--- a/presentation/PARCHED_final.pptx
+++ b/presentation/PARCHED_final.pptx
@@ -5663,8 +5663,8 @@
         </p:nvSpPr>
         <p:spPr>
           <a:xfrm>
-            <a:off x="700000" y="1600000"/>
-            <a:ext cx="7800000" cy="5000000"/>
+            <a:off x="700000" y="1700000"/>
+            <a:ext cx="6500000" cy="5000000"/>
           </a:xfrm>
           <a:prstGeom prst="rect">
             <a:avLst/>
@@ -5683,7 +5683,7 @@
               </a:lnSpc>
             </a:pPr>
             <a:r>
-              <a:rPr sz="2000" b="1">
+              <a:rPr sz="1800" b="1">
                 <a:solidFill>
                   <a:srgbClr val="3EE6C5"/>
                 </a:solidFill>
@@ -5692,7 +5692,7 @@
               <a:t>▸  </a:t>
             </a:r>
             <a:r>
-              <a:rPr sz="2000">
+              <a:rPr sz="1800">
                 <a:solidFill>
                   <a:srgbClr val="FFFFFF"/>
                 </a:solidFill>
@@ -5708,7 +5708,7 @@
               </a:lnSpc>
             </a:pPr>
             <a:r>
-              <a:rPr sz="2000" b="1">
+              <a:rPr sz="1800" b="1">
                 <a:solidFill>
                   <a:srgbClr val="3EE6C5"/>
                 </a:solidFill>
@@ -5717,7 +5717,7 @@
               <a:t>▸  </a:t>
             </a:r>
             <a:r>
-              <a:rPr sz="2000">
+              <a:rPr sz="1800">
                 <a:solidFill>
                   <a:srgbClr val="FFFFFF"/>
                 </a:solidFill>
@@ -5733,7 +5733,7 @@
               </a:lnSpc>
             </a:pPr>
             <a:r>
-              <a:rPr sz="2000" b="1">
+              <a:rPr sz="1800" b="1">
                 <a:solidFill>
                   <a:srgbClr val="3EE6C5"/>
                 </a:solidFill>
@@ -5742,7 +5742,7 @@
               <a:t>▸  </a:t>
             </a:r>
             <a:r>
-              <a:rPr sz="2000">
+              <a:rPr sz="1800">
                 <a:solidFill>
                   <a:srgbClr val="FFFFFF"/>
                 </a:solidFill>
@@ -5758,7 +5758,7 @@
               </a:lnSpc>
             </a:pPr>
             <a:r>
-              <a:rPr sz="2000" b="1">
+              <a:rPr sz="1800" b="1">
                 <a:solidFill>
                   <a:srgbClr val="3EE6C5"/>
                 </a:solidFill>
@@ -5767,7 +5767,7 @@
               <a:t>▸  </a:t>
             </a:r>
             <a:r>
-              <a:rPr sz="2000">
+              <a:rPr sz="1800">
                 <a:solidFill>
                   <a:srgbClr val="FFFFFF"/>
                 </a:solidFill>
@@ -5794,8 +5794,8 @@
         </p:blipFill>
         <p:spPr>
           <a:xfrm>
-            <a:off x="8133333" y="1700000"/>
-            <a:ext cx="4500000" cy="3321330"/>
+            <a:off x="7700000" y="1700000"/>
+            <a:ext cx="5033333" cy="3714969"/>
           </a:xfrm>
           <a:prstGeom prst="rect">
             <a:avLst/>
@@ -5810,8 +5810,8 @@
         </p:nvSpPr>
         <p:spPr>
           <a:xfrm>
-            <a:off x="8133333" y="5071330"/>
-            <a:ext cx="4500000" cy="400000"/>
+            <a:off x="7700000" y="5464969"/>
+            <a:ext cx="5033333" cy="400000"/>
           </a:xfrm>
           <a:prstGeom prst="rect">
             <a:avLst/>
@@ -7143,50 +7143,7 @@
       </p:sp>
       <p:sp>
         <p:nvSpPr>
-          <p:cNvPr id="6" name="Rectangle 5"/>
-          <p:cNvSpPr/>
-          <p:nvPr/>
-        </p:nvSpPr>
-        <p:spPr>
-          <a:xfrm>
-            <a:off x="700000" y="4600000"/>
-            <a:ext cx="1200000" cy="30000"/>
-          </a:xfrm>
-          <a:prstGeom prst="rect">
-            <a:avLst/>
-          </a:prstGeom>
-          <a:solidFill>
-            <a:srgbClr val="E6A532"/>
-          </a:solidFill>
-          <a:ln>
-            <a:noFill/>
-          </a:ln>
-        </p:spPr>
-        <p:style>
-          <a:lnRef idx="1">
-            <a:schemeClr val="accent1"/>
-          </a:lnRef>
-          <a:fillRef idx="3">
-            <a:schemeClr val="accent1"/>
-          </a:fillRef>
-          <a:effectRef idx="2">
-            <a:schemeClr val="accent1"/>
-          </a:effectRef>
-          <a:fontRef idx="minor">
-            <a:schemeClr val="lt1"/>
-          </a:fontRef>
-        </p:style>
-        <p:txBody>
-          <a:bodyPr rtlCol="0" anchor="ctr"/>
-          <a:lstStyle/>
-          <a:p>
-            <a:pPr algn="ctr"/>
-          </a:p>
-        </p:txBody>
-      </p:sp>
-      <p:sp>
-        <p:nvSpPr>
-          <p:cNvPr id="7" name="TextBox 6"/>
+          <p:cNvPr id="6" name="TextBox 5"/>
           <p:cNvSpPr txBox="1"/>
           <p:nvPr/>
         </p:nvSpPr>
@@ -7221,7 +7178,7 @@
       </p:sp>
       <p:sp>
         <p:nvSpPr>
-          <p:cNvPr id="8" name="TextBox 7"/>
+          <p:cNvPr id="7" name="TextBox 6"/>
           <p:cNvSpPr txBox="1"/>
           <p:nvPr/>
         </p:nvSpPr>
@@ -7256,7 +7213,7 @@
       </p:sp>
       <p:sp>
         <p:nvSpPr>
-          <p:cNvPr id="9" name="TextBox 8"/>
+          <p:cNvPr id="8" name="TextBox 7"/>
           <p:cNvSpPr txBox="1"/>
           <p:nvPr/>
         </p:nvSpPr>

--- a/presentation/PARCHED_final.pptx
+++ b/presentation/PARCHED_final.pptx
@@ -4427,7 +4427,7 @@
     <p:bg>
       <p:bgPr>
         <a:solidFill>
-          <a:srgbClr val="0B1426"/>
+          <a:srgbClr val="FAF9F5"/>
         </a:solidFill>
         <a:effectLst/>
       </p:bgPr>
@@ -4441,20 +4441,408 @@
       <p:grpSpPr/>
       <p:sp>
         <p:nvSpPr>
+          <p:cNvPr id="2" name="TextBox 1"/>
+          <p:cNvSpPr txBox="1"/>
+          <p:nvPr/>
+        </p:nvSpPr>
+        <p:spPr>
+          <a:xfrm>
+            <a:off x="700000" y="1500000"/>
+            <a:ext cx="11933333" cy="300000"/>
+          </a:xfrm>
+          <a:prstGeom prst="rect">
+            <a:avLst/>
+          </a:prstGeom>
+          <a:noFill/>
+        </p:spPr>
+        <p:txBody>
+          <a:bodyPr wrap="square" lIns="0" rIns="0" tIns="0" bIns="0" anchor="t">
+            <a:spAutoFit/>
+          </a:bodyPr>
+          <a:lstStyle/>
+          <a:p>
+            <a:pPr algn="l"/>
+            <a:r>
+              <a:rPr sz="1100" b="1" i="0">
+                <a:solidFill>
+                  <a:srgbClr val="C15F3C"/>
+                </a:solidFill>
+                <a:latin typeface="Helvetica Neue"/>
+              </a:rPr>
+              <a:t>CMSC 176, FINAL PROJECT</a:t>
+            </a:r>
+          </a:p>
+        </p:txBody>
+      </p:sp>
+      <p:sp>
+        <p:nvSpPr>
+          <p:cNvPr id="3" name="TextBox 2"/>
+          <p:cNvSpPr txBox="1"/>
+          <p:nvPr/>
+        </p:nvSpPr>
+        <p:spPr>
+          <a:xfrm>
+            <a:off x="700000" y="1900000"/>
+            <a:ext cx="11933333" cy="1600000"/>
+          </a:xfrm>
+          <a:prstGeom prst="rect">
+            <a:avLst/>
+          </a:prstGeom>
+          <a:noFill/>
+        </p:spPr>
+        <p:txBody>
+          <a:bodyPr wrap="square" lIns="0" rIns="0" tIns="0" bIns="0" anchor="t">
+            <a:spAutoFit/>
+          </a:bodyPr>
+          <a:lstStyle/>
+          <a:p>
+            <a:pPr algn="l"/>
+            <a:r>
+              <a:rPr sz="5400" b="1" i="0">
+                <a:solidFill>
+                  <a:srgbClr val="1F1E1D"/>
+                </a:solidFill>
+                <a:latin typeface="Georgia"/>
+              </a:rPr>
+              <a:t>PARCHED: When AI Drinks</a:t>
+            </a:r>
+          </a:p>
+          <a:p>
+            <a:pPr algn="l"/>
+            <a:r>
+              <a:rPr sz="5400" b="1" i="0">
+                <a:solidFill>
+                  <a:srgbClr val="1F1E1D"/>
+                </a:solidFill>
+                <a:latin typeface="Georgia"/>
+              </a:rPr>
+              <a:t>Your Town Dry</a:t>
+            </a:r>
+          </a:p>
+        </p:txBody>
+      </p:sp>
+      <p:sp>
+        <p:nvSpPr>
+          <p:cNvPr id="4" name="TextBox 3"/>
+          <p:cNvSpPr txBox="1"/>
+          <p:nvPr/>
+        </p:nvSpPr>
+        <p:spPr>
+          <a:xfrm>
+            <a:off x="700000" y="3850000"/>
+            <a:ext cx="11933333" cy="600000"/>
+          </a:xfrm>
+          <a:prstGeom prst="rect">
+            <a:avLst/>
+          </a:prstGeom>
+          <a:noFill/>
+        </p:spPr>
+        <p:txBody>
+          <a:bodyPr wrap="square" lIns="0" rIns="0" tIns="0" bIns="0" anchor="t">
+            <a:spAutoFit/>
+          </a:bodyPr>
+          <a:lstStyle/>
+          <a:p>
+            <a:pPr algn="l"/>
+            <a:r>
+              <a:rPr sz="2200" b="0" i="1">
+                <a:solidFill>
+                  <a:srgbClr val="605E5B"/>
+                </a:solidFill>
+                <a:latin typeface="Georgia"/>
+              </a:rPr>
+              <a:t>An Agent-Based Model of Hyperscaler Water Competition</a:t>
+            </a:r>
+          </a:p>
+        </p:txBody>
+      </p:sp>
+      <p:sp>
+        <p:nvSpPr>
+          <p:cNvPr id="5" name="TextBox 4"/>
+          <p:cNvSpPr txBox="1"/>
+          <p:nvPr/>
+        </p:nvSpPr>
+        <p:spPr>
+          <a:xfrm>
+            <a:off x="700000" y="4900000"/>
+            <a:ext cx="11933333" cy="420000"/>
+          </a:xfrm>
+          <a:prstGeom prst="rect">
+            <a:avLst/>
+          </a:prstGeom>
+          <a:noFill/>
+        </p:spPr>
+        <p:txBody>
+          <a:bodyPr wrap="square" lIns="0" rIns="0" tIns="0" bIns="0" anchor="t">
+            <a:spAutoFit/>
+          </a:bodyPr>
+          <a:lstStyle/>
+          <a:p>
+            <a:pPr algn="l"/>
+            <a:r>
+              <a:rPr sz="1600" b="1" i="0">
+                <a:solidFill>
+                  <a:srgbClr val="1F1E1D"/>
+                </a:solidFill>
+                <a:latin typeface="Helvetica Neue"/>
+              </a:rPr>
+              <a:t>Sheldon Arthur Sagrado   /   Jed Edison Donaire</a:t>
+            </a:r>
+          </a:p>
+        </p:txBody>
+      </p:sp>
+      <p:sp>
+        <p:nvSpPr>
+          <p:cNvPr id="6" name="TextBox 5"/>
+          <p:cNvSpPr txBox="1"/>
+          <p:nvPr/>
+        </p:nvSpPr>
+        <p:spPr>
+          <a:xfrm>
+            <a:off x="700000" y="5300000"/>
+            <a:ext cx="11933333" cy="350000"/>
+          </a:xfrm>
+          <a:prstGeom prst="rect">
+            <a:avLst/>
+          </a:prstGeom>
+          <a:noFill/>
+        </p:spPr>
+        <p:txBody>
+          <a:bodyPr wrap="square" lIns="0" rIns="0" tIns="0" bIns="0" anchor="t">
+            <a:spAutoFit/>
+          </a:bodyPr>
+          <a:lstStyle/>
+          <a:p>
+            <a:pPr algn="l"/>
+            <a:r>
+              <a:rPr sz="1100" b="0" i="0">
+                <a:solidFill>
+                  <a:srgbClr val="605E5B"/>
+                </a:solidFill>
+                <a:latin typeface="Helvetica Neue"/>
+              </a:rPr>
+              <a:t>smsagrado@up.edu.ph    jjdonaire@up.edu.ph</a:t>
+            </a:r>
+          </a:p>
+        </p:txBody>
+      </p:sp>
+      <p:sp>
+        <p:nvSpPr>
+          <p:cNvPr id="7" name="TextBox 6"/>
+          <p:cNvSpPr txBox="1"/>
+          <p:nvPr/>
+        </p:nvSpPr>
+        <p:spPr>
+          <a:xfrm>
+            <a:off x="700000" y="5650000"/>
+            <a:ext cx="11933333" cy="300000"/>
+          </a:xfrm>
+          <a:prstGeom prst="rect">
+            <a:avLst/>
+          </a:prstGeom>
+          <a:noFill/>
+        </p:spPr>
+        <p:txBody>
+          <a:bodyPr wrap="square" lIns="0" rIns="0" tIns="0" bIns="0" anchor="t">
+            <a:spAutoFit/>
+          </a:bodyPr>
+          <a:lstStyle/>
+          <a:p>
+            <a:pPr algn="l"/>
+            <a:r>
+              <a:rPr sz="1000" b="0" i="1">
+                <a:solidFill>
+                  <a:srgbClr val="605E5B"/>
+                </a:solidFill>
+                <a:latin typeface="Helvetica Neue"/>
+              </a:rPr>
+              <a:t>Equal contribution.</a:t>
+            </a:r>
+          </a:p>
+        </p:txBody>
+      </p:sp>
+      <p:sp>
+        <p:nvSpPr>
+          <p:cNvPr id="8" name="TextBox 7"/>
+          <p:cNvSpPr txBox="1"/>
+          <p:nvPr/>
+        </p:nvSpPr>
+        <p:spPr>
+          <a:xfrm>
+            <a:off x="700000" y="6150000"/>
+            <a:ext cx="11933333" cy="350000"/>
+          </a:xfrm>
+          <a:prstGeom prst="rect">
+            <a:avLst/>
+          </a:prstGeom>
+          <a:noFill/>
+        </p:spPr>
+        <p:txBody>
+          <a:bodyPr wrap="square" lIns="0" rIns="0" tIns="0" bIns="0" anchor="t">
+            <a:spAutoFit/>
+          </a:bodyPr>
+          <a:lstStyle/>
+          <a:p>
+            <a:pPr algn="l"/>
+            <a:r>
+              <a:rPr sz="1100" b="0" i="0">
+                <a:solidFill>
+                  <a:srgbClr val="605E5B"/>
+                </a:solidFill>
+                <a:latin typeface="Helvetica Neue"/>
+              </a:rPr>
+              <a:t>CMSC 176, AY 2025-2026, University of the Philippines Cebu</a:t>
+            </a:r>
+          </a:p>
+        </p:txBody>
+      </p:sp>
+      <p:sp>
+        <p:nvSpPr>
+          <p:cNvPr id="9" name="TextBox 8"/>
+          <p:cNvSpPr txBox="1"/>
+          <p:nvPr/>
+        </p:nvSpPr>
+        <p:spPr>
+          <a:xfrm>
+            <a:off x="700000" y="6480000"/>
+            <a:ext cx="11933333" cy="300000"/>
+          </a:xfrm>
+          <a:prstGeom prst="rect">
+            <a:avLst/>
+          </a:prstGeom>
+          <a:noFill/>
+        </p:spPr>
+        <p:txBody>
+          <a:bodyPr wrap="square" lIns="0" rIns="0" tIns="0" bIns="0" anchor="t">
+            <a:spAutoFit/>
+          </a:bodyPr>
+          <a:lstStyle/>
+          <a:p>
+            <a:pPr algn="l"/>
+            <a:r>
+              <a:rPr sz="1100" b="0" i="0">
+                <a:solidFill>
+                  <a:srgbClr val="605E5B"/>
+                </a:solidFill>
+                <a:latin typeface="Helvetica Neue"/>
+              </a:rPr>
+              <a:t>May 2026</a:t>
+            </a:r>
+          </a:p>
+        </p:txBody>
+      </p:sp>
+      <p:sp>
+        <p:nvSpPr>
+          <p:cNvPr id="10" name="TextBox 9"/>
+          <p:cNvSpPr txBox="1"/>
+          <p:nvPr/>
+        </p:nvSpPr>
+        <p:spPr>
+          <a:xfrm>
+            <a:off x="700000" y="7120000"/>
+            <a:ext cx="2500000" cy="300000"/>
+          </a:xfrm>
+          <a:prstGeom prst="rect">
+            <a:avLst/>
+          </a:prstGeom>
+          <a:noFill/>
+        </p:spPr>
+        <p:txBody>
+          <a:bodyPr wrap="square" lIns="0" rIns="0" tIns="0" bIns="0" anchor="t">
+            <a:spAutoFit/>
+          </a:bodyPr>
+          <a:lstStyle/>
+          <a:p>
+            <a:pPr algn="l"/>
+            <a:r>
+              <a:rPr sz="900" b="0" i="0">
+                <a:solidFill>
+                  <a:srgbClr val="605E5B"/>
+                </a:solidFill>
+                <a:latin typeface="Helvetica Neue"/>
+              </a:rPr>
+              <a:t>PARCHED</a:t>
+            </a:r>
+          </a:p>
+        </p:txBody>
+      </p:sp>
+      <p:sp>
+        <p:nvSpPr>
+          <p:cNvPr id="11" name="TextBox 10"/>
+          <p:cNvSpPr txBox="1"/>
+          <p:nvPr/>
+        </p:nvSpPr>
+        <p:spPr>
+          <a:xfrm>
+            <a:off x="11133333" y="7120000"/>
+            <a:ext cx="1500000" cy="300000"/>
+          </a:xfrm>
+          <a:prstGeom prst="rect">
+            <a:avLst/>
+          </a:prstGeom>
+          <a:noFill/>
+        </p:spPr>
+        <p:txBody>
+          <a:bodyPr wrap="square" lIns="0" rIns="0" tIns="0" bIns="0" anchor="t">
+            <a:spAutoFit/>
+          </a:bodyPr>
+          <a:lstStyle/>
+          <a:p>
+            <a:pPr algn="r"/>
+            <a:r>
+              <a:rPr sz="900" b="0" i="0">
+                <a:solidFill>
+                  <a:srgbClr val="605E5B"/>
+                </a:solidFill>
+                <a:latin typeface="Helvetica Neue"/>
+              </a:rPr>
+              <a:t>1 / 14</a:t>
+            </a:r>
+          </a:p>
+        </p:txBody>
+      </p:sp>
+    </p:spTree>
+  </p:cSld>
+  <p:clrMapOvr>
+    <a:masterClrMapping/>
+  </p:clrMapOvr>
+</p:sld>
+</file>
+
+<file path=ppt/slides/slide10.xml><?xml version="1.0" encoding="utf-8"?>
+<p:sld xmlns:a="http://schemas.openxmlformats.org/drawingml/2006/main" xmlns:p="http://schemas.openxmlformats.org/presentationml/2006/main" xmlns:r="http://schemas.openxmlformats.org/officeDocument/2006/relationships">
+  <p:cSld>
+    <p:bg>
+      <p:bgPr>
+        <a:solidFill>
+          <a:srgbClr val="FAF9F5"/>
+        </a:solidFill>
+        <a:effectLst/>
+      </p:bgPr>
+    </p:bg>
+    <p:spTree>
+      <p:nvGrpSpPr>
+        <p:cNvPr id="1" name=""/>
+        <p:cNvGrpSpPr/>
+        <p:nvPr/>
+      </p:nvGrpSpPr>
+      <p:grpSpPr/>
+      <p:sp>
+        <p:nvSpPr>
           <p:cNvPr id="2" name="Rectangle 1"/>
           <p:cNvSpPr/>
           <p:nvPr/>
         </p:nvSpPr>
         <p:spPr>
           <a:xfrm>
-            <a:off x="0" y="0"/>
-            <a:ext cx="110000" cy="7500000"/>
+            <a:off x="700000" y="705740"/>
+            <a:ext cx="110000" cy="110000"/>
           </a:xfrm>
           <a:prstGeom prst="rect">
             <a:avLst/>
           </a:prstGeom>
           <a:solidFill>
-            <a:srgbClr val="3EE6C5"/>
+            <a:srgbClr val="C15F3C"/>
           </a:solidFill>
           <a:ln>
             <a:noFill/>
@@ -4490,8 +4878,8 @@
         </p:nvSpPr>
         <p:spPr>
           <a:xfrm>
-            <a:off x="700000" y="1600000"/>
-            <a:ext cx="11933333" cy="300000"/>
+            <a:off x="990000" y="500000"/>
+            <a:ext cx="11643333" cy="900000"/>
           </a:xfrm>
           <a:prstGeom prst="rect">
             <a:avLst/>
@@ -4506,27 +4894,51 @@
           <a:p>
             <a:pPr algn="l"/>
             <a:r>
-              <a:rPr sz="1400" b="1">
-                <a:solidFill>
-                  <a:srgbClr val="3EE6C5"/>
-                </a:solidFill>
-                <a:latin typeface="Calibri"/>
-              </a:rPr>
-              <a:t>CMSC 176, FINAL PROJECT</a:t>
-            </a:r>
-          </a:p>
-        </p:txBody>
-      </p:sp>
-      <p:sp>
-        <p:nvSpPr>
-          <p:cNvPr id="4" name="TextBox 3"/>
-          <p:cNvSpPr txBox="1"/>
-          <p:nvPr/>
-        </p:nvSpPr>
-        <p:spPr>
-          <a:xfrm>
-            <a:off x="700000" y="2000000"/>
-            <a:ext cx="11933333" cy="1400000"/>
+              <a:rPr sz="3600" b="1" i="0">
+                <a:solidFill>
+                  <a:srgbClr val="1F1E1D"/>
+                </a:solidFill>
+                <a:latin typeface="Georgia"/>
+              </a:rPr>
+              <a:t>Result H2: Tipping Point</a:t>
+            </a:r>
+          </a:p>
+        </p:txBody>
+      </p:sp>
+      <p:pic>
+        <p:nvPicPr>
+          <p:cNvPr id="4" name="Picture 3" descr="fig_tipping_point.png"/>
+          <p:cNvPicPr>
+            <a:picLocks noChangeAspect="1"/>
+          </p:cNvPicPr>
+          <p:nvPr/>
+        </p:nvPicPr>
+        <p:blipFill>
+          <a:blip r:embed="rId2"/>
+          <a:stretch>
+            <a:fillRect/>
+          </a:stretch>
+        </p:blipFill>
+        <p:spPr>
+          <a:xfrm>
+            <a:off x="700000" y="1750000"/>
+            <a:ext cx="7600000" cy="4252920"/>
+          </a:xfrm>
+          <a:prstGeom prst="rect">
+            <a:avLst/>
+          </a:prstGeom>
+        </p:spPr>
+      </p:pic>
+      <p:sp>
+        <p:nvSpPr>
+          <p:cNvPr id="5" name="TextBox 4"/>
+          <p:cNvSpPr txBox="1"/>
+          <p:nvPr/>
+        </p:nvSpPr>
+        <p:spPr>
+          <a:xfrm>
+            <a:off x="8800000" y="1850000"/>
+            <a:ext cx="4100000" cy="400000"/>
           </a:xfrm>
           <a:prstGeom prst="rect">
             <a:avLst/>
@@ -4541,27 +4953,27 @@
           <a:p>
             <a:pPr algn="l"/>
             <a:r>
-              <a:rPr sz="5400" b="1">
-                <a:solidFill>
-                  <a:srgbClr val="FFFFFF"/>
-                </a:solidFill>
-                <a:latin typeface="Calibri"/>
-              </a:rPr>
-              <a:t>PARCHED: When AI Drinks Your Town Dry</a:t>
-            </a:r>
-          </a:p>
-        </p:txBody>
-      </p:sp>
-      <p:sp>
-        <p:nvSpPr>
-          <p:cNvPr id="5" name="TextBox 4"/>
-          <p:cNvSpPr txBox="1"/>
-          <p:nvPr/>
-        </p:nvSpPr>
-        <p:spPr>
-          <a:xfrm>
-            <a:off x="700000" y="3500000"/>
-            <a:ext cx="11933333" cy="700000"/>
+              <a:rPr sz="1100" b="1" i="0">
+                <a:solidFill>
+                  <a:srgbClr val="C15F3C"/>
+                </a:solidFill>
+                <a:latin typeface="Helvetica Neue"/>
+              </a:rPr>
+              <a:t>ACCELERATION</a:t>
+            </a:r>
+          </a:p>
+        </p:txBody>
+      </p:sp>
+      <p:sp>
+        <p:nvSpPr>
+          <p:cNvPr id="6" name="TextBox 5"/>
+          <p:cNvSpPr txBox="1"/>
+          <p:nvPr/>
+        </p:nvSpPr>
+        <p:spPr>
+          <a:xfrm>
+            <a:off x="8800000" y="2250000"/>
+            <a:ext cx="4100000" cy="1300000"/>
           </a:xfrm>
           <a:prstGeom prst="rect">
             <a:avLst/>
@@ -4576,33 +4988,269 @@
           <a:p>
             <a:pPr algn="l"/>
             <a:r>
-              <a:rPr sz="2400" b="0">
-                <a:solidFill>
-                  <a:srgbClr val="B6C2D9"/>
-                </a:solidFill>
-                <a:latin typeface="Calibri"/>
-              </a:rPr>
-              <a:t>An Agent-Based Model of Hyperscaler Water Competition</a:t>
-            </a:r>
-          </a:p>
-        </p:txBody>
-      </p:sp>
-      <p:sp>
-        <p:nvSpPr>
-          <p:cNvPr id="6" name="Rectangle 5"/>
+              <a:rPr sz="7200" b="1" i="0">
+                <a:solidFill>
+                  <a:srgbClr val="C15F3C"/>
+                </a:solidFill>
+                <a:latin typeface="Georgia"/>
+              </a:rPr>
+              <a:t>9.25×</a:t>
+            </a:r>
+          </a:p>
+        </p:txBody>
+      </p:sp>
+      <p:sp>
+        <p:nvSpPr>
+          <p:cNvPr id="7" name="TextBox 6"/>
+          <p:cNvSpPr txBox="1"/>
+          <p:nvPr/>
+        </p:nvSpPr>
+        <p:spPr>
+          <a:xfrm>
+            <a:off x="8800000" y="3550000"/>
+            <a:ext cx="4100000" cy="700000"/>
+          </a:xfrm>
+          <a:prstGeom prst="rect">
+            <a:avLst/>
+          </a:prstGeom>
+          <a:noFill/>
+        </p:spPr>
+        <p:txBody>
+          <a:bodyPr wrap="square" lIns="0" rIns="0" tIns="0" bIns="0" anchor="t">
+            <a:spAutoFit/>
+          </a:bodyPr>
+          <a:lstStyle/>
+          <a:p>
+            <a:pPr algn="l"/>
+            <a:r>
+              <a:rPr sz="1400" b="0" i="1">
+                <a:solidFill>
+                  <a:srgbClr val="1F1E1D"/>
+                </a:solidFill>
+                <a:latin typeface="Georgia"/>
+              </a:rPr>
+              <a:t>decline rate after the 40% threshold.</a:t>
+            </a:r>
+          </a:p>
+        </p:txBody>
+      </p:sp>
+      <p:sp>
+        <p:nvSpPr>
+          <p:cNvPr id="8" name="TextBox 7"/>
+          <p:cNvSpPr txBox="1"/>
+          <p:nvPr/>
+        </p:nvSpPr>
+        <p:spPr>
+          <a:xfrm>
+            <a:off x="8800000" y="4400000"/>
+            <a:ext cx="4100000" cy="400000"/>
+          </a:xfrm>
+          <a:prstGeom prst="rect">
+            <a:avLst/>
+          </a:prstGeom>
+          <a:noFill/>
+        </p:spPr>
+        <p:txBody>
+          <a:bodyPr wrap="square" lIns="0" rIns="0" tIns="0" bIns="0" anchor="t">
+            <a:spAutoFit/>
+          </a:bodyPr>
+          <a:lstStyle/>
+          <a:p>
+            <a:pPr algn="l"/>
+            <a:r>
+              <a:rPr sz="1500" b="0" i="0">
+                <a:solidFill>
+                  <a:srgbClr val="605E5B"/>
+                </a:solidFill>
+                <a:latin typeface="Helvetica Neue"/>
+              </a:rPr>
+              <a:t>Pre-tipping: 0.07 / yr</a:t>
+            </a:r>
+          </a:p>
+        </p:txBody>
+      </p:sp>
+      <p:sp>
+        <p:nvSpPr>
+          <p:cNvPr id="9" name="TextBox 8"/>
+          <p:cNvSpPr txBox="1"/>
+          <p:nvPr/>
+        </p:nvSpPr>
+        <p:spPr>
+          <a:xfrm>
+            <a:off x="8800000" y="4850000"/>
+            <a:ext cx="4100000" cy="400000"/>
+          </a:xfrm>
+          <a:prstGeom prst="rect">
+            <a:avLst/>
+          </a:prstGeom>
+          <a:noFill/>
+        </p:spPr>
+        <p:txBody>
+          <a:bodyPr wrap="square" lIns="0" rIns="0" tIns="0" bIns="0" anchor="t">
+            <a:spAutoFit/>
+          </a:bodyPr>
+          <a:lstStyle/>
+          <a:p>
+            <a:pPr algn="l"/>
+            <a:r>
+              <a:rPr sz="1500" b="1" i="0">
+                <a:solidFill>
+                  <a:srgbClr val="1F1E1D"/>
+                </a:solidFill>
+                <a:latin typeface="Helvetica Neue"/>
+              </a:rPr>
+              <a:t>Post-tipping: 0.66 / yr</a:t>
+            </a:r>
+          </a:p>
+        </p:txBody>
+      </p:sp>
+      <p:sp>
+        <p:nvSpPr>
+          <p:cNvPr id="10" name="TextBox 9"/>
+          <p:cNvSpPr txBox="1"/>
+          <p:nvPr/>
+        </p:nvSpPr>
+        <p:spPr>
+          <a:xfrm>
+            <a:off x="8800000" y="5450000"/>
+            <a:ext cx="4100000" cy="400000"/>
+          </a:xfrm>
+          <a:prstGeom prst="rect">
+            <a:avLst/>
+          </a:prstGeom>
+          <a:noFill/>
+        </p:spPr>
+        <p:txBody>
+          <a:bodyPr wrap="square" lIns="0" rIns="0" tIns="0" bIns="0" anchor="t">
+            <a:spAutoFit/>
+          </a:bodyPr>
+          <a:lstStyle/>
+          <a:p>
+            <a:pPr algn="l"/>
+            <a:r>
+              <a:rPr sz="1400" b="0" i="0">
+                <a:solidFill>
+                  <a:srgbClr val="605E5B"/>
+                </a:solidFill>
+                <a:latin typeface="Helvetica Neue"/>
+              </a:rPr>
+              <a:t>p &lt; 10⁻⁷⁴</a:t>
+            </a:r>
+          </a:p>
+        </p:txBody>
+      </p:sp>
+      <p:sp>
+        <p:nvSpPr>
+          <p:cNvPr id="11" name="TextBox 10"/>
+          <p:cNvSpPr txBox="1"/>
+          <p:nvPr/>
+        </p:nvSpPr>
+        <p:spPr>
+          <a:xfrm>
+            <a:off x="700000" y="7120000"/>
+            <a:ext cx="2500000" cy="300000"/>
+          </a:xfrm>
+          <a:prstGeom prst="rect">
+            <a:avLst/>
+          </a:prstGeom>
+          <a:noFill/>
+        </p:spPr>
+        <p:txBody>
+          <a:bodyPr wrap="square" lIns="0" rIns="0" tIns="0" bIns="0" anchor="t">
+            <a:spAutoFit/>
+          </a:bodyPr>
+          <a:lstStyle/>
+          <a:p>
+            <a:pPr algn="l"/>
+            <a:r>
+              <a:rPr sz="900" b="0" i="0">
+                <a:solidFill>
+                  <a:srgbClr val="605E5B"/>
+                </a:solidFill>
+                <a:latin typeface="Helvetica Neue"/>
+              </a:rPr>
+              <a:t>PARCHED</a:t>
+            </a:r>
+          </a:p>
+        </p:txBody>
+      </p:sp>
+      <p:sp>
+        <p:nvSpPr>
+          <p:cNvPr id="12" name="TextBox 11"/>
+          <p:cNvSpPr txBox="1"/>
+          <p:nvPr/>
+        </p:nvSpPr>
+        <p:spPr>
+          <a:xfrm>
+            <a:off x="11133333" y="7120000"/>
+            <a:ext cx="1500000" cy="300000"/>
+          </a:xfrm>
+          <a:prstGeom prst="rect">
+            <a:avLst/>
+          </a:prstGeom>
+          <a:noFill/>
+        </p:spPr>
+        <p:txBody>
+          <a:bodyPr wrap="square" lIns="0" rIns="0" tIns="0" bIns="0" anchor="t">
+            <a:spAutoFit/>
+          </a:bodyPr>
+          <a:lstStyle/>
+          <a:p>
+            <a:pPr algn="r"/>
+            <a:r>
+              <a:rPr sz="900" b="0" i="0">
+                <a:solidFill>
+                  <a:srgbClr val="605E5B"/>
+                </a:solidFill>
+                <a:latin typeface="Helvetica Neue"/>
+              </a:rPr>
+              <a:t>10 / 14</a:t>
+            </a:r>
+          </a:p>
+        </p:txBody>
+      </p:sp>
+    </p:spTree>
+  </p:cSld>
+  <p:clrMapOvr>
+    <a:masterClrMapping/>
+  </p:clrMapOvr>
+</p:sld>
+</file>
+
+<file path=ppt/slides/slide11.xml><?xml version="1.0" encoding="utf-8"?>
+<p:sld xmlns:a="http://schemas.openxmlformats.org/drawingml/2006/main" xmlns:p="http://schemas.openxmlformats.org/presentationml/2006/main" xmlns:r="http://schemas.openxmlformats.org/officeDocument/2006/relationships">
+  <p:cSld>
+    <p:bg>
+      <p:bgPr>
+        <a:solidFill>
+          <a:srgbClr val="FAF9F5"/>
+        </a:solidFill>
+        <a:effectLst/>
+      </p:bgPr>
+    </p:bg>
+    <p:spTree>
+      <p:nvGrpSpPr>
+        <p:cNvPr id="1" name=""/>
+        <p:cNvGrpSpPr/>
+        <p:nvPr/>
+      </p:nvGrpSpPr>
+      <p:grpSpPr/>
+      <p:sp>
+        <p:nvSpPr>
+          <p:cNvPr id="2" name="Rectangle 1"/>
           <p:cNvSpPr/>
           <p:nvPr/>
         </p:nvSpPr>
         <p:spPr>
           <a:xfrm>
-            <a:off x="700000" y="4400000"/>
-            <a:ext cx="1200000" cy="40000"/>
+            <a:off x="700000" y="705740"/>
+            <a:ext cx="110000" cy="110000"/>
           </a:xfrm>
           <a:prstGeom prst="rect">
             <a:avLst/>
           </a:prstGeom>
           <a:solidFill>
-            <a:srgbClr val="3EE6C5"/>
+            <a:srgbClr val="C15F3C"/>
           </a:solidFill>
           <a:ln>
             <a:noFill/>
@@ -4632,14 +5280,143 @@
       </p:sp>
       <p:sp>
         <p:nvSpPr>
+          <p:cNvPr id="3" name="TextBox 2"/>
+          <p:cNvSpPr txBox="1"/>
+          <p:nvPr/>
+        </p:nvSpPr>
+        <p:spPr>
+          <a:xfrm>
+            <a:off x="990000" y="500000"/>
+            <a:ext cx="11643333" cy="900000"/>
+          </a:xfrm>
+          <a:prstGeom prst="rect">
+            <a:avLst/>
+          </a:prstGeom>
+          <a:noFill/>
+        </p:spPr>
+        <p:txBody>
+          <a:bodyPr wrap="square" lIns="0" rIns="0" tIns="0" bIns="0" anchor="t">
+            <a:spAutoFit/>
+          </a:bodyPr>
+          <a:lstStyle/>
+          <a:p>
+            <a:pPr algn="l"/>
+            <a:r>
+              <a:rPr sz="3600" b="1" i="0">
+                <a:solidFill>
+                  <a:srgbClr val="1F1E1D"/>
+                </a:solidFill>
+                <a:latin typeface="Georgia"/>
+              </a:rPr>
+              <a:t>Result H3: Policy Effectiveness</a:t>
+            </a:r>
+          </a:p>
+        </p:txBody>
+      </p:sp>
+      <p:pic>
+        <p:nvPicPr>
+          <p:cNvPr id="4" name="Picture 3" descr="fig_yield_loss.png"/>
+          <p:cNvPicPr>
+            <a:picLocks noChangeAspect="1"/>
+          </p:cNvPicPr>
+          <p:nvPr/>
+        </p:nvPicPr>
+        <p:blipFill>
+          <a:blip r:embed="rId2"/>
+          <a:stretch>
+            <a:fillRect/>
+          </a:stretch>
+        </p:blipFill>
+        <p:spPr>
+          <a:xfrm>
+            <a:off x="700000" y="1750000"/>
+            <a:ext cx="6800000" cy="4590366"/>
+          </a:xfrm>
+          <a:prstGeom prst="rect">
+            <a:avLst/>
+          </a:prstGeom>
+        </p:spPr>
+      </p:pic>
+      <p:sp>
+        <p:nvSpPr>
+          <p:cNvPr id="5" name="TextBox 4"/>
+          <p:cNvSpPr txBox="1"/>
+          <p:nvPr/>
+        </p:nvSpPr>
+        <p:spPr>
+          <a:xfrm>
+            <a:off x="8000000" y="1800000"/>
+            <a:ext cx="5000000" cy="400000"/>
+          </a:xfrm>
+          <a:prstGeom prst="rect">
+            <a:avLst/>
+          </a:prstGeom>
+          <a:noFill/>
+        </p:spPr>
+        <p:txBody>
+          <a:bodyPr wrap="square" lIns="0" rIns="0" tIns="0" bIns="0" anchor="t">
+            <a:spAutoFit/>
+          </a:bodyPr>
+          <a:lstStyle/>
+          <a:p>
+            <a:pPr algn="l"/>
+            <a:r>
+              <a:rPr sz="1100" b="1" i="0">
+                <a:solidFill>
+                  <a:srgbClr val="C15F3C"/>
+                </a:solidFill>
+                <a:latin typeface="Helvetica Neue"/>
+              </a:rPr>
+              <a:t>PROACTIVE CAP</a:t>
+            </a:r>
+          </a:p>
+        </p:txBody>
+      </p:sp>
+      <p:sp>
+        <p:nvSpPr>
+          <p:cNvPr id="6" name="TextBox 5"/>
+          <p:cNvSpPr txBox="1"/>
+          <p:nvPr/>
+        </p:nvSpPr>
+        <p:spPr>
+          <a:xfrm>
+            <a:off x="8000000" y="2200000"/>
+            <a:ext cx="5000000" cy="1100000"/>
+          </a:xfrm>
+          <a:prstGeom prst="rect">
+            <a:avLst/>
+          </a:prstGeom>
+          <a:noFill/>
+        </p:spPr>
+        <p:txBody>
+          <a:bodyPr wrap="square" lIns="0" rIns="0" tIns="0" bIns="0" anchor="t">
+            <a:spAutoFit/>
+          </a:bodyPr>
+          <a:lstStyle/>
+          <a:p>
+            <a:pPr algn="l"/>
+            <a:r>
+              <a:rPr sz="6000" b="1" i="0">
+                <a:solidFill>
+                  <a:srgbClr val="C15F3C"/>
+                </a:solidFill>
+                <a:latin typeface="Georgia"/>
+              </a:rPr>
+              <a:t>+65%</a:t>
+            </a:r>
+          </a:p>
+        </p:txBody>
+      </p:sp>
+      <p:sp>
+        <p:nvSpPr>
           <p:cNvPr id="7" name="TextBox 6"/>
           <p:cNvSpPr txBox="1"/>
           <p:nvPr/>
         </p:nvSpPr>
         <p:spPr>
           <a:xfrm>
-            <a:off x="700000" y="4650000"/>
-            <a:ext cx="11933333" cy="500000"/>
+            <a:off x="8000000" y="3200000"/>
+            <a:ext cx="5000000" cy="400000"/>
           </a:xfrm>
           <a:prstGeom prst="rect">
             <a:avLst/>
@@ -4654,13 +5431,13 @@
           <a:p>
             <a:pPr algn="l"/>
             <a:r>
-              <a:rPr sz="2000" b="1">
-                <a:solidFill>
-                  <a:srgbClr val="FFFFFF"/>
-                </a:solidFill>
-                <a:latin typeface="Calibri"/>
-              </a:rPr>
-              <a:t>Sheldon Arthur Sagrado  ·  Jed Edison Donaire</a:t>
+              <a:rPr sz="1300" b="0" i="0">
+                <a:solidFill>
+                  <a:srgbClr val="605E5B"/>
+                </a:solidFill>
+                <a:latin typeface="Helvetica Neue"/>
+              </a:rPr>
+              <a:t>delay in critical stress onset.</a:t>
             </a:r>
           </a:p>
         </p:txBody>
@@ -4673,8 +5450,8 @@
         </p:nvSpPr>
         <p:spPr>
           <a:xfrm>
-            <a:off x="700000" y="5200000"/>
-            <a:ext cx="11933333" cy="400000"/>
+            <a:off x="8000000" y="3900000"/>
+            <a:ext cx="5000000" cy="400000"/>
           </a:xfrm>
           <a:prstGeom prst="rect">
             <a:avLst/>
@@ -4689,13 +5466,13 @@
           <a:p>
             <a:pPr algn="l"/>
             <a:r>
-              <a:rPr sz="1600" b="0">
-                <a:solidFill>
-                  <a:srgbClr val="B6C2D9"/>
-                </a:solidFill>
-                <a:latin typeface="Calibri"/>
-              </a:rPr>
-              <a:t>CMSC 176, AY 2025-2026, University of the Philippines Cebu</a:t>
+              <a:rPr sz="1100" b="1" i="0">
+                <a:solidFill>
+                  <a:srgbClr val="605E5B"/>
+                </a:solidFill>
+                <a:latin typeface="Helvetica Neue"/>
+              </a:rPr>
+              <a:t>REACTIVE CAP</a:t>
             </a:r>
           </a:p>
         </p:txBody>
@@ -4708,8 +5485,8 @@
         </p:nvSpPr>
         <p:spPr>
           <a:xfrm>
-            <a:off x="700000" y="5650000"/>
-            <a:ext cx="11933333" cy="400000"/>
+            <a:off x="8000000" y="4300000"/>
+            <a:ext cx="5000000" cy="1100000"/>
           </a:xfrm>
           <a:prstGeom prst="rect">
             <a:avLst/>
@@ -4724,13 +5501,13 @@
           <a:p>
             <a:pPr algn="l"/>
             <a:r>
-              <a:rPr sz="1600" b="0">
-                <a:solidFill>
-                  <a:srgbClr val="B6C2D9"/>
-                </a:solidFill>
-                <a:latin typeface="Calibri"/>
-              </a:rPr>
-              <a:t>May 2026</a:t>
+              <a:rPr sz="6000" b="1" i="0">
+                <a:solidFill>
+                  <a:srgbClr val="1F1E1D"/>
+                </a:solidFill>
+                <a:latin typeface="Georgia"/>
+              </a:rPr>
+              <a:t>+0%</a:t>
             </a:r>
           </a:p>
         </p:txBody>
@@ -4743,8 +5520,113 @@
         </p:nvSpPr>
         <p:spPr>
           <a:xfrm>
-            <a:off x="11133333" y="7050000"/>
-            <a:ext cx="1800000" cy="350000"/>
+            <a:off x="8000000" y="5300000"/>
+            <a:ext cx="5000000" cy="400000"/>
+          </a:xfrm>
+          <a:prstGeom prst="rect">
+            <a:avLst/>
+          </a:prstGeom>
+          <a:noFill/>
+        </p:spPr>
+        <p:txBody>
+          <a:bodyPr wrap="square" lIns="0" rIns="0" tIns="0" bIns="0" anchor="t">
+            <a:spAutoFit/>
+          </a:bodyPr>
+          <a:lstStyle/>
+          <a:p>
+            <a:pPr algn="l"/>
+            <a:r>
+              <a:rPr sz="1300" b="0" i="0">
+                <a:solidFill>
+                  <a:srgbClr val="605E5B"/>
+                </a:solidFill>
+                <a:latin typeface="Helvetica Neue"/>
+              </a:rPr>
+              <a:t>indistinguishable from no policy.</a:t>
+            </a:r>
+          </a:p>
+        </p:txBody>
+      </p:sp>
+      <p:sp>
+        <p:nvSpPr>
+          <p:cNvPr id="11" name="TextBox 10"/>
+          <p:cNvSpPr txBox="1"/>
+          <p:nvPr/>
+        </p:nvSpPr>
+        <p:spPr>
+          <a:xfrm>
+            <a:off x="8000000" y="5850000"/>
+            <a:ext cx="5000000" cy="400000"/>
+          </a:xfrm>
+          <a:prstGeom prst="rect">
+            <a:avLst/>
+          </a:prstGeom>
+          <a:noFill/>
+        </p:spPr>
+        <p:txBody>
+          <a:bodyPr wrap="square" lIns="0" rIns="0" tIns="0" bIns="0" anchor="t">
+            <a:spAutoFit/>
+          </a:bodyPr>
+          <a:lstStyle/>
+          <a:p>
+            <a:pPr algn="l"/>
+            <a:r>
+              <a:rPr sz="1400" b="0" i="0">
+                <a:solidFill>
+                  <a:srgbClr val="605E5B"/>
+                </a:solidFill>
+                <a:latin typeface="Helvetica Neue"/>
+              </a:rPr>
+              <a:t>p &lt; 10⁻³⁵</a:t>
+            </a:r>
+          </a:p>
+        </p:txBody>
+      </p:sp>
+      <p:sp>
+        <p:nvSpPr>
+          <p:cNvPr id="12" name="TextBox 11"/>
+          <p:cNvSpPr txBox="1"/>
+          <p:nvPr/>
+        </p:nvSpPr>
+        <p:spPr>
+          <a:xfrm>
+            <a:off x="700000" y="7120000"/>
+            <a:ext cx="2500000" cy="300000"/>
+          </a:xfrm>
+          <a:prstGeom prst="rect">
+            <a:avLst/>
+          </a:prstGeom>
+          <a:noFill/>
+        </p:spPr>
+        <p:txBody>
+          <a:bodyPr wrap="square" lIns="0" rIns="0" tIns="0" bIns="0" anchor="t">
+            <a:spAutoFit/>
+          </a:bodyPr>
+          <a:lstStyle/>
+          <a:p>
+            <a:pPr algn="l"/>
+            <a:r>
+              <a:rPr sz="900" b="0" i="0">
+                <a:solidFill>
+                  <a:srgbClr val="605E5B"/>
+                </a:solidFill>
+                <a:latin typeface="Helvetica Neue"/>
+              </a:rPr>
+              <a:t>PARCHED</a:t>
+            </a:r>
+          </a:p>
+        </p:txBody>
+      </p:sp>
+      <p:sp>
+        <p:nvSpPr>
+          <p:cNvPr id="13" name="TextBox 12"/>
+          <p:cNvSpPr txBox="1"/>
+          <p:nvPr/>
+        </p:nvSpPr>
+        <p:spPr>
+          <a:xfrm>
+            <a:off x="11133333" y="7120000"/>
+            <a:ext cx="1500000" cy="300000"/>
           </a:xfrm>
           <a:prstGeom prst="rect">
             <a:avLst/>
@@ -4759,13 +5641,13 @@
           <a:p>
             <a:pPr algn="r"/>
             <a:r>
-              <a:rPr sz="1000" b="0">
-                <a:solidFill>
-                  <a:srgbClr val="B6C2D9"/>
-                </a:solidFill>
-                <a:latin typeface="Calibri"/>
-              </a:rPr>
-              <a:t>PARCHED   |   1 / 14</a:t>
+              <a:rPr sz="900" b="0" i="0">
+                <a:solidFill>
+                  <a:srgbClr val="605E5B"/>
+                </a:solidFill>
+                <a:latin typeface="Helvetica Neue"/>
+              </a:rPr>
+              <a:t>11 / 14</a:t>
             </a:r>
           </a:p>
         </p:txBody>
@@ -4778,13 +5660,13 @@
 </p:sld>
 </file>
 
-<file path=ppt/slides/slide10.xml><?xml version="1.0" encoding="utf-8"?>
+<file path=ppt/slides/slide12.xml><?xml version="1.0" encoding="utf-8"?>
 <p:sld xmlns:a="http://schemas.openxmlformats.org/drawingml/2006/main" xmlns:p="http://schemas.openxmlformats.org/presentationml/2006/main" xmlns:r="http://schemas.openxmlformats.org/officeDocument/2006/relationships">
   <p:cSld>
     <p:bg>
       <p:bgPr>
         <a:solidFill>
-          <a:srgbClr val="0B1426"/>
+          <a:srgbClr val="FAF9F5"/>
         </a:solidFill>
         <a:effectLst/>
       </p:bgPr>
@@ -4804,14 +5686,14 @@
         </p:nvSpPr>
         <p:spPr>
           <a:xfrm>
-            <a:off x="0" y="0"/>
-            <a:ext cx="110000" cy="7500000"/>
+            <a:off x="700000" y="705740"/>
+            <a:ext cx="110000" cy="110000"/>
           </a:xfrm>
           <a:prstGeom prst="rect">
             <a:avLst/>
           </a:prstGeom>
           <a:solidFill>
-            <a:srgbClr val="3EE6C5"/>
+            <a:srgbClr val="C15F3C"/>
           </a:solidFill>
           <a:ln>
             <a:noFill/>
@@ -4847,8 +5729,8 @@
         </p:nvSpPr>
         <p:spPr>
           <a:xfrm>
-            <a:off x="700000" y="500000"/>
-            <a:ext cx="11933333" cy="800000"/>
+            <a:off x="990000" y="500000"/>
+            <a:ext cx="11643333" cy="900000"/>
           </a:xfrm>
           <a:prstGeom prst="rect">
             <a:avLst/>
@@ -4863,20 +5745,143 @@
           <a:p>
             <a:pPr algn="l"/>
             <a:r>
-              <a:rPr sz="3600" b="1">
-                <a:solidFill>
-                  <a:srgbClr val="FFFFFF"/>
-                </a:solidFill>
-                <a:latin typeface="Calibri"/>
-              </a:rPr>
-              <a:t>Result H2: Tipping Point</a:t>
+              <a:rPr sz="3600" b="1" i="0">
+                <a:solidFill>
+                  <a:srgbClr val="1F1E1D"/>
+                </a:solidFill>
+                <a:latin typeface="Georgia"/>
+              </a:rPr>
+              <a:t>Discussion: What The Model Says</a:t>
+            </a:r>
+          </a:p>
+        </p:txBody>
+      </p:sp>
+      <p:sp>
+        <p:nvSpPr>
+          <p:cNvPr id="4" name="TextBox 3"/>
+          <p:cNvSpPr txBox="1"/>
+          <p:nvPr/>
+        </p:nvSpPr>
+        <p:spPr>
+          <a:xfrm>
+            <a:off x="700000" y="1900000"/>
+            <a:ext cx="6700000" cy="4800000"/>
+          </a:xfrm>
+          <a:prstGeom prst="rect">
+            <a:avLst/>
+          </a:prstGeom>
+          <a:noFill/>
+        </p:spPr>
+        <p:txBody>
+          <a:bodyPr wrap="square" lIns="0" rIns="0" tIns="0" bIns="0" anchor="t">
+            <a:spAutoFit/>
+          </a:bodyPr>
+          <a:lstStyle/>
+          <a:p>
+            <a:pPr algn="l">
+              <a:lnSpc>
+                <a:spcPct val="150000"/>
+              </a:lnSpc>
+            </a:pPr>
+            <a:r>
+              <a:rPr sz="1400" b="1">
+                <a:solidFill>
+                  <a:srgbClr val="C15F3C"/>
+                </a:solidFill>
+                <a:latin typeface="Helvetica Neue"/>
+              </a:rPr>
+              <a:t>·  </a:t>
+            </a:r>
+            <a:r>
+              <a:rPr sz="1400">
+                <a:solidFill>
+                  <a:srgbClr val="1F1E1D"/>
+                </a:solidFill>
+                <a:latin typeface="Helvetica Neue"/>
+              </a:rPr>
+              <a:t>Self-reporting is insufficient. Basin-level visibility is essential.</a:t>
+            </a:r>
+          </a:p>
+          <a:p>
+            <a:pPr algn="l">
+              <a:lnSpc>
+                <a:spcPct val="150000"/>
+              </a:lnSpc>
+            </a:pPr>
+            <a:r>
+              <a:rPr sz="1400" b="1">
+                <a:solidFill>
+                  <a:srgbClr val="C15F3C"/>
+                </a:solidFill>
+                <a:latin typeface="Helvetica Neue"/>
+              </a:rPr>
+              <a:t>·  </a:t>
+            </a:r>
+            <a:r>
+              <a:rPr sz="1400">
+                <a:solidFill>
+                  <a:srgbClr val="1F1E1D"/>
+                </a:solidFill>
+                <a:latin typeface="Helvetica Neue"/>
+              </a:rPr>
+              <a:t>Reactive policy at conventional thresholds is structurally equivalent to no policy.</a:t>
+            </a:r>
+          </a:p>
+          <a:p>
+            <a:pPr algn="l">
+              <a:lnSpc>
+                <a:spcPct val="150000"/>
+              </a:lnSpc>
+            </a:pPr>
+            <a:r>
+              <a:rPr sz="1400" b="1">
+                <a:solidFill>
+                  <a:srgbClr val="C15F3C"/>
+                </a:solidFill>
+                <a:latin typeface="Helvetica Neue"/>
+              </a:rPr>
+              <a:t>·  </a:t>
+            </a:r>
+            <a:r>
+              <a:rPr sz="1400">
+                <a:solidFill>
+                  <a:srgbClr val="1F1E1D"/>
+                </a:solidFill>
+                <a:latin typeface="Helvetica Neue"/>
+              </a:rPr>
+              <a:t>Staggered entry buys time, not safety. Long-run equilibrium is unchanged.</a:t>
+            </a:r>
+          </a:p>
+          <a:p>
+            <a:pPr algn="l">
+              <a:lnSpc>
+                <a:spcPct val="150000"/>
+              </a:lnSpc>
+            </a:pPr>
+            <a:r>
+              <a:rPr sz="1400" b="1">
+                <a:solidFill>
+                  <a:srgbClr val="C15F3C"/>
+                </a:solidFill>
+                <a:latin typeface="Helvetica Neue"/>
+              </a:rPr>
+              <a:t>·  </a:t>
+            </a:r>
+            <a:r>
+              <a:rPr sz="1400">
+                <a:solidFill>
+                  <a:srgbClr val="1F1E1D"/>
+                </a:solidFill>
+                <a:latin typeface="Helvetica Neue"/>
+              </a:rPr>
+              <a:t>A 9x acceleration means by the time politicians notice, it is already too late.</a:t>
             </a:r>
           </a:p>
         </p:txBody>
       </p:sp>
       <p:pic>
         <p:nvPicPr>
-          <p:cNvPr id="4" name="Picture 3" descr="fig_tipping_point.png"/>
+          <p:cNvPr id="5" name="Picture 4" descr="fig_scenario_compare.png"/>
           <p:cNvPicPr>
             <a:picLocks noChangeAspect="1"/>
           </p:cNvPicPr>
@@ -4890,8 +5895,8 @@
         </p:blipFill>
         <p:spPr>
           <a:xfrm>
-            <a:off x="700000" y="1500000"/>
-            <a:ext cx="7800000" cy="4364839"/>
+            <a:off x="7800000" y="2000000"/>
+            <a:ext cx="4833333" cy="3567354"/>
           </a:xfrm>
           <a:prstGeom prst="rect">
             <a:avLst/>
@@ -4900,14 +5905,49 @@
       </p:pic>
       <p:sp>
         <p:nvSpPr>
-          <p:cNvPr id="5" name="TextBox 4"/>
-          <p:cNvSpPr txBox="1"/>
-          <p:nvPr/>
-        </p:nvSpPr>
-        <p:spPr>
-          <a:xfrm>
-            <a:off x="9000000" y="1700000"/>
-            <a:ext cx="4000000" cy="400000"/>
+          <p:cNvPr id="6" name="TextBox 5"/>
+          <p:cNvSpPr txBox="1"/>
+          <p:nvPr/>
+        </p:nvSpPr>
+        <p:spPr>
+          <a:xfrm>
+            <a:off x="7800000" y="5647354"/>
+            <a:ext cx="4833333" cy="400000"/>
+          </a:xfrm>
+          <a:prstGeom prst="rect">
+            <a:avLst/>
+          </a:prstGeom>
+          <a:noFill/>
+        </p:spPr>
+        <p:txBody>
+          <a:bodyPr wrap="square" lIns="0" rIns="0" tIns="0" bIns="0" anchor="t">
+            <a:spAutoFit/>
+          </a:bodyPr>
+          <a:lstStyle/>
+          <a:p>
+            <a:pPr algn="ctr"/>
+            <a:r>
+              <a:rPr sz="1000" b="0" i="0">
+                <a:solidFill>
+                  <a:srgbClr val="605E5B"/>
+                </a:solidFill>
+                <a:latin typeface="Helvetica Neue"/>
+              </a:rPr>
+              <a:t>Scenario comparison (A / B / C / D)</a:t>
+            </a:r>
+          </a:p>
+        </p:txBody>
+      </p:sp>
+      <p:sp>
+        <p:nvSpPr>
+          <p:cNvPr id="7" name="TextBox 6"/>
+          <p:cNvSpPr txBox="1"/>
+          <p:nvPr/>
+        </p:nvSpPr>
+        <p:spPr>
+          <a:xfrm>
+            <a:off x="700000" y="7120000"/>
+            <a:ext cx="2500000" cy="300000"/>
           </a:xfrm>
           <a:prstGeom prst="rect">
             <a:avLst/>
@@ -4922,83 +5962,13 @@
           <a:p>
             <a:pPr algn="l"/>
             <a:r>
-              <a:rPr sz="1400" b="1">
-                <a:solidFill>
-                  <a:srgbClr val="E6A532"/>
-                </a:solidFill>
-                <a:latin typeface="Calibri"/>
-              </a:rPr>
-              <a:t>ACCELERATION</a:t>
-            </a:r>
-          </a:p>
-        </p:txBody>
-      </p:sp>
-      <p:sp>
-        <p:nvSpPr>
-          <p:cNvPr id="6" name="TextBox 5"/>
-          <p:cNvSpPr txBox="1"/>
-          <p:nvPr/>
-        </p:nvSpPr>
-        <p:spPr>
-          <a:xfrm>
-            <a:off x="9000000" y="2100000"/>
-            <a:ext cx="4000000" cy="1200000"/>
-          </a:xfrm>
-          <a:prstGeom prst="rect">
-            <a:avLst/>
-          </a:prstGeom>
-          <a:noFill/>
-        </p:spPr>
-        <p:txBody>
-          <a:bodyPr wrap="square" lIns="0" rIns="0" tIns="0" bIns="0" anchor="t">
-            <a:spAutoFit/>
-          </a:bodyPr>
-          <a:lstStyle/>
-          <a:p>
-            <a:pPr algn="l"/>
-            <a:r>
-              <a:rPr sz="8000" b="1">
-                <a:solidFill>
-                  <a:srgbClr val="E6A532"/>
-                </a:solidFill>
-                <a:latin typeface="Calibri"/>
-              </a:rPr>
-              <a:t>9.25×</a:t>
-            </a:r>
-          </a:p>
-        </p:txBody>
-      </p:sp>
-      <p:sp>
-        <p:nvSpPr>
-          <p:cNvPr id="7" name="TextBox 6"/>
-          <p:cNvSpPr txBox="1"/>
-          <p:nvPr/>
-        </p:nvSpPr>
-        <p:spPr>
-          <a:xfrm>
-            <a:off x="9000000" y="3400000"/>
-            <a:ext cx="4000000" cy="700000"/>
-          </a:xfrm>
-          <a:prstGeom prst="rect">
-            <a:avLst/>
-          </a:prstGeom>
-          <a:noFill/>
-        </p:spPr>
-        <p:txBody>
-          <a:bodyPr wrap="square" lIns="0" rIns="0" tIns="0" bIns="0" anchor="t">
-            <a:spAutoFit/>
-          </a:bodyPr>
-          <a:lstStyle/>
-          <a:p>
-            <a:pPr algn="l"/>
-            <a:r>
-              <a:rPr sz="1600" b="0">
-                <a:solidFill>
-                  <a:srgbClr val="FFFFFF"/>
-                </a:solidFill>
-                <a:latin typeface="Calibri"/>
-              </a:rPr>
-              <a:t>decline rate after 40% threshold</a:t>
+              <a:rPr sz="900" b="0" i="0">
+                <a:solidFill>
+                  <a:srgbClr val="605E5B"/>
+                </a:solidFill>
+                <a:latin typeface="Helvetica Neue"/>
+              </a:rPr>
+              <a:t>PARCHED</a:t>
             </a:r>
           </a:p>
         </p:txBody>
@@ -5011,113 +5981,8 @@
         </p:nvSpPr>
         <p:spPr>
           <a:xfrm>
-            <a:off x="9000000" y="4250000"/>
-            <a:ext cx="4000000" cy="400000"/>
-          </a:xfrm>
-          <a:prstGeom prst="rect">
-            <a:avLst/>
-          </a:prstGeom>
-          <a:noFill/>
-        </p:spPr>
-        <p:txBody>
-          <a:bodyPr wrap="square" lIns="0" rIns="0" tIns="0" bIns="0" anchor="t">
-            <a:spAutoFit/>
-          </a:bodyPr>
-          <a:lstStyle/>
-          <a:p>
-            <a:pPr algn="l"/>
-            <a:r>
-              <a:rPr sz="1800" b="0">
-                <a:solidFill>
-                  <a:srgbClr val="B6C2D9"/>
-                </a:solidFill>
-                <a:latin typeface="Calibri"/>
-              </a:rPr>
-              <a:t>Pre-tipping: 0.07 / yr</a:t>
-            </a:r>
-          </a:p>
-        </p:txBody>
-      </p:sp>
-      <p:sp>
-        <p:nvSpPr>
-          <p:cNvPr id="9" name="TextBox 8"/>
-          <p:cNvSpPr txBox="1"/>
-          <p:nvPr/>
-        </p:nvSpPr>
-        <p:spPr>
-          <a:xfrm>
-            <a:off x="9000000" y="4700000"/>
-            <a:ext cx="4000000" cy="400000"/>
-          </a:xfrm>
-          <a:prstGeom prst="rect">
-            <a:avLst/>
-          </a:prstGeom>
-          <a:noFill/>
-        </p:spPr>
-        <p:txBody>
-          <a:bodyPr wrap="square" lIns="0" rIns="0" tIns="0" bIns="0" anchor="t">
-            <a:spAutoFit/>
-          </a:bodyPr>
-          <a:lstStyle/>
-          <a:p>
-            <a:pPr algn="l"/>
-            <a:r>
-              <a:rPr sz="1800" b="1">
-                <a:solidFill>
-                  <a:srgbClr val="FFFFFF"/>
-                </a:solidFill>
-                <a:latin typeface="Calibri"/>
-              </a:rPr>
-              <a:t>Post-tipping: 0.66 / yr</a:t>
-            </a:r>
-          </a:p>
-        </p:txBody>
-      </p:sp>
-      <p:sp>
-        <p:nvSpPr>
-          <p:cNvPr id="10" name="TextBox 9"/>
-          <p:cNvSpPr txBox="1"/>
-          <p:nvPr/>
-        </p:nvSpPr>
-        <p:spPr>
-          <a:xfrm>
-            <a:off x="9000000" y="5300000"/>
-            <a:ext cx="4000000" cy="500000"/>
-          </a:xfrm>
-          <a:prstGeom prst="rect">
-            <a:avLst/>
-          </a:prstGeom>
-          <a:noFill/>
-        </p:spPr>
-        <p:txBody>
-          <a:bodyPr wrap="square" lIns="0" rIns="0" tIns="0" bIns="0" anchor="t">
-            <a:spAutoFit/>
-          </a:bodyPr>
-          <a:lstStyle/>
-          <a:p>
-            <a:pPr algn="l"/>
-            <a:r>
-              <a:rPr sz="2000" b="1">
-                <a:solidFill>
-                  <a:srgbClr val="3EE6C5"/>
-                </a:solidFill>
-                <a:latin typeface="Calibri"/>
-              </a:rPr>
-              <a:t>p &lt; 10⁻⁷⁴</a:t>
-            </a:r>
-          </a:p>
-        </p:txBody>
-      </p:sp>
-      <p:sp>
-        <p:nvSpPr>
-          <p:cNvPr id="11" name="TextBox 10"/>
-          <p:cNvSpPr txBox="1"/>
-          <p:nvPr/>
-        </p:nvSpPr>
-        <p:spPr>
-          <a:xfrm>
-            <a:off x="11133333" y="7050000"/>
-            <a:ext cx="1800000" cy="350000"/>
+            <a:off x="11133333" y="7120000"/>
+            <a:ext cx="1500000" cy="300000"/>
           </a:xfrm>
           <a:prstGeom prst="rect">
             <a:avLst/>
@@ -5132,13 +5997,13 @@
           <a:p>
             <a:pPr algn="r"/>
             <a:r>
-              <a:rPr sz="1000" b="0">
-                <a:solidFill>
-                  <a:srgbClr val="B6C2D9"/>
-                </a:solidFill>
-                <a:latin typeface="Calibri"/>
-              </a:rPr>
-              <a:t>PARCHED   |   10 / 14</a:t>
+              <a:rPr sz="900" b="0" i="0">
+                <a:solidFill>
+                  <a:srgbClr val="605E5B"/>
+                </a:solidFill>
+                <a:latin typeface="Helvetica Neue"/>
+              </a:rPr>
+              <a:t>12 / 14</a:t>
             </a:r>
           </a:p>
         </p:txBody>
@@ -5151,13 +6016,13 @@
 </p:sld>
 </file>
 
-<file path=ppt/slides/slide11.xml><?xml version="1.0" encoding="utf-8"?>
+<file path=ppt/slides/slide13.xml><?xml version="1.0" encoding="utf-8"?>
 <p:sld xmlns:a="http://schemas.openxmlformats.org/drawingml/2006/main" xmlns:p="http://schemas.openxmlformats.org/presentationml/2006/main" xmlns:r="http://schemas.openxmlformats.org/officeDocument/2006/relationships">
   <p:cSld>
     <p:bg>
       <p:bgPr>
         <a:solidFill>
-          <a:srgbClr val="0B1426"/>
+          <a:srgbClr val="FAF9F5"/>
         </a:solidFill>
         <a:effectLst/>
       </p:bgPr>
@@ -5177,14 +6042,14 @@
         </p:nvSpPr>
         <p:spPr>
           <a:xfrm>
-            <a:off x="0" y="0"/>
-            <a:ext cx="110000" cy="7500000"/>
+            <a:off x="700000" y="705740"/>
+            <a:ext cx="110000" cy="110000"/>
           </a:xfrm>
           <a:prstGeom prst="rect">
             <a:avLst/>
           </a:prstGeom>
           <a:solidFill>
-            <a:srgbClr val="3EE6C5"/>
+            <a:srgbClr val="C15F3C"/>
           </a:solidFill>
           <a:ln>
             <a:noFill/>
@@ -5220,8 +6085,8 @@
         </p:nvSpPr>
         <p:spPr>
           <a:xfrm>
-            <a:off x="700000" y="500000"/>
-            <a:ext cx="11933333" cy="800000"/>
+            <a:off x="990000" y="500000"/>
+            <a:ext cx="11643333" cy="900000"/>
           </a:xfrm>
           <a:prstGeom prst="rect">
             <a:avLst/>
@@ -5236,41 +6101,52 @@
           <a:p>
             <a:pPr algn="l"/>
             <a:r>
-              <a:rPr sz="3600" b="1">
-                <a:solidFill>
-                  <a:srgbClr val="FFFFFF"/>
-                </a:solidFill>
-                <a:latin typeface="Calibri"/>
-              </a:rPr>
-              <a:t>Result H3: Policy Effectiveness</a:t>
-            </a:r>
-          </a:p>
-        </p:txBody>
-      </p:sp>
-      <p:pic>
-        <p:nvPicPr>
-          <p:cNvPr id="4" name="Picture 3" descr="fig_yield_loss.png"/>
-          <p:cNvPicPr>
-            <a:picLocks noChangeAspect="1"/>
-          </p:cNvPicPr>
-          <p:nvPr/>
-        </p:nvPicPr>
-        <p:blipFill>
-          <a:blip r:embed="rId2"/>
-          <a:stretch>
-            <a:fillRect/>
-          </a:stretch>
-        </p:blipFill>
-        <p:spPr>
-          <a:xfrm>
-            <a:off x="700000" y="1500000"/>
-            <a:ext cx="7000000" cy="4725377"/>
-          </a:xfrm>
-          <a:prstGeom prst="rect">
-            <a:avLst/>
-          </a:prstGeom>
-        </p:spPr>
-      </p:pic>
+              <a:rPr sz="3600" b="1" i="0">
+                <a:solidFill>
+                  <a:srgbClr val="1F1E1D"/>
+                </a:solidFill>
+                <a:latin typeface="Georgia"/>
+              </a:rPr>
+              <a:t>Limitations and Future Work</a:t>
+            </a:r>
+          </a:p>
+        </p:txBody>
+      </p:sp>
+      <p:sp>
+        <p:nvSpPr>
+          <p:cNvPr id="4" name="TextBox 3"/>
+          <p:cNvSpPr txBox="1"/>
+          <p:nvPr/>
+        </p:nvSpPr>
+        <p:spPr>
+          <a:xfrm>
+            <a:off x="700000" y="1800000"/>
+            <a:ext cx="5900000" cy="400000"/>
+          </a:xfrm>
+          <a:prstGeom prst="rect">
+            <a:avLst/>
+          </a:prstGeom>
+          <a:noFill/>
+        </p:spPr>
+        <p:txBody>
+          <a:bodyPr wrap="square" lIns="0" rIns="0" tIns="0" bIns="0" anchor="t">
+            <a:spAutoFit/>
+          </a:bodyPr>
+          <a:lstStyle/>
+          <a:p>
+            <a:pPr algn="l"/>
+            <a:r>
+              <a:rPr sz="1100" b="1" i="0">
+                <a:solidFill>
+                  <a:srgbClr val="C15F3C"/>
+                </a:solidFill>
+                <a:latin typeface="Helvetica Neue"/>
+              </a:rPr>
+              <a:t>LIMITATIONS</a:t>
+            </a:r>
+          </a:p>
+        </p:txBody>
+      </p:sp>
       <p:sp>
         <p:nvSpPr>
           <p:cNvPr id="5" name="TextBox 4"/>
@@ -5279,8 +6155,181 @@
         </p:nvSpPr>
         <p:spPr>
           <a:xfrm>
-            <a:off x="8200000" y="1600000"/>
-            <a:ext cx="4800000" cy="400000"/>
+            <a:off x="700000" y="2250000"/>
+            <a:ext cx="5900000" cy="4500000"/>
+          </a:xfrm>
+          <a:prstGeom prst="rect">
+            <a:avLst/>
+          </a:prstGeom>
+          <a:noFill/>
+        </p:spPr>
+        <p:txBody>
+          <a:bodyPr wrap="square" lIns="0" rIns="0" tIns="0" bIns="0" anchor="t">
+            <a:spAutoFit/>
+          </a:bodyPr>
+          <a:lstStyle/>
+          <a:p>
+            <a:pPr algn="l">
+              <a:lnSpc>
+                <a:spcPct val="140000"/>
+              </a:lnSpc>
+            </a:pPr>
+            <a:r>
+              <a:rPr sz="1300" b="1">
+                <a:solidFill>
+                  <a:srgbClr val="C15F3C"/>
+                </a:solidFill>
+                <a:latin typeface="Helvetica Neue"/>
+              </a:rPr>
+              <a:t>·  </a:t>
+            </a:r>
+            <a:r>
+              <a:rPr sz="1300">
+                <a:solidFill>
+                  <a:srgbClr val="1F1E1D"/>
+                </a:solidFill>
+                <a:latin typeface="Helvetica Neue"/>
+              </a:rPr>
+              <a:t>Synthetic parameters (calibrated, not validated against a specific basin)</a:t>
+            </a:r>
+          </a:p>
+          <a:p>
+            <a:pPr algn="l">
+              <a:lnSpc>
+                <a:spcPct val="140000"/>
+              </a:lnSpc>
+            </a:pPr>
+            <a:r>
+              <a:rPr sz="1300" b="1">
+                <a:solidFill>
+                  <a:srgbClr val="C15F3C"/>
+                </a:solidFill>
+                <a:latin typeface="Helvetica Neue"/>
+              </a:rPr>
+              <a:t>·  </a:t>
+            </a:r>
+            <a:r>
+              <a:rPr sz="1300">
+                <a:solidFill>
+                  <a:srgbClr val="1F1E1D"/>
+                </a:solidFill>
+                <a:latin typeface="Helvetica Neue"/>
+              </a:rPr>
+              <a:t>No climate-change drift</a:t>
+            </a:r>
+          </a:p>
+          <a:p>
+            <a:pPr algn="l">
+              <a:lnSpc>
+                <a:spcPct val="140000"/>
+              </a:lnSpc>
+            </a:pPr>
+            <a:r>
+              <a:rPr sz="1300" b="1">
+                <a:solidFill>
+                  <a:srgbClr val="C15F3C"/>
+                </a:solidFill>
+                <a:latin typeface="Helvetica Neue"/>
+              </a:rPr>
+              <a:t>·  </a:t>
+            </a:r>
+            <a:r>
+              <a:rPr sz="1300">
+                <a:solidFill>
+                  <a:srgbClr val="1F1E1D"/>
+                </a:solidFill>
+                <a:latin typeface="Helvetica Neue"/>
+              </a:rPr>
+              <a:t>Single basin, no inter-basin trade</a:t>
+            </a:r>
+          </a:p>
+          <a:p>
+            <a:pPr algn="l">
+              <a:lnSpc>
+                <a:spcPct val="140000"/>
+              </a:lnSpc>
+            </a:pPr>
+            <a:r>
+              <a:rPr sz="1300" b="1">
+                <a:solidFill>
+                  <a:srgbClr val="C15F3C"/>
+                </a:solidFill>
+                <a:latin typeface="Helvetica Neue"/>
+              </a:rPr>
+              <a:t>·  </a:t>
+            </a:r>
+            <a:r>
+              <a:rPr sz="1300">
+                <a:solidFill>
+                  <a:srgbClr val="1F1E1D"/>
+                </a:solidFill>
+                <a:latin typeface="Helvetica Neue"/>
+              </a:rPr>
+              <a:t>Regulator has perfect observability after delay</a:t>
+            </a:r>
+          </a:p>
+          <a:p>
+            <a:pPr algn="l">
+              <a:lnSpc>
+                <a:spcPct val="140000"/>
+              </a:lnSpc>
+            </a:pPr>
+            <a:r>
+              <a:rPr sz="1300" b="1">
+                <a:solidFill>
+                  <a:srgbClr val="C15F3C"/>
+                </a:solidFill>
+                <a:latin typeface="Helvetica Neue"/>
+              </a:rPr>
+              <a:t>·  </a:t>
+            </a:r>
+            <a:r>
+              <a:rPr sz="1300">
+                <a:solidFill>
+                  <a:srgbClr val="1F1E1D"/>
+                </a:solidFill>
+                <a:latin typeface="Helvetica Neue"/>
+              </a:rPr>
+              <a:t>Demand is exogenous</a:t>
+            </a:r>
+          </a:p>
+          <a:p>
+            <a:pPr algn="l">
+              <a:lnSpc>
+                <a:spcPct val="140000"/>
+              </a:lnSpc>
+            </a:pPr>
+            <a:r>
+              <a:rPr sz="1300" b="1">
+                <a:solidFill>
+                  <a:srgbClr val="C15F3C"/>
+                </a:solidFill>
+                <a:latin typeface="Helvetica Neue"/>
+              </a:rPr>
+              <a:t>·  </a:t>
+            </a:r>
+            <a:r>
+              <a:rPr sz="1300">
+                <a:solidFill>
+                  <a:srgbClr val="1F1E1D"/>
+                </a:solidFill>
+                <a:latin typeface="Helvetica Neue"/>
+              </a:rPr>
+              <a:t>Ag yield loss simplified: below threshold = dead</a:t>
+            </a:r>
+          </a:p>
+        </p:txBody>
+      </p:sp>
+      <p:sp>
+        <p:nvSpPr>
+          <p:cNvPr id="6" name="TextBox 5"/>
+          <p:cNvSpPr txBox="1"/>
+          <p:nvPr/>
+        </p:nvSpPr>
+        <p:spPr>
+          <a:xfrm>
+            <a:off x="7100000" y="1800000"/>
+            <a:ext cx="5700000" cy="400000"/>
           </a:xfrm>
           <a:prstGeom prst="rect">
             <a:avLst/>
@@ -5295,27 +6344,200 @@
           <a:p>
             <a:pPr algn="l"/>
             <a:r>
-              <a:rPr sz="1400" b="1">
-                <a:solidFill>
-                  <a:srgbClr val="3EE6C5"/>
-                </a:solidFill>
-                <a:latin typeface="Calibri"/>
-              </a:rPr>
-              <a:t>PROACTIVE CAP</a:t>
-            </a:r>
-          </a:p>
-        </p:txBody>
-      </p:sp>
-      <p:sp>
-        <p:nvSpPr>
-          <p:cNvPr id="6" name="TextBox 5"/>
-          <p:cNvSpPr txBox="1"/>
-          <p:nvPr/>
-        </p:nvSpPr>
-        <p:spPr>
-          <a:xfrm>
-            <a:off x="8200000" y="2000000"/>
-            <a:ext cx="4800000" cy="900000"/>
+              <a:rPr sz="1100" b="1" i="0">
+                <a:solidFill>
+                  <a:srgbClr val="C15F3C"/>
+                </a:solidFill>
+                <a:latin typeface="Helvetica Neue"/>
+              </a:rPr>
+              <a:t>FUTURE WORK</a:t>
+            </a:r>
+          </a:p>
+        </p:txBody>
+      </p:sp>
+      <p:sp>
+        <p:nvSpPr>
+          <p:cNvPr id="7" name="TextBox 6"/>
+          <p:cNvSpPr txBox="1"/>
+          <p:nvPr/>
+        </p:nvSpPr>
+        <p:spPr>
+          <a:xfrm>
+            <a:off x="7100000" y="2250000"/>
+            <a:ext cx="5700000" cy="4500000"/>
+          </a:xfrm>
+          <a:prstGeom prst="rect">
+            <a:avLst/>
+          </a:prstGeom>
+          <a:noFill/>
+        </p:spPr>
+        <p:txBody>
+          <a:bodyPr wrap="square" lIns="0" rIns="0" tIns="0" bIns="0" anchor="t">
+            <a:spAutoFit/>
+          </a:bodyPr>
+          <a:lstStyle/>
+          <a:p>
+            <a:pPr algn="l">
+              <a:lnSpc>
+                <a:spcPct val="140000"/>
+              </a:lnSpc>
+            </a:pPr>
+            <a:r>
+              <a:rPr sz="1300" b="1">
+                <a:solidFill>
+                  <a:srgbClr val="C15F3C"/>
+                </a:solidFill>
+                <a:latin typeface="Helvetica Neue"/>
+              </a:rPr>
+              <a:t>·  </a:t>
+            </a:r>
+            <a:r>
+              <a:rPr sz="1300">
+                <a:solidFill>
+                  <a:srgbClr val="1F1E1D"/>
+                </a:solidFill>
+                <a:latin typeface="Helvetica Neue"/>
+              </a:rPr>
+              <a:t>Inter-basin water trade</a:t>
+            </a:r>
+          </a:p>
+          <a:p>
+            <a:pPr algn="l">
+              <a:lnSpc>
+                <a:spcPct val="140000"/>
+              </a:lnSpc>
+            </a:pPr>
+            <a:r>
+              <a:rPr sz="1300" b="1">
+                <a:solidFill>
+                  <a:srgbClr val="C15F3C"/>
+                </a:solidFill>
+                <a:latin typeface="Helvetica Neue"/>
+              </a:rPr>
+              <a:t>·  </a:t>
+            </a:r>
+            <a:r>
+              <a:rPr sz="1300">
+                <a:solidFill>
+                  <a:srgbClr val="1F1E1D"/>
+                </a:solidFill>
+                <a:latin typeface="Helvetica Neue"/>
+              </a:rPr>
+              <a:t>Climate-change scenarios (drift in recharge)</a:t>
+            </a:r>
+          </a:p>
+          <a:p>
+            <a:pPr algn="l">
+              <a:lnSpc>
+                <a:spcPct val="140000"/>
+              </a:lnSpc>
+            </a:pPr>
+            <a:r>
+              <a:rPr sz="1300" b="1">
+                <a:solidFill>
+                  <a:srgbClr val="C15F3C"/>
+                </a:solidFill>
+                <a:latin typeface="Helvetica Neue"/>
+              </a:rPr>
+              <a:t>·  </a:t>
+            </a:r>
+            <a:r>
+              <a:rPr sz="1300">
+                <a:solidFill>
+                  <a:srgbClr val="1F1E1D"/>
+                </a:solidFill>
+                <a:latin typeface="Helvetica Neue"/>
+              </a:rPr>
+              <a:t>Real permit-process modeling</a:t>
+            </a:r>
+          </a:p>
+          <a:p>
+            <a:pPr algn="l">
+              <a:lnSpc>
+                <a:spcPct val="140000"/>
+              </a:lnSpc>
+            </a:pPr>
+            <a:r>
+              <a:rPr sz="1300" b="1">
+                <a:solidFill>
+                  <a:srgbClr val="C15F3C"/>
+                </a:solidFill>
+                <a:latin typeface="Helvetica Neue"/>
+              </a:rPr>
+              <a:t>·  </a:t>
+            </a:r>
+            <a:r>
+              <a:rPr sz="1300">
+                <a:solidFill>
+                  <a:srgbClr val="1F1E1D"/>
+                </a:solidFill>
+                <a:latin typeface="Helvetica Neue"/>
+              </a:rPr>
+              <a:t>Inter-operator contestation and bidding</a:t>
+            </a:r>
+          </a:p>
+          <a:p>
+            <a:pPr algn="l">
+              <a:lnSpc>
+                <a:spcPct val="140000"/>
+              </a:lnSpc>
+            </a:pPr>
+            <a:r>
+              <a:rPr sz="1300" b="1">
+                <a:solidFill>
+                  <a:srgbClr val="C15F3C"/>
+                </a:solidFill>
+                <a:latin typeface="Helvetica Neue"/>
+              </a:rPr>
+              <a:t>·  </a:t>
+            </a:r>
+            <a:r>
+              <a:rPr sz="1300">
+                <a:solidFill>
+                  <a:srgbClr val="1F1E1D"/>
+                </a:solidFill>
+                <a:latin typeface="Helvetica Neue"/>
+              </a:rPr>
+              <a:t>Endogenous demand response (price elasticity)</a:t>
+            </a:r>
+          </a:p>
+          <a:p>
+            <a:pPr algn="l">
+              <a:lnSpc>
+                <a:spcPct val="140000"/>
+              </a:lnSpc>
+            </a:pPr>
+            <a:r>
+              <a:rPr sz="1300" b="1">
+                <a:solidFill>
+                  <a:srgbClr val="C15F3C"/>
+                </a:solidFill>
+                <a:latin typeface="Helvetica Neue"/>
+              </a:rPr>
+              <a:t>·  </a:t>
+            </a:r>
+            <a:r>
+              <a:rPr sz="1300">
+                <a:solidFill>
+                  <a:srgbClr val="1F1E1D"/>
+                </a:solidFill>
+                <a:latin typeface="Helvetica Neue"/>
+              </a:rPr>
+              <a:t>Calibrate to a real candidate basin</a:t>
+            </a:r>
+          </a:p>
+        </p:txBody>
+      </p:sp>
+      <p:sp>
+        <p:nvSpPr>
+          <p:cNvPr id="8" name="TextBox 7"/>
+          <p:cNvSpPr txBox="1"/>
+          <p:nvPr/>
+        </p:nvSpPr>
+        <p:spPr>
+          <a:xfrm>
+            <a:off x="700000" y="7120000"/>
+            <a:ext cx="2500000" cy="300000"/>
           </a:xfrm>
           <a:prstGeom prst="rect">
             <a:avLst/>
@@ -5330,83 +6552,13 @@
           <a:p>
             <a:pPr algn="l"/>
             <a:r>
-              <a:rPr sz="6400" b="1">
-                <a:solidFill>
-                  <a:srgbClr val="3EE6C5"/>
-                </a:solidFill>
-                <a:latin typeface="Calibri"/>
-              </a:rPr>
-              <a:t>+65%</a:t>
-            </a:r>
-          </a:p>
-        </p:txBody>
-      </p:sp>
-      <p:sp>
-        <p:nvSpPr>
-          <p:cNvPr id="7" name="TextBox 6"/>
-          <p:cNvSpPr txBox="1"/>
-          <p:nvPr/>
-        </p:nvSpPr>
-        <p:spPr>
-          <a:xfrm>
-            <a:off x="8200000" y="3000000"/>
-            <a:ext cx="4800000" cy="400000"/>
-          </a:xfrm>
-          <a:prstGeom prst="rect">
-            <a:avLst/>
-          </a:prstGeom>
-          <a:noFill/>
-        </p:spPr>
-        <p:txBody>
-          <a:bodyPr wrap="square" lIns="0" rIns="0" tIns="0" bIns="0" anchor="t">
-            <a:spAutoFit/>
-          </a:bodyPr>
-          <a:lstStyle/>
-          <a:p>
-            <a:pPr algn="l"/>
-            <a:r>
-              <a:rPr sz="1500" b="0">
-                <a:solidFill>
-                  <a:srgbClr val="B6C2D9"/>
-                </a:solidFill>
-                <a:latin typeface="Calibri"/>
-              </a:rPr>
-              <a:t>delay in critical stress onset</a:t>
-            </a:r>
-          </a:p>
-        </p:txBody>
-      </p:sp>
-      <p:sp>
-        <p:nvSpPr>
-          <p:cNvPr id="8" name="TextBox 7"/>
-          <p:cNvSpPr txBox="1"/>
-          <p:nvPr/>
-        </p:nvSpPr>
-        <p:spPr>
-          <a:xfrm>
-            <a:off x="8200000" y="3700000"/>
-            <a:ext cx="4800000" cy="400000"/>
-          </a:xfrm>
-          <a:prstGeom prst="rect">
-            <a:avLst/>
-          </a:prstGeom>
-          <a:noFill/>
-        </p:spPr>
-        <p:txBody>
-          <a:bodyPr wrap="square" lIns="0" rIns="0" tIns="0" bIns="0" anchor="t">
-            <a:spAutoFit/>
-          </a:bodyPr>
-          <a:lstStyle/>
-          <a:p>
-            <a:pPr algn="l"/>
-            <a:r>
-              <a:rPr sz="1400" b="1">
-                <a:solidFill>
-                  <a:srgbClr val="D9514E"/>
-                </a:solidFill>
-                <a:latin typeface="Calibri"/>
-              </a:rPr>
-              <a:t>REACTIVE CAP</a:t>
+              <a:rPr sz="900" b="0" i="0">
+                <a:solidFill>
+                  <a:srgbClr val="605E5B"/>
+                </a:solidFill>
+                <a:latin typeface="Helvetica Neue"/>
+              </a:rPr>
+              <a:t>PARCHED</a:t>
             </a:r>
           </a:p>
         </p:txBody>
@@ -5419,113 +6571,8 @@
         </p:nvSpPr>
         <p:spPr>
           <a:xfrm>
-            <a:off x="8200000" y="4100000"/>
-            <a:ext cx="4800000" cy="900000"/>
-          </a:xfrm>
-          <a:prstGeom prst="rect">
-            <a:avLst/>
-          </a:prstGeom>
-          <a:noFill/>
-        </p:spPr>
-        <p:txBody>
-          <a:bodyPr wrap="square" lIns="0" rIns="0" tIns="0" bIns="0" anchor="t">
-            <a:spAutoFit/>
-          </a:bodyPr>
-          <a:lstStyle/>
-          <a:p>
-            <a:pPr algn="l"/>
-            <a:r>
-              <a:rPr sz="6400" b="1">
-                <a:solidFill>
-                  <a:srgbClr val="D9514E"/>
-                </a:solidFill>
-                <a:latin typeface="Calibri"/>
-              </a:rPr>
-              <a:t>+0%</a:t>
-            </a:r>
-          </a:p>
-        </p:txBody>
-      </p:sp>
-      <p:sp>
-        <p:nvSpPr>
-          <p:cNvPr id="10" name="TextBox 9"/>
-          <p:cNvSpPr txBox="1"/>
-          <p:nvPr/>
-        </p:nvSpPr>
-        <p:spPr>
-          <a:xfrm>
-            <a:off x="8200000" y="5100000"/>
-            <a:ext cx="4800000" cy="400000"/>
-          </a:xfrm>
-          <a:prstGeom prst="rect">
-            <a:avLst/>
-          </a:prstGeom>
-          <a:noFill/>
-        </p:spPr>
-        <p:txBody>
-          <a:bodyPr wrap="square" lIns="0" rIns="0" tIns="0" bIns="0" anchor="t">
-            <a:spAutoFit/>
-          </a:bodyPr>
-          <a:lstStyle/>
-          <a:p>
-            <a:pPr algn="l"/>
-            <a:r>
-              <a:rPr sz="1500" b="0">
-                <a:solidFill>
-                  <a:srgbClr val="B6C2D9"/>
-                </a:solidFill>
-                <a:latin typeface="Calibri"/>
-              </a:rPr>
-              <a:t>indistinguishable from no policy</a:t>
-            </a:r>
-          </a:p>
-        </p:txBody>
-      </p:sp>
-      <p:sp>
-        <p:nvSpPr>
-          <p:cNvPr id="11" name="TextBox 10"/>
-          <p:cNvSpPr txBox="1"/>
-          <p:nvPr/>
-        </p:nvSpPr>
-        <p:spPr>
-          <a:xfrm>
-            <a:off x="8200000" y="5700000"/>
-            <a:ext cx="4800000" cy="500000"/>
-          </a:xfrm>
-          <a:prstGeom prst="rect">
-            <a:avLst/>
-          </a:prstGeom>
-          <a:noFill/>
-        </p:spPr>
-        <p:txBody>
-          <a:bodyPr wrap="square" lIns="0" rIns="0" tIns="0" bIns="0" anchor="t">
-            <a:spAutoFit/>
-          </a:bodyPr>
-          <a:lstStyle/>
-          <a:p>
-            <a:pPr algn="l"/>
-            <a:r>
-              <a:rPr sz="1800" b="1">
-                <a:solidFill>
-                  <a:srgbClr val="3EE6C5"/>
-                </a:solidFill>
-                <a:latin typeface="Calibri"/>
-              </a:rPr>
-              <a:t>p &lt; 10⁻³⁵</a:t>
-            </a:r>
-          </a:p>
-        </p:txBody>
-      </p:sp>
-      <p:sp>
-        <p:nvSpPr>
-          <p:cNvPr id="12" name="TextBox 11"/>
-          <p:cNvSpPr txBox="1"/>
-          <p:nvPr/>
-        </p:nvSpPr>
-        <p:spPr>
-          <a:xfrm>
-            <a:off x="11133333" y="7050000"/>
-            <a:ext cx="1800000" cy="350000"/>
+            <a:off x="11133333" y="7120000"/>
+            <a:ext cx="1500000" cy="300000"/>
           </a:xfrm>
           <a:prstGeom prst="rect">
             <a:avLst/>
@@ -5540,13 +6587,13 @@
           <a:p>
             <a:pPr algn="r"/>
             <a:r>
-              <a:rPr sz="1000" b="0">
-                <a:solidFill>
-                  <a:srgbClr val="B6C2D9"/>
-                </a:solidFill>
-                <a:latin typeface="Calibri"/>
-              </a:rPr>
-              <a:t>PARCHED   |   11 / 14</a:t>
+              <a:rPr sz="900" b="0" i="0">
+                <a:solidFill>
+                  <a:srgbClr val="605E5B"/>
+                </a:solidFill>
+                <a:latin typeface="Helvetica Neue"/>
+              </a:rPr>
+              <a:t>13 / 14</a:t>
             </a:r>
           </a:p>
         </p:txBody>
@@ -5559,13 +6606,13 @@
 </p:sld>
 </file>
 
-<file path=ppt/slides/slide12.xml><?xml version="1.0" encoding="utf-8"?>
+<file path=ppt/slides/slide14.xml><?xml version="1.0" encoding="utf-8"?>
 <p:sld xmlns:a="http://schemas.openxmlformats.org/drawingml/2006/main" xmlns:p="http://schemas.openxmlformats.org/presentationml/2006/main" xmlns:r="http://schemas.openxmlformats.org/officeDocument/2006/relationships">
   <p:cSld>
     <p:bg>
       <p:bgPr>
         <a:solidFill>
-          <a:srgbClr val="0B1426"/>
+          <a:srgbClr val="FAF9F5"/>
         </a:solidFill>
         <a:effectLst/>
       </p:bgPr>
@@ -5585,14 +6632,14 @@
         </p:nvSpPr>
         <p:spPr>
           <a:xfrm>
-            <a:off x="0" y="0"/>
-            <a:ext cx="110000" cy="7500000"/>
+            <a:off x="700000" y="705740"/>
+            <a:ext cx="110000" cy="110000"/>
           </a:xfrm>
           <a:prstGeom prst="rect">
             <a:avLst/>
           </a:prstGeom>
           <a:solidFill>
-            <a:srgbClr val="3EE6C5"/>
+            <a:srgbClr val="C15F3C"/>
           </a:solidFill>
           <a:ln>
             <a:noFill/>
@@ -5628,8 +6675,8 @@
         </p:nvSpPr>
         <p:spPr>
           <a:xfrm>
-            <a:off x="700000" y="500000"/>
-            <a:ext cx="11933333" cy="800000"/>
+            <a:off x="990000" y="500000"/>
+            <a:ext cx="11643333" cy="900000"/>
           </a:xfrm>
           <a:prstGeom prst="rect">
             <a:avLst/>
@@ -5644,13 +6691,13 @@
           <a:p>
             <a:pPr algn="l"/>
             <a:r>
-              <a:rPr sz="3600" b="1">
-                <a:solidFill>
-                  <a:srgbClr val="FFFFFF"/>
-                </a:solidFill>
-                <a:latin typeface="Calibri"/>
-              </a:rPr>
-              <a:t>Discussion: What The Model Says</a:t>
+              <a:rPr sz="3600" b="1" i="0">
+                <a:solidFill>
+                  <a:srgbClr val="1F1E1D"/>
+                </a:solidFill>
+                <a:latin typeface="Georgia"/>
+              </a:rPr>
+              <a:t>Conclusion and Q&amp;A</a:t>
             </a:r>
           </a:p>
         </p:txBody>
@@ -5663,145 +6710,68 @@
         </p:nvSpPr>
         <p:spPr>
           <a:xfrm>
-            <a:off x="700000" y="1700000"/>
-            <a:ext cx="6500000" cy="5000000"/>
-          </a:xfrm>
-          <a:prstGeom prst="rect">
-            <a:avLst/>
-          </a:prstGeom>
-          <a:noFill/>
-        </p:spPr>
-        <p:txBody>
-          <a:bodyPr wrap="square" lIns="0" rIns="0" tIns="0" bIns="0" anchor="t">
-            <a:spAutoFit/>
-          </a:bodyPr>
-          <a:lstStyle/>
-          <a:p>
-            <a:pPr algn="l">
-              <a:lnSpc>
-                <a:spcPct val="150000"/>
-              </a:lnSpc>
-            </a:pPr>
-            <a:r>
-              <a:rPr sz="1800" b="1">
-                <a:solidFill>
-                  <a:srgbClr val="3EE6C5"/>
-                </a:solidFill>
-                <a:latin typeface="Calibri"/>
-              </a:rPr>
-              <a:t>▸  </a:t>
-            </a:r>
-            <a:r>
-              <a:rPr sz="1800">
-                <a:solidFill>
-                  <a:srgbClr val="FFFFFF"/>
-                </a:solidFill>
-                <a:latin typeface="Calibri"/>
-              </a:rPr>
-              <a:t>Self-reporting is insufficient; basin-level visibility is essential</a:t>
-            </a:r>
-          </a:p>
-          <a:p>
-            <a:pPr algn="l">
-              <a:lnSpc>
-                <a:spcPct val="150000"/>
-              </a:lnSpc>
-            </a:pPr>
-            <a:r>
-              <a:rPr sz="1800" b="1">
-                <a:solidFill>
-                  <a:srgbClr val="3EE6C5"/>
-                </a:solidFill>
-                <a:latin typeface="Calibri"/>
-              </a:rPr>
-              <a:t>▸  </a:t>
-            </a:r>
-            <a:r>
-              <a:rPr sz="1800">
-                <a:solidFill>
-                  <a:srgbClr val="FFFFFF"/>
-                </a:solidFill>
-                <a:latin typeface="Calibri"/>
-              </a:rPr>
-              <a:t>Reactive policy at conventional thresholds is structurally equivalent to no policy</a:t>
-            </a:r>
-          </a:p>
-          <a:p>
-            <a:pPr algn="l">
-              <a:lnSpc>
-                <a:spcPct val="150000"/>
-              </a:lnSpc>
-            </a:pPr>
-            <a:r>
-              <a:rPr sz="1800" b="1">
-                <a:solidFill>
-                  <a:srgbClr val="3EE6C5"/>
-                </a:solidFill>
-                <a:latin typeface="Calibri"/>
-              </a:rPr>
-              <a:t>▸  </a:t>
-            </a:r>
-            <a:r>
-              <a:rPr sz="1800">
-                <a:solidFill>
-                  <a:srgbClr val="FFFFFF"/>
-                </a:solidFill>
-                <a:latin typeface="Calibri"/>
-              </a:rPr>
-              <a:t>Staggered entry buys time, not safety; long-run equilibrium is unchanged</a:t>
-            </a:r>
-          </a:p>
-          <a:p>
-            <a:pPr algn="l">
-              <a:lnSpc>
-                <a:spcPct val="150000"/>
-              </a:lnSpc>
-            </a:pPr>
-            <a:r>
-              <a:rPr sz="1800" b="1">
-                <a:solidFill>
-                  <a:srgbClr val="3EE6C5"/>
-                </a:solidFill>
-                <a:latin typeface="Calibri"/>
-              </a:rPr>
-              <a:t>▸  </a:t>
-            </a:r>
-            <a:r>
-              <a:rPr sz="1800">
-                <a:solidFill>
-                  <a:srgbClr val="FFFFFF"/>
-                </a:solidFill>
-                <a:latin typeface="Calibri"/>
-              </a:rPr>
-              <a:t>A 9x acceleration means by the time politicians notice, it is already too late</a:t>
-            </a:r>
-          </a:p>
-        </p:txBody>
-      </p:sp>
-      <p:pic>
-        <p:nvPicPr>
-          <p:cNvPr id="5" name="Picture 4" descr="fig_scenario_compare.png"/>
-          <p:cNvPicPr>
-            <a:picLocks noChangeAspect="1"/>
-          </p:cNvPicPr>
-          <p:nvPr/>
-        </p:nvPicPr>
-        <p:blipFill>
-          <a:blip r:embed="rId2"/>
-          <a:stretch>
-            <a:fillRect/>
-          </a:stretch>
-        </p:blipFill>
-        <p:spPr>
-          <a:xfrm>
-            <a:off x="7700000" y="1700000"/>
-            <a:ext cx="5033333" cy="3714969"/>
-          </a:xfrm>
-          <a:prstGeom prst="rect">
-            <a:avLst/>
-          </a:prstGeom>
-        </p:spPr>
-      </p:pic>
+            <a:off x="700000" y="1800000"/>
+            <a:ext cx="11933333" cy="400000"/>
+          </a:xfrm>
+          <a:prstGeom prst="rect">
+            <a:avLst/>
+          </a:prstGeom>
+          <a:noFill/>
+        </p:spPr>
+        <p:txBody>
+          <a:bodyPr wrap="square" lIns="0" rIns="0" tIns="0" bIns="0" anchor="t">
+            <a:spAutoFit/>
+          </a:bodyPr>
+          <a:lstStyle/>
+          <a:p>
+            <a:pPr algn="l"/>
+            <a:r>
+              <a:rPr sz="1100" b="1" i="0">
+                <a:solidFill>
+                  <a:srgbClr val="C15F3C"/>
+                </a:solidFill>
+                <a:latin typeface="Helvetica Neue"/>
+              </a:rPr>
+              <a:t>THREE TAKEAWAYS</a:t>
+            </a:r>
+          </a:p>
+        </p:txBody>
+      </p:sp>
+      <p:sp>
+        <p:nvSpPr>
+          <p:cNvPr id="5" name="TextBox 4"/>
+          <p:cNvSpPr txBox="1"/>
+          <p:nvPr/>
+        </p:nvSpPr>
+        <p:spPr>
+          <a:xfrm>
+            <a:off x="700000" y="2300000"/>
+            <a:ext cx="550000" cy="600000"/>
+          </a:xfrm>
+          <a:prstGeom prst="rect">
+            <a:avLst/>
+          </a:prstGeom>
+          <a:noFill/>
+        </p:spPr>
+        <p:txBody>
+          <a:bodyPr wrap="square" lIns="0" rIns="0" tIns="0" bIns="0" anchor="t">
+            <a:spAutoFit/>
+          </a:bodyPr>
+          <a:lstStyle/>
+          <a:p>
+            <a:pPr algn="l"/>
+            <a:r>
+              <a:rPr sz="3200" b="1" i="0">
+                <a:solidFill>
+                  <a:srgbClr val="C15F3C"/>
+                </a:solidFill>
+                <a:latin typeface="Georgia"/>
+              </a:rPr>
+              <a:t>1</a:t>
+            </a:r>
+          </a:p>
+        </p:txBody>
+      </p:sp>
       <p:sp>
         <p:nvSpPr>
           <p:cNvPr id="6" name="TextBox 5"/>
@@ -5810,29 +6780,29 @@
         </p:nvSpPr>
         <p:spPr>
           <a:xfrm>
-            <a:off x="7700000" y="5464969"/>
-            <a:ext cx="5033333" cy="400000"/>
-          </a:xfrm>
-          <a:prstGeom prst="rect">
-            <a:avLst/>
-          </a:prstGeom>
-          <a:noFill/>
-        </p:spPr>
-        <p:txBody>
-          <a:bodyPr wrap="square" lIns="0" rIns="0" tIns="0" bIns="0" anchor="t">
-            <a:spAutoFit/>
-          </a:bodyPr>
-          <a:lstStyle/>
-          <a:p>
-            <a:pPr algn="ctr"/>
-            <a:r>
-              <a:rPr sz="1200" b="0">
-                <a:solidFill>
-                  <a:srgbClr val="B6C2D9"/>
-                </a:solidFill>
-                <a:latin typeface="Calibri"/>
-              </a:rPr>
-              <a:t>Scenario comparison (A/B/C/D)</a:t>
+            <a:off x="1400000" y="2370000"/>
+            <a:ext cx="11133333" cy="600000"/>
+          </a:xfrm>
+          <a:prstGeom prst="rect">
+            <a:avLst/>
+          </a:prstGeom>
+          <a:noFill/>
+        </p:spPr>
+        <p:txBody>
+          <a:bodyPr wrap="square" lIns="0" rIns="0" tIns="0" bIns="0" anchor="t">
+            <a:spAutoFit/>
+          </a:bodyPr>
+          <a:lstStyle/>
+          <a:p>
+            <a:pPr algn="l"/>
+            <a:r>
+              <a:rPr sz="2000" b="1" i="0">
+                <a:solidFill>
+                  <a:srgbClr val="1F1E1D"/>
+                </a:solidFill>
+                <a:latin typeface="Georgia"/>
+              </a:rPr>
+              <a:t>Unregulated AI growth collapses shared basins on a 5 to 8 year timeline.</a:t>
             </a:r>
           </a:p>
         </p:txBody>
@@ -5845,8 +6815,288 @@
         </p:nvSpPr>
         <p:spPr>
           <a:xfrm>
-            <a:off x="11133333" y="7050000"/>
-            <a:ext cx="1800000" cy="350000"/>
+            <a:off x="700000" y="3100000"/>
+            <a:ext cx="550000" cy="600000"/>
+          </a:xfrm>
+          <a:prstGeom prst="rect">
+            <a:avLst/>
+          </a:prstGeom>
+          <a:noFill/>
+        </p:spPr>
+        <p:txBody>
+          <a:bodyPr wrap="square" lIns="0" rIns="0" tIns="0" bIns="0" anchor="t">
+            <a:spAutoFit/>
+          </a:bodyPr>
+          <a:lstStyle/>
+          <a:p>
+            <a:pPr algn="l"/>
+            <a:r>
+              <a:rPr sz="3200" b="1" i="0">
+                <a:solidFill>
+                  <a:srgbClr val="C15F3C"/>
+                </a:solidFill>
+                <a:latin typeface="Georgia"/>
+              </a:rPr>
+              <a:t>2</a:t>
+            </a:r>
+          </a:p>
+        </p:txBody>
+      </p:sp>
+      <p:sp>
+        <p:nvSpPr>
+          <p:cNvPr id="8" name="TextBox 7"/>
+          <p:cNvSpPr txBox="1"/>
+          <p:nvPr/>
+        </p:nvSpPr>
+        <p:spPr>
+          <a:xfrm>
+            <a:off x="1400000" y="3170000"/>
+            <a:ext cx="11133333" cy="600000"/>
+          </a:xfrm>
+          <a:prstGeom prst="rect">
+            <a:avLst/>
+          </a:prstGeom>
+          <a:noFill/>
+        </p:spPr>
+        <p:txBody>
+          <a:bodyPr wrap="square" lIns="0" rIns="0" tIns="0" bIns="0" anchor="t">
+            <a:spAutoFit/>
+          </a:bodyPr>
+          <a:lstStyle/>
+          <a:p>
+            <a:pPr algn="l"/>
+            <a:r>
+              <a:rPr sz="2000" b="1" i="0">
+                <a:solidFill>
+                  <a:srgbClr val="1F1E1D"/>
+                </a:solidFill>
+                <a:latin typeface="Georgia"/>
+              </a:rPr>
+              <a:t>The collapse is nonlinear. Late warnings will not help.</a:t>
+            </a:r>
+          </a:p>
+        </p:txBody>
+      </p:sp>
+      <p:sp>
+        <p:nvSpPr>
+          <p:cNvPr id="9" name="TextBox 8"/>
+          <p:cNvSpPr txBox="1"/>
+          <p:nvPr/>
+        </p:nvSpPr>
+        <p:spPr>
+          <a:xfrm>
+            <a:off x="700000" y="3900000"/>
+            <a:ext cx="550000" cy="600000"/>
+          </a:xfrm>
+          <a:prstGeom prst="rect">
+            <a:avLst/>
+          </a:prstGeom>
+          <a:noFill/>
+        </p:spPr>
+        <p:txBody>
+          <a:bodyPr wrap="square" lIns="0" rIns="0" tIns="0" bIns="0" anchor="t">
+            <a:spAutoFit/>
+          </a:bodyPr>
+          <a:lstStyle/>
+          <a:p>
+            <a:pPr algn="l"/>
+            <a:r>
+              <a:rPr sz="3200" b="1" i="0">
+                <a:solidFill>
+                  <a:srgbClr val="C15F3C"/>
+                </a:solidFill>
+                <a:latin typeface="Georgia"/>
+              </a:rPr>
+              <a:t>3</a:t>
+            </a:r>
+          </a:p>
+        </p:txBody>
+      </p:sp>
+      <p:sp>
+        <p:nvSpPr>
+          <p:cNvPr id="10" name="TextBox 9"/>
+          <p:cNvSpPr txBox="1"/>
+          <p:nvPr/>
+        </p:nvSpPr>
+        <p:spPr>
+          <a:xfrm>
+            <a:off x="1400000" y="3970000"/>
+            <a:ext cx="11133333" cy="600000"/>
+          </a:xfrm>
+          <a:prstGeom prst="rect">
+            <a:avLst/>
+          </a:prstGeom>
+          <a:noFill/>
+        </p:spPr>
+        <p:txBody>
+          <a:bodyPr wrap="square" lIns="0" rIns="0" tIns="0" bIns="0" anchor="t">
+            <a:spAutoFit/>
+          </a:bodyPr>
+          <a:lstStyle/>
+          <a:p>
+            <a:pPr algn="l"/>
+            <a:r>
+              <a:rPr sz="2000" b="1" i="0">
+                <a:solidFill>
+                  <a:srgbClr val="1F1E1D"/>
+                </a:solidFill>
+                <a:latin typeface="Georgia"/>
+              </a:rPr>
+              <a:t>Proactive caps work. Reactive caps do not.</a:t>
+            </a:r>
+          </a:p>
+        </p:txBody>
+      </p:sp>
+      <p:sp>
+        <p:nvSpPr>
+          <p:cNvPr id="11" name="TextBox 10"/>
+          <p:cNvSpPr txBox="1"/>
+          <p:nvPr/>
+        </p:nvSpPr>
+        <p:spPr>
+          <a:xfrm>
+            <a:off x="700000" y="5050000"/>
+            <a:ext cx="11933333" cy="1000000"/>
+          </a:xfrm>
+          <a:prstGeom prst="rect">
+            <a:avLst/>
+          </a:prstGeom>
+          <a:noFill/>
+        </p:spPr>
+        <p:txBody>
+          <a:bodyPr wrap="square" lIns="0" rIns="0" tIns="0" bIns="0" anchor="t">
+            <a:spAutoFit/>
+          </a:bodyPr>
+          <a:lstStyle/>
+          <a:p>
+            <a:pPr algn="l"/>
+            <a:r>
+              <a:rPr sz="2000" b="0" i="1">
+                <a:solidFill>
+                  <a:srgbClr val="C15F3C"/>
+                </a:solidFill>
+                <a:latin typeface="Georgia"/>
+              </a:rPr>
+              <a:t>"If you want to keep the water on, you have to cap the draw before anyone asks you to."</a:t>
+            </a:r>
+          </a:p>
+        </p:txBody>
+      </p:sp>
+      <p:sp>
+        <p:nvSpPr>
+          <p:cNvPr id="12" name="TextBox 11"/>
+          <p:cNvSpPr txBox="1"/>
+          <p:nvPr/>
+        </p:nvSpPr>
+        <p:spPr>
+          <a:xfrm>
+            <a:off x="700000" y="6200000"/>
+            <a:ext cx="11933333" cy="400000"/>
+          </a:xfrm>
+          <a:prstGeom prst="rect">
+            <a:avLst/>
+          </a:prstGeom>
+          <a:noFill/>
+        </p:spPr>
+        <p:txBody>
+          <a:bodyPr wrap="square" lIns="0" rIns="0" tIns="0" bIns="0" anchor="t">
+            <a:spAutoFit/>
+          </a:bodyPr>
+          <a:lstStyle/>
+          <a:p>
+            <a:pPr algn="l"/>
+            <a:r>
+              <a:rPr sz="1100" b="0" i="0">
+                <a:solidFill>
+                  <a:srgbClr val="605E5B"/>
+                </a:solidFill>
+                <a:latin typeface="Helvetica Neue"/>
+              </a:rPr>
+              <a:t>Code and data: github.com/cup-noodlehS/ABM-project</a:t>
+            </a:r>
+          </a:p>
+        </p:txBody>
+      </p:sp>
+      <p:sp>
+        <p:nvSpPr>
+          <p:cNvPr id="13" name="TextBox 12"/>
+          <p:cNvSpPr txBox="1"/>
+          <p:nvPr/>
+        </p:nvSpPr>
+        <p:spPr>
+          <a:xfrm>
+            <a:off x="700000" y="6600000"/>
+            <a:ext cx="11933333" cy="400000"/>
+          </a:xfrm>
+          <a:prstGeom prst="rect">
+            <a:avLst/>
+          </a:prstGeom>
+          <a:noFill/>
+        </p:spPr>
+        <p:txBody>
+          <a:bodyPr wrap="square" lIns="0" rIns="0" tIns="0" bIns="0" anchor="t">
+            <a:spAutoFit/>
+          </a:bodyPr>
+          <a:lstStyle/>
+          <a:p>
+            <a:pPr algn="l"/>
+            <a:r>
+              <a:rPr sz="1600" b="1" i="0">
+                <a:solidFill>
+                  <a:srgbClr val="1F1E1D"/>
+                </a:solidFill>
+                <a:latin typeface="Helvetica Neue"/>
+              </a:rPr>
+              <a:t>Thank you. Questions?</a:t>
+            </a:r>
+          </a:p>
+        </p:txBody>
+      </p:sp>
+      <p:sp>
+        <p:nvSpPr>
+          <p:cNvPr id="14" name="TextBox 13"/>
+          <p:cNvSpPr txBox="1"/>
+          <p:nvPr/>
+        </p:nvSpPr>
+        <p:spPr>
+          <a:xfrm>
+            <a:off x="700000" y="7120000"/>
+            <a:ext cx="2500000" cy="300000"/>
+          </a:xfrm>
+          <a:prstGeom prst="rect">
+            <a:avLst/>
+          </a:prstGeom>
+          <a:noFill/>
+        </p:spPr>
+        <p:txBody>
+          <a:bodyPr wrap="square" lIns="0" rIns="0" tIns="0" bIns="0" anchor="t">
+            <a:spAutoFit/>
+          </a:bodyPr>
+          <a:lstStyle/>
+          <a:p>
+            <a:pPr algn="l"/>
+            <a:r>
+              <a:rPr sz="900" b="0" i="0">
+                <a:solidFill>
+                  <a:srgbClr val="605E5B"/>
+                </a:solidFill>
+                <a:latin typeface="Helvetica Neue"/>
+              </a:rPr>
+              <a:t>PARCHED</a:t>
+            </a:r>
+          </a:p>
+        </p:txBody>
+      </p:sp>
+      <p:sp>
+        <p:nvSpPr>
+          <p:cNvPr id="15" name="TextBox 14"/>
+          <p:cNvSpPr txBox="1"/>
+          <p:nvPr/>
+        </p:nvSpPr>
+        <p:spPr>
+          <a:xfrm>
+            <a:off x="11133333" y="7120000"/>
+            <a:ext cx="1500000" cy="300000"/>
           </a:xfrm>
           <a:prstGeom prst="rect">
             <a:avLst/>
@@ -5861,13 +7111,13 @@
           <a:p>
             <a:pPr algn="r"/>
             <a:r>
-              <a:rPr sz="1000" b="0">
-                <a:solidFill>
-                  <a:srgbClr val="B6C2D9"/>
-                </a:solidFill>
-                <a:latin typeface="Calibri"/>
-              </a:rPr>
-              <a:t>PARCHED   |   12 / 14</a:t>
+              <a:rPr sz="900" b="0" i="0">
+                <a:solidFill>
+                  <a:srgbClr val="605E5B"/>
+                </a:solidFill>
+                <a:latin typeface="Helvetica Neue"/>
+              </a:rPr>
+              <a:t>14 / 14</a:t>
             </a:r>
           </a:p>
         </p:txBody>
@@ -5880,13 +7130,13 @@
 </p:sld>
 </file>
 
-<file path=ppt/slides/slide13.xml><?xml version="1.0" encoding="utf-8"?>
+<file path=ppt/slides/slide2.xml><?xml version="1.0" encoding="utf-8"?>
 <p:sld xmlns:a="http://schemas.openxmlformats.org/drawingml/2006/main" xmlns:p="http://schemas.openxmlformats.org/presentationml/2006/main" xmlns:r="http://schemas.openxmlformats.org/officeDocument/2006/relationships">
   <p:cSld>
     <p:bg>
       <p:bgPr>
         <a:solidFill>
-          <a:srgbClr val="0B1426"/>
+          <a:srgbClr val="FAF9F5"/>
         </a:solidFill>
         <a:effectLst/>
       </p:bgPr>
@@ -5906,14 +7156,14 @@
         </p:nvSpPr>
         <p:spPr>
           <a:xfrm>
-            <a:off x="0" y="0"/>
-            <a:ext cx="110000" cy="7500000"/>
+            <a:off x="700000" y="705740"/>
+            <a:ext cx="110000" cy="110000"/>
           </a:xfrm>
           <a:prstGeom prst="rect">
             <a:avLst/>
           </a:prstGeom>
           <a:solidFill>
-            <a:srgbClr val="3EE6C5"/>
+            <a:srgbClr val="C15F3C"/>
           </a:solidFill>
           <a:ln>
             <a:noFill/>
@@ -5949,8 +7199,8 @@
         </p:nvSpPr>
         <p:spPr>
           <a:xfrm>
-            <a:off x="700000" y="500000"/>
-            <a:ext cx="11933333" cy="800000"/>
+            <a:off x="990000" y="500000"/>
+            <a:ext cx="11643333" cy="900000"/>
           </a:xfrm>
           <a:prstGeom prst="rect">
             <a:avLst/>
@@ -5965,13 +7215,13 @@
           <a:p>
             <a:pPr algn="l"/>
             <a:r>
-              <a:rPr sz="3600" b="1">
-                <a:solidFill>
-                  <a:srgbClr val="FFFFFF"/>
-                </a:solidFill>
-                <a:latin typeface="Calibri"/>
-              </a:rPr>
-              <a:t>Limitations and Future Work</a:t>
+              <a:rPr sz="3600" b="1" i="0">
+                <a:solidFill>
+                  <a:srgbClr val="1F1E1D"/>
+                </a:solidFill>
+                <a:latin typeface="Georgia"/>
+              </a:rPr>
+              <a:t>The Hook</a:t>
             </a:r>
           </a:p>
         </p:txBody>
@@ -5984,8 +7234,8 @@
         </p:nvSpPr>
         <p:spPr>
           <a:xfrm>
-            <a:off x="700000" y="1600000"/>
-            <a:ext cx="6000000" cy="400000"/>
+            <a:off x="700000" y="2000000"/>
+            <a:ext cx="11933333" cy="1500000"/>
           </a:xfrm>
           <a:prstGeom prst="rect">
             <a:avLst/>
@@ -6000,13 +7250,13 @@
           <a:p>
             <a:pPr algn="l"/>
             <a:r>
-              <a:rPr sz="1400" b="1">
-                <a:solidFill>
-                  <a:srgbClr val="E6A532"/>
-                </a:solidFill>
-                <a:latin typeface="Calibri"/>
-              </a:rPr>
-              <a:t>LIMITATIONS</a:t>
+              <a:rPr sz="7200" b="1" i="0">
+                <a:solidFill>
+                  <a:srgbClr val="C15F3C"/>
+                </a:solidFill>
+                <a:latin typeface="Georgia"/>
+              </a:rPr>
+              <a:t>3 to 5 million liters</a:t>
             </a:r>
           </a:p>
         </p:txBody>
@@ -6019,167 +7269,29 @@
         </p:nvSpPr>
         <p:spPr>
           <a:xfrm>
-            <a:off x="700000" y="2050000"/>
-            <a:ext cx="6000000" cy="4500000"/>
-          </a:xfrm>
-          <a:prstGeom prst="rect">
-            <a:avLst/>
-          </a:prstGeom>
-          <a:noFill/>
-        </p:spPr>
-        <p:txBody>
-          <a:bodyPr wrap="square" lIns="0" rIns="0" tIns="0" bIns="0" anchor="t">
-            <a:spAutoFit/>
-          </a:bodyPr>
-          <a:lstStyle/>
-          <a:p>
-            <a:pPr algn="l">
-              <a:lnSpc>
-                <a:spcPct val="130000"/>
-              </a:lnSpc>
-            </a:pPr>
-            <a:r>
-              <a:rPr sz="1600" b="1">
-                <a:solidFill>
-                  <a:srgbClr val="E6A532"/>
-                </a:solidFill>
-                <a:latin typeface="Calibri"/>
-              </a:rPr>
-              <a:t>▸  </a:t>
-            </a:r>
-            <a:r>
-              <a:rPr sz="1600">
-                <a:solidFill>
-                  <a:srgbClr val="FFFFFF"/>
-                </a:solidFill>
-                <a:latin typeface="Calibri"/>
-              </a:rPr>
-              <a:t>Synthetic parameters (calibrated, not validated against a specific basin)</a:t>
-            </a:r>
-          </a:p>
-          <a:p>
-            <a:pPr algn="l">
-              <a:lnSpc>
-                <a:spcPct val="130000"/>
-              </a:lnSpc>
-            </a:pPr>
-            <a:r>
-              <a:rPr sz="1600" b="1">
-                <a:solidFill>
-                  <a:srgbClr val="E6A532"/>
-                </a:solidFill>
-                <a:latin typeface="Calibri"/>
-              </a:rPr>
-              <a:t>▸  </a:t>
-            </a:r>
-            <a:r>
-              <a:rPr sz="1600">
-                <a:solidFill>
-                  <a:srgbClr val="FFFFFF"/>
-                </a:solidFill>
-                <a:latin typeface="Calibri"/>
-              </a:rPr>
-              <a:t>No climate-change drift</a:t>
-            </a:r>
-          </a:p>
-          <a:p>
-            <a:pPr algn="l">
-              <a:lnSpc>
-                <a:spcPct val="130000"/>
-              </a:lnSpc>
-            </a:pPr>
-            <a:r>
-              <a:rPr sz="1600" b="1">
-                <a:solidFill>
-                  <a:srgbClr val="E6A532"/>
-                </a:solidFill>
-                <a:latin typeface="Calibri"/>
-              </a:rPr>
-              <a:t>▸  </a:t>
-            </a:r>
-            <a:r>
-              <a:rPr sz="1600">
-                <a:solidFill>
-                  <a:srgbClr val="FFFFFF"/>
-                </a:solidFill>
-                <a:latin typeface="Calibri"/>
-              </a:rPr>
-              <a:t>Single basin, no inter-basin trade</a:t>
-            </a:r>
-          </a:p>
-          <a:p>
-            <a:pPr algn="l">
-              <a:lnSpc>
-                <a:spcPct val="130000"/>
-              </a:lnSpc>
-            </a:pPr>
-            <a:r>
-              <a:rPr sz="1600" b="1">
-                <a:solidFill>
-                  <a:srgbClr val="E6A532"/>
-                </a:solidFill>
-                <a:latin typeface="Calibri"/>
-              </a:rPr>
-              <a:t>▸  </a:t>
-            </a:r>
-            <a:r>
-              <a:rPr sz="1600">
-                <a:solidFill>
-                  <a:srgbClr val="FFFFFF"/>
-                </a:solidFill>
-                <a:latin typeface="Calibri"/>
-              </a:rPr>
-              <a:t>Regulator has perfect observability after delay</a:t>
-            </a:r>
-          </a:p>
-          <a:p>
-            <a:pPr algn="l">
-              <a:lnSpc>
-                <a:spcPct val="130000"/>
-              </a:lnSpc>
-            </a:pPr>
-            <a:r>
-              <a:rPr sz="1600" b="1">
-                <a:solidFill>
-                  <a:srgbClr val="E6A532"/>
-                </a:solidFill>
-                <a:latin typeface="Calibri"/>
-              </a:rPr>
-              <a:t>▸  </a:t>
-            </a:r>
-            <a:r>
-              <a:rPr sz="1600">
-                <a:solidFill>
-                  <a:srgbClr val="FFFFFF"/>
-                </a:solidFill>
-                <a:latin typeface="Calibri"/>
-              </a:rPr>
-              <a:t>Demand is exogenous</a:t>
-            </a:r>
-          </a:p>
-          <a:p>
-            <a:pPr algn="l">
-              <a:lnSpc>
-                <a:spcPct val="130000"/>
-              </a:lnSpc>
-            </a:pPr>
-            <a:r>
-              <a:rPr sz="1600" b="1">
-                <a:solidFill>
-                  <a:srgbClr val="E6A532"/>
-                </a:solidFill>
-                <a:latin typeface="Calibri"/>
-              </a:rPr>
-              <a:t>▸  </a:t>
-            </a:r>
-            <a:r>
-              <a:rPr sz="1600">
-                <a:solidFill>
-                  <a:srgbClr val="FFFFFF"/>
-                </a:solidFill>
-                <a:latin typeface="Calibri"/>
-              </a:rPr>
-              <a:t>Ag yield loss simplified: below threshold = dead</a:t>
+            <a:off x="700000" y="3500000"/>
+            <a:ext cx="11933333" cy="500000"/>
+          </a:xfrm>
+          <a:prstGeom prst="rect">
+            <a:avLst/>
+          </a:prstGeom>
+          <a:noFill/>
+        </p:spPr>
+        <p:txBody>
+          <a:bodyPr wrap="square" lIns="0" rIns="0" tIns="0" bIns="0" anchor="t">
+            <a:spAutoFit/>
+          </a:bodyPr>
+          <a:lstStyle/>
+          <a:p>
+            <a:pPr algn="l"/>
+            <a:r>
+              <a:rPr sz="2200" b="0" i="1">
+                <a:solidFill>
+                  <a:srgbClr val="1F1E1D"/>
+                </a:solidFill>
+                <a:latin typeface="Georgia"/>
+              </a:rPr>
+              <a:t>per day, per hyperscale data center.</a:t>
             </a:r>
           </a:p>
         </p:txBody>
@@ -6192,8 +7304,8 @@
         </p:nvSpPr>
         <p:spPr>
           <a:xfrm>
-            <a:off x="7100000" y="1600000"/>
-            <a:ext cx="5700000" cy="400000"/>
+            <a:off x="700000" y="4700000"/>
+            <a:ext cx="11933333" cy="700000"/>
           </a:xfrm>
           <a:prstGeom prst="rect">
             <a:avLst/>
@@ -6208,13 +7320,13 @@
           <a:p>
             <a:pPr algn="l"/>
             <a:r>
-              <a:rPr sz="1400" b="1">
-                <a:solidFill>
-                  <a:srgbClr val="3EE6C5"/>
-                </a:solidFill>
-                <a:latin typeface="Calibri"/>
-              </a:rPr>
-              <a:t>FUTURE WORK</a:t>
+              <a:rPr sz="2200" b="1" i="0">
+                <a:solidFill>
+                  <a:srgbClr val="1F1E1D"/>
+                </a:solidFill>
+                <a:latin typeface="Helvetica Neue"/>
+              </a:rPr>
+              <a:t>And nobody is modeling the basin-level collisions.</a:t>
             </a:r>
           </a:p>
         </p:txBody>
@@ -6227,167 +7339,29 @@
         </p:nvSpPr>
         <p:spPr>
           <a:xfrm>
-            <a:off x="7100000" y="2050000"/>
-            <a:ext cx="5700000" cy="4500000"/>
-          </a:xfrm>
-          <a:prstGeom prst="rect">
-            <a:avLst/>
-          </a:prstGeom>
-          <a:noFill/>
-        </p:spPr>
-        <p:txBody>
-          <a:bodyPr wrap="square" lIns="0" rIns="0" tIns="0" bIns="0" anchor="t">
-            <a:spAutoFit/>
-          </a:bodyPr>
-          <a:lstStyle/>
-          <a:p>
-            <a:pPr algn="l">
-              <a:lnSpc>
-                <a:spcPct val="130000"/>
-              </a:lnSpc>
-            </a:pPr>
-            <a:r>
-              <a:rPr sz="1600" b="1">
-                <a:solidFill>
-                  <a:srgbClr val="3EE6C5"/>
-                </a:solidFill>
-                <a:latin typeface="Calibri"/>
-              </a:rPr>
-              <a:t>▸  </a:t>
-            </a:r>
-            <a:r>
-              <a:rPr sz="1600">
-                <a:solidFill>
-                  <a:srgbClr val="FFFFFF"/>
-                </a:solidFill>
-                <a:latin typeface="Calibri"/>
-              </a:rPr>
-              <a:t>Inter-basin water trade</a:t>
-            </a:r>
-          </a:p>
-          <a:p>
-            <a:pPr algn="l">
-              <a:lnSpc>
-                <a:spcPct val="130000"/>
-              </a:lnSpc>
-            </a:pPr>
-            <a:r>
-              <a:rPr sz="1600" b="1">
-                <a:solidFill>
-                  <a:srgbClr val="3EE6C5"/>
-                </a:solidFill>
-                <a:latin typeface="Calibri"/>
-              </a:rPr>
-              <a:t>▸  </a:t>
-            </a:r>
-            <a:r>
-              <a:rPr sz="1600">
-                <a:solidFill>
-                  <a:srgbClr val="FFFFFF"/>
-                </a:solidFill>
-                <a:latin typeface="Calibri"/>
-              </a:rPr>
-              <a:t>Climate-change scenarios (drift in recharge)</a:t>
-            </a:r>
-          </a:p>
-          <a:p>
-            <a:pPr algn="l">
-              <a:lnSpc>
-                <a:spcPct val="130000"/>
-              </a:lnSpc>
-            </a:pPr>
-            <a:r>
-              <a:rPr sz="1600" b="1">
-                <a:solidFill>
-                  <a:srgbClr val="3EE6C5"/>
-                </a:solidFill>
-                <a:latin typeface="Calibri"/>
-              </a:rPr>
-              <a:t>▸  </a:t>
-            </a:r>
-            <a:r>
-              <a:rPr sz="1600">
-                <a:solidFill>
-                  <a:srgbClr val="FFFFFF"/>
-                </a:solidFill>
-                <a:latin typeface="Calibri"/>
-              </a:rPr>
-              <a:t>Real permit-process modeling</a:t>
-            </a:r>
-          </a:p>
-          <a:p>
-            <a:pPr algn="l">
-              <a:lnSpc>
-                <a:spcPct val="130000"/>
-              </a:lnSpc>
-            </a:pPr>
-            <a:r>
-              <a:rPr sz="1600" b="1">
-                <a:solidFill>
-                  <a:srgbClr val="3EE6C5"/>
-                </a:solidFill>
-                <a:latin typeface="Calibri"/>
-              </a:rPr>
-              <a:t>▸  </a:t>
-            </a:r>
-            <a:r>
-              <a:rPr sz="1600">
-                <a:solidFill>
-                  <a:srgbClr val="FFFFFF"/>
-                </a:solidFill>
-                <a:latin typeface="Calibri"/>
-              </a:rPr>
-              <a:t>Inter-operator contestation and bidding</a:t>
-            </a:r>
-          </a:p>
-          <a:p>
-            <a:pPr algn="l">
-              <a:lnSpc>
-                <a:spcPct val="130000"/>
-              </a:lnSpc>
-            </a:pPr>
-            <a:r>
-              <a:rPr sz="1600" b="1">
-                <a:solidFill>
-                  <a:srgbClr val="3EE6C5"/>
-                </a:solidFill>
-                <a:latin typeface="Calibri"/>
-              </a:rPr>
-              <a:t>▸  </a:t>
-            </a:r>
-            <a:r>
-              <a:rPr sz="1600">
-                <a:solidFill>
-                  <a:srgbClr val="FFFFFF"/>
-                </a:solidFill>
-                <a:latin typeface="Calibri"/>
-              </a:rPr>
-              <a:t>Endogenous demand response (price elasticity)</a:t>
-            </a:r>
-          </a:p>
-          <a:p>
-            <a:pPr algn="l">
-              <a:lnSpc>
-                <a:spcPct val="130000"/>
-              </a:lnSpc>
-            </a:pPr>
-            <a:r>
-              <a:rPr sz="1600" b="1">
-                <a:solidFill>
-                  <a:srgbClr val="3EE6C5"/>
-                </a:solidFill>
-                <a:latin typeface="Calibri"/>
-              </a:rPr>
-              <a:t>▸  </a:t>
-            </a:r>
-            <a:r>
-              <a:rPr sz="1600">
-                <a:solidFill>
-                  <a:srgbClr val="FFFFFF"/>
-                </a:solidFill>
-                <a:latin typeface="Calibri"/>
-              </a:rPr>
-              <a:t>Calibrate to a real candidate basin</a:t>
+            <a:off x="700000" y="5500000"/>
+            <a:ext cx="11933333" cy="500000"/>
+          </a:xfrm>
+          <a:prstGeom prst="rect">
+            <a:avLst/>
+          </a:prstGeom>
+          <a:noFill/>
+        </p:spPr>
+        <p:txBody>
+          <a:bodyPr wrap="square" lIns="0" rIns="0" tIns="0" bIns="0" anchor="t">
+            <a:spAutoFit/>
+          </a:bodyPr>
+          <a:lstStyle/>
+          <a:p>
+            <a:pPr algn="l"/>
+            <a:r>
+              <a:rPr sz="1000" b="0" i="0">
+                <a:solidFill>
+                  <a:srgbClr val="605E5B"/>
+                </a:solidFill>
+                <a:latin typeface="Helvetica Neue"/>
+              </a:rPr>
+              <a:t>Source: Li et al. (2023), "Making AI Less Thirsty."</a:t>
             </a:r>
           </a:p>
         </p:txBody>
@@ -6400,8 +7374,43 @@
         </p:nvSpPr>
         <p:spPr>
           <a:xfrm>
-            <a:off x="11133333" y="7050000"/>
-            <a:ext cx="1800000" cy="350000"/>
+            <a:off x="700000" y="7120000"/>
+            <a:ext cx="2500000" cy="300000"/>
+          </a:xfrm>
+          <a:prstGeom prst="rect">
+            <a:avLst/>
+          </a:prstGeom>
+          <a:noFill/>
+        </p:spPr>
+        <p:txBody>
+          <a:bodyPr wrap="square" lIns="0" rIns="0" tIns="0" bIns="0" anchor="t">
+            <a:spAutoFit/>
+          </a:bodyPr>
+          <a:lstStyle/>
+          <a:p>
+            <a:pPr algn="l"/>
+            <a:r>
+              <a:rPr sz="900" b="0" i="0">
+                <a:solidFill>
+                  <a:srgbClr val="605E5B"/>
+                </a:solidFill>
+                <a:latin typeface="Helvetica Neue"/>
+              </a:rPr>
+              <a:t>PARCHED</a:t>
+            </a:r>
+          </a:p>
+        </p:txBody>
+      </p:sp>
+      <p:sp>
+        <p:nvSpPr>
+          <p:cNvPr id="9" name="TextBox 8"/>
+          <p:cNvSpPr txBox="1"/>
+          <p:nvPr/>
+        </p:nvSpPr>
+        <p:spPr>
+          <a:xfrm>
+            <a:off x="11133333" y="7120000"/>
+            <a:ext cx="1500000" cy="300000"/>
           </a:xfrm>
           <a:prstGeom prst="rect">
             <a:avLst/>
@@ -6416,13 +7425,13 @@
           <a:p>
             <a:pPr algn="r"/>
             <a:r>
-              <a:rPr sz="1000" b="0">
-                <a:solidFill>
-                  <a:srgbClr val="B6C2D9"/>
-                </a:solidFill>
-                <a:latin typeface="Calibri"/>
-              </a:rPr>
-              <a:t>PARCHED   |   13 / 14</a:t>
+              <a:rPr sz="900" b="0" i="0">
+                <a:solidFill>
+                  <a:srgbClr val="605E5B"/>
+                </a:solidFill>
+                <a:latin typeface="Helvetica Neue"/>
+              </a:rPr>
+              <a:t>2 / 14</a:t>
             </a:r>
           </a:p>
         </p:txBody>
@@ -6435,13 +7444,13 @@
 </p:sld>
 </file>
 
-<file path=ppt/slides/slide14.xml><?xml version="1.0" encoding="utf-8"?>
+<file path=ppt/slides/slide3.xml><?xml version="1.0" encoding="utf-8"?>
 <p:sld xmlns:a="http://schemas.openxmlformats.org/drawingml/2006/main" xmlns:p="http://schemas.openxmlformats.org/presentationml/2006/main" xmlns:r="http://schemas.openxmlformats.org/officeDocument/2006/relationships">
   <p:cSld>
     <p:bg>
       <p:bgPr>
         <a:solidFill>
-          <a:srgbClr val="0B1426"/>
+          <a:srgbClr val="FAF9F5"/>
         </a:solidFill>
         <a:effectLst/>
       </p:bgPr>
@@ -6461,14 +7470,14 @@
         </p:nvSpPr>
         <p:spPr>
           <a:xfrm>
-            <a:off x="0" y="0"/>
-            <a:ext cx="110000" cy="7500000"/>
+            <a:off x="700000" y="705740"/>
+            <a:ext cx="110000" cy="110000"/>
           </a:xfrm>
           <a:prstGeom prst="rect">
             <a:avLst/>
           </a:prstGeom>
           <a:solidFill>
-            <a:srgbClr val="3EE6C5"/>
+            <a:srgbClr val="C15F3C"/>
           </a:solidFill>
           <a:ln>
             <a:noFill/>
@@ -6504,8 +7513,8 @@
         </p:nvSpPr>
         <p:spPr>
           <a:xfrm>
-            <a:off x="700000" y="500000"/>
-            <a:ext cx="11933333" cy="800000"/>
+            <a:off x="990000" y="500000"/>
+            <a:ext cx="11643333" cy="900000"/>
           </a:xfrm>
           <a:prstGeom prst="rect">
             <a:avLst/>
@@ -6520,13 +7529,13 @@
           <a:p>
             <a:pPr algn="l"/>
             <a:r>
-              <a:rPr sz="3600" b="1">
-                <a:solidFill>
-                  <a:srgbClr val="FFFFFF"/>
-                </a:solidFill>
-                <a:latin typeface="Calibri"/>
-              </a:rPr>
-              <a:t>Conclusion and Q&amp;A</a:t>
+              <a:rPr sz="3600" b="1" i="0">
+                <a:solidFill>
+                  <a:srgbClr val="1F1E1D"/>
+                </a:solidFill>
+                <a:latin typeface="Georgia"/>
+              </a:rPr>
+              <a:t>Problem and Research Question</a:t>
             </a:r>
           </a:p>
         </p:txBody>
@@ -6539,8 +7548,8 @@
         </p:nvSpPr>
         <p:spPr>
           <a:xfrm>
-            <a:off x="700000" y="1600000"/>
-            <a:ext cx="11933333" cy="400000"/>
+            <a:off x="700000" y="1700000"/>
+            <a:ext cx="5800000" cy="400000"/>
           </a:xfrm>
           <a:prstGeom prst="rect">
             <a:avLst/>
@@ -6555,33 +7564,382 @@
           <a:p>
             <a:pPr algn="l"/>
             <a:r>
-              <a:rPr sz="1400" b="1">
-                <a:solidFill>
-                  <a:srgbClr val="3EE6C5"/>
-                </a:solidFill>
-                <a:latin typeface="Calibri"/>
-              </a:rPr>
-              <a:t>THREE TAKEAWAYS</a:t>
-            </a:r>
-          </a:p>
-        </p:txBody>
-      </p:sp>
-      <p:sp>
-        <p:nvSpPr>
-          <p:cNvPr id="5" name="Oval 4"/>
+              <a:rPr sz="1100" b="1" i="0">
+                <a:solidFill>
+                  <a:srgbClr val="C15F3C"/>
+                </a:solidFill>
+                <a:latin typeface="Helvetica Neue"/>
+              </a:rPr>
+              <a:t>THE SETUP</a:t>
+            </a:r>
+          </a:p>
+        </p:txBody>
+      </p:sp>
+      <p:sp>
+        <p:nvSpPr>
+          <p:cNvPr id="5" name="TextBox 4"/>
+          <p:cNvSpPr txBox="1"/>
+          <p:nvPr/>
+        </p:nvSpPr>
+        <p:spPr>
+          <a:xfrm>
+            <a:off x="700000" y="2150000"/>
+            <a:ext cx="5800000" cy="3800000"/>
+          </a:xfrm>
+          <a:prstGeom prst="rect">
+            <a:avLst/>
+          </a:prstGeom>
+          <a:noFill/>
+        </p:spPr>
+        <p:txBody>
+          <a:bodyPr wrap="square" lIns="0" rIns="0" tIns="0" bIns="0" anchor="t">
+            <a:spAutoFit/>
+          </a:bodyPr>
+          <a:lstStyle/>
+          <a:p>
+            <a:pPr algn="l">
+              <a:lnSpc>
+                <a:spcPct val="145000"/>
+              </a:lnSpc>
+            </a:pPr>
+            <a:r>
+              <a:rPr sz="1600" b="1">
+                <a:solidFill>
+                  <a:srgbClr val="C15F3C"/>
+                </a:solidFill>
+                <a:latin typeface="Helvetica Neue"/>
+              </a:rPr>
+              <a:t>·  </a:t>
+            </a:r>
+            <a:r>
+              <a:rPr sz="1600">
+                <a:solidFill>
+                  <a:srgbClr val="1F1E1D"/>
+                </a:solidFill>
+                <a:latin typeface="Helvetica Neue"/>
+              </a:rPr>
+              <a:t>One shared freshwater basin (30 BL capacity)</a:t>
+            </a:r>
+          </a:p>
+          <a:p>
+            <a:pPr algn="l">
+              <a:lnSpc>
+                <a:spcPct val="145000"/>
+              </a:lnSpc>
+            </a:pPr>
+            <a:r>
+              <a:rPr sz="1600" b="1">
+                <a:solidFill>
+                  <a:srgbClr val="C15F3C"/>
+                </a:solidFill>
+                <a:latin typeface="Helvetica Neue"/>
+              </a:rPr>
+              <a:t>·  </a:t>
+            </a:r>
+            <a:r>
+              <a:rPr sz="1600">
+                <a:solidFill>
+                  <a:srgbClr val="1F1E1D"/>
+                </a:solidFill>
+                <a:latin typeface="Helvetica Neue"/>
+              </a:rPr>
+              <a:t>Multiple data centers competing for cooling water</a:t>
+            </a:r>
+          </a:p>
+          <a:p>
+            <a:pPr algn="l">
+              <a:lnSpc>
+                <a:spcPct val="145000"/>
+              </a:lnSpc>
+            </a:pPr>
+            <a:r>
+              <a:rPr sz="1600" b="1">
+                <a:solidFill>
+                  <a:srgbClr val="C15F3C"/>
+                </a:solidFill>
+                <a:latin typeface="Helvetica Neue"/>
+              </a:rPr>
+              <a:t>·  </a:t>
+            </a:r>
+            <a:r>
+              <a:rPr sz="1600">
+                <a:solidFill>
+                  <a:srgbClr val="1F1E1D"/>
+                </a:solidFill>
+                <a:latin typeface="Helvetica Neue"/>
+              </a:rPr>
+              <a:t>Residential demand (~100k people)</a:t>
+            </a:r>
+          </a:p>
+          <a:p>
+            <a:pPr algn="l">
+              <a:lnSpc>
+                <a:spcPct val="145000"/>
+              </a:lnSpc>
+            </a:pPr>
+            <a:r>
+              <a:rPr sz="1600" b="1">
+                <a:solidFill>
+                  <a:srgbClr val="C15F3C"/>
+                </a:solidFill>
+                <a:latin typeface="Helvetica Neue"/>
+              </a:rPr>
+              <a:t>·  </a:t>
+            </a:r>
+            <a:r>
+              <a:rPr sz="1600">
+                <a:solidFill>
+                  <a:srgbClr val="1F1E1D"/>
+                </a:solidFill>
+                <a:latin typeface="Helvetica Neue"/>
+              </a:rPr>
+              <a:t>Agriculture (rainfed and irrigated fields)</a:t>
+            </a:r>
+          </a:p>
+          <a:p>
+            <a:pPr algn="l">
+              <a:lnSpc>
+                <a:spcPct val="145000"/>
+              </a:lnSpc>
+            </a:pPr>
+            <a:r>
+              <a:rPr sz="1600" b="1">
+                <a:solidFill>
+                  <a:srgbClr val="C15F3C"/>
+                </a:solidFill>
+                <a:latin typeface="Helvetica Neue"/>
+              </a:rPr>
+              <a:t>·  </a:t>
+            </a:r>
+            <a:r>
+              <a:rPr sz="1600">
+                <a:solidFill>
+                  <a:srgbClr val="1F1E1D"/>
+                </a:solidFill>
+                <a:latin typeface="Helvetica Neue"/>
+              </a:rPr>
+              <a:t>A regulator with delayed observability</a:t>
+            </a:r>
+          </a:p>
+        </p:txBody>
+      </p:sp>
+      <p:sp>
+        <p:nvSpPr>
+          <p:cNvPr id="6" name="TextBox 5"/>
+          <p:cNvSpPr txBox="1"/>
+          <p:nvPr/>
+        </p:nvSpPr>
+        <p:spPr>
+          <a:xfrm>
+            <a:off x="7000000" y="1700000"/>
+            <a:ext cx="5800000" cy="400000"/>
+          </a:xfrm>
+          <a:prstGeom prst="rect">
+            <a:avLst/>
+          </a:prstGeom>
+          <a:noFill/>
+        </p:spPr>
+        <p:txBody>
+          <a:bodyPr wrap="square" lIns="0" rIns="0" tIns="0" bIns="0" anchor="t">
+            <a:spAutoFit/>
+          </a:bodyPr>
+          <a:lstStyle/>
+          <a:p>
+            <a:pPr algn="l"/>
+            <a:r>
+              <a:rPr sz="1100" b="1" i="0">
+                <a:solidFill>
+                  <a:srgbClr val="C15F3C"/>
+                </a:solidFill>
+                <a:latin typeface="Helvetica Neue"/>
+              </a:rPr>
+              <a:t>THE QUESTION</a:t>
+            </a:r>
+          </a:p>
+        </p:txBody>
+      </p:sp>
+      <p:sp>
+        <p:nvSpPr>
+          <p:cNvPr id="7" name="TextBox 6"/>
+          <p:cNvSpPr txBox="1"/>
+          <p:nvPr/>
+        </p:nvSpPr>
+        <p:spPr>
+          <a:xfrm>
+            <a:off x="7000000" y="2150000"/>
+            <a:ext cx="5800000" cy="2200000"/>
+          </a:xfrm>
+          <a:prstGeom prst="rect">
+            <a:avLst/>
+          </a:prstGeom>
+          <a:noFill/>
+        </p:spPr>
+        <p:txBody>
+          <a:bodyPr wrap="square" lIns="0" rIns="0" tIns="0" bIns="0" anchor="t">
+            <a:spAutoFit/>
+          </a:bodyPr>
+          <a:lstStyle/>
+          <a:p>
+            <a:pPr algn="l"/>
+            <a:r>
+              <a:rPr sz="2200" b="1" i="0">
+                <a:solidFill>
+                  <a:srgbClr val="1F1E1D"/>
+                </a:solidFill>
+                <a:latin typeface="Georgia"/>
+              </a:rPr>
+              <a:t>What happens when self-interested data centers, blind to each other, share a finite basin?</a:t>
+            </a:r>
+          </a:p>
+        </p:txBody>
+      </p:sp>
+      <p:sp>
+        <p:nvSpPr>
+          <p:cNvPr id="8" name="TextBox 7"/>
+          <p:cNvSpPr txBox="1"/>
+          <p:nvPr/>
+        </p:nvSpPr>
+        <p:spPr>
+          <a:xfrm>
+            <a:off x="7000000" y="4700000"/>
+            <a:ext cx="5800000" cy="1500000"/>
+          </a:xfrm>
+          <a:prstGeom prst="rect">
+            <a:avLst/>
+          </a:prstGeom>
+          <a:noFill/>
+        </p:spPr>
+        <p:txBody>
+          <a:bodyPr wrap="square" lIns="0" rIns="0" tIns="0" bIns="0" anchor="t">
+            <a:spAutoFit/>
+          </a:bodyPr>
+          <a:lstStyle/>
+          <a:p>
+            <a:pPr algn="l"/>
+            <a:r>
+              <a:rPr sz="1400" b="0" i="1">
+                <a:solidFill>
+                  <a:srgbClr val="605E5B"/>
+                </a:solidFill>
+                <a:latin typeface="Helvetica Neue"/>
+              </a:rPr>
+              <a:t>No coordination. No shared meter. No price signal until things break.</a:t>
+            </a:r>
+          </a:p>
+        </p:txBody>
+      </p:sp>
+      <p:sp>
+        <p:nvSpPr>
+          <p:cNvPr id="9" name="TextBox 8"/>
+          <p:cNvSpPr txBox="1"/>
+          <p:nvPr/>
+        </p:nvSpPr>
+        <p:spPr>
+          <a:xfrm>
+            <a:off x="700000" y="7120000"/>
+            <a:ext cx="2500000" cy="300000"/>
+          </a:xfrm>
+          <a:prstGeom prst="rect">
+            <a:avLst/>
+          </a:prstGeom>
+          <a:noFill/>
+        </p:spPr>
+        <p:txBody>
+          <a:bodyPr wrap="square" lIns="0" rIns="0" tIns="0" bIns="0" anchor="t">
+            <a:spAutoFit/>
+          </a:bodyPr>
+          <a:lstStyle/>
+          <a:p>
+            <a:pPr algn="l"/>
+            <a:r>
+              <a:rPr sz="900" b="0" i="0">
+                <a:solidFill>
+                  <a:srgbClr val="605E5B"/>
+                </a:solidFill>
+                <a:latin typeface="Helvetica Neue"/>
+              </a:rPr>
+              <a:t>PARCHED</a:t>
+            </a:r>
+          </a:p>
+        </p:txBody>
+      </p:sp>
+      <p:sp>
+        <p:nvSpPr>
+          <p:cNvPr id="10" name="TextBox 9"/>
+          <p:cNvSpPr txBox="1"/>
+          <p:nvPr/>
+        </p:nvSpPr>
+        <p:spPr>
+          <a:xfrm>
+            <a:off x="11133333" y="7120000"/>
+            <a:ext cx="1500000" cy="300000"/>
+          </a:xfrm>
+          <a:prstGeom prst="rect">
+            <a:avLst/>
+          </a:prstGeom>
+          <a:noFill/>
+        </p:spPr>
+        <p:txBody>
+          <a:bodyPr wrap="square" lIns="0" rIns="0" tIns="0" bIns="0" anchor="t">
+            <a:spAutoFit/>
+          </a:bodyPr>
+          <a:lstStyle/>
+          <a:p>
+            <a:pPr algn="r"/>
+            <a:r>
+              <a:rPr sz="900" b="0" i="0">
+                <a:solidFill>
+                  <a:srgbClr val="605E5B"/>
+                </a:solidFill>
+                <a:latin typeface="Helvetica Neue"/>
+              </a:rPr>
+              <a:t>3 / 14</a:t>
+            </a:r>
+          </a:p>
+        </p:txBody>
+      </p:sp>
+    </p:spTree>
+  </p:cSld>
+  <p:clrMapOvr>
+    <a:masterClrMapping/>
+  </p:clrMapOvr>
+</p:sld>
+</file>
+
+<file path=ppt/slides/slide4.xml><?xml version="1.0" encoding="utf-8"?>
+<p:sld xmlns:a="http://schemas.openxmlformats.org/drawingml/2006/main" xmlns:p="http://schemas.openxmlformats.org/presentationml/2006/main" xmlns:r="http://schemas.openxmlformats.org/officeDocument/2006/relationships">
+  <p:cSld>
+    <p:bg>
+      <p:bgPr>
+        <a:solidFill>
+          <a:srgbClr val="FAF9F5"/>
+        </a:solidFill>
+        <a:effectLst/>
+      </p:bgPr>
+    </p:bg>
+    <p:spTree>
+      <p:nvGrpSpPr>
+        <p:cNvPr id="1" name=""/>
+        <p:cNvGrpSpPr/>
+        <p:nvPr/>
+      </p:nvGrpSpPr>
+      <p:grpSpPr/>
+      <p:sp>
+        <p:nvSpPr>
+          <p:cNvPr id="2" name="Rectangle 1"/>
           <p:cNvSpPr/>
           <p:nvPr/>
         </p:nvSpPr>
         <p:spPr>
           <a:xfrm>
-            <a:off x="700000" y="2100000"/>
-            <a:ext cx="520000" cy="520000"/>
-          </a:xfrm>
-          <a:prstGeom prst="ellipse">
+            <a:off x="700000" y="705740"/>
+            <a:ext cx="110000" cy="110000"/>
+          </a:xfrm>
+          <a:prstGeom prst="rect">
             <a:avLst/>
           </a:prstGeom>
           <a:solidFill>
-            <a:srgbClr val="D9514E"/>
+            <a:srgbClr val="C15F3C"/>
           </a:solidFill>
           <a:ln>
             <a:noFill/>
@@ -6606,14 +7964,173 @@
           <a:lstStyle/>
           <a:p>
             <a:pPr algn="ctr"/>
-            <a:r>
-              <a:rPr sz="2200" b="1">
-                <a:solidFill>
-                  <a:srgbClr val="0B1426"/>
-                </a:solidFill>
-                <a:latin typeface="Calibri"/>
-              </a:rPr>
-              <a:t>1</a:t>
+          </a:p>
+        </p:txBody>
+      </p:sp>
+      <p:sp>
+        <p:nvSpPr>
+          <p:cNvPr id="3" name="TextBox 2"/>
+          <p:cNvSpPr txBox="1"/>
+          <p:nvPr/>
+        </p:nvSpPr>
+        <p:spPr>
+          <a:xfrm>
+            <a:off x="990000" y="500000"/>
+            <a:ext cx="11643333" cy="900000"/>
+          </a:xfrm>
+          <a:prstGeom prst="rect">
+            <a:avLst/>
+          </a:prstGeom>
+          <a:noFill/>
+        </p:spPr>
+        <p:txBody>
+          <a:bodyPr wrap="square" lIns="0" rIns="0" tIns="0" bIns="0" anchor="t">
+            <a:spAutoFit/>
+          </a:bodyPr>
+          <a:lstStyle/>
+          <a:p>
+            <a:pPr algn="l"/>
+            <a:r>
+              <a:rPr sz="3600" b="1" i="0">
+                <a:solidFill>
+                  <a:srgbClr val="1F1E1D"/>
+                </a:solidFill>
+                <a:latin typeface="Georgia"/>
+              </a:rPr>
+              <a:t>Objectives</a:t>
+            </a:r>
+          </a:p>
+        </p:txBody>
+      </p:sp>
+      <p:sp>
+        <p:nvSpPr>
+          <p:cNvPr id="4" name="TextBox 3"/>
+          <p:cNvSpPr txBox="1"/>
+          <p:nvPr/>
+        </p:nvSpPr>
+        <p:spPr>
+          <a:xfrm>
+            <a:off x="700000" y="2100000"/>
+            <a:ext cx="11933333" cy="3500000"/>
+          </a:xfrm>
+          <a:prstGeom prst="rect">
+            <a:avLst/>
+          </a:prstGeom>
+          <a:noFill/>
+        </p:spPr>
+        <p:txBody>
+          <a:bodyPr wrap="square" lIns="0" rIns="0" tIns="0" bIns="0" anchor="t">
+            <a:spAutoFit/>
+          </a:bodyPr>
+          <a:lstStyle/>
+          <a:p>
+            <a:pPr algn="l">
+              <a:lnSpc>
+                <a:spcPct val="160000"/>
+              </a:lnSpc>
+            </a:pPr>
+            <a:r>
+              <a:rPr sz="2000" b="1">
+                <a:solidFill>
+                  <a:srgbClr val="C15F3C"/>
+                </a:solidFill>
+                <a:latin typeface="Helvetica Neue"/>
+              </a:rPr>
+              <a:t>·  </a:t>
+            </a:r>
+            <a:r>
+              <a:rPr sz="2000">
+                <a:solidFill>
+                  <a:srgbClr val="1F1E1D"/>
+                </a:solidFill>
+                <a:latin typeface="Helvetica Neue"/>
+              </a:rPr>
+              <a:t>Build a calibrated agent-based model of basin-level water competition</a:t>
+            </a:r>
+          </a:p>
+          <a:p>
+            <a:pPr algn="l">
+              <a:lnSpc>
+                <a:spcPct val="160000"/>
+              </a:lnSpc>
+            </a:pPr>
+            <a:r>
+              <a:rPr sz="2000" b="1">
+                <a:solidFill>
+                  <a:srgbClr val="C15F3C"/>
+                </a:solidFill>
+                <a:latin typeface="Helvetica Neue"/>
+              </a:rPr>
+              <a:t>·  </a:t>
+            </a:r>
+            <a:r>
+              <a:rPr sz="2000">
+                <a:solidFill>
+                  <a:srgbClr val="1F1E1D"/>
+                </a:solidFill>
+                <a:latin typeface="Helvetica Neue"/>
+              </a:rPr>
+              <a:t>Test three hypotheses about collapse timing, nonlinearity, and policy effect</a:t>
+            </a:r>
+          </a:p>
+          <a:p>
+            <a:pPr algn="l">
+              <a:lnSpc>
+                <a:spcPct val="160000"/>
+              </a:lnSpc>
+            </a:pPr>
+            <a:r>
+              <a:rPr sz="2000" b="1">
+                <a:solidFill>
+                  <a:srgbClr val="C15F3C"/>
+                </a:solidFill>
+                <a:latin typeface="Helvetica Neue"/>
+              </a:rPr>
+              <a:t>·  </a:t>
+            </a:r>
+            <a:r>
+              <a:rPr sz="2000">
+                <a:solidFill>
+                  <a:srgbClr val="1F1E1D"/>
+                </a:solidFill>
+                <a:latin typeface="Helvetica Neue"/>
+              </a:rPr>
+              <a:t>Compare four policy scenarios under matched stochastic conditions</a:t>
+            </a:r>
+          </a:p>
+        </p:txBody>
+      </p:sp>
+      <p:sp>
+        <p:nvSpPr>
+          <p:cNvPr id="5" name="TextBox 4"/>
+          <p:cNvSpPr txBox="1"/>
+          <p:nvPr/>
+        </p:nvSpPr>
+        <p:spPr>
+          <a:xfrm>
+            <a:off x="700000" y="5800000"/>
+            <a:ext cx="11933333" cy="500000"/>
+          </a:xfrm>
+          <a:prstGeom prst="rect">
+            <a:avLst/>
+          </a:prstGeom>
+          <a:noFill/>
+        </p:spPr>
+        <p:txBody>
+          <a:bodyPr wrap="square" lIns="0" rIns="0" tIns="0" bIns="0" anchor="t">
+            <a:spAutoFit/>
+          </a:bodyPr>
+          <a:lstStyle/>
+          <a:p>
+            <a:pPr algn="l"/>
+            <a:r>
+              <a:rPr sz="1800" b="1" i="1">
+                <a:solidFill>
+                  <a:srgbClr val="C15F3C"/>
+                </a:solidFill>
+                <a:latin typeface="Georgia"/>
+              </a:rPr>
+              <a:t>Same seeds, same shocks, different rules.</a:t>
             </a:r>
           </a:p>
         </p:txBody>
@@ -6626,8 +8143,8 @@
         </p:nvSpPr>
         <p:spPr>
           <a:xfrm>
-            <a:off x="1450000" y="2160000"/>
-            <a:ext cx="11133333" cy="600000"/>
+            <a:off x="700000" y="7120000"/>
+            <a:ext cx="2500000" cy="300000"/>
           </a:xfrm>
           <a:prstGeom prst="rect">
             <a:avLst/>
@@ -6642,33 +8159,94 @@
           <a:p>
             <a:pPr algn="l"/>
             <a:r>
-              <a:rPr sz="2200" b="1">
-                <a:solidFill>
-                  <a:srgbClr val="FFFFFF"/>
-                </a:solidFill>
-                <a:latin typeface="Calibri"/>
-              </a:rPr>
-              <a:t>Unregulated AI growth collapses shared basins on a 5 to 8 year timeline.</a:t>
-            </a:r>
-          </a:p>
-        </p:txBody>
-      </p:sp>
-      <p:sp>
-        <p:nvSpPr>
-          <p:cNvPr id="7" name="Oval 6"/>
+              <a:rPr sz="900" b="0" i="0">
+                <a:solidFill>
+                  <a:srgbClr val="605E5B"/>
+                </a:solidFill>
+                <a:latin typeface="Helvetica Neue"/>
+              </a:rPr>
+              <a:t>PARCHED</a:t>
+            </a:r>
+          </a:p>
+        </p:txBody>
+      </p:sp>
+      <p:sp>
+        <p:nvSpPr>
+          <p:cNvPr id="7" name="TextBox 6"/>
+          <p:cNvSpPr txBox="1"/>
+          <p:nvPr/>
+        </p:nvSpPr>
+        <p:spPr>
+          <a:xfrm>
+            <a:off x="11133333" y="7120000"/>
+            <a:ext cx="1500000" cy="300000"/>
+          </a:xfrm>
+          <a:prstGeom prst="rect">
+            <a:avLst/>
+          </a:prstGeom>
+          <a:noFill/>
+        </p:spPr>
+        <p:txBody>
+          <a:bodyPr wrap="square" lIns="0" rIns="0" tIns="0" bIns="0" anchor="t">
+            <a:spAutoFit/>
+          </a:bodyPr>
+          <a:lstStyle/>
+          <a:p>
+            <a:pPr algn="r"/>
+            <a:r>
+              <a:rPr sz="900" b="0" i="0">
+                <a:solidFill>
+                  <a:srgbClr val="605E5B"/>
+                </a:solidFill>
+                <a:latin typeface="Helvetica Neue"/>
+              </a:rPr>
+              <a:t>4 / 14</a:t>
+            </a:r>
+          </a:p>
+        </p:txBody>
+      </p:sp>
+    </p:spTree>
+  </p:cSld>
+  <p:clrMapOvr>
+    <a:masterClrMapping/>
+  </p:clrMapOvr>
+</p:sld>
+</file>
+
+<file path=ppt/slides/slide5.xml><?xml version="1.0" encoding="utf-8"?>
+<p:sld xmlns:a="http://schemas.openxmlformats.org/drawingml/2006/main" xmlns:p="http://schemas.openxmlformats.org/presentationml/2006/main" xmlns:r="http://schemas.openxmlformats.org/officeDocument/2006/relationships">
+  <p:cSld>
+    <p:bg>
+      <p:bgPr>
+        <a:solidFill>
+          <a:srgbClr val="FAF9F5"/>
+        </a:solidFill>
+        <a:effectLst/>
+      </p:bgPr>
+    </p:bg>
+    <p:spTree>
+      <p:nvGrpSpPr>
+        <p:cNvPr id="1" name=""/>
+        <p:cNvGrpSpPr/>
+        <p:nvPr/>
+      </p:nvGrpSpPr>
+      <p:grpSpPr/>
+      <p:sp>
+        <p:nvSpPr>
+          <p:cNvPr id="2" name="Rectangle 1"/>
           <p:cNvSpPr/>
           <p:nvPr/>
         </p:nvSpPr>
         <p:spPr>
           <a:xfrm>
-            <a:off x="700000" y="2900000"/>
-            <a:ext cx="520000" cy="520000"/>
-          </a:xfrm>
-          <a:prstGeom prst="ellipse">
+            <a:off x="700000" y="705740"/>
+            <a:ext cx="110000" cy="110000"/>
+          </a:xfrm>
+          <a:prstGeom prst="rect">
             <a:avLst/>
           </a:prstGeom>
           <a:solidFill>
-            <a:srgbClr val="E6A532"/>
+            <a:srgbClr val="C15F3C"/>
           </a:solidFill>
           <a:ln>
             <a:noFill/>
@@ -6693,14 +8271,180 @@
           <a:lstStyle/>
           <a:p>
             <a:pPr algn="ctr"/>
-            <a:r>
-              <a:rPr sz="2200" b="1">
-                <a:solidFill>
-                  <a:srgbClr val="0B1426"/>
-                </a:solidFill>
-                <a:latin typeface="Calibri"/>
-              </a:rPr>
-              <a:t>2</a:t>
+          </a:p>
+        </p:txBody>
+      </p:sp>
+      <p:sp>
+        <p:nvSpPr>
+          <p:cNvPr id="3" name="TextBox 2"/>
+          <p:cNvSpPr txBox="1"/>
+          <p:nvPr/>
+        </p:nvSpPr>
+        <p:spPr>
+          <a:xfrm>
+            <a:off x="990000" y="500000"/>
+            <a:ext cx="11643333" cy="900000"/>
+          </a:xfrm>
+          <a:prstGeom prst="rect">
+            <a:avLst/>
+          </a:prstGeom>
+          <a:noFill/>
+        </p:spPr>
+        <p:txBody>
+          <a:bodyPr wrap="square" lIns="0" rIns="0" tIns="0" bIns="0" anchor="t">
+            <a:spAutoFit/>
+          </a:bodyPr>
+          <a:lstStyle/>
+          <a:p>
+            <a:pPr algn="l"/>
+            <a:r>
+              <a:rPr sz="3600" b="1" i="0">
+                <a:solidFill>
+                  <a:srgbClr val="1F1E1D"/>
+                </a:solidFill>
+                <a:latin typeface="Georgia"/>
+              </a:rPr>
+              <a:t>Hypotheses</a:t>
+            </a:r>
+          </a:p>
+        </p:txBody>
+      </p:sp>
+      <p:sp>
+        <p:nvSpPr>
+          <p:cNvPr id="4" name="TextBox 3"/>
+          <p:cNvSpPr txBox="1"/>
+          <p:nvPr/>
+        </p:nvSpPr>
+        <p:spPr>
+          <a:xfrm>
+            <a:off x="700000" y="1900000"/>
+            <a:ext cx="3900000" cy="400000"/>
+          </a:xfrm>
+          <a:prstGeom prst="rect">
+            <a:avLst/>
+          </a:prstGeom>
+          <a:noFill/>
+        </p:spPr>
+        <p:txBody>
+          <a:bodyPr wrap="square" lIns="0" rIns="0" tIns="0" bIns="0" anchor="t">
+            <a:spAutoFit/>
+          </a:bodyPr>
+          <a:lstStyle/>
+          <a:p>
+            <a:pPr algn="l"/>
+            <a:r>
+              <a:rPr sz="1100" b="1" i="0">
+                <a:solidFill>
+                  <a:srgbClr val="C15F3C"/>
+                </a:solidFill>
+                <a:latin typeface="Helvetica Neue"/>
+              </a:rPr>
+              <a:t>H1   COLLAPSE</a:t>
+            </a:r>
+          </a:p>
+        </p:txBody>
+      </p:sp>
+      <p:sp>
+        <p:nvSpPr>
+          <p:cNvPr id="5" name="TextBox 4"/>
+          <p:cNvSpPr txBox="1"/>
+          <p:nvPr/>
+        </p:nvSpPr>
+        <p:spPr>
+          <a:xfrm>
+            <a:off x="700000" y="2350000"/>
+            <a:ext cx="3900000" cy="2200000"/>
+          </a:xfrm>
+          <a:prstGeom prst="rect">
+            <a:avLst/>
+          </a:prstGeom>
+          <a:noFill/>
+        </p:spPr>
+        <p:txBody>
+          <a:bodyPr wrap="square" lIns="0" rIns="0" tIns="0" bIns="0" anchor="t">
+            <a:spAutoFit/>
+          </a:bodyPr>
+          <a:lstStyle/>
+          <a:p>
+            <a:pPr algn="l"/>
+            <a:r>
+              <a:rPr sz="2000" b="1" i="0">
+                <a:solidFill>
+                  <a:srgbClr val="1F1E1D"/>
+                </a:solidFill>
+                <a:latin typeface="Georgia"/>
+              </a:rPr>
+              <a:t>Unregulated growth collapses the basin in 5 to 8 years.</a:t>
+            </a:r>
+          </a:p>
+        </p:txBody>
+      </p:sp>
+      <p:sp>
+        <p:nvSpPr>
+          <p:cNvPr id="6" name="TextBox 5"/>
+          <p:cNvSpPr txBox="1"/>
+          <p:nvPr/>
+        </p:nvSpPr>
+        <p:spPr>
+          <a:xfrm>
+            <a:off x="700000" y="4250000"/>
+            <a:ext cx="3900000" cy="1800000"/>
+          </a:xfrm>
+          <a:prstGeom prst="rect">
+            <a:avLst/>
+          </a:prstGeom>
+          <a:noFill/>
+        </p:spPr>
+        <p:txBody>
+          <a:bodyPr wrap="square" lIns="0" rIns="0" tIns="0" bIns="0" anchor="t">
+            <a:spAutoFit/>
+          </a:bodyPr>
+          <a:lstStyle/>
+          <a:p>
+            <a:pPr algn="l"/>
+            <a:r>
+              <a:rPr sz="1300" b="0" i="0">
+                <a:solidFill>
+                  <a:srgbClr val="605E5B"/>
+                </a:solidFill>
+                <a:latin typeface="Helvetica Neue"/>
+              </a:rPr>
+              <a:t>Critical-stress crossing under no policy, across 50 replicate runs.</a:t>
+            </a:r>
+          </a:p>
+        </p:txBody>
+      </p:sp>
+      <p:sp>
+        <p:nvSpPr>
+          <p:cNvPr id="7" name="TextBox 6"/>
+          <p:cNvSpPr txBox="1"/>
+          <p:nvPr/>
+        </p:nvSpPr>
+        <p:spPr>
+          <a:xfrm>
+            <a:off x="4850000" y="1900000"/>
+            <a:ext cx="3900000" cy="400000"/>
+          </a:xfrm>
+          <a:prstGeom prst="rect">
+            <a:avLst/>
+          </a:prstGeom>
+          <a:noFill/>
+        </p:spPr>
+        <p:txBody>
+          <a:bodyPr wrap="square" lIns="0" rIns="0" tIns="0" bIns="0" anchor="t">
+            <a:spAutoFit/>
+          </a:bodyPr>
+          <a:lstStyle/>
+          <a:p>
+            <a:pPr algn="l"/>
+            <a:r>
+              <a:rPr sz="1100" b="1" i="0">
+                <a:solidFill>
+                  <a:srgbClr val="C15F3C"/>
+                </a:solidFill>
+                <a:latin typeface="Helvetica Neue"/>
+              </a:rPr>
+              <a:t>H2   TIPPING POINT</a:t>
             </a:r>
           </a:p>
         </p:txBody>
@@ -6713,8 +8457,8 @@
         </p:nvSpPr>
         <p:spPr>
           <a:xfrm>
-            <a:off x="1450000" y="2960000"/>
-            <a:ext cx="11133333" cy="600000"/>
+            <a:off x="4850000" y="2350000"/>
+            <a:ext cx="3900000" cy="2200000"/>
           </a:xfrm>
           <a:prstGeom prst="rect">
             <a:avLst/>
@@ -6729,33 +8473,269 @@
           <a:p>
             <a:pPr algn="l"/>
             <a:r>
-              <a:rPr sz="2200" b="1">
-                <a:solidFill>
-                  <a:srgbClr val="FFFFFF"/>
-                </a:solidFill>
-                <a:latin typeface="Calibri"/>
-              </a:rPr>
-              <a:t>The collapse is nonlinear. Late warnings will not help.</a:t>
-            </a:r>
-          </a:p>
-        </p:txBody>
-      </p:sp>
-      <p:sp>
-        <p:nvSpPr>
-          <p:cNvPr id="9" name="Oval 8"/>
+              <a:rPr sz="2000" b="1" i="0">
+                <a:solidFill>
+                  <a:srgbClr val="1F1E1D"/>
+                </a:solidFill>
+                <a:latin typeface="Georgia"/>
+              </a:rPr>
+              <a:t>Decline becomes nonlinear once basin storage drops below 40%.</a:t>
+            </a:r>
+          </a:p>
+        </p:txBody>
+      </p:sp>
+      <p:sp>
+        <p:nvSpPr>
+          <p:cNvPr id="9" name="TextBox 8"/>
+          <p:cNvSpPr txBox="1"/>
+          <p:nvPr/>
+        </p:nvSpPr>
+        <p:spPr>
+          <a:xfrm>
+            <a:off x="4850000" y="4250000"/>
+            <a:ext cx="3900000" cy="1800000"/>
+          </a:xfrm>
+          <a:prstGeom prst="rect">
+            <a:avLst/>
+          </a:prstGeom>
+          <a:noFill/>
+        </p:spPr>
+        <p:txBody>
+          <a:bodyPr wrap="square" lIns="0" rIns="0" tIns="0" bIns="0" anchor="t">
+            <a:spAutoFit/>
+          </a:bodyPr>
+          <a:lstStyle/>
+          <a:p>
+            <a:pPr algn="l"/>
+            <a:r>
+              <a:rPr sz="1300" b="0" i="0">
+                <a:solidFill>
+                  <a:srgbClr val="605E5B"/>
+                </a:solidFill>
+                <a:latin typeface="Helvetica Neue"/>
+              </a:rPr>
+              <a:t>Cooling-stress positive feedback amplifies withdrawals as headroom shrinks.</a:t>
+            </a:r>
+          </a:p>
+        </p:txBody>
+      </p:sp>
+      <p:sp>
+        <p:nvSpPr>
+          <p:cNvPr id="10" name="TextBox 9"/>
+          <p:cNvSpPr txBox="1"/>
+          <p:nvPr/>
+        </p:nvSpPr>
+        <p:spPr>
+          <a:xfrm>
+            <a:off x="9000000" y="1900000"/>
+            <a:ext cx="3900000" cy="400000"/>
+          </a:xfrm>
+          <a:prstGeom prst="rect">
+            <a:avLst/>
+          </a:prstGeom>
+          <a:noFill/>
+        </p:spPr>
+        <p:txBody>
+          <a:bodyPr wrap="square" lIns="0" rIns="0" tIns="0" bIns="0" anchor="t">
+            <a:spAutoFit/>
+          </a:bodyPr>
+          <a:lstStyle/>
+          <a:p>
+            <a:pPr algn="l"/>
+            <a:r>
+              <a:rPr sz="1100" b="1" i="0">
+                <a:solidFill>
+                  <a:srgbClr val="C15F3C"/>
+                </a:solidFill>
+                <a:latin typeface="Helvetica Neue"/>
+              </a:rPr>
+              <a:t>H3   POLICY</a:t>
+            </a:r>
+          </a:p>
+        </p:txBody>
+      </p:sp>
+      <p:sp>
+        <p:nvSpPr>
+          <p:cNvPr id="11" name="TextBox 10"/>
+          <p:cNvSpPr txBox="1"/>
+          <p:nvPr/>
+        </p:nvSpPr>
+        <p:spPr>
+          <a:xfrm>
+            <a:off x="9000000" y="2350000"/>
+            <a:ext cx="3900000" cy="2200000"/>
+          </a:xfrm>
+          <a:prstGeom prst="rect">
+            <a:avLst/>
+          </a:prstGeom>
+          <a:noFill/>
+        </p:spPr>
+        <p:txBody>
+          <a:bodyPr wrap="square" lIns="0" rIns="0" tIns="0" bIns="0" anchor="t">
+            <a:spAutoFit/>
+          </a:bodyPr>
+          <a:lstStyle/>
+          <a:p>
+            <a:pPr algn="l"/>
+            <a:r>
+              <a:rPr sz="2000" b="1" i="0">
+                <a:solidFill>
+                  <a:srgbClr val="1F1E1D"/>
+                </a:solidFill>
+                <a:latin typeface="Georgia"/>
+              </a:rPr>
+              <a:t>Proactive caps delay critical stress by 40% or more.</a:t>
+            </a:r>
+          </a:p>
+        </p:txBody>
+      </p:sp>
+      <p:sp>
+        <p:nvSpPr>
+          <p:cNvPr id="12" name="TextBox 11"/>
+          <p:cNvSpPr txBox="1"/>
+          <p:nvPr/>
+        </p:nvSpPr>
+        <p:spPr>
+          <a:xfrm>
+            <a:off x="9000000" y="4250000"/>
+            <a:ext cx="3900000" cy="1800000"/>
+          </a:xfrm>
+          <a:prstGeom prst="rect">
+            <a:avLst/>
+          </a:prstGeom>
+          <a:noFill/>
+        </p:spPr>
+        <p:txBody>
+          <a:bodyPr wrap="square" lIns="0" rIns="0" tIns="0" bIns="0" anchor="t">
+            <a:spAutoFit/>
+          </a:bodyPr>
+          <a:lstStyle/>
+          <a:p>
+            <a:pPr algn="l"/>
+            <a:r>
+              <a:rPr sz="1300" b="0" i="0">
+                <a:solidFill>
+                  <a:srgbClr val="605E5B"/>
+                </a:solidFill>
+                <a:latin typeface="Helvetica Neue"/>
+              </a:rPr>
+              <a:t>Reactive caps and staggered entry do not, once measured against matched seeds.</a:t>
+            </a:r>
+          </a:p>
+        </p:txBody>
+      </p:sp>
+      <p:sp>
+        <p:nvSpPr>
+          <p:cNvPr id="13" name="TextBox 12"/>
+          <p:cNvSpPr txBox="1"/>
+          <p:nvPr/>
+        </p:nvSpPr>
+        <p:spPr>
+          <a:xfrm>
+            <a:off x="700000" y="7120000"/>
+            <a:ext cx="2500000" cy="300000"/>
+          </a:xfrm>
+          <a:prstGeom prst="rect">
+            <a:avLst/>
+          </a:prstGeom>
+          <a:noFill/>
+        </p:spPr>
+        <p:txBody>
+          <a:bodyPr wrap="square" lIns="0" rIns="0" tIns="0" bIns="0" anchor="t">
+            <a:spAutoFit/>
+          </a:bodyPr>
+          <a:lstStyle/>
+          <a:p>
+            <a:pPr algn="l"/>
+            <a:r>
+              <a:rPr sz="900" b="0" i="0">
+                <a:solidFill>
+                  <a:srgbClr val="605E5B"/>
+                </a:solidFill>
+                <a:latin typeface="Helvetica Neue"/>
+              </a:rPr>
+              <a:t>PARCHED</a:t>
+            </a:r>
+          </a:p>
+        </p:txBody>
+      </p:sp>
+      <p:sp>
+        <p:nvSpPr>
+          <p:cNvPr id="14" name="TextBox 13"/>
+          <p:cNvSpPr txBox="1"/>
+          <p:nvPr/>
+        </p:nvSpPr>
+        <p:spPr>
+          <a:xfrm>
+            <a:off x="11133333" y="7120000"/>
+            <a:ext cx="1500000" cy="300000"/>
+          </a:xfrm>
+          <a:prstGeom prst="rect">
+            <a:avLst/>
+          </a:prstGeom>
+          <a:noFill/>
+        </p:spPr>
+        <p:txBody>
+          <a:bodyPr wrap="square" lIns="0" rIns="0" tIns="0" bIns="0" anchor="t">
+            <a:spAutoFit/>
+          </a:bodyPr>
+          <a:lstStyle/>
+          <a:p>
+            <a:pPr algn="r"/>
+            <a:r>
+              <a:rPr sz="900" b="0" i="0">
+                <a:solidFill>
+                  <a:srgbClr val="605E5B"/>
+                </a:solidFill>
+                <a:latin typeface="Helvetica Neue"/>
+              </a:rPr>
+              <a:t>5 / 14</a:t>
+            </a:r>
+          </a:p>
+        </p:txBody>
+      </p:sp>
+    </p:spTree>
+  </p:cSld>
+  <p:clrMapOvr>
+    <a:masterClrMapping/>
+  </p:clrMapOvr>
+</p:sld>
+</file>
+
+<file path=ppt/slides/slide6.xml><?xml version="1.0" encoding="utf-8"?>
+<p:sld xmlns:a="http://schemas.openxmlformats.org/drawingml/2006/main" xmlns:p="http://schemas.openxmlformats.org/presentationml/2006/main" xmlns:r="http://schemas.openxmlformats.org/officeDocument/2006/relationships">
+  <p:cSld>
+    <p:bg>
+      <p:bgPr>
+        <a:solidFill>
+          <a:srgbClr val="FAF9F5"/>
+        </a:solidFill>
+        <a:effectLst/>
+      </p:bgPr>
+    </p:bg>
+    <p:spTree>
+      <p:nvGrpSpPr>
+        <p:cNvPr id="1" name=""/>
+        <p:cNvGrpSpPr/>
+        <p:nvPr/>
+      </p:nvGrpSpPr>
+      <p:grpSpPr/>
+      <p:sp>
+        <p:nvSpPr>
+          <p:cNvPr id="2" name="Rectangle 1"/>
           <p:cNvSpPr/>
           <p:nvPr/>
         </p:nvSpPr>
         <p:spPr>
           <a:xfrm>
-            <a:off x="700000" y="3700000"/>
-            <a:ext cx="520000" cy="520000"/>
-          </a:xfrm>
-          <a:prstGeom prst="ellipse">
+            <a:off x="700000" y="705740"/>
+            <a:ext cx="110000" cy="110000"/>
+          </a:xfrm>
+          <a:prstGeom prst="rect">
             <a:avLst/>
           </a:prstGeom>
           <a:solidFill>
-            <a:srgbClr val="3EE6C5"/>
+            <a:srgbClr val="C15F3C"/>
           </a:solidFill>
           <a:ln>
             <a:noFill/>
@@ -6780,28 +8760,19 @@
           <a:lstStyle/>
           <a:p>
             <a:pPr algn="ctr"/>
-            <a:r>
-              <a:rPr sz="2200" b="1">
-                <a:solidFill>
-                  <a:srgbClr val="0B1426"/>
-                </a:solidFill>
-                <a:latin typeface="Calibri"/>
-              </a:rPr>
-              <a:t>3</a:t>
-            </a:r>
-          </a:p>
-        </p:txBody>
-      </p:sp>
-      <p:sp>
-        <p:nvSpPr>
-          <p:cNvPr id="10" name="TextBox 9"/>
-          <p:cNvSpPr txBox="1"/>
-          <p:nvPr/>
-        </p:nvSpPr>
-        <p:spPr>
-          <a:xfrm>
-            <a:off x="1450000" y="3760000"/>
-            <a:ext cx="11133333" cy="600000"/>
+          </a:p>
+        </p:txBody>
+      </p:sp>
+      <p:sp>
+        <p:nvSpPr>
+          <p:cNvPr id="3" name="TextBox 2"/>
+          <p:cNvSpPr txBox="1"/>
+          <p:nvPr/>
+        </p:nvSpPr>
+        <p:spPr>
+          <a:xfrm>
+            <a:off x="990000" y="500000"/>
+            <a:ext cx="11643333" cy="900000"/>
           </a:xfrm>
           <a:prstGeom prst="rect">
             <a:avLst/>
@@ -6816,27 +8787,200 @@
           <a:p>
             <a:pPr algn="l"/>
             <a:r>
-              <a:rPr sz="2200" b="1">
-                <a:solidFill>
-                  <a:srgbClr val="FFFFFF"/>
-                </a:solidFill>
-                <a:latin typeface="Calibri"/>
-              </a:rPr>
-              <a:t>Proactive caps work. Reactive caps do not.</a:t>
-            </a:r>
-          </a:p>
-        </p:txBody>
-      </p:sp>
-      <p:sp>
-        <p:nvSpPr>
-          <p:cNvPr id="11" name="TextBox 10"/>
-          <p:cNvSpPr txBox="1"/>
-          <p:nvPr/>
-        </p:nvSpPr>
-        <p:spPr>
-          <a:xfrm>
-            <a:off x="700000" y="5000000"/>
-            <a:ext cx="11933333" cy="1100000"/>
+              <a:rPr sz="3600" b="1" i="0">
+                <a:solidFill>
+                  <a:srgbClr val="1F1E1D"/>
+                </a:solidFill>
+                <a:latin typeface="Georgia"/>
+              </a:rPr>
+              <a:t>Model Overview</a:t>
+            </a:r>
+          </a:p>
+        </p:txBody>
+      </p:sp>
+      <p:sp>
+        <p:nvSpPr>
+          <p:cNvPr id="4" name="TextBox 3"/>
+          <p:cNvSpPr txBox="1"/>
+          <p:nvPr/>
+        </p:nvSpPr>
+        <p:spPr>
+          <a:xfrm>
+            <a:off x="700000" y="1800000"/>
+            <a:ext cx="5400000" cy="4500000"/>
+          </a:xfrm>
+          <a:prstGeom prst="rect">
+            <a:avLst/>
+          </a:prstGeom>
+          <a:noFill/>
+        </p:spPr>
+        <p:txBody>
+          <a:bodyPr wrap="square" lIns="0" rIns="0" tIns="0" bIns="0" anchor="t">
+            <a:spAutoFit/>
+          </a:bodyPr>
+          <a:lstStyle/>
+          <a:p>
+            <a:pPr algn="l">
+              <a:lnSpc>
+                <a:spcPct val="145000"/>
+              </a:lnSpc>
+            </a:pPr>
+            <a:r>
+              <a:rPr sz="1500" b="1">
+                <a:solidFill>
+                  <a:srgbClr val="C15F3C"/>
+                </a:solidFill>
+                <a:latin typeface="Helvetica Neue"/>
+              </a:rPr>
+              <a:t>·  </a:t>
+            </a:r>
+            <a:r>
+              <a:rPr sz="1500">
+                <a:solidFill>
+                  <a:srgbClr val="1F1E1D"/>
+                </a:solidFill>
+                <a:latin typeface="Helvetica Neue"/>
+              </a:rPr>
+              <a:t>4 data centers (heterogeneous capacity)</a:t>
+            </a:r>
+          </a:p>
+          <a:p>
+            <a:pPr algn="l">
+              <a:lnSpc>
+                <a:spcPct val="145000"/>
+              </a:lnSpc>
+            </a:pPr>
+            <a:r>
+              <a:rPr sz="1500" b="1">
+                <a:solidFill>
+                  <a:srgbClr val="C15F3C"/>
+                </a:solidFill>
+                <a:latin typeface="Helvetica Neue"/>
+              </a:rPr>
+              <a:t>·  </a:t>
+            </a:r>
+            <a:r>
+              <a:rPr sz="1500">
+                <a:solidFill>
+                  <a:srgbClr val="1F1E1D"/>
+                </a:solidFill>
+                <a:latin typeface="Helvetica Neue"/>
+              </a:rPr>
+              <a:t>2 farms (rainfed and irrigated)</a:t>
+            </a:r>
+          </a:p>
+          <a:p>
+            <a:pPr algn="l">
+              <a:lnSpc>
+                <a:spcPct val="145000"/>
+              </a:lnSpc>
+            </a:pPr>
+            <a:r>
+              <a:rPr sz="1500" b="1">
+                <a:solidFill>
+                  <a:srgbClr val="C15F3C"/>
+                </a:solidFill>
+                <a:latin typeface="Helvetica Neue"/>
+              </a:rPr>
+              <a:t>·  </a:t>
+            </a:r>
+            <a:r>
+              <a:rPr sz="1500">
+                <a:solidFill>
+                  <a:srgbClr val="1F1E1D"/>
+                </a:solidFill>
+                <a:latin typeface="Helvetica Neue"/>
+              </a:rPr>
+              <a:t>100k residents (consumption from demand curve)</a:t>
+            </a:r>
+          </a:p>
+          <a:p>
+            <a:pPr algn="l">
+              <a:lnSpc>
+                <a:spcPct val="145000"/>
+              </a:lnSpc>
+            </a:pPr>
+            <a:r>
+              <a:rPr sz="1500" b="1">
+                <a:solidFill>
+                  <a:srgbClr val="C15F3C"/>
+                </a:solidFill>
+                <a:latin typeface="Helvetica Neue"/>
+              </a:rPr>
+              <a:t>·  </a:t>
+            </a:r>
+            <a:r>
+              <a:rPr sz="1500">
+                <a:solidFill>
+                  <a:srgbClr val="1F1E1D"/>
+                </a:solidFill>
+                <a:latin typeface="Helvetica Neue"/>
+              </a:rPr>
+              <a:t>1 regulator (delayed observability)</a:t>
+            </a:r>
+          </a:p>
+          <a:p>
+            <a:pPr algn="l">
+              <a:lnSpc>
+                <a:spcPct val="145000"/>
+              </a:lnSpc>
+            </a:pPr>
+            <a:r>
+              <a:rPr sz="1500" b="1">
+                <a:solidFill>
+                  <a:srgbClr val="C15F3C"/>
+                </a:solidFill>
+                <a:latin typeface="Helvetica Neue"/>
+              </a:rPr>
+              <a:t>·  </a:t>
+            </a:r>
+            <a:r>
+              <a:rPr sz="1500">
+                <a:solidFill>
+                  <a:srgbClr val="1F1E1D"/>
+                </a:solidFill>
+                <a:latin typeface="Helvetica Neue"/>
+              </a:rPr>
+              <a:t>30 BL shared basin, with stochastic recharge</a:t>
+            </a:r>
+          </a:p>
+          <a:p>
+            <a:pPr algn="l">
+              <a:lnSpc>
+                <a:spcPct val="145000"/>
+              </a:lnSpc>
+            </a:pPr>
+            <a:r>
+              <a:rPr sz="1500" b="1">
+                <a:solidFill>
+                  <a:srgbClr val="C15F3C"/>
+                </a:solidFill>
+                <a:latin typeface="Helvetica Neue"/>
+              </a:rPr>
+              <a:t>·  </a:t>
+            </a:r>
+            <a:r>
+              <a:rPr sz="1500">
+                <a:solidFill>
+                  <a:srgbClr val="1F1E1D"/>
+                </a:solidFill>
+                <a:latin typeface="Helvetica Neue"/>
+              </a:rPr>
+              <a:t>All interactions mediated through the basin</a:t>
+            </a:r>
+          </a:p>
+        </p:txBody>
+      </p:sp>
+      <p:sp>
+        <p:nvSpPr>
+          <p:cNvPr id="5" name="TextBox 4"/>
+          <p:cNvSpPr txBox="1"/>
+          <p:nvPr/>
+        </p:nvSpPr>
+        <p:spPr>
+          <a:xfrm>
+            <a:off x="700000" y="6000000"/>
+            <a:ext cx="5400000" cy="400000"/>
           </a:xfrm>
           <a:prstGeom prst="rect">
             <a:avLst/>
@@ -6851,27 +8995,51 @@
           <a:p>
             <a:pPr algn="l"/>
             <a:r>
-              <a:rPr sz="2400" b="1">
-                <a:solidFill>
-                  <a:srgbClr val="3EE6C5"/>
-                </a:solidFill>
-                <a:latin typeface="Calibri"/>
-              </a:rPr>
-              <a:t>"If you want to keep the water on, you have to cap the draw before anyone asks you to."</a:t>
-            </a:r>
-          </a:p>
-        </p:txBody>
-      </p:sp>
-      <p:sp>
-        <p:nvSpPr>
-          <p:cNvPr id="12" name="TextBox 11"/>
-          <p:cNvSpPr txBox="1"/>
-          <p:nvPr/>
-        </p:nvSpPr>
-        <p:spPr>
-          <a:xfrm>
-            <a:off x="700000" y="6300000"/>
-            <a:ext cx="11933333" cy="400000"/>
+              <a:rPr sz="1100" b="1" i="0">
+                <a:solidFill>
+                  <a:srgbClr val="C15F3C"/>
+                </a:solidFill>
+                <a:latin typeface="Helvetica Neue"/>
+              </a:rPr>
+              <a:t>1 tick = 1 day   /   10-year horizon   /   stop on collapse</a:t>
+            </a:r>
+          </a:p>
+        </p:txBody>
+      </p:sp>
+      <p:pic>
+        <p:nvPicPr>
+          <p:cNvPr id="6" name="Picture 5" descr="fig_simulation_screenshot.png"/>
+          <p:cNvPicPr>
+            <a:picLocks noChangeAspect="1"/>
+          </p:cNvPicPr>
+          <p:nvPr/>
+        </p:nvPicPr>
+        <p:blipFill>
+          <a:blip r:embed="rId2"/>
+          <a:stretch>
+            <a:fillRect/>
+          </a:stretch>
+        </p:blipFill>
+        <p:spPr>
+          <a:xfrm>
+            <a:off x="6433333" y="2250759"/>
+            <a:ext cx="6200000" cy="3798481"/>
+          </a:xfrm>
+          <a:prstGeom prst="rect">
+            <a:avLst/>
+          </a:prstGeom>
+        </p:spPr>
+      </p:pic>
+      <p:sp>
+        <p:nvSpPr>
+          <p:cNvPr id="7" name="TextBox 6"/>
+          <p:cNvSpPr txBox="1"/>
+          <p:nvPr/>
+        </p:nvSpPr>
+        <p:spPr>
+          <a:xfrm>
+            <a:off x="700000" y="7120000"/>
+            <a:ext cx="2500000" cy="300000"/>
           </a:xfrm>
           <a:prstGeom prst="rect">
             <a:avLst/>
@@ -6886,62 +9054,27 @@
           <a:p>
             <a:pPr algn="l"/>
             <a:r>
-              <a:rPr sz="1400" b="0">
-                <a:solidFill>
-                  <a:srgbClr val="B6C2D9"/>
-                </a:solidFill>
-                <a:latin typeface="Calibri"/>
-              </a:rPr>
-              <a:t>Code and data: github.com/cup-noodlehS/ABM-project</a:t>
-            </a:r>
-          </a:p>
-        </p:txBody>
-      </p:sp>
-      <p:sp>
-        <p:nvSpPr>
-          <p:cNvPr id="13" name="TextBox 12"/>
-          <p:cNvSpPr txBox="1"/>
-          <p:nvPr/>
-        </p:nvSpPr>
-        <p:spPr>
-          <a:xfrm>
-            <a:off x="700000" y="6700000"/>
-            <a:ext cx="11933333" cy="400000"/>
-          </a:xfrm>
-          <a:prstGeom prst="rect">
-            <a:avLst/>
-          </a:prstGeom>
-          <a:noFill/>
-        </p:spPr>
-        <p:txBody>
-          <a:bodyPr wrap="square" lIns="0" rIns="0" tIns="0" bIns="0" anchor="t">
-            <a:spAutoFit/>
-          </a:bodyPr>
-          <a:lstStyle/>
-          <a:p>
-            <a:pPr algn="l"/>
-            <a:r>
-              <a:rPr sz="1800" b="1">
-                <a:solidFill>
-                  <a:srgbClr val="FFFFFF"/>
-                </a:solidFill>
-                <a:latin typeface="Calibri"/>
-              </a:rPr>
-              <a:t>Thank you. Questions?</a:t>
-            </a:r>
-          </a:p>
-        </p:txBody>
-      </p:sp>
-      <p:sp>
-        <p:nvSpPr>
-          <p:cNvPr id="14" name="TextBox 13"/>
-          <p:cNvSpPr txBox="1"/>
-          <p:nvPr/>
-        </p:nvSpPr>
-        <p:spPr>
-          <a:xfrm>
-            <a:off x="11133333" y="7050000"/>
-            <a:ext cx="1800000" cy="350000"/>
+              <a:rPr sz="900" b="0" i="0">
+                <a:solidFill>
+                  <a:srgbClr val="605E5B"/>
+                </a:solidFill>
+                <a:latin typeface="Helvetica Neue"/>
+              </a:rPr>
+              <a:t>PARCHED</a:t>
+            </a:r>
+          </a:p>
+        </p:txBody>
+      </p:sp>
+      <p:sp>
+        <p:nvSpPr>
+          <p:cNvPr id="8" name="TextBox 7"/>
+          <p:cNvSpPr txBox="1"/>
+          <p:nvPr/>
+        </p:nvSpPr>
+        <p:spPr>
+          <a:xfrm>
+            <a:off x="11133333" y="7120000"/>
+            <a:ext cx="1500000" cy="300000"/>
           </a:xfrm>
           <a:prstGeom prst="rect">
             <a:avLst/>
@@ -6956,13 +9089,13 @@
           <a:p>
             <a:pPr algn="r"/>
             <a:r>
-              <a:rPr sz="1000" b="0">
-                <a:solidFill>
-                  <a:srgbClr val="B6C2D9"/>
-                </a:solidFill>
-                <a:latin typeface="Calibri"/>
-              </a:rPr>
-              <a:t>PARCHED   |   14 / 14</a:t>
+              <a:rPr sz="900" b="0" i="0">
+                <a:solidFill>
+                  <a:srgbClr val="605E5B"/>
+                </a:solidFill>
+                <a:latin typeface="Helvetica Neue"/>
+              </a:rPr>
+              <a:t>6 / 14</a:t>
             </a:r>
           </a:p>
         </p:txBody>
@@ -6975,13 +9108,13 @@
 </p:sld>
 </file>
 
-<file path=ppt/slides/slide2.xml><?xml version="1.0" encoding="utf-8"?>
+<file path=ppt/slides/slide7.xml><?xml version="1.0" encoding="utf-8"?>
 <p:sld xmlns:a="http://schemas.openxmlformats.org/drawingml/2006/main" xmlns:p="http://schemas.openxmlformats.org/presentationml/2006/main" xmlns:r="http://schemas.openxmlformats.org/officeDocument/2006/relationships">
   <p:cSld>
     <p:bg>
       <p:bgPr>
         <a:solidFill>
-          <a:srgbClr val="0B1426"/>
+          <a:srgbClr val="FAF9F5"/>
         </a:solidFill>
         <a:effectLst/>
       </p:bgPr>
@@ -7001,14 +9134,14 @@
         </p:nvSpPr>
         <p:spPr>
           <a:xfrm>
-            <a:off x="0" y="0"/>
-            <a:ext cx="110000" cy="7500000"/>
+            <a:off x="700000" y="705740"/>
+            <a:ext cx="110000" cy="110000"/>
           </a:xfrm>
           <a:prstGeom prst="rect">
             <a:avLst/>
           </a:prstGeom>
           <a:solidFill>
-            <a:srgbClr val="3EE6C5"/>
+            <a:srgbClr val="C15F3C"/>
           </a:solidFill>
           <a:ln>
             <a:noFill/>
@@ -7044,8 +9177,8 @@
         </p:nvSpPr>
         <p:spPr>
           <a:xfrm>
-            <a:off x="700000" y="500000"/>
-            <a:ext cx="11933333" cy="800000"/>
+            <a:off x="990000" y="500000"/>
+            <a:ext cx="11643333" cy="900000"/>
           </a:xfrm>
           <a:prstGeom prst="rect">
             <a:avLst/>
@@ -7060,13 +9193,13 @@
           <a:p>
             <a:pPr algn="l"/>
             <a:r>
-              <a:rPr sz="3600" b="1">
-                <a:solidFill>
-                  <a:srgbClr val="FFFFFF"/>
-                </a:solidFill>
-                <a:latin typeface="Calibri"/>
-              </a:rPr>
-              <a:t>The Hook</a:t>
+              <a:rPr sz="3600" b="1" i="0">
+                <a:solidFill>
+                  <a:srgbClr val="1F1E1D"/>
+                </a:solidFill>
+                <a:latin typeface="Georgia"/>
+              </a:rPr>
+              <a:t>Parameters and Scenarios</a:t>
             </a:r>
           </a:p>
         </p:txBody>
@@ -7079,8 +9212,8 @@
         </p:nvSpPr>
         <p:spPr>
           <a:xfrm>
-            <a:off x="700000" y="2000000"/>
-            <a:ext cx="11933333" cy="1800000"/>
+            <a:off x="700000" y="1900000"/>
+            <a:ext cx="550000" cy="550000"/>
           </a:xfrm>
           <a:prstGeom prst="rect">
             <a:avLst/>
@@ -7095,13 +9228,13 @@
           <a:p>
             <a:pPr algn="l"/>
             <a:r>
-              <a:rPr sz="8800" b="1">
-                <a:solidFill>
-                  <a:srgbClr val="3EE6C5"/>
-                </a:solidFill>
-                <a:latin typeface="Calibri"/>
-              </a:rPr>
-              <a:t>3 to 5 million liters</a:t>
+              <a:rPr sz="2800" b="1" i="0">
+                <a:solidFill>
+                  <a:srgbClr val="C15F3C"/>
+                </a:solidFill>
+                <a:latin typeface="Georgia"/>
+              </a:rPr>
+              <a:t>A</a:t>
             </a:r>
           </a:p>
         </p:txBody>
@@ -7114,8 +9247,8 @@
         </p:nvSpPr>
         <p:spPr>
           <a:xfrm>
-            <a:off x="700000" y="3700000"/>
-            <a:ext cx="11933333" cy="500000"/>
+            <a:off x="1500000" y="1960000"/>
+            <a:ext cx="3000000" cy="500000"/>
           </a:xfrm>
           <a:prstGeom prst="rect">
             <a:avLst/>
@@ -7130,13 +9263,13 @@
           <a:p>
             <a:pPr algn="l"/>
             <a:r>
-              <a:rPr sz="2400" b="0">
-                <a:solidFill>
-                  <a:srgbClr val="FFFFFF"/>
-                </a:solidFill>
-                <a:latin typeface="Calibri"/>
-              </a:rPr>
-              <a:t>per day, per hyperscale data center</a:t>
+              <a:rPr sz="2000" b="1" i="0">
+                <a:solidFill>
+                  <a:srgbClr val="1F1E1D"/>
+                </a:solidFill>
+                <a:latin typeface="Georgia"/>
+              </a:rPr>
+              <a:t>Unregulated</a:t>
             </a:r>
           </a:p>
         </p:txBody>
@@ -7149,7 +9282,357 @@
         </p:nvSpPr>
         <p:spPr>
           <a:xfrm>
-            <a:off x="700000" y="4850000"/>
+            <a:off x="4700000" y="1990000"/>
+            <a:ext cx="8000000" cy="500000"/>
+          </a:xfrm>
+          <a:prstGeom prst="rect">
+            <a:avLst/>
+          </a:prstGeom>
+          <a:noFill/>
+        </p:spPr>
+        <p:txBody>
+          <a:bodyPr wrap="square" lIns="0" rIns="0" tIns="0" bIns="0" anchor="t">
+            <a:spAutoFit/>
+          </a:bodyPr>
+          <a:lstStyle/>
+          <a:p>
+            <a:pPr algn="l"/>
+            <a:r>
+              <a:rPr sz="1500" b="0" i="0">
+                <a:solidFill>
+                  <a:srgbClr val="605E5B"/>
+                </a:solidFill>
+                <a:latin typeface="Helvetica Neue"/>
+              </a:rPr>
+              <a:t>No cap, no oversight.</a:t>
+            </a:r>
+          </a:p>
+        </p:txBody>
+      </p:sp>
+      <p:sp>
+        <p:nvSpPr>
+          <p:cNvPr id="7" name="TextBox 6"/>
+          <p:cNvSpPr txBox="1"/>
+          <p:nvPr/>
+        </p:nvSpPr>
+        <p:spPr>
+          <a:xfrm>
+            <a:off x="700000" y="2620000"/>
+            <a:ext cx="550000" cy="550000"/>
+          </a:xfrm>
+          <a:prstGeom prst="rect">
+            <a:avLst/>
+          </a:prstGeom>
+          <a:noFill/>
+        </p:spPr>
+        <p:txBody>
+          <a:bodyPr wrap="square" lIns="0" rIns="0" tIns="0" bIns="0" anchor="t">
+            <a:spAutoFit/>
+          </a:bodyPr>
+          <a:lstStyle/>
+          <a:p>
+            <a:pPr algn="l"/>
+            <a:r>
+              <a:rPr sz="2800" b="1" i="0">
+                <a:solidFill>
+                  <a:srgbClr val="C15F3C"/>
+                </a:solidFill>
+                <a:latin typeface="Georgia"/>
+              </a:rPr>
+              <a:t>B</a:t>
+            </a:r>
+          </a:p>
+        </p:txBody>
+      </p:sp>
+      <p:sp>
+        <p:nvSpPr>
+          <p:cNvPr id="8" name="TextBox 7"/>
+          <p:cNvSpPr txBox="1"/>
+          <p:nvPr/>
+        </p:nvSpPr>
+        <p:spPr>
+          <a:xfrm>
+            <a:off x="1500000" y="2680000"/>
+            <a:ext cx="3000000" cy="500000"/>
+          </a:xfrm>
+          <a:prstGeom prst="rect">
+            <a:avLst/>
+          </a:prstGeom>
+          <a:noFill/>
+        </p:spPr>
+        <p:txBody>
+          <a:bodyPr wrap="square" lIns="0" rIns="0" tIns="0" bIns="0" anchor="t">
+            <a:spAutoFit/>
+          </a:bodyPr>
+          <a:lstStyle/>
+          <a:p>
+            <a:pPr algn="l"/>
+            <a:r>
+              <a:rPr sz="2000" b="1" i="0">
+                <a:solidFill>
+                  <a:srgbClr val="1F1E1D"/>
+                </a:solidFill>
+                <a:latin typeface="Georgia"/>
+              </a:rPr>
+              <a:t>Reactive cap</a:t>
+            </a:r>
+          </a:p>
+        </p:txBody>
+      </p:sp>
+      <p:sp>
+        <p:nvSpPr>
+          <p:cNvPr id="9" name="TextBox 8"/>
+          <p:cNvSpPr txBox="1"/>
+          <p:nvPr/>
+        </p:nvSpPr>
+        <p:spPr>
+          <a:xfrm>
+            <a:off x="4700000" y="2710000"/>
+            <a:ext cx="8000000" cy="500000"/>
+          </a:xfrm>
+          <a:prstGeom prst="rect">
+            <a:avLst/>
+          </a:prstGeom>
+          <a:noFill/>
+        </p:spPr>
+        <p:txBody>
+          <a:bodyPr wrap="square" lIns="0" rIns="0" tIns="0" bIns="0" anchor="t">
+            <a:spAutoFit/>
+          </a:bodyPr>
+          <a:lstStyle/>
+          <a:p>
+            <a:pPr algn="l"/>
+            <a:r>
+              <a:rPr sz="1500" b="0" i="0">
+                <a:solidFill>
+                  <a:srgbClr val="605E5B"/>
+                </a:solidFill>
+                <a:latin typeface="Helvetica Neue"/>
+              </a:rPr>
+              <a:t>Cap triggers at 30% basin storage.</a:t>
+            </a:r>
+          </a:p>
+        </p:txBody>
+      </p:sp>
+      <p:sp>
+        <p:nvSpPr>
+          <p:cNvPr id="10" name="TextBox 9"/>
+          <p:cNvSpPr txBox="1"/>
+          <p:nvPr/>
+        </p:nvSpPr>
+        <p:spPr>
+          <a:xfrm>
+            <a:off x="700000" y="3340000"/>
+            <a:ext cx="550000" cy="550000"/>
+          </a:xfrm>
+          <a:prstGeom prst="rect">
+            <a:avLst/>
+          </a:prstGeom>
+          <a:noFill/>
+        </p:spPr>
+        <p:txBody>
+          <a:bodyPr wrap="square" lIns="0" rIns="0" tIns="0" bIns="0" anchor="t">
+            <a:spAutoFit/>
+          </a:bodyPr>
+          <a:lstStyle/>
+          <a:p>
+            <a:pPr algn="l"/>
+            <a:r>
+              <a:rPr sz="2800" b="1" i="0">
+                <a:solidFill>
+                  <a:srgbClr val="C15F3C"/>
+                </a:solidFill>
+                <a:latin typeface="Georgia"/>
+              </a:rPr>
+              <a:t>C</a:t>
+            </a:r>
+          </a:p>
+        </p:txBody>
+      </p:sp>
+      <p:sp>
+        <p:nvSpPr>
+          <p:cNvPr id="11" name="TextBox 10"/>
+          <p:cNvSpPr txBox="1"/>
+          <p:nvPr/>
+        </p:nvSpPr>
+        <p:spPr>
+          <a:xfrm>
+            <a:off x="1500000" y="3400000"/>
+            <a:ext cx="3000000" cy="500000"/>
+          </a:xfrm>
+          <a:prstGeom prst="rect">
+            <a:avLst/>
+          </a:prstGeom>
+          <a:noFill/>
+        </p:spPr>
+        <p:txBody>
+          <a:bodyPr wrap="square" lIns="0" rIns="0" tIns="0" bIns="0" anchor="t">
+            <a:spAutoFit/>
+          </a:bodyPr>
+          <a:lstStyle/>
+          <a:p>
+            <a:pPr algn="l"/>
+            <a:r>
+              <a:rPr sz="2000" b="1" i="0">
+                <a:solidFill>
+                  <a:srgbClr val="1F1E1D"/>
+                </a:solidFill>
+                <a:latin typeface="Georgia"/>
+              </a:rPr>
+              <a:t>Proactive cap</a:t>
+            </a:r>
+          </a:p>
+        </p:txBody>
+      </p:sp>
+      <p:sp>
+        <p:nvSpPr>
+          <p:cNvPr id="12" name="TextBox 11"/>
+          <p:cNvSpPr txBox="1"/>
+          <p:nvPr/>
+        </p:nvSpPr>
+        <p:spPr>
+          <a:xfrm>
+            <a:off x="4700000" y="3430000"/>
+            <a:ext cx="8000000" cy="500000"/>
+          </a:xfrm>
+          <a:prstGeom prst="rect">
+            <a:avLst/>
+          </a:prstGeom>
+          <a:noFill/>
+        </p:spPr>
+        <p:txBody>
+          <a:bodyPr wrap="square" lIns="0" rIns="0" tIns="0" bIns="0" anchor="t">
+            <a:spAutoFit/>
+          </a:bodyPr>
+          <a:lstStyle/>
+          <a:p>
+            <a:pPr algn="l"/>
+            <a:r>
+              <a:rPr sz="1500" b="0" i="0">
+                <a:solidFill>
+                  <a:srgbClr val="605E5B"/>
+                </a:solidFill>
+                <a:latin typeface="Helvetica Neue"/>
+              </a:rPr>
+              <a:t>15 ML/day from t=0.</a:t>
+            </a:r>
+          </a:p>
+        </p:txBody>
+      </p:sp>
+      <p:sp>
+        <p:nvSpPr>
+          <p:cNvPr id="13" name="TextBox 12"/>
+          <p:cNvSpPr txBox="1"/>
+          <p:nvPr/>
+        </p:nvSpPr>
+        <p:spPr>
+          <a:xfrm>
+            <a:off x="700000" y="4060000"/>
+            <a:ext cx="550000" cy="550000"/>
+          </a:xfrm>
+          <a:prstGeom prst="rect">
+            <a:avLst/>
+          </a:prstGeom>
+          <a:noFill/>
+        </p:spPr>
+        <p:txBody>
+          <a:bodyPr wrap="square" lIns="0" rIns="0" tIns="0" bIns="0" anchor="t">
+            <a:spAutoFit/>
+          </a:bodyPr>
+          <a:lstStyle/>
+          <a:p>
+            <a:pPr algn="l"/>
+            <a:r>
+              <a:rPr sz="2800" b="1" i="0">
+                <a:solidFill>
+                  <a:srgbClr val="C15F3C"/>
+                </a:solidFill>
+                <a:latin typeface="Georgia"/>
+              </a:rPr>
+              <a:t>D</a:t>
+            </a:r>
+          </a:p>
+        </p:txBody>
+      </p:sp>
+      <p:sp>
+        <p:nvSpPr>
+          <p:cNvPr id="14" name="TextBox 13"/>
+          <p:cNvSpPr txBox="1"/>
+          <p:nvPr/>
+        </p:nvSpPr>
+        <p:spPr>
+          <a:xfrm>
+            <a:off x="1500000" y="4120000"/>
+            <a:ext cx="3000000" cy="500000"/>
+          </a:xfrm>
+          <a:prstGeom prst="rect">
+            <a:avLst/>
+          </a:prstGeom>
+          <a:noFill/>
+        </p:spPr>
+        <p:txBody>
+          <a:bodyPr wrap="square" lIns="0" rIns="0" tIns="0" bIns="0" anchor="t">
+            <a:spAutoFit/>
+          </a:bodyPr>
+          <a:lstStyle/>
+          <a:p>
+            <a:pPr algn="l"/>
+            <a:r>
+              <a:rPr sz="2000" b="1" i="0">
+                <a:solidFill>
+                  <a:srgbClr val="1F1E1D"/>
+                </a:solidFill>
+                <a:latin typeface="Georgia"/>
+              </a:rPr>
+              <a:t>Staggered entry</a:t>
+            </a:r>
+          </a:p>
+        </p:txBody>
+      </p:sp>
+      <p:sp>
+        <p:nvSpPr>
+          <p:cNvPr id="15" name="TextBox 14"/>
+          <p:cNvSpPr txBox="1"/>
+          <p:nvPr/>
+        </p:nvSpPr>
+        <p:spPr>
+          <a:xfrm>
+            <a:off x="4700000" y="4150000"/>
+            <a:ext cx="8000000" cy="500000"/>
+          </a:xfrm>
+          <a:prstGeom prst="rect">
+            <a:avLst/>
+          </a:prstGeom>
+          <a:noFill/>
+        </p:spPr>
+        <p:txBody>
+          <a:bodyPr wrap="square" lIns="0" rIns="0" tIns="0" bIns="0" anchor="t">
+            <a:spAutoFit/>
+          </a:bodyPr>
+          <a:lstStyle/>
+          <a:p>
+            <a:pPr algn="l"/>
+            <a:r>
+              <a:rPr sz="1500" b="0" i="0">
+                <a:solidFill>
+                  <a:srgbClr val="605E5B"/>
+                </a:solidFill>
+                <a:latin typeface="Helvetica Neue"/>
+              </a:rPr>
+              <a:t>DCs come online in years 0, 2, 4, 6.</a:t>
+            </a:r>
+          </a:p>
+        </p:txBody>
+      </p:sp>
+      <p:sp>
+        <p:nvSpPr>
+          <p:cNvPr id="16" name="TextBox 15"/>
+          <p:cNvSpPr txBox="1"/>
+          <p:nvPr/>
+        </p:nvSpPr>
+        <p:spPr>
+          <a:xfrm>
+            <a:off x="700000" y="5900000"/>
             <a:ext cx="11933333" cy="900000"/>
           </a:xfrm>
           <a:prstGeom prst="rect">
@@ -7165,27 +9648,27 @@
           <a:p>
             <a:pPr algn="l"/>
             <a:r>
-              <a:rPr sz="2800" b="1">
-                <a:solidFill>
-                  <a:srgbClr val="E6A532"/>
-                </a:solidFill>
-                <a:latin typeface="Calibri"/>
-              </a:rPr>
-              <a:t>And nobody is modeling the basin-level collisions.</a:t>
-            </a:r>
-          </a:p>
-        </p:txBody>
-      </p:sp>
-      <p:sp>
-        <p:nvSpPr>
-          <p:cNvPr id="7" name="TextBox 6"/>
-          <p:cNvSpPr txBox="1"/>
-          <p:nvPr/>
-        </p:nvSpPr>
-        <p:spPr>
-          <a:xfrm>
-            <a:off x="700000" y="5800000"/>
-            <a:ext cx="11933333" cy="900000"/>
+              <a:rPr sz="1400" b="0" i="1">
+                <a:solidFill>
+                  <a:srgbClr val="C15F3C"/>
+                </a:solidFill>
+                <a:latin typeface="Georgia"/>
+              </a:rPr>
+              <a:t>Matched-seed design: every scenario sees the same 50 random seeds, so differences are policy, not luck.</a:t>
+            </a:r>
+          </a:p>
+        </p:txBody>
+      </p:sp>
+      <p:sp>
+        <p:nvSpPr>
+          <p:cNvPr id="17" name="TextBox 16"/>
+          <p:cNvSpPr txBox="1"/>
+          <p:nvPr/>
+        </p:nvSpPr>
+        <p:spPr>
+          <a:xfrm>
+            <a:off x="700000" y="7120000"/>
+            <a:ext cx="2500000" cy="300000"/>
           </a:xfrm>
           <a:prstGeom prst="rect">
             <a:avLst/>
@@ -7200,27 +9683,27 @@
           <a:p>
             <a:pPr algn="l"/>
             <a:r>
-              <a:rPr sz="1400" b="0">
-                <a:solidFill>
-                  <a:srgbClr val="B6C2D9"/>
-                </a:solidFill>
-                <a:latin typeface="Calibri"/>
-              </a:rPr>
-              <a:t>Source: Li et al. (2023), "Making AI Less Thirsty"</a:t>
-            </a:r>
-          </a:p>
-        </p:txBody>
-      </p:sp>
-      <p:sp>
-        <p:nvSpPr>
-          <p:cNvPr id="8" name="TextBox 7"/>
-          <p:cNvSpPr txBox="1"/>
-          <p:nvPr/>
-        </p:nvSpPr>
-        <p:spPr>
-          <a:xfrm>
-            <a:off x="11133333" y="7050000"/>
-            <a:ext cx="1800000" cy="350000"/>
+              <a:rPr sz="900" b="0" i="0">
+                <a:solidFill>
+                  <a:srgbClr val="605E5B"/>
+                </a:solidFill>
+                <a:latin typeface="Helvetica Neue"/>
+              </a:rPr>
+              <a:t>PARCHED</a:t>
+            </a:r>
+          </a:p>
+        </p:txBody>
+      </p:sp>
+      <p:sp>
+        <p:nvSpPr>
+          <p:cNvPr id="18" name="TextBox 17"/>
+          <p:cNvSpPr txBox="1"/>
+          <p:nvPr/>
+        </p:nvSpPr>
+        <p:spPr>
+          <a:xfrm>
+            <a:off x="11133333" y="7120000"/>
+            <a:ext cx="1500000" cy="300000"/>
           </a:xfrm>
           <a:prstGeom prst="rect">
             <a:avLst/>
@@ -7235,13 +9718,13 @@
           <a:p>
             <a:pPr algn="r"/>
             <a:r>
-              <a:rPr sz="1000" b="0">
-                <a:solidFill>
-                  <a:srgbClr val="B6C2D9"/>
-                </a:solidFill>
-                <a:latin typeface="Calibri"/>
-              </a:rPr>
-              <a:t>PARCHED   |   2 / 14</a:t>
+              <a:rPr sz="900" b="0" i="0">
+                <a:solidFill>
+                  <a:srgbClr val="605E5B"/>
+                </a:solidFill>
+                <a:latin typeface="Helvetica Neue"/>
+              </a:rPr>
+              <a:t>7 / 14</a:t>
             </a:r>
           </a:p>
         </p:txBody>
@@ -7254,13 +9737,13 @@
 </p:sld>
 </file>
 
-<file path=ppt/slides/slide3.xml><?xml version="1.0" encoding="utf-8"?>
+<file path=ppt/slides/slide8.xml><?xml version="1.0" encoding="utf-8"?>
 <p:sld xmlns:a="http://schemas.openxmlformats.org/drawingml/2006/main" xmlns:p="http://schemas.openxmlformats.org/presentationml/2006/main" xmlns:r="http://schemas.openxmlformats.org/officeDocument/2006/relationships">
   <p:cSld>
     <p:bg>
       <p:bgPr>
         <a:solidFill>
-          <a:srgbClr val="0B1426"/>
+          <a:srgbClr val="FAF9F5"/>
         </a:solidFill>
         <a:effectLst/>
       </p:bgPr>
@@ -7280,14 +9763,14 @@
         </p:nvSpPr>
         <p:spPr>
           <a:xfrm>
-            <a:off x="0" y="0"/>
-            <a:ext cx="110000" cy="7500000"/>
+            <a:off x="700000" y="705740"/>
+            <a:ext cx="110000" cy="110000"/>
           </a:xfrm>
           <a:prstGeom prst="rect">
             <a:avLst/>
           </a:prstGeom>
           <a:solidFill>
-            <a:srgbClr val="3EE6C5"/>
+            <a:srgbClr val="C15F3C"/>
           </a:solidFill>
           <a:ln>
             <a:noFill/>
@@ -7323,8 +9806,8 @@
         </p:nvSpPr>
         <p:spPr>
           <a:xfrm>
-            <a:off x="700000" y="500000"/>
-            <a:ext cx="11933333" cy="800000"/>
+            <a:off x="990000" y="500000"/>
+            <a:ext cx="11643333" cy="900000"/>
           </a:xfrm>
           <a:prstGeom prst="rect">
             <a:avLst/>
@@ -7339,27 +9822,51 @@
           <a:p>
             <a:pPr algn="l"/>
             <a:r>
-              <a:rPr sz="3600" b="1">
-                <a:solidFill>
-                  <a:srgbClr val="FFFFFF"/>
-                </a:solidFill>
-                <a:latin typeface="Calibri"/>
-              </a:rPr>
-              <a:t>Problem and Research Question</a:t>
-            </a:r>
-          </a:p>
-        </p:txBody>
-      </p:sp>
-      <p:sp>
-        <p:nvSpPr>
-          <p:cNvPr id="4" name="TextBox 3"/>
-          <p:cNvSpPr txBox="1"/>
-          <p:nvPr/>
-        </p:nvSpPr>
-        <p:spPr>
-          <a:xfrm>
-            <a:off x="700000" y="1500000"/>
-            <a:ext cx="5800000" cy="400000"/>
+              <a:rPr sz="3600" b="1" i="0">
+                <a:solidFill>
+                  <a:srgbClr val="1F1E1D"/>
+                </a:solidFill>
+                <a:latin typeface="Georgia"/>
+              </a:rPr>
+              <a:t>How To Read The Simulation</a:t>
+            </a:r>
+          </a:p>
+        </p:txBody>
+      </p:sp>
+      <p:pic>
+        <p:nvPicPr>
+          <p:cNvPr id="4" name="Picture 3" descr="fig_basin_timeseries.png"/>
+          <p:cNvPicPr>
+            <a:picLocks noChangeAspect="1"/>
+          </p:cNvPicPr>
+          <p:nvPr/>
+        </p:nvPicPr>
+        <p:blipFill>
+          <a:blip r:embed="rId2"/>
+          <a:stretch>
+            <a:fillRect/>
+          </a:stretch>
+        </p:blipFill>
+        <p:spPr>
+          <a:xfrm>
+            <a:off x="700000" y="1750000"/>
+            <a:ext cx="7573588" cy="4600000"/>
+          </a:xfrm>
+          <a:prstGeom prst="rect">
+            <a:avLst/>
+          </a:prstGeom>
+        </p:spPr>
+      </p:pic>
+      <p:sp>
+        <p:nvSpPr>
+          <p:cNvPr id="5" name="TextBox 4"/>
+          <p:cNvSpPr txBox="1"/>
+          <p:nvPr/>
+        </p:nvSpPr>
+        <p:spPr>
+          <a:xfrm>
+            <a:off x="9300000" y="1800000"/>
+            <a:ext cx="3500000" cy="400000"/>
           </a:xfrm>
           <a:prstGeom prst="rect">
             <a:avLst/>
@@ -7374,161 +9881,13 @@
           <a:p>
             <a:pPr algn="l"/>
             <a:r>
-              <a:rPr sz="1400" b="1">
-                <a:solidFill>
-                  <a:srgbClr val="3EE6C5"/>
-                </a:solidFill>
-                <a:latin typeface="Calibri"/>
-              </a:rPr>
-              <a:t>THE SETUP</a:t>
-            </a:r>
-          </a:p>
-        </p:txBody>
-      </p:sp>
-      <p:sp>
-        <p:nvSpPr>
-          <p:cNvPr id="5" name="TextBox 4"/>
-          <p:cNvSpPr txBox="1"/>
-          <p:nvPr/>
-        </p:nvSpPr>
-        <p:spPr>
-          <a:xfrm>
-            <a:off x="700000" y="1950000"/>
-            <a:ext cx="5800000" cy="3800000"/>
-          </a:xfrm>
-          <a:prstGeom prst="rect">
-            <a:avLst/>
-          </a:prstGeom>
-          <a:noFill/>
-        </p:spPr>
-        <p:txBody>
-          <a:bodyPr wrap="square" lIns="0" rIns="0" tIns="0" bIns="0" anchor="t">
-            <a:spAutoFit/>
-          </a:bodyPr>
-          <a:lstStyle/>
-          <a:p>
-            <a:pPr algn="l">
-              <a:lnSpc>
-                <a:spcPct val="125000"/>
-              </a:lnSpc>
-            </a:pPr>
-            <a:r>
-              <a:rPr sz="2000" b="1">
-                <a:solidFill>
-                  <a:srgbClr val="3EE6C5"/>
-                </a:solidFill>
-                <a:latin typeface="Calibri"/>
-              </a:rPr>
-              <a:t>▸  </a:t>
-            </a:r>
-            <a:r>
-              <a:rPr sz="2000">
-                <a:solidFill>
-                  <a:srgbClr val="FFFFFF"/>
-                </a:solidFill>
-                <a:latin typeface="Calibri"/>
-              </a:rPr>
-              <a:t>One shared freshwater basin (30 BL capacity)</a:t>
-            </a:r>
-          </a:p>
-          <a:p>
-            <a:pPr algn="l">
-              <a:lnSpc>
-                <a:spcPct val="125000"/>
-              </a:lnSpc>
-            </a:pPr>
-            <a:r>
-              <a:rPr sz="2000" b="1">
-                <a:solidFill>
-                  <a:srgbClr val="3EE6C5"/>
-                </a:solidFill>
-                <a:latin typeface="Calibri"/>
-              </a:rPr>
-              <a:t>▸  </a:t>
-            </a:r>
-            <a:r>
-              <a:rPr sz="2000">
-                <a:solidFill>
-                  <a:srgbClr val="FFFFFF"/>
-                </a:solidFill>
-                <a:latin typeface="Calibri"/>
-              </a:rPr>
-              <a:t>Multiple data centers competing for cooling water</a:t>
-            </a:r>
-          </a:p>
-          <a:p>
-            <a:pPr algn="l">
-              <a:lnSpc>
-                <a:spcPct val="125000"/>
-              </a:lnSpc>
-            </a:pPr>
-            <a:r>
-              <a:rPr sz="2000" b="1">
-                <a:solidFill>
-                  <a:srgbClr val="3EE6C5"/>
-                </a:solidFill>
-                <a:latin typeface="Calibri"/>
-              </a:rPr>
-              <a:t>▸  </a:t>
-            </a:r>
-            <a:r>
-              <a:rPr sz="2000">
-                <a:solidFill>
-                  <a:srgbClr val="FFFFFF"/>
-                </a:solidFill>
-                <a:latin typeface="Calibri"/>
-              </a:rPr>
-              <a:t>Residential demand (~100k people)</a:t>
-            </a:r>
-          </a:p>
-          <a:p>
-            <a:pPr algn="l">
-              <a:lnSpc>
-                <a:spcPct val="125000"/>
-              </a:lnSpc>
-            </a:pPr>
-            <a:r>
-              <a:rPr sz="2000" b="1">
-                <a:solidFill>
-                  <a:srgbClr val="3EE6C5"/>
-                </a:solidFill>
-                <a:latin typeface="Calibri"/>
-              </a:rPr>
-              <a:t>▸  </a:t>
-            </a:r>
-            <a:r>
-              <a:rPr sz="2000">
-                <a:solidFill>
-                  <a:srgbClr val="FFFFFF"/>
-                </a:solidFill>
-                <a:latin typeface="Calibri"/>
-              </a:rPr>
-              <a:t>Agriculture (rainfed and irrigated fields)</a:t>
-            </a:r>
-          </a:p>
-          <a:p>
-            <a:pPr algn="l">
-              <a:lnSpc>
-                <a:spcPct val="125000"/>
-              </a:lnSpc>
-            </a:pPr>
-            <a:r>
-              <a:rPr sz="2000" b="1">
-                <a:solidFill>
-                  <a:srgbClr val="3EE6C5"/>
-                </a:solidFill>
-                <a:latin typeface="Calibri"/>
-              </a:rPr>
-              <a:t>▸  </a:t>
-            </a:r>
-            <a:r>
-              <a:rPr sz="2000">
-                <a:solidFill>
-                  <a:srgbClr val="FFFFFF"/>
-                </a:solidFill>
-                <a:latin typeface="Calibri"/>
-              </a:rPr>
-              <a:t>A regulator with delayed observability</a:t>
+              <a:rPr sz="1100" b="1" i="0">
+                <a:solidFill>
+                  <a:srgbClr val="C15F3C"/>
+                </a:solidFill>
+                <a:latin typeface="Helvetica Neue"/>
+              </a:rPr>
+              <a:t>WHAT TO SEE</a:t>
             </a:r>
           </a:p>
         </p:txBody>
@@ -7541,8 +9900,8 @@
         </p:nvSpPr>
         <p:spPr>
           <a:xfrm>
-            <a:off x="7000000" y="1500000"/>
-            <a:ext cx="5800000" cy="400000"/>
+            <a:off x="9300000" y="2250000"/>
+            <a:ext cx="3500000" cy="400000"/>
           </a:xfrm>
           <a:prstGeom prst="rect">
             <a:avLst/>
@@ -7557,13 +9916,13 @@
           <a:p>
             <a:pPr algn="l"/>
             <a:r>
-              <a:rPr sz="1400" b="1">
-                <a:solidFill>
-                  <a:srgbClr val="E6A532"/>
-                </a:solidFill>
-                <a:latin typeface="Calibri"/>
-              </a:rPr>
-              <a:t>THE QUESTION</a:t>
+              <a:rPr sz="1700" b="1" i="0">
+                <a:solidFill>
+                  <a:srgbClr val="1F1E1D"/>
+                </a:solidFill>
+                <a:latin typeface="Georgia"/>
+              </a:rPr>
+              <a:t>A and B</a:t>
             </a:r>
           </a:p>
         </p:txBody>
@@ -7576,8 +9935,8 @@
         </p:nvSpPr>
         <p:spPr>
           <a:xfrm>
-            <a:off x="7000000" y="1950000"/>
-            <a:ext cx="5800000" cy="2500000"/>
+            <a:off x="9300000" y="2600000"/>
+            <a:ext cx="3500000" cy="900000"/>
           </a:xfrm>
           <a:prstGeom prst="rect">
             <a:avLst/>
@@ -7592,13 +9951,13 @@
           <a:p>
             <a:pPr algn="l"/>
             <a:r>
-              <a:rPr sz="2600" b="1">
-                <a:solidFill>
-                  <a:srgbClr val="FFFFFF"/>
-                </a:solidFill>
-                <a:latin typeface="Calibri"/>
-              </a:rPr>
-              <a:t>What happens when self-interested data centers, blind to each other, share a finite basin?</a:t>
+              <a:rPr sz="1200" b="0" i="0">
+                <a:solidFill>
+                  <a:srgbClr val="605E5B"/>
+                </a:solidFill>
+                <a:latin typeface="Helvetica Neue"/>
+              </a:rPr>
+              <a:t>Identical trajectory. Reactive cap fires after the cliff.</a:t>
             </a:r>
           </a:p>
         </p:txBody>
@@ -7611,8 +9970,8 @@
         </p:nvSpPr>
         <p:spPr>
           <a:xfrm>
-            <a:off x="7000000" y="4700000"/>
-            <a:ext cx="5800000" cy="1500000"/>
+            <a:off x="9300000" y="3550000"/>
+            <a:ext cx="3500000" cy="400000"/>
           </a:xfrm>
           <a:prstGeom prst="rect">
             <a:avLst/>
@@ -7627,13 +9986,13 @@
           <a:p>
             <a:pPr algn="l"/>
             <a:r>
-              <a:rPr sz="1800" b="0">
-                <a:solidFill>
-                  <a:srgbClr val="B6C2D9"/>
-                </a:solidFill>
-                <a:latin typeface="Calibri"/>
-              </a:rPr>
-              <a:t>No coordination. No shared meter. No price signal until things break.</a:t>
+              <a:rPr sz="1700" b="1" i="0">
+                <a:solidFill>
+                  <a:srgbClr val="1F1E1D"/>
+                </a:solidFill>
+                <a:latin typeface="Georgia"/>
+              </a:rPr>
+              <a:t>C</a:t>
             </a:r>
           </a:p>
         </p:txBody>
@@ -7646,8 +10005,148 @@
         </p:nvSpPr>
         <p:spPr>
           <a:xfrm>
-            <a:off x="11133333" y="7050000"/>
-            <a:ext cx="1800000" cy="350000"/>
+            <a:off x="9300000" y="3900000"/>
+            <a:ext cx="3500000" cy="900000"/>
+          </a:xfrm>
+          <a:prstGeom prst="rect">
+            <a:avLst/>
+          </a:prstGeom>
+          <a:noFill/>
+        </p:spPr>
+        <p:txBody>
+          <a:bodyPr wrap="square" lIns="0" rIns="0" tIns="0" bIns="0" anchor="t">
+            <a:spAutoFit/>
+          </a:bodyPr>
+          <a:lstStyle/>
+          <a:p>
+            <a:pPr algn="l"/>
+            <a:r>
+              <a:rPr sz="1200" b="0" i="0">
+                <a:solidFill>
+                  <a:srgbClr val="605E5B"/>
+                </a:solidFill>
+                <a:latin typeface="Helvetica Neue"/>
+              </a:rPr>
+              <a:t>Holds above 90% for the entire decade.</a:t>
+            </a:r>
+          </a:p>
+        </p:txBody>
+      </p:sp>
+      <p:sp>
+        <p:nvSpPr>
+          <p:cNvPr id="10" name="TextBox 9"/>
+          <p:cNvSpPr txBox="1"/>
+          <p:nvPr/>
+        </p:nvSpPr>
+        <p:spPr>
+          <a:xfrm>
+            <a:off x="9300000" y="4850000"/>
+            <a:ext cx="3500000" cy="400000"/>
+          </a:xfrm>
+          <a:prstGeom prst="rect">
+            <a:avLst/>
+          </a:prstGeom>
+          <a:noFill/>
+        </p:spPr>
+        <p:txBody>
+          <a:bodyPr wrap="square" lIns="0" rIns="0" tIns="0" bIns="0" anchor="t">
+            <a:spAutoFit/>
+          </a:bodyPr>
+          <a:lstStyle/>
+          <a:p>
+            <a:pPr algn="l"/>
+            <a:r>
+              <a:rPr sz="1700" b="1" i="0">
+                <a:solidFill>
+                  <a:srgbClr val="1F1E1D"/>
+                </a:solidFill>
+                <a:latin typeface="Georgia"/>
+              </a:rPr>
+              <a:t>D</a:t>
+            </a:r>
+          </a:p>
+        </p:txBody>
+      </p:sp>
+      <p:sp>
+        <p:nvSpPr>
+          <p:cNvPr id="11" name="TextBox 10"/>
+          <p:cNvSpPr txBox="1"/>
+          <p:nvPr/>
+        </p:nvSpPr>
+        <p:spPr>
+          <a:xfrm>
+            <a:off x="9300000" y="5200000"/>
+            <a:ext cx="3500000" cy="900000"/>
+          </a:xfrm>
+          <a:prstGeom prst="rect">
+            <a:avLst/>
+          </a:prstGeom>
+          <a:noFill/>
+        </p:spPr>
+        <p:txBody>
+          <a:bodyPr wrap="square" lIns="0" rIns="0" tIns="0" bIns="0" anchor="t">
+            <a:spAutoFit/>
+          </a:bodyPr>
+          <a:lstStyle/>
+          <a:p>
+            <a:pPr algn="l"/>
+            <a:r>
+              <a:rPr sz="1200" b="0" i="0">
+                <a:solidFill>
+                  <a:srgbClr val="605E5B"/>
+                </a:solidFill>
+                <a:latin typeface="Helvetica Neue"/>
+              </a:rPr>
+              <a:t>Delays the collapse but the endpoint is unchanged.</a:t>
+            </a:r>
+          </a:p>
+        </p:txBody>
+      </p:sp>
+      <p:sp>
+        <p:nvSpPr>
+          <p:cNvPr id="12" name="TextBox 11"/>
+          <p:cNvSpPr txBox="1"/>
+          <p:nvPr/>
+        </p:nvSpPr>
+        <p:spPr>
+          <a:xfrm>
+            <a:off x="700000" y="7120000"/>
+            <a:ext cx="2500000" cy="300000"/>
+          </a:xfrm>
+          <a:prstGeom prst="rect">
+            <a:avLst/>
+          </a:prstGeom>
+          <a:noFill/>
+        </p:spPr>
+        <p:txBody>
+          <a:bodyPr wrap="square" lIns="0" rIns="0" tIns="0" bIns="0" anchor="t">
+            <a:spAutoFit/>
+          </a:bodyPr>
+          <a:lstStyle/>
+          <a:p>
+            <a:pPr algn="l"/>
+            <a:r>
+              <a:rPr sz="900" b="0" i="0">
+                <a:solidFill>
+                  <a:srgbClr val="605E5B"/>
+                </a:solidFill>
+                <a:latin typeface="Helvetica Neue"/>
+              </a:rPr>
+              <a:t>PARCHED</a:t>
+            </a:r>
+          </a:p>
+        </p:txBody>
+      </p:sp>
+      <p:sp>
+        <p:nvSpPr>
+          <p:cNvPr id="13" name="TextBox 12"/>
+          <p:cNvSpPr txBox="1"/>
+          <p:nvPr/>
+        </p:nvSpPr>
+        <p:spPr>
+          <a:xfrm>
+            <a:off x="11133333" y="7120000"/>
+            <a:ext cx="1500000" cy="300000"/>
           </a:xfrm>
           <a:prstGeom prst="rect">
             <a:avLst/>
@@ -7662,13 +10161,13 @@
           <a:p>
             <a:pPr algn="r"/>
             <a:r>
-              <a:rPr sz="1000" b="0">
-                <a:solidFill>
-                  <a:srgbClr val="B6C2D9"/>
-                </a:solidFill>
-                <a:latin typeface="Calibri"/>
-              </a:rPr>
-              <a:t>PARCHED   |   3 / 14</a:t>
+              <a:rPr sz="900" b="0" i="0">
+                <a:solidFill>
+                  <a:srgbClr val="605E5B"/>
+                </a:solidFill>
+                <a:latin typeface="Helvetica Neue"/>
+              </a:rPr>
+              <a:t>8 / 14</a:t>
             </a:r>
           </a:p>
         </p:txBody>
@@ -7681,13 +10180,13 @@
 </p:sld>
 </file>
 
-<file path=ppt/slides/slide4.xml><?xml version="1.0" encoding="utf-8"?>
+<file path=ppt/slides/slide9.xml><?xml version="1.0" encoding="utf-8"?>
 <p:sld xmlns:a="http://schemas.openxmlformats.org/drawingml/2006/main" xmlns:p="http://schemas.openxmlformats.org/presentationml/2006/main" xmlns:r="http://schemas.openxmlformats.org/officeDocument/2006/relationships">
   <p:cSld>
     <p:bg>
       <p:bgPr>
         <a:solidFill>
-          <a:srgbClr val="0B1426"/>
+          <a:srgbClr val="FAF9F5"/>
         </a:solidFill>
         <a:effectLst/>
       </p:bgPr>
@@ -7707,14 +10206,14 @@
         </p:nvSpPr>
         <p:spPr>
           <a:xfrm>
-            <a:off x="0" y="0"/>
-            <a:ext cx="110000" cy="7500000"/>
+            <a:off x="700000" y="705740"/>
+            <a:ext cx="110000" cy="110000"/>
           </a:xfrm>
           <a:prstGeom prst="rect">
             <a:avLst/>
           </a:prstGeom>
           <a:solidFill>
-            <a:srgbClr val="3EE6C5"/>
+            <a:srgbClr val="C15F3C"/>
           </a:solidFill>
           <a:ln>
             <a:noFill/>
@@ -7750,8 +10249,8 @@
         </p:nvSpPr>
         <p:spPr>
           <a:xfrm>
-            <a:off x="700000" y="500000"/>
-            <a:ext cx="11933333" cy="800000"/>
+            <a:off x="990000" y="500000"/>
+            <a:ext cx="11643333" cy="900000"/>
           </a:xfrm>
           <a:prstGeom prst="rect">
             <a:avLst/>
@@ -7766,1089 +10265,20 @@
           <a:p>
             <a:pPr algn="l"/>
             <a:r>
-              <a:rPr sz="3600" b="1">
-                <a:solidFill>
-                  <a:srgbClr val="FFFFFF"/>
-                </a:solidFill>
-                <a:latin typeface="Calibri"/>
-              </a:rPr>
-              <a:t>Objectives</a:t>
-            </a:r>
-          </a:p>
-        </p:txBody>
-      </p:sp>
-      <p:sp>
-        <p:nvSpPr>
-          <p:cNvPr id="4" name="TextBox 3"/>
-          <p:cNvSpPr txBox="1"/>
-          <p:nvPr/>
-        </p:nvSpPr>
-        <p:spPr>
-          <a:xfrm>
-            <a:off x="700000" y="2000000"/>
-            <a:ext cx="11933333" cy="4000000"/>
-          </a:xfrm>
-          <a:prstGeom prst="rect">
-            <a:avLst/>
-          </a:prstGeom>
-          <a:noFill/>
-        </p:spPr>
-        <p:txBody>
-          <a:bodyPr wrap="square" lIns="0" rIns="0" tIns="0" bIns="0" anchor="t">
-            <a:spAutoFit/>
-          </a:bodyPr>
-          <a:lstStyle/>
-          <a:p>
-            <a:pPr algn="l">
-              <a:lnSpc>
-                <a:spcPct val="160000"/>
-              </a:lnSpc>
-            </a:pPr>
-            <a:r>
-              <a:rPr sz="2600" b="1">
-                <a:solidFill>
-                  <a:srgbClr val="3EE6C5"/>
-                </a:solidFill>
-                <a:latin typeface="Calibri"/>
-              </a:rPr>
-              <a:t>▸  </a:t>
-            </a:r>
-            <a:r>
-              <a:rPr sz="2600">
-                <a:solidFill>
-                  <a:srgbClr val="FFFFFF"/>
-                </a:solidFill>
-                <a:latin typeface="Calibri"/>
-              </a:rPr>
-              <a:t>Build a calibrated agent-based model of basin-level water competition</a:t>
-            </a:r>
-          </a:p>
-          <a:p>
-            <a:pPr algn="l">
-              <a:lnSpc>
-                <a:spcPct val="160000"/>
-              </a:lnSpc>
-            </a:pPr>
-            <a:r>
-              <a:rPr sz="2600" b="1">
-                <a:solidFill>
-                  <a:srgbClr val="3EE6C5"/>
-                </a:solidFill>
-                <a:latin typeface="Calibri"/>
-              </a:rPr>
-              <a:t>▸  </a:t>
-            </a:r>
-            <a:r>
-              <a:rPr sz="2600">
-                <a:solidFill>
-                  <a:srgbClr val="FFFFFF"/>
-                </a:solidFill>
-                <a:latin typeface="Calibri"/>
-              </a:rPr>
-              <a:t>Test three hypotheses about collapse timing, nonlinearity, and policy effect</a:t>
-            </a:r>
-          </a:p>
-          <a:p>
-            <a:pPr algn="l">
-              <a:lnSpc>
-                <a:spcPct val="160000"/>
-              </a:lnSpc>
-            </a:pPr>
-            <a:r>
-              <a:rPr sz="2600" b="1">
-                <a:solidFill>
-                  <a:srgbClr val="3EE6C5"/>
-                </a:solidFill>
-                <a:latin typeface="Calibri"/>
-              </a:rPr>
-              <a:t>▸  </a:t>
-            </a:r>
-            <a:r>
-              <a:rPr sz="2600">
-                <a:solidFill>
-                  <a:srgbClr val="FFFFFF"/>
-                </a:solidFill>
-                <a:latin typeface="Calibri"/>
-              </a:rPr>
-              <a:t>Compare four policy scenarios under matched stochastic conditions</a:t>
-            </a:r>
-          </a:p>
-        </p:txBody>
-      </p:sp>
-      <p:sp>
-        <p:nvSpPr>
-          <p:cNvPr id="5" name="TextBox 4"/>
-          <p:cNvSpPr txBox="1"/>
-          <p:nvPr/>
-        </p:nvSpPr>
-        <p:spPr>
-          <a:xfrm>
-            <a:off x="700000" y="6000000"/>
-            <a:ext cx="11933333" cy="500000"/>
-          </a:xfrm>
-          <a:prstGeom prst="rect">
-            <a:avLst/>
-          </a:prstGeom>
-          <a:noFill/>
-        </p:spPr>
-        <p:txBody>
-          <a:bodyPr wrap="square" lIns="0" rIns="0" tIns="0" bIns="0" anchor="t">
-            <a:spAutoFit/>
-          </a:bodyPr>
-          <a:lstStyle/>
-          <a:p>
-            <a:pPr algn="l"/>
-            <a:r>
-              <a:rPr sz="1800" b="1">
-                <a:solidFill>
-                  <a:srgbClr val="3EE6C5"/>
-                </a:solidFill>
-                <a:latin typeface="Calibri"/>
-              </a:rPr>
-              <a:t>Same seeds, same shocks, different rules.</a:t>
-            </a:r>
-          </a:p>
-        </p:txBody>
-      </p:sp>
-      <p:sp>
-        <p:nvSpPr>
-          <p:cNvPr id="6" name="TextBox 5"/>
-          <p:cNvSpPr txBox="1"/>
-          <p:nvPr/>
-        </p:nvSpPr>
-        <p:spPr>
-          <a:xfrm>
-            <a:off x="11133333" y="7050000"/>
-            <a:ext cx="1800000" cy="350000"/>
-          </a:xfrm>
-          <a:prstGeom prst="rect">
-            <a:avLst/>
-          </a:prstGeom>
-          <a:noFill/>
-        </p:spPr>
-        <p:txBody>
-          <a:bodyPr wrap="square" lIns="0" rIns="0" tIns="0" bIns="0" anchor="t">
-            <a:spAutoFit/>
-          </a:bodyPr>
-          <a:lstStyle/>
-          <a:p>
-            <a:pPr algn="r"/>
-            <a:r>
-              <a:rPr sz="1000" b="0">
-                <a:solidFill>
-                  <a:srgbClr val="B6C2D9"/>
-                </a:solidFill>
-                <a:latin typeface="Calibri"/>
-              </a:rPr>
-              <a:t>PARCHED   |   4 / 14</a:t>
-            </a:r>
-          </a:p>
-        </p:txBody>
-      </p:sp>
-    </p:spTree>
-  </p:cSld>
-  <p:clrMapOvr>
-    <a:masterClrMapping/>
-  </p:clrMapOvr>
-</p:sld>
-</file>
-
-<file path=ppt/slides/slide5.xml><?xml version="1.0" encoding="utf-8"?>
-<p:sld xmlns:a="http://schemas.openxmlformats.org/drawingml/2006/main" xmlns:p="http://schemas.openxmlformats.org/presentationml/2006/main" xmlns:r="http://schemas.openxmlformats.org/officeDocument/2006/relationships">
-  <p:cSld>
-    <p:bg>
-      <p:bgPr>
-        <a:solidFill>
-          <a:srgbClr val="0B1426"/>
-        </a:solidFill>
-        <a:effectLst/>
-      </p:bgPr>
-    </p:bg>
-    <p:spTree>
-      <p:nvGrpSpPr>
-        <p:cNvPr id="1" name=""/>
-        <p:cNvGrpSpPr/>
-        <p:nvPr/>
-      </p:nvGrpSpPr>
-      <p:grpSpPr/>
-      <p:sp>
-        <p:nvSpPr>
-          <p:cNvPr id="2" name="Rectangle 1"/>
-          <p:cNvSpPr/>
-          <p:nvPr/>
-        </p:nvSpPr>
-        <p:spPr>
-          <a:xfrm>
-            <a:off x="0" y="0"/>
-            <a:ext cx="110000" cy="7500000"/>
-          </a:xfrm>
-          <a:prstGeom prst="rect">
-            <a:avLst/>
-          </a:prstGeom>
-          <a:solidFill>
-            <a:srgbClr val="3EE6C5"/>
-          </a:solidFill>
-          <a:ln>
-            <a:noFill/>
-          </a:ln>
-        </p:spPr>
-        <p:style>
-          <a:lnRef idx="1">
-            <a:schemeClr val="accent1"/>
-          </a:lnRef>
-          <a:fillRef idx="3">
-            <a:schemeClr val="accent1"/>
-          </a:fillRef>
-          <a:effectRef idx="2">
-            <a:schemeClr val="accent1"/>
-          </a:effectRef>
-          <a:fontRef idx="minor">
-            <a:schemeClr val="lt1"/>
-          </a:fontRef>
-        </p:style>
-        <p:txBody>
-          <a:bodyPr rtlCol="0" anchor="ctr"/>
-          <a:lstStyle/>
-          <a:p>
-            <a:pPr algn="ctr"/>
-          </a:p>
-        </p:txBody>
-      </p:sp>
-      <p:sp>
-        <p:nvSpPr>
-          <p:cNvPr id="3" name="TextBox 2"/>
-          <p:cNvSpPr txBox="1"/>
-          <p:nvPr/>
-        </p:nvSpPr>
-        <p:spPr>
-          <a:xfrm>
-            <a:off x="700000" y="500000"/>
-            <a:ext cx="11933333" cy="800000"/>
-          </a:xfrm>
-          <a:prstGeom prst="rect">
-            <a:avLst/>
-          </a:prstGeom>
-          <a:noFill/>
-        </p:spPr>
-        <p:txBody>
-          <a:bodyPr wrap="square" lIns="0" rIns="0" tIns="0" bIns="0" anchor="t">
-            <a:spAutoFit/>
-          </a:bodyPr>
-          <a:lstStyle/>
-          <a:p>
-            <a:pPr algn="l"/>
-            <a:r>
-              <a:rPr sz="3600" b="1">
-                <a:solidFill>
-                  <a:srgbClr val="FFFFFF"/>
-                </a:solidFill>
-                <a:latin typeface="Calibri"/>
-              </a:rPr>
-              <a:t>Hypotheses</a:t>
-            </a:r>
-          </a:p>
-        </p:txBody>
-      </p:sp>
-      <p:sp>
-        <p:nvSpPr>
-          <p:cNvPr id="4" name="Rectangle 3"/>
-          <p:cNvSpPr/>
-          <p:nvPr/>
-        </p:nvSpPr>
-        <p:spPr>
-          <a:xfrm>
-            <a:off x="700000" y="1700000"/>
-            <a:ext cx="4000000" cy="4400000"/>
-          </a:xfrm>
-          <a:prstGeom prst="rect">
-            <a:avLst/>
-          </a:prstGeom>
-          <a:solidFill>
-            <a:srgbClr val="121F36"/>
-          </a:solidFill>
-          <a:ln w="19050">
-            <a:solidFill>
-              <a:srgbClr val="D9514E"/>
-            </a:solidFill>
-          </a:ln>
-        </p:spPr>
-        <p:style>
-          <a:lnRef idx="1">
-            <a:schemeClr val="accent1"/>
-          </a:lnRef>
-          <a:fillRef idx="3">
-            <a:schemeClr val="accent1"/>
-          </a:fillRef>
-          <a:effectRef idx="2">
-            <a:schemeClr val="accent1"/>
-          </a:effectRef>
-          <a:fontRef idx="minor">
-            <a:schemeClr val="lt1"/>
-          </a:fontRef>
-        </p:style>
-        <p:txBody>
-          <a:bodyPr rtlCol="0" anchor="ctr"/>
-          <a:lstStyle/>
-          <a:p>
-            <a:pPr algn="ctr"/>
-          </a:p>
-        </p:txBody>
-      </p:sp>
-      <p:sp>
-        <p:nvSpPr>
-          <p:cNvPr id="5" name="TextBox 4"/>
-          <p:cNvSpPr txBox="1"/>
-          <p:nvPr/>
-        </p:nvSpPr>
-        <p:spPr>
-          <a:xfrm>
-            <a:off x="950000" y="1900000"/>
-            <a:ext cx="3500000" cy="500000"/>
-          </a:xfrm>
-          <a:prstGeom prst="rect">
-            <a:avLst/>
-          </a:prstGeom>
-          <a:noFill/>
-        </p:spPr>
-        <p:txBody>
-          <a:bodyPr wrap="square" lIns="0" rIns="0" tIns="0" bIns="0" anchor="t">
-            <a:spAutoFit/>
-          </a:bodyPr>
-          <a:lstStyle/>
-          <a:p>
-            <a:pPr algn="l"/>
-            <a:r>
-              <a:rPr sz="1600" b="1">
-                <a:solidFill>
-                  <a:srgbClr val="D9514E"/>
-                </a:solidFill>
-                <a:latin typeface="Calibri"/>
-              </a:rPr>
-              <a:t>H1   COLLAPSE</a:t>
-            </a:r>
-          </a:p>
-        </p:txBody>
-      </p:sp>
-      <p:sp>
-        <p:nvSpPr>
-          <p:cNvPr id="6" name="TextBox 5"/>
-          <p:cNvSpPr txBox="1"/>
-          <p:nvPr/>
-        </p:nvSpPr>
-        <p:spPr>
-          <a:xfrm>
-            <a:off x="950000" y="2450000"/>
-            <a:ext cx="3500000" cy="1500000"/>
-          </a:xfrm>
-          <a:prstGeom prst="rect">
-            <a:avLst/>
-          </a:prstGeom>
-          <a:noFill/>
-        </p:spPr>
-        <p:txBody>
-          <a:bodyPr wrap="square" lIns="0" rIns="0" tIns="0" bIns="0" anchor="t">
-            <a:spAutoFit/>
-          </a:bodyPr>
-          <a:lstStyle/>
-          <a:p>
-            <a:pPr algn="l"/>
-            <a:r>
-              <a:rPr sz="2200" b="1">
-                <a:solidFill>
-                  <a:srgbClr val="FFFFFF"/>
-                </a:solidFill>
-                <a:latin typeface="Calibri"/>
-              </a:rPr>
-              <a:t>Unregulated growth collapses the basin in 5 to 8 years.</a:t>
-            </a:r>
-          </a:p>
-        </p:txBody>
-      </p:sp>
-      <p:sp>
-        <p:nvSpPr>
-          <p:cNvPr id="7" name="TextBox 6"/>
-          <p:cNvSpPr txBox="1"/>
-          <p:nvPr/>
-        </p:nvSpPr>
-        <p:spPr>
-          <a:xfrm>
-            <a:off x="950000" y="4100000"/>
-            <a:ext cx="3500000" cy="1800000"/>
-          </a:xfrm>
-          <a:prstGeom prst="rect">
-            <a:avLst/>
-          </a:prstGeom>
-          <a:noFill/>
-        </p:spPr>
-        <p:txBody>
-          <a:bodyPr wrap="square" lIns="0" rIns="0" tIns="0" bIns="0" anchor="t">
-            <a:spAutoFit/>
-          </a:bodyPr>
-          <a:lstStyle/>
-          <a:p>
-            <a:pPr algn="l"/>
-            <a:r>
-              <a:rPr sz="1500" b="0">
-                <a:solidFill>
-                  <a:srgbClr val="B6C2D9"/>
-                </a:solidFill>
-                <a:latin typeface="Calibri"/>
-              </a:rPr>
-              <a:t>Critical-stress crossing under no policy, across 50 replicate runs.</a:t>
-            </a:r>
-          </a:p>
-        </p:txBody>
-      </p:sp>
-      <p:sp>
-        <p:nvSpPr>
-          <p:cNvPr id="8" name="Rectangle 7"/>
-          <p:cNvSpPr/>
-          <p:nvPr/>
-        </p:nvSpPr>
-        <p:spPr>
-          <a:xfrm>
-            <a:off x="4900000" y="1700000"/>
-            <a:ext cx="4000000" cy="4400000"/>
-          </a:xfrm>
-          <a:prstGeom prst="rect">
-            <a:avLst/>
-          </a:prstGeom>
-          <a:solidFill>
-            <a:srgbClr val="121F36"/>
-          </a:solidFill>
-          <a:ln w="19050">
-            <a:solidFill>
-              <a:srgbClr val="E6A532"/>
-            </a:solidFill>
-          </a:ln>
-        </p:spPr>
-        <p:style>
-          <a:lnRef idx="1">
-            <a:schemeClr val="accent1"/>
-          </a:lnRef>
-          <a:fillRef idx="3">
-            <a:schemeClr val="accent1"/>
-          </a:fillRef>
-          <a:effectRef idx="2">
-            <a:schemeClr val="accent1"/>
-          </a:effectRef>
-          <a:fontRef idx="minor">
-            <a:schemeClr val="lt1"/>
-          </a:fontRef>
-        </p:style>
-        <p:txBody>
-          <a:bodyPr rtlCol="0" anchor="ctr"/>
-          <a:lstStyle/>
-          <a:p>
-            <a:pPr algn="ctr"/>
-          </a:p>
-        </p:txBody>
-      </p:sp>
-      <p:sp>
-        <p:nvSpPr>
-          <p:cNvPr id="9" name="TextBox 8"/>
-          <p:cNvSpPr txBox="1"/>
-          <p:nvPr/>
-        </p:nvSpPr>
-        <p:spPr>
-          <a:xfrm>
-            <a:off x="5150000" y="1900000"/>
-            <a:ext cx="3500000" cy="500000"/>
-          </a:xfrm>
-          <a:prstGeom prst="rect">
-            <a:avLst/>
-          </a:prstGeom>
-          <a:noFill/>
-        </p:spPr>
-        <p:txBody>
-          <a:bodyPr wrap="square" lIns="0" rIns="0" tIns="0" bIns="0" anchor="t">
-            <a:spAutoFit/>
-          </a:bodyPr>
-          <a:lstStyle/>
-          <a:p>
-            <a:pPr algn="l"/>
-            <a:r>
-              <a:rPr sz="1600" b="1">
-                <a:solidFill>
-                  <a:srgbClr val="E6A532"/>
-                </a:solidFill>
-                <a:latin typeface="Calibri"/>
-              </a:rPr>
-              <a:t>H2   TIPPING POINT</a:t>
-            </a:r>
-          </a:p>
-        </p:txBody>
-      </p:sp>
-      <p:sp>
-        <p:nvSpPr>
-          <p:cNvPr id="10" name="TextBox 9"/>
-          <p:cNvSpPr txBox="1"/>
-          <p:nvPr/>
-        </p:nvSpPr>
-        <p:spPr>
-          <a:xfrm>
-            <a:off x="5150000" y="2450000"/>
-            <a:ext cx="3500000" cy="1500000"/>
-          </a:xfrm>
-          <a:prstGeom prst="rect">
-            <a:avLst/>
-          </a:prstGeom>
-          <a:noFill/>
-        </p:spPr>
-        <p:txBody>
-          <a:bodyPr wrap="square" lIns="0" rIns="0" tIns="0" bIns="0" anchor="t">
-            <a:spAutoFit/>
-          </a:bodyPr>
-          <a:lstStyle/>
-          <a:p>
-            <a:pPr algn="l"/>
-            <a:r>
-              <a:rPr sz="2200" b="1">
-                <a:solidFill>
-                  <a:srgbClr val="FFFFFF"/>
-                </a:solidFill>
-                <a:latin typeface="Calibri"/>
-              </a:rPr>
-              <a:t>Decline becomes nonlinear once basin storage drops below 40%.</a:t>
-            </a:r>
-          </a:p>
-        </p:txBody>
-      </p:sp>
-      <p:sp>
-        <p:nvSpPr>
-          <p:cNvPr id="11" name="TextBox 10"/>
-          <p:cNvSpPr txBox="1"/>
-          <p:nvPr/>
-        </p:nvSpPr>
-        <p:spPr>
-          <a:xfrm>
-            <a:off x="5150000" y="4100000"/>
-            <a:ext cx="3500000" cy="1800000"/>
-          </a:xfrm>
-          <a:prstGeom prst="rect">
-            <a:avLst/>
-          </a:prstGeom>
-          <a:noFill/>
-        </p:spPr>
-        <p:txBody>
-          <a:bodyPr wrap="square" lIns="0" rIns="0" tIns="0" bIns="0" anchor="t">
-            <a:spAutoFit/>
-          </a:bodyPr>
-          <a:lstStyle/>
-          <a:p>
-            <a:pPr algn="l"/>
-            <a:r>
-              <a:rPr sz="1500" b="0">
-                <a:solidFill>
-                  <a:srgbClr val="B6C2D9"/>
-                </a:solidFill>
-                <a:latin typeface="Calibri"/>
-              </a:rPr>
-              <a:t>Cooling-stress positive feedback amplifies withdrawals as headroom shrinks.</a:t>
-            </a:r>
-          </a:p>
-        </p:txBody>
-      </p:sp>
-      <p:sp>
-        <p:nvSpPr>
-          <p:cNvPr id="12" name="Rectangle 11"/>
-          <p:cNvSpPr/>
-          <p:nvPr/>
-        </p:nvSpPr>
-        <p:spPr>
-          <a:xfrm>
-            <a:off x="9100000" y="1700000"/>
-            <a:ext cx="4000000" cy="4400000"/>
-          </a:xfrm>
-          <a:prstGeom prst="rect">
-            <a:avLst/>
-          </a:prstGeom>
-          <a:solidFill>
-            <a:srgbClr val="121F36"/>
-          </a:solidFill>
-          <a:ln w="19050">
-            <a:solidFill>
-              <a:srgbClr val="3EE6C5"/>
-            </a:solidFill>
-          </a:ln>
-        </p:spPr>
-        <p:style>
-          <a:lnRef idx="1">
-            <a:schemeClr val="accent1"/>
-          </a:lnRef>
-          <a:fillRef idx="3">
-            <a:schemeClr val="accent1"/>
-          </a:fillRef>
-          <a:effectRef idx="2">
-            <a:schemeClr val="accent1"/>
-          </a:effectRef>
-          <a:fontRef idx="minor">
-            <a:schemeClr val="lt1"/>
-          </a:fontRef>
-        </p:style>
-        <p:txBody>
-          <a:bodyPr rtlCol="0" anchor="ctr"/>
-          <a:lstStyle/>
-          <a:p>
-            <a:pPr algn="ctr"/>
-          </a:p>
-        </p:txBody>
-      </p:sp>
-      <p:sp>
-        <p:nvSpPr>
-          <p:cNvPr id="13" name="TextBox 12"/>
-          <p:cNvSpPr txBox="1"/>
-          <p:nvPr/>
-        </p:nvSpPr>
-        <p:spPr>
-          <a:xfrm>
-            <a:off x="9350000" y="1900000"/>
-            <a:ext cx="3500000" cy="500000"/>
-          </a:xfrm>
-          <a:prstGeom prst="rect">
-            <a:avLst/>
-          </a:prstGeom>
-          <a:noFill/>
-        </p:spPr>
-        <p:txBody>
-          <a:bodyPr wrap="square" lIns="0" rIns="0" tIns="0" bIns="0" anchor="t">
-            <a:spAutoFit/>
-          </a:bodyPr>
-          <a:lstStyle/>
-          <a:p>
-            <a:pPr algn="l"/>
-            <a:r>
-              <a:rPr sz="1600" b="1">
-                <a:solidFill>
-                  <a:srgbClr val="3EE6C5"/>
-                </a:solidFill>
-                <a:latin typeface="Calibri"/>
-              </a:rPr>
-              <a:t>H3   POLICY</a:t>
-            </a:r>
-          </a:p>
-        </p:txBody>
-      </p:sp>
-      <p:sp>
-        <p:nvSpPr>
-          <p:cNvPr id="14" name="TextBox 13"/>
-          <p:cNvSpPr txBox="1"/>
-          <p:nvPr/>
-        </p:nvSpPr>
-        <p:spPr>
-          <a:xfrm>
-            <a:off x="9350000" y="2450000"/>
-            <a:ext cx="3500000" cy="1500000"/>
-          </a:xfrm>
-          <a:prstGeom prst="rect">
-            <a:avLst/>
-          </a:prstGeom>
-          <a:noFill/>
-        </p:spPr>
-        <p:txBody>
-          <a:bodyPr wrap="square" lIns="0" rIns="0" tIns="0" bIns="0" anchor="t">
-            <a:spAutoFit/>
-          </a:bodyPr>
-          <a:lstStyle/>
-          <a:p>
-            <a:pPr algn="l"/>
-            <a:r>
-              <a:rPr sz="2200" b="1">
-                <a:solidFill>
-                  <a:srgbClr val="FFFFFF"/>
-                </a:solidFill>
-                <a:latin typeface="Calibri"/>
-              </a:rPr>
-              <a:t>Proactive caps delay critical stress by 40% or more.</a:t>
-            </a:r>
-          </a:p>
-        </p:txBody>
-      </p:sp>
-      <p:sp>
-        <p:nvSpPr>
-          <p:cNvPr id="15" name="TextBox 14"/>
-          <p:cNvSpPr txBox="1"/>
-          <p:nvPr/>
-        </p:nvSpPr>
-        <p:spPr>
-          <a:xfrm>
-            <a:off x="9350000" y="4100000"/>
-            <a:ext cx="3500000" cy="1800000"/>
-          </a:xfrm>
-          <a:prstGeom prst="rect">
-            <a:avLst/>
-          </a:prstGeom>
-          <a:noFill/>
-        </p:spPr>
-        <p:txBody>
-          <a:bodyPr wrap="square" lIns="0" rIns="0" tIns="0" bIns="0" anchor="t">
-            <a:spAutoFit/>
-          </a:bodyPr>
-          <a:lstStyle/>
-          <a:p>
-            <a:pPr algn="l"/>
-            <a:r>
-              <a:rPr sz="1500" b="0">
-                <a:solidFill>
-                  <a:srgbClr val="B6C2D9"/>
-                </a:solidFill>
-                <a:latin typeface="Calibri"/>
-              </a:rPr>
-              <a:t>Reactive caps and staggered entry do not, once measured against matched seeds.</a:t>
-            </a:r>
-          </a:p>
-        </p:txBody>
-      </p:sp>
-      <p:sp>
-        <p:nvSpPr>
-          <p:cNvPr id="16" name="TextBox 15"/>
-          <p:cNvSpPr txBox="1"/>
-          <p:nvPr/>
-        </p:nvSpPr>
-        <p:spPr>
-          <a:xfrm>
-            <a:off x="11133333" y="7050000"/>
-            <a:ext cx="1800000" cy="350000"/>
-          </a:xfrm>
-          <a:prstGeom prst="rect">
-            <a:avLst/>
-          </a:prstGeom>
-          <a:noFill/>
-        </p:spPr>
-        <p:txBody>
-          <a:bodyPr wrap="square" lIns="0" rIns="0" tIns="0" bIns="0" anchor="t">
-            <a:spAutoFit/>
-          </a:bodyPr>
-          <a:lstStyle/>
-          <a:p>
-            <a:pPr algn="r"/>
-            <a:r>
-              <a:rPr sz="1000" b="0">
-                <a:solidFill>
-                  <a:srgbClr val="B6C2D9"/>
-                </a:solidFill>
-                <a:latin typeface="Calibri"/>
-              </a:rPr>
-              <a:t>PARCHED   |   5 / 14</a:t>
-            </a:r>
-          </a:p>
-        </p:txBody>
-      </p:sp>
-    </p:spTree>
-  </p:cSld>
-  <p:clrMapOvr>
-    <a:masterClrMapping/>
-  </p:clrMapOvr>
-</p:sld>
-</file>
-
-<file path=ppt/slides/slide6.xml><?xml version="1.0" encoding="utf-8"?>
-<p:sld xmlns:a="http://schemas.openxmlformats.org/drawingml/2006/main" xmlns:p="http://schemas.openxmlformats.org/presentationml/2006/main" xmlns:r="http://schemas.openxmlformats.org/officeDocument/2006/relationships">
-  <p:cSld>
-    <p:bg>
-      <p:bgPr>
-        <a:solidFill>
-          <a:srgbClr val="0B1426"/>
-        </a:solidFill>
-        <a:effectLst/>
-      </p:bgPr>
-    </p:bg>
-    <p:spTree>
-      <p:nvGrpSpPr>
-        <p:cNvPr id="1" name=""/>
-        <p:cNvGrpSpPr/>
-        <p:nvPr/>
-      </p:nvGrpSpPr>
-      <p:grpSpPr/>
-      <p:sp>
-        <p:nvSpPr>
-          <p:cNvPr id="2" name="Rectangle 1"/>
-          <p:cNvSpPr/>
-          <p:nvPr/>
-        </p:nvSpPr>
-        <p:spPr>
-          <a:xfrm>
-            <a:off x="0" y="0"/>
-            <a:ext cx="110000" cy="7500000"/>
-          </a:xfrm>
-          <a:prstGeom prst="rect">
-            <a:avLst/>
-          </a:prstGeom>
-          <a:solidFill>
-            <a:srgbClr val="3EE6C5"/>
-          </a:solidFill>
-          <a:ln>
-            <a:noFill/>
-          </a:ln>
-        </p:spPr>
-        <p:style>
-          <a:lnRef idx="1">
-            <a:schemeClr val="accent1"/>
-          </a:lnRef>
-          <a:fillRef idx="3">
-            <a:schemeClr val="accent1"/>
-          </a:fillRef>
-          <a:effectRef idx="2">
-            <a:schemeClr val="accent1"/>
-          </a:effectRef>
-          <a:fontRef idx="minor">
-            <a:schemeClr val="lt1"/>
-          </a:fontRef>
-        </p:style>
-        <p:txBody>
-          <a:bodyPr rtlCol="0" anchor="ctr"/>
-          <a:lstStyle/>
-          <a:p>
-            <a:pPr algn="ctr"/>
-          </a:p>
-        </p:txBody>
-      </p:sp>
-      <p:sp>
-        <p:nvSpPr>
-          <p:cNvPr id="3" name="TextBox 2"/>
-          <p:cNvSpPr txBox="1"/>
-          <p:nvPr/>
-        </p:nvSpPr>
-        <p:spPr>
-          <a:xfrm>
-            <a:off x="700000" y="500000"/>
-            <a:ext cx="11933333" cy="800000"/>
-          </a:xfrm>
-          <a:prstGeom prst="rect">
-            <a:avLst/>
-          </a:prstGeom>
-          <a:noFill/>
-        </p:spPr>
-        <p:txBody>
-          <a:bodyPr wrap="square" lIns="0" rIns="0" tIns="0" bIns="0" anchor="t">
-            <a:spAutoFit/>
-          </a:bodyPr>
-          <a:lstStyle/>
-          <a:p>
-            <a:pPr algn="l"/>
-            <a:r>
-              <a:rPr sz="3600" b="1">
-                <a:solidFill>
-                  <a:srgbClr val="FFFFFF"/>
-                </a:solidFill>
-                <a:latin typeface="Calibri"/>
-              </a:rPr>
-              <a:t>Model Overview</a:t>
-            </a:r>
-          </a:p>
-        </p:txBody>
-      </p:sp>
-      <p:sp>
-        <p:nvSpPr>
-          <p:cNvPr id="4" name="TextBox 3"/>
-          <p:cNvSpPr txBox="1"/>
-          <p:nvPr/>
-        </p:nvSpPr>
-        <p:spPr>
-          <a:xfrm>
-            <a:off x="700000" y="1600000"/>
-            <a:ext cx="5600000" cy="4500000"/>
-          </a:xfrm>
-          <a:prstGeom prst="rect">
-            <a:avLst/>
-          </a:prstGeom>
-          <a:noFill/>
-        </p:spPr>
-        <p:txBody>
-          <a:bodyPr wrap="square" lIns="0" rIns="0" tIns="0" bIns="0" anchor="t">
-            <a:spAutoFit/>
-          </a:bodyPr>
-          <a:lstStyle/>
-          <a:p>
-            <a:pPr algn="l">
-              <a:lnSpc>
-                <a:spcPct val="125000"/>
-              </a:lnSpc>
-            </a:pPr>
-            <a:r>
-              <a:rPr sz="1800" b="1">
-                <a:solidFill>
-                  <a:srgbClr val="3EE6C5"/>
-                </a:solidFill>
-                <a:latin typeface="Calibri"/>
-              </a:rPr>
-              <a:t>▸  </a:t>
-            </a:r>
-            <a:r>
-              <a:rPr sz="1800">
-                <a:solidFill>
-                  <a:srgbClr val="FFFFFF"/>
-                </a:solidFill>
-                <a:latin typeface="Calibri"/>
-              </a:rPr>
-              <a:t>4 data centers (heterogeneous capacity)</a:t>
-            </a:r>
-          </a:p>
-          <a:p>
-            <a:pPr algn="l">
-              <a:lnSpc>
-                <a:spcPct val="125000"/>
-              </a:lnSpc>
-            </a:pPr>
-            <a:r>
-              <a:rPr sz="1800" b="1">
-                <a:solidFill>
-                  <a:srgbClr val="3EE6C5"/>
-                </a:solidFill>
-                <a:latin typeface="Calibri"/>
-              </a:rPr>
-              <a:t>▸  </a:t>
-            </a:r>
-            <a:r>
-              <a:rPr sz="1800">
-                <a:solidFill>
-                  <a:srgbClr val="FFFFFF"/>
-                </a:solidFill>
-                <a:latin typeface="Calibri"/>
-              </a:rPr>
-              <a:t>2 farms (rainfed + irrigated)</a:t>
-            </a:r>
-          </a:p>
-          <a:p>
-            <a:pPr algn="l">
-              <a:lnSpc>
-                <a:spcPct val="125000"/>
-              </a:lnSpc>
-            </a:pPr>
-            <a:r>
-              <a:rPr sz="1800" b="1">
-                <a:solidFill>
-                  <a:srgbClr val="3EE6C5"/>
-                </a:solidFill>
-                <a:latin typeface="Calibri"/>
-              </a:rPr>
-              <a:t>▸  </a:t>
-            </a:r>
-            <a:r>
-              <a:rPr sz="1800">
-                <a:solidFill>
-                  <a:srgbClr val="FFFFFF"/>
-                </a:solidFill>
-                <a:latin typeface="Calibri"/>
-              </a:rPr>
-              <a:t>100k residents (consumption from demand curve)</a:t>
-            </a:r>
-          </a:p>
-          <a:p>
-            <a:pPr algn="l">
-              <a:lnSpc>
-                <a:spcPct val="125000"/>
-              </a:lnSpc>
-            </a:pPr>
-            <a:r>
-              <a:rPr sz="1800" b="1">
-                <a:solidFill>
-                  <a:srgbClr val="3EE6C5"/>
-                </a:solidFill>
-                <a:latin typeface="Calibri"/>
-              </a:rPr>
-              <a:t>▸  </a:t>
-            </a:r>
-            <a:r>
-              <a:rPr sz="1800">
-                <a:solidFill>
-                  <a:srgbClr val="FFFFFF"/>
-                </a:solidFill>
-                <a:latin typeface="Calibri"/>
-              </a:rPr>
-              <a:t>1 regulator (delayed observability)</a:t>
-            </a:r>
-          </a:p>
-          <a:p>
-            <a:pPr algn="l">
-              <a:lnSpc>
-                <a:spcPct val="125000"/>
-              </a:lnSpc>
-            </a:pPr>
-            <a:r>
-              <a:rPr sz="1800" b="1">
-                <a:solidFill>
-                  <a:srgbClr val="3EE6C5"/>
-                </a:solidFill>
-                <a:latin typeface="Calibri"/>
-              </a:rPr>
-              <a:t>▸  </a:t>
-            </a:r>
-            <a:r>
-              <a:rPr sz="1800">
-                <a:solidFill>
-                  <a:srgbClr val="FFFFFF"/>
-                </a:solidFill>
-                <a:latin typeface="Calibri"/>
-              </a:rPr>
-              <a:t>30 BL shared basin, with stochastic recharge</a:t>
-            </a:r>
-          </a:p>
-          <a:p>
-            <a:pPr algn="l">
-              <a:lnSpc>
-                <a:spcPct val="125000"/>
-              </a:lnSpc>
-            </a:pPr>
-            <a:r>
-              <a:rPr sz="1800" b="1">
-                <a:solidFill>
-                  <a:srgbClr val="3EE6C5"/>
-                </a:solidFill>
-                <a:latin typeface="Calibri"/>
-              </a:rPr>
-              <a:t>▸  </a:t>
-            </a:r>
-            <a:r>
-              <a:rPr sz="1800">
-                <a:solidFill>
-                  <a:srgbClr val="FFFFFF"/>
-                </a:solidFill>
-                <a:latin typeface="Calibri"/>
-              </a:rPr>
-              <a:t>All interactions mediated through the basin</a:t>
-            </a:r>
-          </a:p>
-        </p:txBody>
-      </p:sp>
-      <p:sp>
-        <p:nvSpPr>
-          <p:cNvPr id="5" name="TextBox 4"/>
-          <p:cNvSpPr txBox="1"/>
-          <p:nvPr/>
-        </p:nvSpPr>
-        <p:spPr>
-          <a:xfrm>
-            <a:off x="700000" y="6100000"/>
-            <a:ext cx="5600000" cy="400000"/>
-          </a:xfrm>
-          <a:prstGeom prst="rect">
-            <a:avLst/>
-          </a:prstGeom>
-          <a:noFill/>
-        </p:spPr>
-        <p:txBody>
-          <a:bodyPr wrap="square" lIns="0" rIns="0" tIns="0" bIns="0" anchor="t">
-            <a:spAutoFit/>
-          </a:bodyPr>
-          <a:lstStyle/>
-          <a:p>
-            <a:pPr algn="l"/>
-            <a:r>
-              <a:rPr sz="1400" b="1">
-                <a:solidFill>
-                  <a:srgbClr val="3EE6C5"/>
-                </a:solidFill>
-                <a:latin typeface="Calibri"/>
-              </a:rPr>
-              <a:t>1 tick = 1 day   ·   10-year horizon   ·   stop on collapse</a:t>
+              <a:rPr sz="3600" b="1" i="0">
+                <a:solidFill>
+                  <a:srgbClr val="1F1E1D"/>
+                </a:solidFill>
+                <a:latin typeface="Georgia"/>
+              </a:rPr>
+              <a:t>Result H1: Collapse Timing</a:t>
             </a:r>
           </a:p>
         </p:txBody>
       </p:sp>
       <p:pic>
         <p:nvPicPr>
-          <p:cNvPr id="6" name="Picture 5" descr="fig_simulation_screenshot.png"/>
+          <p:cNvPr id="4" name="Picture 3" descr="fig_time_to_stress.png"/>
           <p:cNvPicPr>
             <a:picLocks noChangeAspect="1"/>
           </p:cNvPicPr>
@@ -8862,8 +10292,8 @@
         </p:blipFill>
         <p:spPr>
           <a:xfrm>
-            <a:off x="6333333" y="2070127"/>
-            <a:ext cx="6300000" cy="3859746"/>
+            <a:off x="700000" y="1750000"/>
+            <a:ext cx="6942930" cy="4900000"/>
           </a:xfrm>
           <a:prstGeom prst="rect">
             <a:avLst/>
@@ -8872,14 +10302,259 @@
       </p:pic>
       <p:sp>
         <p:nvSpPr>
+          <p:cNvPr id="5" name="TextBox 4"/>
+          <p:cNvSpPr txBox="1"/>
+          <p:nvPr/>
+        </p:nvSpPr>
+        <p:spPr>
+          <a:xfrm>
+            <a:off x="8800000" y="1850000"/>
+            <a:ext cx="4100000" cy="400000"/>
+          </a:xfrm>
+          <a:prstGeom prst="rect">
+            <a:avLst/>
+          </a:prstGeom>
+          <a:noFill/>
+        </p:spPr>
+        <p:txBody>
+          <a:bodyPr wrap="square" lIns="0" rIns="0" tIns="0" bIns="0" anchor="t">
+            <a:spAutoFit/>
+          </a:bodyPr>
+          <a:lstStyle/>
+          <a:p>
+            <a:pPr algn="l"/>
+            <a:r>
+              <a:rPr sz="1100" b="1" i="0">
+                <a:solidFill>
+                  <a:srgbClr val="C15F3C"/>
+                </a:solidFill>
+                <a:latin typeface="Helvetica Neue"/>
+              </a:rPr>
+              <a:t>RESULT</a:t>
+            </a:r>
+          </a:p>
+        </p:txBody>
+      </p:sp>
+      <p:sp>
+        <p:nvSpPr>
+          <p:cNvPr id="6" name="TextBox 5"/>
+          <p:cNvSpPr txBox="1"/>
+          <p:nvPr/>
+        </p:nvSpPr>
+        <p:spPr>
+          <a:xfrm>
+            <a:off x="8800000" y="2250000"/>
+            <a:ext cx="4100000" cy="1300000"/>
+          </a:xfrm>
+          <a:prstGeom prst="rect">
+            <a:avLst/>
+          </a:prstGeom>
+          <a:noFill/>
+        </p:spPr>
+        <p:txBody>
+          <a:bodyPr wrap="square" lIns="0" rIns="0" tIns="0" bIns="0" anchor="t">
+            <a:spAutoFit/>
+          </a:bodyPr>
+          <a:lstStyle/>
+          <a:p>
+            <a:pPr algn="l"/>
+            <a:r>
+              <a:rPr sz="7200" b="1" i="0">
+                <a:solidFill>
+                  <a:srgbClr val="C15F3C"/>
+                </a:solidFill>
+                <a:latin typeface="Georgia"/>
+              </a:rPr>
+              <a:t>100%</a:t>
+            </a:r>
+          </a:p>
+        </p:txBody>
+      </p:sp>
+      <p:sp>
+        <p:nvSpPr>
           <p:cNvPr id="7" name="TextBox 6"/>
           <p:cNvSpPr txBox="1"/>
           <p:nvPr/>
         </p:nvSpPr>
         <p:spPr>
           <a:xfrm>
-            <a:off x="11133333" y="7050000"/>
-            <a:ext cx="1800000" cy="350000"/>
+            <a:off x="8800000" y="3550000"/>
+            <a:ext cx="4100000" cy="700000"/>
+          </a:xfrm>
+          <a:prstGeom prst="rect">
+            <a:avLst/>
+          </a:prstGeom>
+          <a:noFill/>
+        </p:spPr>
+        <p:txBody>
+          <a:bodyPr wrap="square" lIns="0" rIns="0" tIns="0" bIns="0" anchor="t">
+            <a:spAutoFit/>
+          </a:bodyPr>
+          <a:lstStyle/>
+          <a:p>
+            <a:pPr algn="l"/>
+            <a:r>
+              <a:rPr sz="1600" b="0" i="1">
+                <a:solidFill>
+                  <a:srgbClr val="1F1E1D"/>
+                </a:solidFill>
+                <a:latin typeface="Georgia"/>
+              </a:rPr>
+              <a:t>of unregulated runs collapsed.</a:t>
+            </a:r>
+          </a:p>
+        </p:txBody>
+      </p:sp>
+      <p:sp>
+        <p:nvSpPr>
+          <p:cNvPr id="8" name="TextBox 7"/>
+          <p:cNvSpPr txBox="1"/>
+          <p:nvPr/>
+        </p:nvSpPr>
+        <p:spPr>
+          <a:xfrm>
+            <a:off x="8800000" y="4500000"/>
+            <a:ext cx="4100000" cy="450000"/>
+          </a:xfrm>
+          <a:prstGeom prst="rect">
+            <a:avLst/>
+          </a:prstGeom>
+          <a:noFill/>
+        </p:spPr>
+        <p:txBody>
+          <a:bodyPr wrap="square" lIns="0" rIns="0" tIns="0" bIns="0" anchor="t">
+            <a:spAutoFit/>
+          </a:bodyPr>
+          <a:lstStyle/>
+          <a:p>
+            <a:pPr algn="l"/>
+            <a:r>
+              <a:rPr sz="1800" b="1" i="0">
+                <a:solidFill>
+                  <a:srgbClr val="1F1E1D"/>
+                </a:solidFill>
+                <a:latin typeface="Helvetica Neue"/>
+              </a:rPr>
+              <a:t>Mean: 6.07 ± 0.84 years</a:t>
+            </a:r>
+          </a:p>
+        </p:txBody>
+      </p:sp>
+      <p:sp>
+        <p:nvSpPr>
+          <p:cNvPr id="9" name="TextBox 8"/>
+          <p:cNvSpPr txBox="1"/>
+          <p:nvPr/>
+        </p:nvSpPr>
+        <p:spPr>
+          <a:xfrm>
+            <a:off x="8800000" y="5000000"/>
+            <a:ext cx="4100000" cy="400000"/>
+          </a:xfrm>
+          <a:prstGeom prst="rect">
+            <a:avLst/>
+          </a:prstGeom>
+          <a:noFill/>
+        </p:spPr>
+        <p:txBody>
+          <a:bodyPr wrap="square" lIns="0" rIns="0" tIns="0" bIns="0" anchor="t">
+            <a:spAutoFit/>
+          </a:bodyPr>
+          <a:lstStyle/>
+          <a:p>
+            <a:pPr algn="l"/>
+            <a:r>
+              <a:rPr sz="1400" b="0" i="0">
+                <a:solidFill>
+                  <a:srgbClr val="605E5B"/>
+                </a:solidFill>
+                <a:latin typeface="Helvetica Neue"/>
+              </a:rPr>
+              <a:t>p &lt; 10⁻²¹</a:t>
+            </a:r>
+          </a:p>
+        </p:txBody>
+      </p:sp>
+      <p:sp>
+        <p:nvSpPr>
+          <p:cNvPr id="10" name="TextBox 9"/>
+          <p:cNvSpPr txBox="1"/>
+          <p:nvPr/>
+        </p:nvSpPr>
+        <p:spPr>
+          <a:xfrm>
+            <a:off x="8800000" y="5450000"/>
+            <a:ext cx="4100000" cy="400000"/>
+          </a:xfrm>
+          <a:prstGeom prst="rect">
+            <a:avLst/>
+          </a:prstGeom>
+          <a:noFill/>
+        </p:spPr>
+        <p:txBody>
+          <a:bodyPr wrap="square" lIns="0" rIns="0" tIns="0" bIns="0" anchor="t">
+            <a:spAutoFit/>
+          </a:bodyPr>
+          <a:lstStyle/>
+          <a:p>
+            <a:pPr algn="l"/>
+            <a:r>
+              <a:rPr sz="1100" b="0" i="0">
+                <a:solidFill>
+                  <a:srgbClr val="605E5B"/>
+                </a:solidFill>
+                <a:latin typeface="Helvetica Neue"/>
+              </a:rPr>
+              <a:t>n = 50 replicate runs</a:t>
+            </a:r>
+          </a:p>
+        </p:txBody>
+      </p:sp>
+      <p:sp>
+        <p:nvSpPr>
+          <p:cNvPr id="11" name="TextBox 10"/>
+          <p:cNvSpPr txBox="1"/>
+          <p:nvPr/>
+        </p:nvSpPr>
+        <p:spPr>
+          <a:xfrm>
+            <a:off x="700000" y="7120000"/>
+            <a:ext cx="2500000" cy="300000"/>
+          </a:xfrm>
+          <a:prstGeom prst="rect">
+            <a:avLst/>
+          </a:prstGeom>
+          <a:noFill/>
+        </p:spPr>
+        <p:txBody>
+          <a:bodyPr wrap="square" lIns="0" rIns="0" tIns="0" bIns="0" anchor="t">
+            <a:spAutoFit/>
+          </a:bodyPr>
+          <a:lstStyle/>
+          <a:p>
+            <a:pPr algn="l"/>
+            <a:r>
+              <a:rPr sz="900" b="0" i="0">
+                <a:solidFill>
+                  <a:srgbClr val="605E5B"/>
+                </a:solidFill>
+                <a:latin typeface="Helvetica Neue"/>
+              </a:rPr>
+              <a:t>PARCHED</a:t>
+            </a:r>
+          </a:p>
+        </p:txBody>
+      </p:sp>
+      <p:sp>
+        <p:nvSpPr>
+          <p:cNvPr id="12" name="TextBox 11"/>
+          <p:cNvSpPr txBox="1"/>
+          <p:nvPr/>
+        </p:nvSpPr>
+        <p:spPr>
+          <a:xfrm>
+            <a:off x="11133333" y="7120000"/>
+            <a:ext cx="1500000" cy="300000"/>
           </a:xfrm>
           <a:prstGeom prst="rect">
             <a:avLst/>
@@ -8894,1499 +10569,13 @@
           <a:p>
             <a:pPr algn="r"/>
             <a:r>
-              <a:rPr sz="1000" b="0">
-                <a:solidFill>
-                  <a:srgbClr val="B6C2D9"/>
-                </a:solidFill>
-                <a:latin typeface="Calibri"/>
-              </a:rPr>
-              <a:t>PARCHED   |   6 / 14</a:t>
-            </a:r>
-          </a:p>
-        </p:txBody>
-      </p:sp>
-    </p:spTree>
-  </p:cSld>
-  <p:clrMapOvr>
-    <a:masterClrMapping/>
-  </p:clrMapOvr>
-</p:sld>
-</file>
-
-<file path=ppt/slides/slide7.xml><?xml version="1.0" encoding="utf-8"?>
-<p:sld xmlns:a="http://schemas.openxmlformats.org/drawingml/2006/main" xmlns:p="http://schemas.openxmlformats.org/presentationml/2006/main" xmlns:r="http://schemas.openxmlformats.org/officeDocument/2006/relationships">
-  <p:cSld>
-    <p:bg>
-      <p:bgPr>
-        <a:solidFill>
-          <a:srgbClr val="0B1426"/>
-        </a:solidFill>
-        <a:effectLst/>
-      </p:bgPr>
-    </p:bg>
-    <p:spTree>
-      <p:nvGrpSpPr>
-        <p:cNvPr id="1" name=""/>
-        <p:cNvGrpSpPr/>
-        <p:nvPr/>
-      </p:nvGrpSpPr>
-      <p:grpSpPr/>
-      <p:sp>
-        <p:nvSpPr>
-          <p:cNvPr id="2" name="Rectangle 1"/>
-          <p:cNvSpPr/>
-          <p:nvPr/>
-        </p:nvSpPr>
-        <p:spPr>
-          <a:xfrm>
-            <a:off x="0" y="0"/>
-            <a:ext cx="110000" cy="7500000"/>
-          </a:xfrm>
-          <a:prstGeom prst="rect">
-            <a:avLst/>
-          </a:prstGeom>
-          <a:solidFill>
-            <a:srgbClr val="3EE6C5"/>
-          </a:solidFill>
-          <a:ln>
-            <a:noFill/>
-          </a:ln>
-        </p:spPr>
-        <p:style>
-          <a:lnRef idx="1">
-            <a:schemeClr val="accent1"/>
-          </a:lnRef>
-          <a:fillRef idx="3">
-            <a:schemeClr val="accent1"/>
-          </a:fillRef>
-          <a:effectRef idx="2">
-            <a:schemeClr val="accent1"/>
-          </a:effectRef>
-          <a:fontRef idx="minor">
-            <a:schemeClr val="lt1"/>
-          </a:fontRef>
-        </p:style>
-        <p:txBody>
-          <a:bodyPr rtlCol="0" anchor="ctr"/>
-          <a:lstStyle/>
-          <a:p>
-            <a:pPr algn="ctr"/>
-          </a:p>
-        </p:txBody>
-      </p:sp>
-      <p:sp>
-        <p:nvSpPr>
-          <p:cNvPr id="3" name="TextBox 2"/>
-          <p:cNvSpPr txBox="1"/>
-          <p:nvPr/>
-        </p:nvSpPr>
-        <p:spPr>
-          <a:xfrm>
-            <a:off x="700000" y="500000"/>
-            <a:ext cx="11933333" cy="800000"/>
-          </a:xfrm>
-          <a:prstGeom prst="rect">
-            <a:avLst/>
-          </a:prstGeom>
-          <a:noFill/>
-        </p:spPr>
-        <p:txBody>
-          <a:bodyPr wrap="square" lIns="0" rIns="0" tIns="0" bIns="0" anchor="t">
-            <a:spAutoFit/>
-          </a:bodyPr>
-          <a:lstStyle/>
-          <a:p>
-            <a:pPr algn="l"/>
-            <a:r>
-              <a:rPr sz="3600" b="1">
-                <a:solidFill>
-                  <a:srgbClr val="FFFFFF"/>
-                </a:solidFill>
-                <a:latin typeface="Calibri"/>
-              </a:rPr>
-              <a:t>Parameters and Scenarios</a:t>
-            </a:r>
-          </a:p>
-        </p:txBody>
-      </p:sp>
-      <p:sp>
-        <p:nvSpPr>
-          <p:cNvPr id="4" name="Rectangle 3"/>
-          <p:cNvSpPr/>
-          <p:nvPr/>
-        </p:nvSpPr>
-        <p:spPr>
-          <a:xfrm>
-            <a:off x="700000" y="1600000"/>
-            <a:ext cx="11933333" cy="50000"/>
-          </a:xfrm>
-          <a:prstGeom prst="rect">
-            <a:avLst/>
-          </a:prstGeom>
-          <a:solidFill>
-            <a:srgbClr val="3EE6C5"/>
-          </a:solidFill>
-          <a:ln>
-            <a:noFill/>
-          </a:ln>
-        </p:spPr>
-        <p:style>
-          <a:lnRef idx="1">
-            <a:schemeClr val="accent1"/>
-          </a:lnRef>
-          <a:fillRef idx="3">
-            <a:schemeClr val="accent1"/>
-          </a:fillRef>
-          <a:effectRef idx="2">
-            <a:schemeClr val="accent1"/>
-          </a:effectRef>
-          <a:fontRef idx="minor">
-            <a:schemeClr val="lt1"/>
-          </a:fontRef>
-        </p:style>
-        <p:txBody>
-          <a:bodyPr rtlCol="0" anchor="ctr"/>
-          <a:lstStyle/>
-          <a:p>
-            <a:pPr algn="ctr"/>
-          </a:p>
-        </p:txBody>
-      </p:sp>
-      <p:sp>
-        <p:nvSpPr>
-          <p:cNvPr id="5" name="Oval 4"/>
-          <p:cNvSpPr/>
-          <p:nvPr/>
-        </p:nvSpPr>
-        <p:spPr>
-          <a:xfrm>
-            <a:off x="700000" y="1900000"/>
-            <a:ext cx="550000" cy="550000"/>
-          </a:xfrm>
-          <a:prstGeom prst="ellipse">
-            <a:avLst/>
-          </a:prstGeom>
-          <a:solidFill>
-            <a:srgbClr val="D9514E"/>
-          </a:solidFill>
-          <a:ln>
-            <a:noFill/>
-          </a:ln>
-        </p:spPr>
-        <p:style>
-          <a:lnRef idx="1">
-            <a:schemeClr val="accent1"/>
-          </a:lnRef>
-          <a:fillRef idx="3">
-            <a:schemeClr val="accent1"/>
-          </a:fillRef>
-          <a:effectRef idx="2">
-            <a:schemeClr val="accent1"/>
-          </a:effectRef>
-          <a:fontRef idx="minor">
-            <a:schemeClr val="lt1"/>
-          </a:fontRef>
-        </p:style>
-        <p:txBody>
-          <a:bodyPr rtlCol="0" anchor="ctr" lIns="0" rIns="0" tIns="0" bIns="0"/>
-          <a:lstStyle/>
-          <a:p>
-            <a:pPr algn="ctr"/>
-            <a:r>
-              <a:rPr sz="2200" b="1">
-                <a:solidFill>
-                  <a:srgbClr val="0B1426"/>
-                </a:solidFill>
-                <a:latin typeface="Calibri"/>
-              </a:rPr>
-              <a:t>A</a:t>
-            </a:r>
-          </a:p>
-        </p:txBody>
-      </p:sp>
-      <p:sp>
-        <p:nvSpPr>
-          <p:cNvPr id="6" name="TextBox 5"/>
-          <p:cNvSpPr txBox="1"/>
-          <p:nvPr/>
-        </p:nvSpPr>
-        <p:spPr>
-          <a:xfrm>
-            <a:off x="1500000" y="1950000"/>
-            <a:ext cx="2400000" cy="500000"/>
-          </a:xfrm>
-          <a:prstGeom prst="rect">
-            <a:avLst/>
-          </a:prstGeom>
-          <a:noFill/>
-        </p:spPr>
-        <p:txBody>
-          <a:bodyPr wrap="square" lIns="0" rIns="0" tIns="0" bIns="0" anchor="t">
-            <a:spAutoFit/>
-          </a:bodyPr>
-          <a:lstStyle/>
-          <a:p>
-            <a:pPr algn="l"/>
-            <a:r>
-              <a:rPr sz="2200" b="1">
-                <a:solidFill>
-                  <a:srgbClr val="FFFFFF"/>
-                </a:solidFill>
-                <a:latin typeface="Calibri"/>
-              </a:rPr>
-              <a:t>Unregulated</a:t>
-            </a:r>
-          </a:p>
-        </p:txBody>
-      </p:sp>
-      <p:sp>
-        <p:nvSpPr>
-          <p:cNvPr id="7" name="TextBox 6"/>
-          <p:cNvSpPr txBox="1"/>
-          <p:nvPr/>
-        </p:nvSpPr>
-        <p:spPr>
-          <a:xfrm>
-            <a:off x="4100000" y="1970000"/>
-            <a:ext cx="8000000" cy="500000"/>
-          </a:xfrm>
-          <a:prstGeom prst="rect">
-            <a:avLst/>
-          </a:prstGeom>
-          <a:noFill/>
-        </p:spPr>
-        <p:txBody>
-          <a:bodyPr wrap="square" lIns="0" rIns="0" tIns="0" bIns="0" anchor="t">
-            <a:spAutoFit/>
-          </a:bodyPr>
-          <a:lstStyle/>
-          <a:p>
-            <a:pPr algn="l"/>
-            <a:r>
-              <a:rPr sz="1800" b="0">
-                <a:solidFill>
-                  <a:srgbClr val="B6C2D9"/>
-                </a:solidFill>
-                <a:latin typeface="Calibri"/>
-              </a:rPr>
-              <a:t>No cap, no oversight</a:t>
-            </a:r>
-          </a:p>
-        </p:txBody>
-      </p:sp>
-      <p:sp>
-        <p:nvSpPr>
-          <p:cNvPr id="8" name="Oval 7"/>
-          <p:cNvSpPr/>
-          <p:nvPr/>
-        </p:nvSpPr>
-        <p:spPr>
-          <a:xfrm>
-            <a:off x="700000" y="2600000"/>
-            <a:ext cx="550000" cy="550000"/>
-          </a:xfrm>
-          <a:prstGeom prst="ellipse">
-            <a:avLst/>
-          </a:prstGeom>
-          <a:solidFill>
-            <a:srgbClr val="E6A532"/>
-          </a:solidFill>
-          <a:ln>
-            <a:noFill/>
-          </a:ln>
-        </p:spPr>
-        <p:style>
-          <a:lnRef idx="1">
-            <a:schemeClr val="accent1"/>
-          </a:lnRef>
-          <a:fillRef idx="3">
-            <a:schemeClr val="accent1"/>
-          </a:fillRef>
-          <a:effectRef idx="2">
-            <a:schemeClr val="accent1"/>
-          </a:effectRef>
-          <a:fontRef idx="minor">
-            <a:schemeClr val="lt1"/>
-          </a:fontRef>
-        </p:style>
-        <p:txBody>
-          <a:bodyPr rtlCol="0" anchor="ctr" lIns="0" rIns="0" tIns="0" bIns="0"/>
-          <a:lstStyle/>
-          <a:p>
-            <a:pPr algn="ctr"/>
-            <a:r>
-              <a:rPr sz="2200" b="1">
-                <a:solidFill>
-                  <a:srgbClr val="0B1426"/>
-                </a:solidFill>
-                <a:latin typeface="Calibri"/>
-              </a:rPr>
-              <a:t>B</a:t>
-            </a:r>
-          </a:p>
-        </p:txBody>
-      </p:sp>
-      <p:sp>
-        <p:nvSpPr>
-          <p:cNvPr id="9" name="TextBox 8"/>
-          <p:cNvSpPr txBox="1"/>
-          <p:nvPr/>
-        </p:nvSpPr>
-        <p:spPr>
-          <a:xfrm>
-            <a:off x="1500000" y="2650000"/>
-            <a:ext cx="2400000" cy="500000"/>
-          </a:xfrm>
-          <a:prstGeom prst="rect">
-            <a:avLst/>
-          </a:prstGeom>
-          <a:noFill/>
-        </p:spPr>
-        <p:txBody>
-          <a:bodyPr wrap="square" lIns="0" rIns="0" tIns="0" bIns="0" anchor="t">
-            <a:spAutoFit/>
-          </a:bodyPr>
-          <a:lstStyle/>
-          <a:p>
-            <a:pPr algn="l"/>
-            <a:r>
-              <a:rPr sz="2200" b="1">
-                <a:solidFill>
-                  <a:srgbClr val="FFFFFF"/>
-                </a:solidFill>
-                <a:latin typeface="Calibri"/>
-              </a:rPr>
-              <a:t>Reactive cap</a:t>
-            </a:r>
-          </a:p>
-        </p:txBody>
-      </p:sp>
-      <p:sp>
-        <p:nvSpPr>
-          <p:cNvPr id="10" name="TextBox 9"/>
-          <p:cNvSpPr txBox="1"/>
-          <p:nvPr/>
-        </p:nvSpPr>
-        <p:spPr>
-          <a:xfrm>
-            <a:off x="4100000" y="2670000"/>
-            <a:ext cx="8000000" cy="500000"/>
-          </a:xfrm>
-          <a:prstGeom prst="rect">
-            <a:avLst/>
-          </a:prstGeom>
-          <a:noFill/>
-        </p:spPr>
-        <p:txBody>
-          <a:bodyPr wrap="square" lIns="0" rIns="0" tIns="0" bIns="0" anchor="t">
-            <a:spAutoFit/>
-          </a:bodyPr>
-          <a:lstStyle/>
-          <a:p>
-            <a:pPr algn="l"/>
-            <a:r>
-              <a:rPr sz="1800" b="0">
-                <a:solidFill>
-                  <a:srgbClr val="B6C2D9"/>
-                </a:solidFill>
-                <a:latin typeface="Calibri"/>
-              </a:rPr>
-              <a:t>Cap triggers at 30% basin storage</a:t>
-            </a:r>
-          </a:p>
-        </p:txBody>
-      </p:sp>
-      <p:sp>
-        <p:nvSpPr>
-          <p:cNvPr id="11" name="Oval 10"/>
-          <p:cNvSpPr/>
-          <p:nvPr/>
-        </p:nvSpPr>
-        <p:spPr>
-          <a:xfrm>
-            <a:off x="700000" y="3300000"/>
-            <a:ext cx="550000" cy="550000"/>
-          </a:xfrm>
-          <a:prstGeom prst="ellipse">
-            <a:avLst/>
-          </a:prstGeom>
-          <a:solidFill>
-            <a:srgbClr val="3EE6C5"/>
-          </a:solidFill>
-          <a:ln>
-            <a:noFill/>
-          </a:ln>
-        </p:spPr>
-        <p:style>
-          <a:lnRef idx="1">
-            <a:schemeClr val="accent1"/>
-          </a:lnRef>
-          <a:fillRef idx="3">
-            <a:schemeClr val="accent1"/>
-          </a:fillRef>
-          <a:effectRef idx="2">
-            <a:schemeClr val="accent1"/>
-          </a:effectRef>
-          <a:fontRef idx="minor">
-            <a:schemeClr val="lt1"/>
-          </a:fontRef>
-        </p:style>
-        <p:txBody>
-          <a:bodyPr rtlCol="0" anchor="ctr" lIns="0" rIns="0" tIns="0" bIns="0"/>
-          <a:lstStyle/>
-          <a:p>
-            <a:pPr algn="ctr"/>
-            <a:r>
-              <a:rPr sz="2200" b="1">
-                <a:solidFill>
-                  <a:srgbClr val="0B1426"/>
-                </a:solidFill>
-                <a:latin typeface="Calibri"/>
-              </a:rPr>
-              <a:t>C</a:t>
-            </a:r>
-          </a:p>
-        </p:txBody>
-      </p:sp>
-      <p:sp>
-        <p:nvSpPr>
-          <p:cNvPr id="12" name="TextBox 11"/>
-          <p:cNvSpPr txBox="1"/>
-          <p:nvPr/>
-        </p:nvSpPr>
-        <p:spPr>
-          <a:xfrm>
-            <a:off x="1500000" y="3350000"/>
-            <a:ext cx="2400000" cy="500000"/>
-          </a:xfrm>
-          <a:prstGeom prst="rect">
-            <a:avLst/>
-          </a:prstGeom>
-          <a:noFill/>
-        </p:spPr>
-        <p:txBody>
-          <a:bodyPr wrap="square" lIns="0" rIns="0" tIns="0" bIns="0" anchor="t">
-            <a:spAutoFit/>
-          </a:bodyPr>
-          <a:lstStyle/>
-          <a:p>
-            <a:pPr algn="l"/>
-            <a:r>
-              <a:rPr sz="2200" b="1">
-                <a:solidFill>
-                  <a:srgbClr val="FFFFFF"/>
-                </a:solidFill>
-                <a:latin typeface="Calibri"/>
-              </a:rPr>
-              <a:t>Proactive cap</a:t>
-            </a:r>
-          </a:p>
-        </p:txBody>
-      </p:sp>
-      <p:sp>
-        <p:nvSpPr>
-          <p:cNvPr id="13" name="TextBox 12"/>
-          <p:cNvSpPr txBox="1"/>
-          <p:nvPr/>
-        </p:nvSpPr>
-        <p:spPr>
-          <a:xfrm>
-            <a:off x="4100000" y="3370000"/>
-            <a:ext cx="8000000" cy="500000"/>
-          </a:xfrm>
-          <a:prstGeom prst="rect">
-            <a:avLst/>
-          </a:prstGeom>
-          <a:noFill/>
-        </p:spPr>
-        <p:txBody>
-          <a:bodyPr wrap="square" lIns="0" rIns="0" tIns="0" bIns="0" anchor="t">
-            <a:spAutoFit/>
-          </a:bodyPr>
-          <a:lstStyle/>
-          <a:p>
-            <a:pPr algn="l"/>
-            <a:r>
-              <a:rPr sz="1800" b="0">
-                <a:solidFill>
-                  <a:srgbClr val="B6C2D9"/>
-                </a:solidFill>
-                <a:latin typeface="Calibri"/>
-              </a:rPr>
-              <a:t>15 ML/day from t=0</a:t>
-            </a:r>
-          </a:p>
-        </p:txBody>
-      </p:sp>
-      <p:sp>
-        <p:nvSpPr>
-          <p:cNvPr id="14" name="Oval 13"/>
-          <p:cNvSpPr/>
-          <p:nvPr/>
-        </p:nvSpPr>
-        <p:spPr>
-          <a:xfrm>
-            <a:off x="700000" y="4000000"/>
-            <a:ext cx="550000" cy="550000"/>
-          </a:xfrm>
-          <a:prstGeom prst="ellipse">
-            <a:avLst/>
-          </a:prstGeom>
-          <a:solidFill>
-            <a:srgbClr val="6F9CEB"/>
-          </a:solidFill>
-          <a:ln>
-            <a:noFill/>
-          </a:ln>
-        </p:spPr>
-        <p:style>
-          <a:lnRef idx="1">
-            <a:schemeClr val="accent1"/>
-          </a:lnRef>
-          <a:fillRef idx="3">
-            <a:schemeClr val="accent1"/>
-          </a:fillRef>
-          <a:effectRef idx="2">
-            <a:schemeClr val="accent1"/>
-          </a:effectRef>
-          <a:fontRef idx="minor">
-            <a:schemeClr val="lt1"/>
-          </a:fontRef>
-        </p:style>
-        <p:txBody>
-          <a:bodyPr rtlCol="0" anchor="ctr" lIns="0" rIns="0" tIns="0" bIns="0"/>
-          <a:lstStyle/>
-          <a:p>
-            <a:pPr algn="ctr"/>
-            <a:r>
-              <a:rPr sz="2200" b="1">
-                <a:solidFill>
-                  <a:srgbClr val="0B1426"/>
-                </a:solidFill>
-                <a:latin typeface="Calibri"/>
-              </a:rPr>
-              <a:t>D</a:t>
-            </a:r>
-          </a:p>
-        </p:txBody>
-      </p:sp>
-      <p:sp>
-        <p:nvSpPr>
-          <p:cNvPr id="15" name="TextBox 14"/>
-          <p:cNvSpPr txBox="1"/>
-          <p:nvPr/>
-        </p:nvSpPr>
-        <p:spPr>
-          <a:xfrm>
-            <a:off x="1500000" y="4050000"/>
-            <a:ext cx="2400000" cy="500000"/>
-          </a:xfrm>
-          <a:prstGeom prst="rect">
-            <a:avLst/>
-          </a:prstGeom>
-          <a:noFill/>
-        </p:spPr>
-        <p:txBody>
-          <a:bodyPr wrap="square" lIns="0" rIns="0" tIns="0" bIns="0" anchor="t">
-            <a:spAutoFit/>
-          </a:bodyPr>
-          <a:lstStyle/>
-          <a:p>
-            <a:pPr algn="l"/>
-            <a:r>
-              <a:rPr sz="2200" b="1">
-                <a:solidFill>
-                  <a:srgbClr val="FFFFFF"/>
-                </a:solidFill>
-                <a:latin typeface="Calibri"/>
-              </a:rPr>
-              <a:t>Staggered entry</a:t>
-            </a:r>
-          </a:p>
-        </p:txBody>
-      </p:sp>
-      <p:sp>
-        <p:nvSpPr>
-          <p:cNvPr id="16" name="TextBox 15"/>
-          <p:cNvSpPr txBox="1"/>
-          <p:nvPr/>
-        </p:nvSpPr>
-        <p:spPr>
-          <a:xfrm>
-            <a:off x="4100000" y="4070000"/>
-            <a:ext cx="8000000" cy="500000"/>
-          </a:xfrm>
-          <a:prstGeom prst="rect">
-            <a:avLst/>
-          </a:prstGeom>
-          <a:noFill/>
-        </p:spPr>
-        <p:txBody>
-          <a:bodyPr wrap="square" lIns="0" rIns="0" tIns="0" bIns="0" anchor="t">
-            <a:spAutoFit/>
-          </a:bodyPr>
-          <a:lstStyle/>
-          <a:p>
-            <a:pPr algn="l"/>
-            <a:r>
-              <a:rPr sz="1800" b="0">
-                <a:solidFill>
-                  <a:srgbClr val="B6C2D9"/>
-                </a:solidFill>
-                <a:latin typeface="Calibri"/>
-              </a:rPr>
-              <a:t>DCs come online in years 0, 2, 4, 6</a:t>
-            </a:r>
-          </a:p>
-        </p:txBody>
-      </p:sp>
-      <p:sp>
-        <p:nvSpPr>
-          <p:cNvPr id="17" name="TextBox 16"/>
-          <p:cNvSpPr txBox="1"/>
-          <p:nvPr/>
-        </p:nvSpPr>
-        <p:spPr>
-          <a:xfrm>
-            <a:off x="700000" y="5700000"/>
-            <a:ext cx="11933333" cy="900000"/>
-          </a:xfrm>
-          <a:prstGeom prst="rect">
-            <a:avLst/>
-          </a:prstGeom>
-          <a:noFill/>
-        </p:spPr>
-        <p:txBody>
-          <a:bodyPr wrap="square" lIns="0" rIns="0" tIns="0" bIns="0" anchor="t">
-            <a:spAutoFit/>
-          </a:bodyPr>
-          <a:lstStyle/>
-          <a:p>
-            <a:pPr algn="l"/>
-            <a:r>
-              <a:rPr sz="1600" b="1">
-                <a:solidFill>
-                  <a:srgbClr val="3EE6C5"/>
-                </a:solidFill>
-                <a:latin typeface="Calibri"/>
-              </a:rPr>
-              <a:t>Matched-seed design: every scenario sees the same 50 random seeds, so differences are policy, not luck.</a:t>
-            </a:r>
-          </a:p>
-        </p:txBody>
-      </p:sp>
-      <p:sp>
-        <p:nvSpPr>
-          <p:cNvPr id="18" name="TextBox 17"/>
-          <p:cNvSpPr txBox="1"/>
-          <p:nvPr/>
-        </p:nvSpPr>
-        <p:spPr>
-          <a:xfrm>
-            <a:off x="11133333" y="7050000"/>
-            <a:ext cx="1800000" cy="350000"/>
-          </a:xfrm>
-          <a:prstGeom prst="rect">
-            <a:avLst/>
-          </a:prstGeom>
-          <a:noFill/>
-        </p:spPr>
-        <p:txBody>
-          <a:bodyPr wrap="square" lIns="0" rIns="0" tIns="0" bIns="0" anchor="t">
-            <a:spAutoFit/>
-          </a:bodyPr>
-          <a:lstStyle/>
-          <a:p>
-            <a:pPr algn="r"/>
-            <a:r>
-              <a:rPr sz="1000" b="0">
-                <a:solidFill>
-                  <a:srgbClr val="B6C2D9"/>
-                </a:solidFill>
-                <a:latin typeface="Calibri"/>
-              </a:rPr>
-              <a:t>PARCHED   |   7 / 14</a:t>
-            </a:r>
-          </a:p>
-        </p:txBody>
-      </p:sp>
-    </p:spTree>
-  </p:cSld>
-  <p:clrMapOvr>
-    <a:masterClrMapping/>
-  </p:clrMapOvr>
-</p:sld>
-</file>
-
-<file path=ppt/slides/slide8.xml><?xml version="1.0" encoding="utf-8"?>
-<p:sld xmlns:a="http://schemas.openxmlformats.org/drawingml/2006/main" xmlns:p="http://schemas.openxmlformats.org/presentationml/2006/main" xmlns:r="http://schemas.openxmlformats.org/officeDocument/2006/relationships">
-  <p:cSld>
-    <p:bg>
-      <p:bgPr>
-        <a:solidFill>
-          <a:srgbClr val="0B1426"/>
-        </a:solidFill>
-        <a:effectLst/>
-      </p:bgPr>
-    </p:bg>
-    <p:spTree>
-      <p:nvGrpSpPr>
-        <p:cNvPr id="1" name=""/>
-        <p:cNvGrpSpPr/>
-        <p:nvPr/>
-      </p:nvGrpSpPr>
-      <p:grpSpPr/>
-      <p:sp>
-        <p:nvSpPr>
-          <p:cNvPr id="2" name="Rectangle 1"/>
-          <p:cNvSpPr/>
-          <p:nvPr/>
-        </p:nvSpPr>
-        <p:spPr>
-          <a:xfrm>
-            <a:off x="0" y="0"/>
-            <a:ext cx="110000" cy="7500000"/>
-          </a:xfrm>
-          <a:prstGeom prst="rect">
-            <a:avLst/>
-          </a:prstGeom>
-          <a:solidFill>
-            <a:srgbClr val="3EE6C5"/>
-          </a:solidFill>
-          <a:ln>
-            <a:noFill/>
-          </a:ln>
-        </p:spPr>
-        <p:style>
-          <a:lnRef idx="1">
-            <a:schemeClr val="accent1"/>
-          </a:lnRef>
-          <a:fillRef idx="3">
-            <a:schemeClr val="accent1"/>
-          </a:fillRef>
-          <a:effectRef idx="2">
-            <a:schemeClr val="accent1"/>
-          </a:effectRef>
-          <a:fontRef idx="minor">
-            <a:schemeClr val="lt1"/>
-          </a:fontRef>
-        </p:style>
-        <p:txBody>
-          <a:bodyPr rtlCol="0" anchor="ctr"/>
-          <a:lstStyle/>
-          <a:p>
-            <a:pPr algn="ctr"/>
-          </a:p>
-        </p:txBody>
-      </p:sp>
-      <p:sp>
-        <p:nvSpPr>
-          <p:cNvPr id="3" name="TextBox 2"/>
-          <p:cNvSpPr txBox="1"/>
-          <p:nvPr/>
-        </p:nvSpPr>
-        <p:spPr>
-          <a:xfrm>
-            <a:off x="700000" y="500000"/>
-            <a:ext cx="11933333" cy="800000"/>
-          </a:xfrm>
-          <a:prstGeom prst="rect">
-            <a:avLst/>
-          </a:prstGeom>
-          <a:noFill/>
-        </p:spPr>
-        <p:txBody>
-          <a:bodyPr wrap="square" lIns="0" rIns="0" tIns="0" bIns="0" anchor="t">
-            <a:spAutoFit/>
-          </a:bodyPr>
-          <a:lstStyle/>
-          <a:p>
-            <a:pPr algn="l"/>
-            <a:r>
-              <a:rPr sz="3600" b="1">
-                <a:solidFill>
-                  <a:srgbClr val="FFFFFF"/>
-                </a:solidFill>
-                <a:latin typeface="Calibri"/>
-              </a:rPr>
-              <a:t>How To Read The Simulation</a:t>
-            </a:r>
-          </a:p>
-        </p:txBody>
-      </p:sp>
-      <p:pic>
-        <p:nvPicPr>
-          <p:cNvPr id="4" name="Picture 3" descr="fig_basin_timeseries.png"/>
-          <p:cNvPicPr>
-            <a:picLocks noChangeAspect="1"/>
-          </p:cNvPicPr>
-          <p:nvPr/>
-        </p:nvPicPr>
-        <p:blipFill>
-          <a:blip r:embed="rId2"/>
-          <a:stretch>
-            <a:fillRect/>
-          </a:stretch>
-        </p:blipFill>
-        <p:spPr>
-          <a:xfrm>
-            <a:off x="700000" y="1500000"/>
-            <a:ext cx="7902875" cy="4800000"/>
-          </a:xfrm>
-          <a:prstGeom prst="rect">
-            <a:avLst/>
-          </a:prstGeom>
-        </p:spPr>
-      </p:pic>
-      <p:sp>
-        <p:nvSpPr>
-          <p:cNvPr id="5" name="TextBox 4"/>
-          <p:cNvSpPr txBox="1"/>
-          <p:nvPr/>
-        </p:nvSpPr>
-        <p:spPr>
-          <a:xfrm>
-            <a:off x="9500000" y="1600000"/>
-            <a:ext cx="3500000" cy="400000"/>
-          </a:xfrm>
-          <a:prstGeom prst="rect">
-            <a:avLst/>
-          </a:prstGeom>
-          <a:noFill/>
-        </p:spPr>
-        <p:txBody>
-          <a:bodyPr wrap="square" lIns="0" rIns="0" tIns="0" bIns="0" anchor="t">
-            <a:spAutoFit/>
-          </a:bodyPr>
-          <a:lstStyle/>
-          <a:p>
-            <a:pPr algn="l"/>
-            <a:r>
-              <a:rPr sz="1400" b="1">
-                <a:solidFill>
-                  <a:srgbClr val="3EE6C5"/>
-                </a:solidFill>
-                <a:latin typeface="Calibri"/>
-              </a:rPr>
-              <a:t>WHAT TO SEE</a:t>
-            </a:r>
-          </a:p>
-        </p:txBody>
-      </p:sp>
-      <p:sp>
-        <p:nvSpPr>
-          <p:cNvPr id="6" name="TextBox 5"/>
-          <p:cNvSpPr txBox="1"/>
-          <p:nvPr/>
-        </p:nvSpPr>
-        <p:spPr>
-          <a:xfrm>
-            <a:off x="9500000" y="2050000"/>
-            <a:ext cx="3500000" cy="400000"/>
-          </a:xfrm>
-          <a:prstGeom prst="rect">
-            <a:avLst/>
-          </a:prstGeom>
-          <a:noFill/>
-        </p:spPr>
-        <p:txBody>
-          <a:bodyPr wrap="square" lIns="0" rIns="0" tIns="0" bIns="0" anchor="t">
-            <a:spAutoFit/>
-          </a:bodyPr>
-          <a:lstStyle/>
-          <a:p>
-            <a:pPr algn="l"/>
-            <a:r>
-              <a:rPr sz="1800" b="1">
-                <a:solidFill>
-                  <a:srgbClr val="D9514E"/>
-                </a:solidFill>
-                <a:latin typeface="Calibri"/>
-              </a:rPr>
-              <a:t>A and B</a:t>
-            </a:r>
-          </a:p>
-        </p:txBody>
-      </p:sp>
-      <p:sp>
-        <p:nvSpPr>
-          <p:cNvPr id="7" name="TextBox 6"/>
-          <p:cNvSpPr txBox="1"/>
-          <p:nvPr/>
-        </p:nvSpPr>
-        <p:spPr>
-          <a:xfrm>
-            <a:off x="9500000" y="2400000"/>
-            <a:ext cx="3500000" cy="900000"/>
-          </a:xfrm>
-          <a:prstGeom prst="rect">
-            <a:avLst/>
-          </a:prstGeom>
-          <a:noFill/>
-        </p:spPr>
-        <p:txBody>
-          <a:bodyPr wrap="square" lIns="0" rIns="0" tIns="0" bIns="0" anchor="t">
-            <a:spAutoFit/>
-          </a:bodyPr>
-          <a:lstStyle/>
-          <a:p>
-            <a:pPr algn="l"/>
-            <a:r>
-              <a:rPr sz="1400" b="0">
-                <a:solidFill>
-                  <a:srgbClr val="B6C2D9"/>
-                </a:solidFill>
-                <a:latin typeface="Calibri"/>
-              </a:rPr>
-              <a:t>Identical trajectory. Reactive cap fires after the cliff.</a:t>
-            </a:r>
-          </a:p>
-        </p:txBody>
-      </p:sp>
-      <p:sp>
-        <p:nvSpPr>
-          <p:cNvPr id="8" name="TextBox 7"/>
-          <p:cNvSpPr txBox="1"/>
-          <p:nvPr/>
-        </p:nvSpPr>
-        <p:spPr>
-          <a:xfrm>
-            <a:off x="9500000" y="3450000"/>
-            <a:ext cx="3500000" cy="400000"/>
-          </a:xfrm>
-          <a:prstGeom prst="rect">
-            <a:avLst/>
-          </a:prstGeom>
-          <a:noFill/>
-        </p:spPr>
-        <p:txBody>
-          <a:bodyPr wrap="square" lIns="0" rIns="0" tIns="0" bIns="0" anchor="t">
-            <a:spAutoFit/>
-          </a:bodyPr>
-          <a:lstStyle/>
-          <a:p>
-            <a:pPr algn="l"/>
-            <a:r>
-              <a:rPr sz="1800" b="1">
-                <a:solidFill>
-                  <a:srgbClr val="3EE6C5"/>
-                </a:solidFill>
-                <a:latin typeface="Calibri"/>
-              </a:rPr>
-              <a:t>C</a:t>
-            </a:r>
-          </a:p>
-        </p:txBody>
-      </p:sp>
-      <p:sp>
-        <p:nvSpPr>
-          <p:cNvPr id="9" name="TextBox 8"/>
-          <p:cNvSpPr txBox="1"/>
-          <p:nvPr/>
-        </p:nvSpPr>
-        <p:spPr>
-          <a:xfrm>
-            <a:off x="9500000" y="3800000"/>
-            <a:ext cx="3500000" cy="900000"/>
-          </a:xfrm>
-          <a:prstGeom prst="rect">
-            <a:avLst/>
-          </a:prstGeom>
-          <a:noFill/>
-        </p:spPr>
-        <p:txBody>
-          <a:bodyPr wrap="square" lIns="0" rIns="0" tIns="0" bIns="0" anchor="t">
-            <a:spAutoFit/>
-          </a:bodyPr>
-          <a:lstStyle/>
-          <a:p>
-            <a:pPr algn="l"/>
-            <a:r>
-              <a:rPr sz="1400" b="0">
-                <a:solidFill>
-                  <a:srgbClr val="B6C2D9"/>
-                </a:solidFill>
-                <a:latin typeface="Calibri"/>
-              </a:rPr>
-              <a:t>Holds above 90% for the entire decade.</a:t>
-            </a:r>
-          </a:p>
-        </p:txBody>
-      </p:sp>
-      <p:sp>
-        <p:nvSpPr>
-          <p:cNvPr id="10" name="TextBox 9"/>
-          <p:cNvSpPr txBox="1"/>
-          <p:nvPr/>
-        </p:nvSpPr>
-        <p:spPr>
-          <a:xfrm>
-            <a:off x="9500000" y="4800000"/>
-            <a:ext cx="3500000" cy="400000"/>
-          </a:xfrm>
-          <a:prstGeom prst="rect">
-            <a:avLst/>
-          </a:prstGeom>
-          <a:noFill/>
-        </p:spPr>
-        <p:txBody>
-          <a:bodyPr wrap="square" lIns="0" rIns="0" tIns="0" bIns="0" anchor="t">
-            <a:spAutoFit/>
-          </a:bodyPr>
-          <a:lstStyle/>
-          <a:p>
-            <a:pPr algn="l"/>
-            <a:r>
-              <a:rPr sz="1800" b="1">
-                <a:solidFill>
-                  <a:srgbClr val="6F9CEB"/>
-                </a:solidFill>
-                <a:latin typeface="Calibri"/>
-              </a:rPr>
-              <a:t>D</a:t>
-            </a:r>
-          </a:p>
-        </p:txBody>
-      </p:sp>
-      <p:sp>
-        <p:nvSpPr>
-          <p:cNvPr id="11" name="TextBox 10"/>
-          <p:cNvSpPr txBox="1"/>
-          <p:nvPr/>
-        </p:nvSpPr>
-        <p:spPr>
-          <a:xfrm>
-            <a:off x="9500000" y="5150000"/>
-            <a:ext cx="3500000" cy="900000"/>
-          </a:xfrm>
-          <a:prstGeom prst="rect">
-            <a:avLst/>
-          </a:prstGeom>
-          <a:noFill/>
-        </p:spPr>
-        <p:txBody>
-          <a:bodyPr wrap="square" lIns="0" rIns="0" tIns="0" bIns="0" anchor="t">
-            <a:spAutoFit/>
-          </a:bodyPr>
-          <a:lstStyle/>
-          <a:p>
-            <a:pPr algn="l"/>
-            <a:r>
-              <a:rPr sz="1400" b="0">
-                <a:solidFill>
-                  <a:srgbClr val="B6C2D9"/>
-                </a:solidFill>
-                <a:latin typeface="Calibri"/>
-              </a:rPr>
-              <a:t>Delays the collapse but the endpoint is unchanged.</a:t>
-            </a:r>
-          </a:p>
-        </p:txBody>
-      </p:sp>
-      <p:sp>
-        <p:nvSpPr>
-          <p:cNvPr id="12" name="TextBox 11"/>
-          <p:cNvSpPr txBox="1"/>
-          <p:nvPr/>
-        </p:nvSpPr>
-        <p:spPr>
-          <a:xfrm>
-            <a:off x="11133333" y="7050000"/>
-            <a:ext cx="1800000" cy="350000"/>
-          </a:xfrm>
-          <a:prstGeom prst="rect">
-            <a:avLst/>
-          </a:prstGeom>
-          <a:noFill/>
-        </p:spPr>
-        <p:txBody>
-          <a:bodyPr wrap="square" lIns="0" rIns="0" tIns="0" bIns="0" anchor="t">
-            <a:spAutoFit/>
-          </a:bodyPr>
-          <a:lstStyle/>
-          <a:p>
-            <a:pPr algn="r"/>
-            <a:r>
-              <a:rPr sz="1000" b="0">
-                <a:solidFill>
-                  <a:srgbClr val="B6C2D9"/>
-                </a:solidFill>
-                <a:latin typeface="Calibri"/>
-              </a:rPr>
-              <a:t>PARCHED   |   8 / 14</a:t>
-            </a:r>
-          </a:p>
-        </p:txBody>
-      </p:sp>
-    </p:spTree>
-  </p:cSld>
-  <p:clrMapOvr>
-    <a:masterClrMapping/>
-  </p:clrMapOvr>
-</p:sld>
-</file>
-
-<file path=ppt/slides/slide9.xml><?xml version="1.0" encoding="utf-8"?>
-<p:sld xmlns:a="http://schemas.openxmlformats.org/drawingml/2006/main" xmlns:p="http://schemas.openxmlformats.org/presentationml/2006/main" xmlns:r="http://schemas.openxmlformats.org/officeDocument/2006/relationships">
-  <p:cSld>
-    <p:bg>
-      <p:bgPr>
-        <a:solidFill>
-          <a:srgbClr val="0B1426"/>
-        </a:solidFill>
-        <a:effectLst/>
-      </p:bgPr>
-    </p:bg>
-    <p:spTree>
-      <p:nvGrpSpPr>
-        <p:cNvPr id="1" name=""/>
-        <p:cNvGrpSpPr/>
-        <p:nvPr/>
-      </p:nvGrpSpPr>
-      <p:grpSpPr/>
-      <p:sp>
-        <p:nvSpPr>
-          <p:cNvPr id="2" name="Rectangle 1"/>
-          <p:cNvSpPr/>
-          <p:nvPr/>
-        </p:nvSpPr>
-        <p:spPr>
-          <a:xfrm>
-            <a:off x="0" y="0"/>
-            <a:ext cx="110000" cy="7500000"/>
-          </a:xfrm>
-          <a:prstGeom prst="rect">
-            <a:avLst/>
-          </a:prstGeom>
-          <a:solidFill>
-            <a:srgbClr val="3EE6C5"/>
-          </a:solidFill>
-          <a:ln>
-            <a:noFill/>
-          </a:ln>
-        </p:spPr>
-        <p:style>
-          <a:lnRef idx="1">
-            <a:schemeClr val="accent1"/>
-          </a:lnRef>
-          <a:fillRef idx="3">
-            <a:schemeClr val="accent1"/>
-          </a:fillRef>
-          <a:effectRef idx="2">
-            <a:schemeClr val="accent1"/>
-          </a:effectRef>
-          <a:fontRef idx="minor">
-            <a:schemeClr val="lt1"/>
-          </a:fontRef>
-        </p:style>
-        <p:txBody>
-          <a:bodyPr rtlCol="0" anchor="ctr"/>
-          <a:lstStyle/>
-          <a:p>
-            <a:pPr algn="ctr"/>
-          </a:p>
-        </p:txBody>
-      </p:sp>
-      <p:sp>
-        <p:nvSpPr>
-          <p:cNvPr id="3" name="TextBox 2"/>
-          <p:cNvSpPr txBox="1"/>
-          <p:nvPr/>
-        </p:nvSpPr>
-        <p:spPr>
-          <a:xfrm>
-            <a:off x="700000" y="500000"/>
-            <a:ext cx="11933333" cy="800000"/>
-          </a:xfrm>
-          <a:prstGeom prst="rect">
-            <a:avLst/>
-          </a:prstGeom>
-          <a:noFill/>
-        </p:spPr>
-        <p:txBody>
-          <a:bodyPr wrap="square" lIns="0" rIns="0" tIns="0" bIns="0" anchor="t">
-            <a:spAutoFit/>
-          </a:bodyPr>
-          <a:lstStyle/>
-          <a:p>
-            <a:pPr algn="l"/>
-            <a:r>
-              <a:rPr sz="3600" b="1">
-                <a:solidFill>
-                  <a:srgbClr val="FFFFFF"/>
-                </a:solidFill>
-                <a:latin typeface="Calibri"/>
-              </a:rPr>
-              <a:t>Result H1: Collapse Timing</a:t>
-            </a:r>
-          </a:p>
-        </p:txBody>
-      </p:sp>
-      <p:pic>
-        <p:nvPicPr>
-          <p:cNvPr id="4" name="Picture 3" descr="fig_time_to_stress.png"/>
-          <p:cNvPicPr>
-            <a:picLocks noChangeAspect="1"/>
-          </p:cNvPicPr>
-          <p:nvPr/>
-        </p:nvPicPr>
-        <p:blipFill>
-          <a:blip r:embed="rId2"/>
-          <a:stretch>
-            <a:fillRect/>
-          </a:stretch>
-        </p:blipFill>
-        <p:spPr>
-          <a:xfrm>
-            <a:off x="700000" y="1500000"/>
-            <a:ext cx="7368008" cy="5200000"/>
-          </a:xfrm>
-          <a:prstGeom prst="rect">
-            <a:avLst/>
-          </a:prstGeom>
-        </p:spPr>
-      </p:pic>
-      <p:sp>
-        <p:nvSpPr>
-          <p:cNvPr id="5" name="TextBox 4"/>
-          <p:cNvSpPr txBox="1"/>
-          <p:nvPr/>
-        </p:nvSpPr>
-        <p:spPr>
-          <a:xfrm>
-            <a:off x="9000000" y="1700000"/>
-            <a:ext cx="4000000" cy="400000"/>
-          </a:xfrm>
-          <a:prstGeom prst="rect">
-            <a:avLst/>
-          </a:prstGeom>
-          <a:noFill/>
-        </p:spPr>
-        <p:txBody>
-          <a:bodyPr wrap="square" lIns="0" rIns="0" tIns="0" bIns="0" anchor="t">
-            <a:spAutoFit/>
-          </a:bodyPr>
-          <a:lstStyle/>
-          <a:p>
-            <a:pPr algn="l"/>
-            <a:r>
-              <a:rPr sz="1400" b="1">
-                <a:solidFill>
-                  <a:srgbClr val="3EE6C5"/>
-                </a:solidFill>
-                <a:latin typeface="Calibri"/>
-              </a:rPr>
-              <a:t>RESULT</a:t>
-            </a:r>
-          </a:p>
-        </p:txBody>
-      </p:sp>
-      <p:sp>
-        <p:nvSpPr>
-          <p:cNvPr id="6" name="TextBox 5"/>
-          <p:cNvSpPr txBox="1"/>
-          <p:nvPr/>
-        </p:nvSpPr>
-        <p:spPr>
-          <a:xfrm>
-            <a:off x="9000000" y="2100000"/>
-            <a:ext cx="4000000" cy="1200000"/>
-          </a:xfrm>
-          <a:prstGeom prst="rect">
-            <a:avLst/>
-          </a:prstGeom>
-          <a:noFill/>
-        </p:spPr>
-        <p:txBody>
-          <a:bodyPr wrap="square" lIns="0" rIns="0" tIns="0" bIns="0" anchor="t">
-            <a:spAutoFit/>
-          </a:bodyPr>
-          <a:lstStyle/>
-          <a:p>
-            <a:pPr algn="l"/>
-            <a:r>
-              <a:rPr sz="8000" b="1">
-                <a:solidFill>
-                  <a:srgbClr val="D9514E"/>
-                </a:solidFill>
-                <a:latin typeface="Calibri"/>
-              </a:rPr>
-              <a:t>100%</a:t>
-            </a:r>
-          </a:p>
-        </p:txBody>
-      </p:sp>
-      <p:sp>
-        <p:nvSpPr>
-          <p:cNvPr id="7" name="TextBox 6"/>
-          <p:cNvSpPr txBox="1"/>
-          <p:nvPr/>
-        </p:nvSpPr>
-        <p:spPr>
-          <a:xfrm>
-            <a:off x="9000000" y="3400000"/>
-            <a:ext cx="4000000" cy="700000"/>
-          </a:xfrm>
-          <a:prstGeom prst="rect">
-            <a:avLst/>
-          </a:prstGeom>
-          <a:noFill/>
-        </p:spPr>
-        <p:txBody>
-          <a:bodyPr wrap="square" lIns="0" rIns="0" tIns="0" bIns="0" anchor="t">
-            <a:spAutoFit/>
-          </a:bodyPr>
-          <a:lstStyle/>
-          <a:p>
-            <a:pPr algn="l"/>
-            <a:r>
-              <a:rPr sz="1800" b="0">
-                <a:solidFill>
-                  <a:srgbClr val="FFFFFF"/>
-                </a:solidFill>
-                <a:latin typeface="Calibri"/>
-              </a:rPr>
-              <a:t>of unregulated runs collapsed</a:t>
-            </a:r>
-          </a:p>
-        </p:txBody>
-      </p:sp>
-      <p:sp>
-        <p:nvSpPr>
-          <p:cNvPr id="8" name="TextBox 7"/>
-          <p:cNvSpPr txBox="1"/>
-          <p:nvPr/>
-        </p:nvSpPr>
-        <p:spPr>
-          <a:xfrm>
-            <a:off x="9000000" y="4350000"/>
-            <a:ext cx="4000000" cy="600000"/>
-          </a:xfrm>
-          <a:prstGeom prst="rect">
-            <a:avLst/>
-          </a:prstGeom>
-          <a:noFill/>
-        </p:spPr>
-        <p:txBody>
-          <a:bodyPr wrap="square" lIns="0" rIns="0" tIns="0" bIns="0" anchor="t">
-            <a:spAutoFit/>
-          </a:bodyPr>
-          <a:lstStyle/>
-          <a:p>
-            <a:pPr algn="l"/>
-            <a:r>
-              <a:rPr sz="2200" b="1">
-                <a:solidFill>
-                  <a:srgbClr val="FFFFFF"/>
-                </a:solidFill>
-                <a:latin typeface="Calibri"/>
-              </a:rPr>
-              <a:t>Mean: 6.07 ± 0.84 years</a:t>
-            </a:r>
-          </a:p>
-        </p:txBody>
-      </p:sp>
-      <p:sp>
-        <p:nvSpPr>
-          <p:cNvPr id="9" name="TextBox 8"/>
-          <p:cNvSpPr txBox="1"/>
-          <p:nvPr/>
-        </p:nvSpPr>
-        <p:spPr>
-          <a:xfrm>
-            <a:off x="9000000" y="5000000"/>
-            <a:ext cx="4000000" cy="500000"/>
-          </a:xfrm>
-          <a:prstGeom prst="rect">
-            <a:avLst/>
-          </a:prstGeom>
-          <a:noFill/>
-        </p:spPr>
-        <p:txBody>
-          <a:bodyPr wrap="square" lIns="0" rIns="0" tIns="0" bIns="0" anchor="t">
-            <a:spAutoFit/>
-          </a:bodyPr>
-          <a:lstStyle/>
-          <a:p>
-            <a:pPr algn="l"/>
-            <a:r>
-              <a:rPr sz="2000" b="1">
-                <a:solidFill>
-                  <a:srgbClr val="3EE6C5"/>
-                </a:solidFill>
-                <a:latin typeface="Calibri"/>
-              </a:rPr>
-              <a:t>p &lt; 10⁻²¹</a:t>
-            </a:r>
-          </a:p>
-        </p:txBody>
-      </p:sp>
-      <p:sp>
-        <p:nvSpPr>
-          <p:cNvPr id="10" name="TextBox 9"/>
-          <p:cNvSpPr txBox="1"/>
-          <p:nvPr/>
-        </p:nvSpPr>
-        <p:spPr>
-          <a:xfrm>
-            <a:off x="9000000" y="5550000"/>
-            <a:ext cx="4000000" cy="500000"/>
-          </a:xfrm>
-          <a:prstGeom prst="rect">
-            <a:avLst/>
-          </a:prstGeom>
-          <a:noFill/>
-        </p:spPr>
-        <p:txBody>
-          <a:bodyPr wrap="square" lIns="0" rIns="0" tIns="0" bIns="0" anchor="t">
-            <a:spAutoFit/>
-          </a:bodyPr>
-          <a:lstStyle/>
-          <a:p>
-            <a:pPr algn="l"/>
-            <a:r>
-              <a:rPr sz="1400" b="0">
-                <a:solidFill>
-                  <a:srgbClr val="B6C2D9"/>
-                </a:solidFill>
-                <a:latin typeface="Calibri"/>
-              </a:rPr>
-              <a:t>n = 50 replicate runs</a:t>
-            </a:r>
-          </a:p>
-        </p:txBody>
-      </p:sp>
-      <p:sp>
-        <p:nvSpPr>
-          <p:cNvPr id="11" name="TextBox 10"/>
-          <p:cNvSpPr txBox="1"/>
-          <p:nvPr/>
-        </p:nvSpPr>
-        <p:spPr>
-          <a:xfrm>
-            <a:off x="11133333" y="7050000"/>
-            <a:ext cx="1800000" cy="350000"/>
-          </a:xfrm>
-          <a:prstGeom prst="rect">
-            <a:avLst/>
-          </a:prstGeom>
-          <a:noFill/>
-        </p:spPr>
-        <p:txBody>
-          <a:bodyPr wrap="square" lIns="0" rIns="0" tIns="0" bIns="0" anchor="t">
-            <a:spAutoFit/>
-          </a:bodyPr>
-          <a:lstStyle/>
-          <a:p>
-            <a:pPr algn="r"/>
-            <a:r>
-              <a:rPr sz="1000" b="0">
-                <a:solidFill>
-                  <a:srgbClr val="B6C2D9"/>
-                </a:solidFill>
-                <a:latin typeface="Calibri"/>
-              </a:rPr>
-              <a:t>PARCHED   |   9 / 14</a:t>
+              <a:rPr sz="900" b="0" i="0">
+                <a:solidFill>
+                  <a:srgbClr val="605E5B"/>
+                </a:solidFill>
+                <a:latin typeface="Helvetica Neue"/>
+              </a:rPr>
+              <a:t>9 / 14</a:t>
             </a:r>
           </a:p>
         </p:txBody>

--- a/presentation/PARCHED_final.pptx
+++ b/presentation/PARCHED_final.pptx
@@ -4465,7 +4465,7 @@
             <a:r>
               <a:rPr sz="1100" b="1" i="0">
                 <a:solidFill>
-                  <a:srgbClr val="C15F3C"/>
+                  <a:srgbClr val="7B2D26"/>
                 </a:solidFill>
                 <a:latin typeface="Helvetica Neue"/>
               </a:rPr>
@@ -4842,7 +4842,7 @@
             <a:avLst/>
           </a:prstGeom>
           <a:solidFill>
-            <a:srgbClr val="C15F3C"/>
+            <a:srgbClr val="7B2D26"/>
           </a:solidFill>
           <a:ln>
             <a:noFill/>
@@ -4955,7 +4955,7 @@
             <a:r>
               <a:rPr sz="1100" b="1" i="0">
                 <a:solidFill>
-                  <a:srgbClr val="C15F3C"/>
+                  <a:srgbClr val="7B2D26"/>
                 </a:solidFill>
                 <a:latin typeface="Helvetica Neue"/>
               </a:rPr>
@@ -4990,7 +4990,7 @@
             <a:r>
               <a:rPr sz="7200" b="1" i="0">
                 <a:solidFill>
-                  <a:srgbClr val="C15F3C"/>
+                  <a:srgbClr val="7B2D26"/>
                 </a:solidFill>
                 <a:latin typeface="Georgia"/>
               </a:rPr>
@@ -5250,7 +5250,7 @@
             <a:avLst/>
           </a:prstGeom>
           <a:solidFill>
-            <a:srgbClr val="C15F3C"/>
+            <a:srgbClr val="7B2D26"/>
           </a:solidFill>
           <a:ln>
             <a:noFill/>
@@ -5363,7 +5363,7 @@
             <a:r>
               <a:rPr sz="1100" b="1" i="0">
                 <a:solidFill>
-                  <a:srgbClr val="C15F3C"/>
+                  <a:srgbClr val="7B2D26"/>
                 </a:solidFill>
                 <a:latin typeface="Helvetica Neue"/>
               </a:rPr>
@@ -5398,7 +5398,7 @@
             <a:r>
               <a:rPr sz="6000" b="1" i="0">
                 <a:solidFill>
-                  <a:srgbClr val="C15F3C"/>
+                  <a:srgbClr val="7B2D26"/>
                 </a:solidFill>
                 <a:latin typeface="Georgia"/>
               </a:rPr>
@@ -5693,7 +5693,7 @@
             <a:avLst/>
           </a:prstGeom>
           <a:solidFill>
-            <a:srgbClr val="C15F3C"/>
+            <a:srgbClr val="7B2D26"/>
           </a:solidFill>
           <a:ln>
             <a:noFill/>
@@ -5786,7 +5786,7 @@
             <a:r>
               <a:rPr sz="1400" b="1">
                 <a:solidFill>
-                  <a:srgbClr val="C15F3C"/>
+                  <a:srgbClr val="7B2D26"/>
                 </a:solidFill>
                 <a:latin typeface="Helvetica Neue"/>
               </a:rPr>
@@ -5811,7 +5811,7 @@
             <a:r>
               <a:rPr sz="1400" b="1">
                 <a:solidFill>
-                  <a:srgbClr val="C15F3C"/>
+                  <a:srgbClr val="7B2D26"/>
                 </a:solidFill>
                 <a:latin typeface="Helvetica Neue"/>
               </a:rPr>
@@ -5836,7 +5836,7 @@
             <a:r>
               <a:rPr sz="1400" b="1">
                 <a:solidFill>
-                  <a:srgbClr val="C15F3C"/>
+                  <a:srgbClr val="7B2D26"/>
                 </a:solidFill>
                 <a:latin typeface="Helvetica Neue"/>
               </a:rPr>
@@ -5861,7 +5861,7 @@
             <a:r>
               <a:rPr sz="1400" b="1">
                 <a:solidFill>
-                  <a:srgbClr val="C15F3C"/>
+                  <a:srgbClr val="7B2D26"/>
                 </a:solidFill>
                 <a:latin typeface="Helvetica Neue"/>
               </a:rPr>
@@ -6049,7 +6049,7 @@
             <a:avLst/>
           </a:prstGeom>
           <a:solidFill>
-            <a:srgbClr val="C15F3C"/>
+            <a:srgbClr val="7B2D26"/>
           </a:solidFill>
           <a:ln>
             <a:noFill/>
@@ -6138,7 +6138,7 @@
             <a:r>
               <a:rPr sz="1100" b="1" i="0">
                 <a:solidFill>
-                  <a:srgbClr val="C15F3C"/>
+                  <a:srgbClr val="7B2D26"/>
                 </a:solidFill>
                 <a:latin typeface="Helvetica Neue"/>
               </a:rPr>
@@ -6177,7 +6177,7 @@
             <a:r>
               <a:rPr sz="1300" b="1">
                 <a:solidFill>
-                  <a:srgbClr val="C15F3C"/>
+                  <a:srgbClr val="7B2D26"/>
                 </a:solidFill>
                 <a:latin typeface="Helvetica Neue"/>
               </a:rPr>
@@ -6202,7 +6202,7 @@
             <a:r>
               <a:rPr sz="1300" b="1">
                 <a:solidFill>
-                  <a:srgbClr val="C15F3C"/>
+                  <a:srgbClr val="7B2D26"/>
                 </a:solidFill>
                 <a:latin typeface="Helvetica Neue"/>
               </a:rPr>
@@ -6227,7 +6227,7 @@
             <a:r>
               <a:rPr sz="1300" b="1">
                 <a:solidFill>
-                  <a:srgbClr val="C15F3C"/>
+                  <a:srgbClr val="7B2D26"/>
                 </a:solidFill>
                 <a:latin typeface="Helvetica Neue"/>
               </a:rPr>
@@ -6252,7 +6252,7 @@
             <a:r>
               <a:rPr sz="1300" b="1">
                 <a:solidFill>
-                  <a:srgbClr val="C15F3C"/>
+                  <a:srgbClr val="7B2D26"/>
                 </a:solidFill>
                 <a:latin typeface="Helvetica Neue"/>
               </a:rPr>
@@ -6277,7 +6277,7 @@
             <a:r>
               <a:rPr sz="1300" b="1">
                 <a:solidFill>
-                  <a:srgbClr val="C15F3C"/>
+                  <a:srgbClr val="7B2D26"/>
                 </a:solidFill>
                 <a:latin typeface="Helvetica Neue"/>
               </a:rPr>
@@ -6302,7 +6302,7 @@
             <a:r>
               <a:rPr sz="1300" b="1">
                 <a:solidFill>
-                  <a:srgbClr val="C15F3C"/>
+                  <a:srgbClr val="7B2D26"/>
                 </a:solidFill>
                 <a:latin typeface="Helvetica Neue"/>
               </a:rPr>
@@ -6346,7 +6346,7 @@
             <a:r>
               <a:rPr sz="1100" b="1" i="0">
                 <a:solidFill>
-                  <a:srgbClr val="C15F3C"/>
+                  <a:srgbClr val="7B2D26"/>
                 </a:solidFill>
                 <a:latin typeface="Helvetica Neue"/>
               </a:rPr>
@@ -6385,7 +6385,7 @@
             <a:r>
               <a:rPr sz="1300" b="1">
                 <a:solidFill>
-                  <a:srgbClr val="C15F3C"/>
+                  <a:srgbClr val="7B2D26"/>
                 </a:solidFill>
                 <a:latin typeface="Helvetica Neue"/>
               </a:rPr>
@@ -6410,7 +6410,7 @@
             <a:r>
               <a:rPr sz="1300" b="1">
                 <a:solidFill>
-                  <a:srgbClr val="C15F3C"/>
+                  <a:srgbClr val="7B2D26"/>
                 </a:solidFill>
                 <a:latin typeface="Helvetica Neue"/>
               </a:rPr>
@@ -6435,7 +6435,7 @@
             <a:r>
               <a:rPr sz="1300" b="1">
                 <a:solidFill>
-                  <a:srgbClr val="C15F3C"/>
+                  <a:srgbClr val="7B2D26"/>
                 </a:solidFill>
                 <a:latin typeface="Helvetica Neue"/>
               </a:rPr>
@@ -6460,7 +6460,7 @@
             <a:r>
               <a:rPr sz="1300" b="1">
                 <a:solidFill>
-                  <a:srgbClr val="C15F3C"/>
+                  <a:srgbClr val="7B2D26"/>
                 </a:solidFill>
                 <a:latin typeface="Helvetica Neue"/>
               </a:rPr>
@@ -6485,7 +6485,7 @@
             <a:r>
               <a:rPr sz="1300" b="1">
                 <a:solidFill>
-                  <a:srgbClr val="C15F3C"/>
+                  <a:srgbClr val="7B2D26"/>
                 </a:solidFill>
                 <a:latin typeface="Helvetica Neue"/>
               </a:rPr>
@@ -6510,7 +6510,7 @@
             <a:r>
               <a:rPr sz="1300" b="1">
                 <a:solidFill>
-                  <a:srgbClr val="C15F3C"/>
+                  <a:srgbClr val="7B2D26"/>
                 </a:solidFill>
                 <a:latin typeface="Helvetica Neue"/>
               </a:rPr>
@@ -6639,7 +6639,7 @@
             <a:avLst/>
           </a:prstGeom>
           <a:solidFill>
-            <a:srgbClr val="C15F3C"/>
+            <a:srgbClr val="7B2D26"/>
           </a:solidFill>
           <a:ln>
             <a:noFill/>
@@ -6728,7 +6728,7 @@
             <a:r>
               <a:rPr sz="1100" b="1" i="0">
                 <a:solidFill>
-                  <a:srgbClr val="C15F3C"/>
+                  <a:srgbClr val="7B2D26"/>
                 </a:solidFill>
                 <a:latin typeface="Helvetica Neue"/>
               </a:rPr>
@@ -6763,7 +6763,7 @@
             <a:r>
               <a:rPr sz="3200" b="1" i="0">
                 <a:solidFill>
-                  <a:srgbClr val="C15F3C"/>
+                  <a:srgbClr val="7B2D26"/>
                 </a:solidFill>
                 <a:latin typeface="Georgia"/>
               </a:rPr>
@@ -6833,7 +6833,7 @@
             <a:r>
               <a:rPr sz="3200" b="1" i="0">
                 <a:solidFill>
-                  <a:srgbClr val="C15F3C"/>
+                  <a:srgbClr val="7B2D26"/>
                 </a:solidFill>
                 <a:latin typeface="Georgia"/>
               </a:rPr>
@@ -6903,7 +6903,7 @@
             <a:r>
               <a:rPr sz="3200" b="1" i="0">
                 <a:solidFill>
-                  <a:srgbClr val="C15F3C"/>
+                  <a:srgbClr val="7B2D26"/>
                 </a:solidFill>
                 <a:latin typeface="Georgia"/>
               </a:rPr>
@@ -6973,7 +6973,7 @@
             <a:r>
               <a:rPr sz="2000" b="0" i="1">
                 <a:solidFill>
-                  <a:srgbClr val="C15F3C"/>
+                  <a:srgbClr val="7B2D26"/>
                 </a:solidFill>
                 <a:latin typeface="Georgia"/>
               </a:rPr>
@@ -7163,7 +7163,7 @@
             <a:avLst/>
           </a:prstGeom>
           <a:solidFill>
-            <a:srgbClr val="C15F3C"/>
+            <a:srgbClr val="7B2D26"/>
           </a:solidFill>
           <a:ln>
             <a:noFill/>
@@ -7252,7 +7252,7 @@
             <a:r>
               <a:rPr sz="7200" b="1" i="0">
                 <a:solidFill>
-                  <a:srgbClr val="C15F3C"/>
+                  <a:srgbClr val="7B2D26"/>
                 </a:solidFill>
                 <a:latin typeface="Georgia"/>
               </a:rPr>
@@ -7477,7 +7477,7 @@
             <a:avLst/>
           </a:prstGeom>
           <a:solidFill>
-            <a:srgbClr val="C15F3C"/>
+            <a:srgbClr val="7B2D26"/>
           </a:solidFill>
           <a:ln>
             <a:noFill/>
@@ -7566,7 +7566,7 @@
             <a:r>
               <a:rPr sz="1100" b="1" i="0">
                 <a:solidFill>
-                  <a:srgbClr val="C15F3C"/>
+                  <a:srgbClr val="7B2D26"/>
                 </a:solidFill>
                 <a:latin typeface="Helvetica Neue"/>
               </a:rPr>
@@ -7605,7 +7605,7 @@
             <a:r>
               <a:rPr sz="1600" b="1">
                 <a:solidFill>
-                  <a:srgbClr val="C15F3C"/>
+                  <a:srgbClr val="7B2D26"/>
                 </a:solidFill>
                 <a:latin typeface="Helvetica Neue"/>
               </a:rPr>
@@ -7630,7 +7630,7 @@
             <a:r>
               <a:rPr sz="1600" b="1">
                 <a:solidFill>
-                  <a:srgbClr val="C15F3C"/>
+                  <a:srgbClr val="7B2D26"/>
                 </a:solidFill>
                 <a:latin typeface="Helvetica Neue"/>
               </a:rPr>
@@ -7655,7 +7655,7 @@
             <a:r>
               <a:rPr sz="1600" b="1">
                 <a:solidFill>
-                  <a:srgbClr val="C15F3C"/>
+                  <a:srgbClr val="7B2D26"/>
                 </a:solidFill>
                 <a:latin typeface="Helvetica Neue"/>
               </a:rPr>
@@ -7680,7 +7680,7 @@
             <a:r>
               <a:rPr sz="1600" b="1">
                 <a:solidFill>
-                  <a:srgbClr val="C15F3C"/>
+                  <a:srgbClr val="7B2D26"/>
                 </a:solidFill>
                 <a:latin typeface="Helvetica Neue"/>
               </a:rPr>
@@ -7705,7 +7705,7 @@
             <a:r>
               <a:rPr sz="1600" b="1">
                 <a:solidFill>
-                  <a:srgbClr val="C15F3C"/>
+                  <a:srgbClr val="7B2D26"/>
                 </a:solidFill>
                 <a:latin typeface="Helvetica Neue"/>
               </a:rPr>
@@ -7749,7 +7749,7 @@
             <a:r>
               <a:rPr sz="1100" b="1" i="0">
                 <a:solidFill>
-                  <a:srgbClr val="C15F3C"/>
+                  <a:srgbClr val="7B2D26"/>
                 </a:solidFill>
                 <a:latin typeface="Helvetica Neue"/>
               </a:rPr>
@@ -7939,7 +7939,7 @@
             <a:avLst/>
           </a:prstGeom>
           <a:solidFill>
-            <a:srgbClr val="C15F3C"/>
+            <a:srgbClr val="7B2D26"/>
           </a:solidFill>
           <a:ln>
             <a:noFill/>
@@ -8032,7 +8032,7 @@
             <a:r>
               <a:rPr sz="2000" b="1">
                 <a:solidFill>
-                  <a:srgbClr val="C15F3C"/>
+                  <a:srgbClr val="7B2D26"/>
                 </a:solidFill>
                 <a:latin typeface="Helvetica Neue"/>
               </a:rPr>
@@ -8057,7 +8057,7 @@
             <a:r>
               <a:rPr sz="2000" b="1">
                 <a:solidFill>
-                  <a:srgbClr val="C15F3C"/>
+                  <a:srgbClr val="7B2D26"/>
                 </a:solidFill>
                 <a:latin typeface="Helvetica Neue"/>
               </a:rPr>
@@ -8082,7 +8082,7 @@
             <a:r>
               <a:rPr sz="2000" b="1">
                 <a:solidFill>
-                  <a:srgbClr val="C15F3C"/>
+                  <a:srgbClr val="7B2D26"/>
                 </a:solidFill>
                 <a:latin typeface="Helvetica Neue"/>
               </a:rPr>
@@ -8126,7 +8126,7 @@
             <a:r>
               <a:rPr sz="1800" b="1" i="1">
                 <a:solidFill>
-                  <a:srgbClr val="C15F3C"/>
+                  <a:srgbClr val="7B2D26"/>
                 </a:solidFill>
                 <a:latin typeface="Georgia"/>
               </a:rPr>
@@ -8246,7 +8246,7 @@
             <a:avLst/>
           </a:prstGeom>
           <a:solidFill>
-            <a:srgbClr val="C15F3C"/>
+            <a:srgbClr val="7B2D26"/>
           </a:solidFill>
           <a:ln>
             <a:noFill/>
@@ -8335,7 +8335,7 @@
             <a:r>
               <a:rPr sz="1100" b="1" i="0">
                 <a:solidFill>
-                  <a:srgbClr val="C15F3C"/>
+                  <a:srgbClr val="7B2D26"/>
                 </a:solidFill>
                 <a:latin typeface="Helvetica Neue"/>
               </a:rPr>
@@ -8440,7 +8440,7 @@
             <a:r>
               <a:rPr sz="1100" b="1" i="0">
                 <a:solidFill>
-                  <a:srgbClr val="C15F3C"/>
+                  <a:srgbClr val="7B2D26"/>
                 </a:solidFill>
                 <a:latin typeface="Helvetica Neue"/>
               </a:rPr>
@@ -8545,7 +8545,7 @@
             <a:r>
               <a:rPr sz="1100" b="1" i="0">
                 <a:solidFill>
-                  <a:srgbClr val="C15F3C"/>
+                  <a:srgbClr val="7B2D26"/>
                 </a:solidFill>
                 <a:latin typeface="Helvetica Neue"/>
               </a:rPr>
@@ -8735,7 +8735,7 @@
             <a:avLst/>
           </a:prstGeom>
           <a:solidFill>
-            <a:srgbClr val="C15F3C"/>
+            <a:srgbClr val="7B2D26"/>
           </a:solidFill>
           <a:ln>
             <a:noFill/>
@@ -8828,7 +8828,7 @@
             <a:r>
               <a:rPr sz="1500" b="1">
                 <a:solidFill>
-                  <a:srgbClr val="C15F3C"/>
+                  <a:srgbClr val="7B2D26"/>
                 </a:solidFill>
                 <a:latin typeface="Helvetica Neue"/>
               </a:rPr>
@@ -8853,7 +8853,7 @@
             <a:r>
               <a:rPr sz="1500" b="1">
                 <a:solidFill>
-                  <a:srgbClr val="C15F3C"/>
+                  <a:srgbClr val="7B2D26"/>
                 </a:solidFill>
                 <a:latin typeface="Helvetica Neue"/>
               </a:rPr>
@@ -8878,7 +8878,7 @@
             <a:r>
               <a:rPr sz="1500" b="1">
                 <a:solidFill>
-                  <a:srgbClr val="C15F3C"/>
+                  <a:srgbClr val="7B2D26"/>
                 </a:solidFill>
                 <a:latin typeface="Helvetica Neue"/>
               </a:rPr>
@@ -8903,7 +8903,7 @@
             <a:r>
               <a:rPr sz="1500" b="1">
                 <a:solidFill>
-                  <a:srgbClr val="C15F3C"/>
+                  <a:srgbClr val="7B2D26"/>
                 </a:solidFill>
                 <a:latin typeface="Helvetica Neue"/>
               </a:rPr>
@@ -8928,7 +8928,7 @@
             <a:r>
               <a:rPr sz="1500" b="1">
                 <a:solidFill>
-                  <a:srgbClr val="C15F3C"/>
+                  <a:srgbClr val="7B2D26"/>
                 </a:solidFill>
                 <a:latin typeface="Helvetica Neue"/>
               </a:rPr>
@@ -8953,7 +8953,7 @@
             <a:r>
               <a:rPr sz="1500" b="1">
                 <a:solidFill>
-                  <a:srgbClr val="C15F3C"/>
+                  <a:srgbClr val="7B2D26"/>
                 </a:solidFill>
                 <a:latin typeface="Helvetica Neue"/>
               </a:rPr>
@@ -8997,7 +8997,7 @@
             <a:r>
               <a:rPr sz="1100" b="1" i="0">
                 <a:solidFill>
-                  <a:srgbClr val="C15F3C"/>
+                  <a:srgbClr val="7B2D26"/>
                 </a:solidFill>
                 <a:latin typeface="Helvetica Neue"/>
               </a:rPr>
@@ -9141,7 +9141,7 @@
             <a:avLst/>
           </a:prstGeom>
           <a:solidFill>
-            <a:srgbClr val="C15F3C"/>
+            <a:srgbClr val="7B2D26"/>
           </a:solidFill>
           <a:ln>
             <a:noFill/>
@@ -9230,7 +9230,7 @@
             <a:r>
               <a:rPr sz="2800" b="1" i="0">
                 <a:solidFill>
-                  <a:srgbClr val="C15F3C"/>
+                  <a:srgbClr val="7B2D26"/>
                 </a:solidFill>
                 <a:latin typeface="Georgia"/>
               </a:rPr>
@@ -9335,7 +9335,7 @@
             <a:r>
               <a:rPr sz="2800" b="1" i="0">
                 <a:solidFill>
-                  <a:srgbClr val="C15F3C"/>
+                  <a:srgbClr val="7B2D26"/>
                 </a:solidFill>
                 <a:latin typeface="Georgia"/>
               </a:rPr>
@@ -9440,7 +9440,7 @@
             <a:r>
               <a:rPr sz="2800" b="1" i="0">
                 <a:solidFill>
-                  <a:srgbClr val="C15F3C"/>
+                  <a:srgbClr val="7B2D26"/>
                 </a:solidFill>
                 <a:latin typeface="Georgia"/>
               </a:rPr>
@@ -9545,7 +9545,7 @@
             <a:r>
               <a:rPr sz="2800" b="1" i="0">
                 <a:solidFill>
-                  <a:srgbClr val="C15F3C"/>
+                  <a:srgbClr val="7B2D26"/>
                 </a:solidFill>
                 <a:latin typeface="Georgia"/>
               </a:rPr>
@@ -9650,7 +9650,7 @@
             <a:r>
               <a:rPr sz="1400" b="0" i="1">
                 <a:solidFill>
-                  <a:srgbClr val="C15F3C"/>
+                  <a:srgbClr val="7B2D26"/>
                 </a:solidFill>
                 <a:latin typeface="Georgia"/>
               </a:rPr>
@@ -9770,7 +9770,7 @@
             <a:avLst/>
           </a:prstGeom>
           <a:solidFill>
-            <a:srgbClr val="C15F3C"/>
+            <a:srgbClr val="7B2D26"/>
           </a:solidFill>
           <a:ln>
             <a:noFill/>
@@ -9883,7 +9883,7 @@
             <a:r>
               <a:rPr sz="1100" b="1" i="0">
                 <a:solidFill>
-                  <a:srgbClr val="C15F3C"/>
+                  <a:srgbClr val="7B2D26"/>
                 </a:solidFill>
                 <a:latin typeface="Helvetica Neue"/>
               </a:rPr>
@@ -10213,7 +10213,7 @@
             <a:avLst/>
           </a:prstGeom>
           <a:solidFill>
-            <a:srgbClr val="C15F3C"/>
+            <a:srgbClr val="7B2D26"/>
           </a:solidFill>
           <a:ln>
             <a:noFill/>
@@ -10326,7 +10326,7 @@
             <a:r>
               <a:rPr sz="1100" b="1" i="0">
                 <a:solidFill>
-                  <a:srgbClr val="C15F3C"/>
+                  <a:srgbClr val="7B2D26"/>
                 </a:solidFill>
                 <a:latin typeface="Helvetica Neue"/>
               </a:rPr>
@@ -10361,7 +10361,7 @@
             <a:r>
               <a:rPr sz="7200" b="1" i="0">
                 <a:solidFill>
-                  <a:srgbClr val="C15F3C"/>
+                  <a:srgbClr val="7B2D26"/>
                 </a:solidFill>
                 <a:latin typeface="Georgia"/>
               </a:rPr>

--- a/presentation/PARCHED_final.pptx
+++ b/presentation/PARCHED_final.pptx
@@ -7122,6 +7122,39 @@
           </a:p>
         </p:txBody>
       </p:sp>
+      <p:sp>
+        <p:nvSpPr>
+          <p:cNvPr id="16" name="TextBox 15"/>
+          <p:cNvSpPr txBox="1"/>
+          <p:nvPr/>
+        </p:nvSpPr>
+        <p:spPr>
+          <a:xfrm>
+            <a:off x="228600" y="6126480"/>
+            <a:ext cx="5486400" cy="365760"/>
+          </a:xfrm>
+          <a:prstGeom prst="rect">
+            <a:avLst/>
+          </a:prstGeom>
+          <a:noFill/>
+        </p:spPr>
+        <p:txBody>
+          <a:bodyPr wrap="none">
+            <a:spAutoFit/>
+          </a:bodyPr>
+          <a:lstStyle/>
+          <a:p>
+            <a:r>
+              <a:rPr sz="1100" b="1">
+                <a:solidFill>
+                  <a:srgbClr val="58A6FF"/>
+                </a:solidFill>
+              </a:rPr>
+              <a:t>🌐  Live model → https://jed08-parched.hf.space/</a:t>
+            </a:r>
+          </a:p>
+        </p:txBody>
+      </p:sp>
     </p:spTree>
   </p:cSld>
   <p:clrMapOvr>
@@ -10168,6 +10201,39 @@
                 <a:latin typeface="Helvetica Neue"/>
               </a:rPr>
               <a:t>8 / 14</a:t>
+            </a:r>
+          </a:p>
+        </p:txBody>
+      </p:sp>
+      <p:sp>
+        <p:nvSpPr>
+          <p:cNvPr id="14" name="TextBox 13"/>
+          <p:cNvSpPr txBox="1"/>
+          <p:nvPr/>
+        </p:nvSpPr>
+        <p:spPr>
+          <a:xfrm>
+            <a:off x="228600" y="6126480"/>
+            <a:ext cx="5486400" cy="365760"/>
+          </a:xfrm>
+          <a:prstGeom prst="rect">
+            <a:avLst/>
+          </a:prstGeom>
+          <a:noFill/>
+        </p:spPr>
+        <p:txBody>
+          <a:bodyPr wrap="none">
+            <a:spAutoFit/>
+          </a:bodyPr>
+          <a:lstStyle/>
+          <a:p>
+            <a:r>
+              <a:rPr sz="1100" b="1">
+                <a:solidFill>
+                  <a:srgbClr val="58A6FF"/>
+                </a:solidFill>
+              </a:rPr>
+              <a:t>🌐  https://jed08-parched.hf.space/</a:t>
             </a:r>
           </a:p>
         </p:txBody>

--- a/presentation/PARCHED_final.pptx
+++ b/presentation/PARCHED_final.pptx
@@ -1215,7 +1215,7 @@
           <a:lstStyle/>
           <a:p>
             <a:r>
-              <a:t>Quick architectural tour. We have four data centers with heterogeneous capacity, so they do not all draw the same. Two farms, one rainfed and one irrigated, which gives us a non-DC consumer with very different demand seasonality. One hundred thousand residents, whose draw follows a temperature-modulated demand curve. A regulator that can issue caps but only sees the basin state with a configurable delay. And the basin itself, thirty billion liters of usable capacity with stochastic recharge from rainfall. One tick is one day, the model runs for ten years or until collapse, whichever comes first. The single most important mechanism is the cooling-stress positive feedback loop, which is what produces the nonlinear regime, and we will see it light up in the H2 result.</a:t>
+              <a:t>Quick architectural tour. We have four data centers with heterogeneous capacity that expand on a fixed nine-month schedule, regardless of basin state. Two farms with seasonal demand, one rainfed and one irrigated. One residential community that starts at one hundred thousand people and grows at a configurable annual rate, so its water need compounds over time just like a real city. A regulator that can issue caps but only sees the basin state with a stochastic delay. And we also model DC water restoration, where data centers return a fraction of their daily draw to the basin via funded recharge projects, modeling real-world water-positive pledges from operators like Microsoft and Google. One tick is one day, the model runs for ten years or until collapse. The single most important mechanism is the cooling-stress positive feedback loop, which produces the nonlinear cliff we will see in H2.</a:t>
             </a:r>
           </a:p>
         </p:txBody>
@@ -5896,7 +5896,7 @@
         <p:spPr>
           <a:xfrm>
             <a:off x="7800000" y="2000000"/>
-            <a:ext cx="4833333" cy="3567354"/>
+            <a:ext cx="4833333" cy="3568991"/>
           </a:xfrm>
           <a:prstGeom prst="rect">
             <a:avLst/>
@@ -5911,7 +5911,7 @@
         </p:nvSpPr>
         <p:spPr>
           <a:xfrm>
-            <a:off x="7800000" y="5647354"/>
+            <a:off x="7800000" y="5648991"/>
             <a:ext cx="4833333" cy="400000"/>
           </a:xfrm>
           <a:prstGeom prst="rect">
@@ -6215,7 +6215,7 @@
                 </a:solidFill>
                 <a:latin typeface="Helvetica Neue"/>
               </a:rPr>
-              <a:t>No climate-change drift</a:t>
+              <a:t>No climate-change drift in recharge mean</a:t>
             </a:r>
           </a:p>
           <a:p>
@@ -6290,7 +6290,7 @@
                 </a:solidFill>
                 <a:latin typeface="Helvetica Neue"/>
               </a:rPr>
-              <a:t>Demand is exogenous</a:t>
+              <a:t>DC demand is exogenous (compute growth not price-responsive)</a:t>
             </a:r>
           </a:p>
           <a:p>
@@ -6423,7 +6423,7 @@
                 </a:solidFill>
                 <a:latin typeface="Helvetica Neue"/>
               </a:rPr>
-              <a:t>Climate-change scenarios (drift in recharge)</a:t>
+              <a:t>Climate-change scenarios (drift in recharge mean)</a:t>
             </a:r>
           </a:p>
           <a:p>
@@ -6448,7 +6448,7 @@
                 </a:solidFill>
                 <a:latin typeface="Helvetica Neue"/>
               </a:rPr>
-              <a:t>Real permit-process modeling</a:t>
+              <a:t>Real permit-process modeling (political delay curves)</a:t>
             </a:r>
           </a:p>
           <a:p>
@@ -6498,7 +6498,7 @@
                 </a:solidFill>
                 <a:latin typeface="Helvetica Neue"/>
               </a:rPr>
-              <a:t>Endogenous demand response (price elasticity)</a:t>
+              <a:t>Endogenous DC demand response (price / water cost)</a:t>
             </a:r>
           </a:p>
           <a:p>
@@ -6523,7 +6523,7 @@
                 </a:solidFill>
                 <a:latin typeface="Helvetica Neue"/>
               </a:rPr>
-              <a:t>Calibrate to a real candidate basin</a:t>
+              <a:t>Calibrate to a real candidate basin (Pacific NW, Chile)</a:t>
             </a:r>
           </a:p>
         </p:txBody>
@@ -7122,39 +7122,6 @@
           </a:p>
         </p:txBody>
       </p:sp>
-      <p:sp>
-        <p:nvSpPr>
-          <p:cNvPr id="16" name="TextBox 15"/>
-          <p:cNvSpPr txBox="1"/>
-          <p:nvPr/>
-        </p:nvSpPr>
-        <p:spPr>
-          <a:xfrm>
-            <a:off x="228600" y="6126480"/>
-            <a:ext cx="5486400" cy="365760"/>
-          </a:xfrm>
-          <a:prstGeom prst="rect">
-            <a:avLst/>
-          </a:prstGeom>
-          <a:noFill/>
-        </p:spPr>
-        <p:txBody>
-          <a:bodyPr wrap="none">
-            <a:spAutoFit/>
-          </a:bodyPr>
-          <a:lstStyle/>
-          <a:p>
-            <a:r>
-              <a:rPr sz="1100" b="1">
-                <a:solidFill>
-                  <a:srgbClr val="58A6FF"/>
-                </a:solidFill>
-              </a:rPr>
-              <a:t>🌐  Live model → https://jed08-parched.hf.space/</a:t>
-            </a:r>
-          </a:p>
-        </p:txBody>
-      </p:sp>
     </p:spTree>
   </p:cSld>
   <p:clrMapOvr>
@@ -7701,7 +7668,7 @@
                 </a:solidFill>
                 <a:latin typeface="Helvetica Neue"/>
               </a:rPr>
-              <a:t>Residential demand (~100k people)</a:t>
+              <a:t>Residential demand (~100k people, growing each year)</a:t>
             </a:r>
           </a:p>
           <a:p>
@@ -8874,7 +8841,7 @@
                 </a:solidFill>
                 <a:latin typeface="Helvetica Neue"/>
               </a:rPr>
-              <a:t>4 data centers (heterogeneous capacity)</a:t>
+              <a:t>4 data centers (heterogeneous capacity, expand every ~9 months)</a:t>
             </a:r>
           </a:p>
           <a:p>
@@ -8899,7 +8866,7 @@
                 </a:solidFill>
                 <a:latin typeface="Helvetica Neue"/>
               </a:rPr>
-              <a:t>2 farms (rainfed and irrigated)</a:t>
+              <a:t>2 farms (rainfed and irrigated, seasonal demand)</a:t>
             </a:r>
           </a:p>
           <a:p>
@@ -8924,7 +8891,7 @@
                 </a:solidFill>
                 <a:latin typeface="Helvetica Neue"/>
               </a:rPr>
-              <a:t>100k residents (consumption from demand curve)</a:t>
+              <a:t>1 residential community (growing population, compound growth)</a:t>
             </a:r>
           </a:p>
           <a:p>
@@ -8949,7 +8916,7 @@
                 </a:solidFill>
                 <a:latin typeface="Helvetica Neue"/>
               </a:rPr>
-              <a:t>1 regulator (delayed observability)</a:t>
+              <a:t>1 regulator (delayed observability, 4 policy modes)</a:t>
             </a:r>
           </a:p>
           <a:p>
@@ -8974,7 +8941,7 @@
                 </a:solidFill>
                 <a:latin typeface="Helvetica Neue"/>
               </a:rPr>
-              <a:t>30 BL shared basin, with stochastic recharge</a:t>
+              <a:t>30 BL shared basin, stochastic recharge + nonlinear penalty</a:t>
             </a:r>
           </a:p>
           <a:p>
@@ -8999,7 +8966,7 @@
                 </a:solidFill>
                 <a:latin typeface="Helvetica Neue"/>
               </a:rPr>
-              <a:t>All interactions mediated through the basin</a:t>
+              <a:t>DC water restoration: configurable replenishment fraction</a:t>
             </a:r>
           </a:p>
         </p:txBody>
@@ -9034,7 +9001,7 @@
                 </a:solidFill>
                 <a:latin typeface="Helvetica Neue"/>
               </a:rPr>
-              <a:t>1 tick = 1 day   /   10-year horizon   /   stop on collapse</a:t>
+              <a:t>1 tick = 1 day   /   10-year horizon   /   stop on collapse   /   live at jed08-parched.hf.space</a:t>
             </a:r>
           </a:p>
         </p:txBody>
@@ -9055,8 +9022,8 @@
         </p:blipFill>
         <p:spPr>
           <a:xfrm>
-            <a:off x="6433333" y="2250759"/>
-            <a:ext cx="6200000" cy="3798481"/>
+            <a:off x="6433333" y="2279667"/>
+            <a:ext cx="6200000" cy="3740666"/>
           </a:xfrm>
           <a:prstGeom prst="rect">
             <a:avLst/>
@@ -10201,39 +10168,6 @@
                 <a:latin typeface="Helvetica Neue"/>
               </a:rPr>
               <a:t>8 / 14</a:t>
-            </a:r>
-          </a:p>
-        </p:txBody>
-      </p:sp>
-      <p:sp>
-        <p:nvSpPr>
-          <p:cNvPr id="14" name="TextBox 13"/>
-          <p:cNvSpPr txBox="1"/>
-          <p:nvPr/>
-        </p:nvSpPr>
-        <p:spPr>
-          <a:xfrm>
-            <a:off x="228600" y="6126480"/>
-            <a:ext cx="5486400" cy="365760"/>
-          </a:xfrm>
-          <a:prstGeom prst="rect">
-            <a:avLst/>
-          </a:prstGeom>
-          <a:noFill/>
-        </p:spPr>
-        <p:txBody>
-          <a:bodyPr wrap="none">
-            <a:spAutoFit/>
-          </a:bodyPr>
-          <a:lstStyle/>
-          <a:p>
-            <a:r>
-              <a:rPr sz="1100" b="1">
-                <a:solidFill>
-                  <a:srgbClr val="58A6FF"/>
-                </a:solidFill>
-              </a:rPr>
-              <a:t>🌐  https://jed08-parched.hf.space/</a:t>
             </a:r>
           </a:p>
         </p:txBody>

--- a/presentation/PARCHED_final.pptx
+++ b/presentation/PARCHED_final.pptx
@@ -19,6 +19,7 @@
     <p:sldId id="267" r:id="rId19"/>
     <p:sldId id="268" r:id="rId20"/>
     <p:sldId id="269" r:id="rId21"/>
+    <p:sldId id="270" r:id="rId22"/>
   </p:sldIdLst>
   <p:sldSz cx="13333333" cy="7500000" type="screen4x3"/>
   <p:notesSz cx="6858000" cy="9144000"/>
@@ -725,7 +726,7 @@
           <a:lstStyle/>
           <a:p>
             <a:r>
-              <a:t>Pulling back, four discussion points. First, self-reporting from individual operators cannot tell you what is happening to the basin. You need a shared, real-time view, basin-level visibility. Second, reactive policy calibrated to conventional thresholds, like thirty percent storage, is structurally equivalent to no policy. It just signs off on the collapse a little later. Third, staggered entry buys time but not safety. The long-run equilibrium is the same. Fourth, and this is the punchline, the nine-times acceleration we found in H2 means that by the time politicians and the press are paying attention, the system is already in the cliff. Real-world parallels are not hypothetical here, think Phoenix, The Dalles in Oregon, Santiago in Chile. Real basins also have climate drift and contamination, which our model does not capture, and those make the situation worse, not better.</a:t>
+              <a:t>This finding came out of running the model with the DC Restore parameter turned up. Here is the narrative. Without restoration our unregulated baseline collapses every single run, mean six years. Now we turn on restoration, which models the water-positive pledges that companies like Microsoft and Google have made publicly: Microsoft wants to be water-positive by 2030, meaning it replenishes more than it consumes. Google has committed to replenishing one hundred and twenty percent of its consumption. We added this mechanism to the model as a configurable fraction of daily draw that is returned to the basin each day. The result is striking. At a hundred percent restoration, the basin stabilizes even under the unregulated scenario. At a hundred and fifty percent, the basin fills to capacity and the net daily aquifer change is positive thirty six point eight megaliters per day. Four data centers running at full capacity, population grown to one hundred and thirty five thousand, zero agricultural complaints. The policy implication is that if restoration obligations are written into operating permits at or above the hundred percent threshold, the regulatory policy mode becomes secondary. The data center itself becomes a water infrastructure asset, not a liability.</a:t>
             </a:r>
           </a:p>
         </p:txBody>
@@ -795,7 +796,7 @@
           <a:lstStyle/>
           <a:p>
             <a:r>
-              <a:t>Limitations, briefly. Our parameters are synthetic, drawn from the literature and calibrated for internal consistency, but they are not validated against any single real basin. We do not model climate-change drift, which would make recharge less reliable over time. We treat the basin as a closed system with no inter-basin trade. The regulator, once it observes the basin, has perfect information. Demand is exogenous, meaning households and farms do not respond to prices. And our agricultural yield loss is binary in a way real crops are not. On the future-work side, the most interesting extensions are inter-basin trade, climate scenarios with drifting recharge, modeling the actual permit process with the political delays it implies, and a calibration exercise against a real candidate basin in the Pacific Northwest or in Latin America.</a:t>
+              <a:t>Pulling back, four discussion points. First, self-reporting from individual operators cannot tell you what is happening to the basin. You need a shared, real-time view, basin-level visibility. Second, reactive policy calibrated to conventional thresholds, like thirty percent storage, is structurally equivalent to no policy. It just signs off on the collapse a little later. Third, staggered entry buys time but not safety. The long-run equilibrium is the same. Fourth, and this is the punchline, the nine-times acceleration we found in H2 means that by the time politicians and the press are paying attention, the system is already in the cliff. Real-world parallels are not hypothetical here, think Phoenix, The Dalles in Oregon, Santiago in Chile. Real basins also have climate drift and contamination, which our model does not capture, and those make the situation worse, not better.</a:t>
             </a:r>
           </a:p>
         </p:txBody>
@@ -821,6 +822,76 @@
 </file>
 
 <file path=ppt/notesSlides/notesSlide14.xml><?xml version="1.0" encoding="utf-8"?>
+<p:notes xmlns:a="http://schemas.openxmlformats.org/drawingml/2006/main" xmlns:p="http://schemas.openxmlformats.org/presentationml/2006/main" xmlns:r="http://schemas.openxmlformats.org/officeDocument/2006/relationships">
+  <p:cSld>
+    <p:spTree>
+      <p:nvGrpSpPr>
+        <p:cNvPr id="1" name=""/>
+        <p:cNvGrpSpPr/>
+        <p:nvPr/>
+      </p:nvGrpSpPr>
+      <p:grpSpPr>
+        <a:xfrm>
+          <a:off x="0" y="0"/>
+          <a:ext cx="0" cy="0"/>
+          <a:chOff x="0" y="0"/>
+          <a:chExt cx="0" cy="0"/>
+        </a:xfrm>
+      </p:grpSpPr>
+      <p:sp>
+        <p:nvSpPr>
+          <p:cNvPr id="2" name="Slide Image Placeholder 1"/>
+          <p:cNvSpPr>
+            <a:spLocks noGrp="1"/>
+          </p:cNvSpPr>
+          <p:nvPr>
+            <p:ph type="sldImg" idx="2"/>
+          </p:nvPr>
+        </p:nvSpPr>
+        <p:spPr/>
+      </p:sp>
+      <p:sp>
+        <p:nvSpPr>
+          <p:cNvPr id="3" name="Notes Placeholder 2"/>
+          <p:cNvSpPr>
+            <a:spLocks noGrp="1"/>
+          </p:cNvSpPr>
+          <p:nvPr>
+            <p:ph type="body" idx="3" sz="quarter"/>
+          </p:nvPr>
+        </p:nvSpPr>
+        <p:spPr/>
+        <p:txBody>
+          <a:bodyPr/>
+          <a:lstStyle/>
+          <a:p>
+            <a:r>
+              <a:t>Limitations, briefly. Our parameters are synthetic, drawn from the literature and calibrated for internal consistency, but they are not validated against any single real basin. We do not model climate-change drift, which would make recharge less reliable over time. We treat the basin as a closed system with no inter-basin trade. The regulator, once it observes the basin, has perfect information. Demand is exogenous, meaning households and farms do not respond to prices. And our agricultural yield loss is binary in a way real crops are not. On the future-work side, the most interesting extensions are inter-basin trade, climate scenarios with drifting recharge, modeling the actual permit process with the political delays it implies, and a calibration exercise against a real candidate basin in the Pacific Northwest or in Latin America.</a:t>
+            </a:r>
+          </a:p>
+        </p:txBody>
+      </p:sp>
+      <p:sp>
+        <p:nvSpPr>
+          <p:cNvPr id="4" name="Slide Number Placeholder 3"/>
+          <p:cNvSpPr>
+            <a:spLocks noGrp="1"/>
+          </p:cNvSpPr>
+          <p:nvPr>
+            <p:ph type="sldNum" idx="5" sz="quarter"/>
+          </p:nvPr>
+        </p:nvSpPr>
+        <p:spPr/>
+      </p:sp>
+    </p:spTree>
+  </p:cSld>
+  <p:clrMapOvr>
+    <a:masterClrMapping/>
+  </p:clrMapOvr>
+</p:notes>
+</file>
+
+<file path=ppt/notesSlides/notesSlide15.xml><?xml version="1.0" encoding="utf-8"?>
 <p:notes xmlns:a="http://schemas.openxmlformats.org/drawingml/2006/main" xmlns:p="http://schemas.openxmlformats.org/presentationml/2006/main" xmlns:r="http://schemas.openxmlformats.org/officeDocument/2006/relationships">
   <p:cSld>
     <p:spTree>
@@ -4796,7 +4867,7 @@
                 </a:solidFill>
                 <a:latin typeface="Helvetica Neue"/>
               </a:rPr>
-              <a:t>1 / 14</a:t>
+              <a:t>1 / 15</a:t>
             </a:r>
           </a:p>
         </p:txBody>
@@ -5204,7 +5275,7 @@
                 </a:solidFill>
                 <a:latin typeface="Helvetica Neue"/>
               </a:rPr>
-              <a:t>10 / 14</a:t>
+              <a:t>10 / 15</a:t>
             </a:r>
           </a:p>
         </p:txBody>
@@ -5647,7 +5718,7 @@
                 </a:solidFill>
                 <a:latin typeface="Helvetica Neue"/>
               </a:rPr>
-              <a:t>11 / 14</a:t>
+              <a:t>11 / 15</a:t>
             </a:r>
           </a:p>
         </p:txBody>
@@ -5751,7 +5822,7 @@
                 </a:solidFill>
                 <a:latin typeface="Georgia"/>
               </a:rPr>
-              <a:t>Discussion: What The Model Says</a:t>
+              <a:t>Bonus Finding: The Restoration Threshold</a:t>
             </a:r>
           </a:p>
         </p:txBody>
@@ -5764,8 +5835,78 @@
         </p:nvSpPr>
         <p:spPr>
           <a:xfrm>
-            <a:off x="700000" y="1900000"/>
-            <a:ext cx="6700000" cy="4800000"/>
+            <a:off x="700000" y="1700000"/>
+            <a:ext cx="11933333" cy="350000"/>
+          </a:xfrm>
+          <a:prstGeom prst="rect">
+            <a:avLst/>
+          </a:prstGeom>
+          <a:noFill/>
+        </p:spPr>
+        <p:txBody>
+          <a:bodyPr wrap="square" lIns="0" rIns="0" tIns="0" bIns="0" anchor="t">
+            <a:spAutoFit/>
+          </a:bodyPr>
+          <a:lstStyle/>
+          <a:p>
+            <a:pPr algn="l"/>
+            <a:r>
+              <a:rPr sz="1100" b="1" i="0">
+                <a:solidFill>
+                  <a:srgbClr val="7B2D26"/>
+                </a:solidFill>
+                <a:latin typeface="Helvetica Neue"/>
+              </a:rPr>
+              <a:t>WHAT HAPPENS WHEN DATA CENTERS GIVE WATER BACK?</a:t>
+            </a:r>
+          </a:p>
+        </p:txBody>
+      </p:sp>
+      <p:sp>
+        <p:nvSpPr>
+          <p:cNvPr id="5" name="TextBox 4"/>
+          <p:cNvSpPr txBox="1"/>
+          <p:nvPr/>
+        </p:nvSpPr>
+        <p:spPr>
+          <a:xfrm>
+            <a:off x="700000" y="2150000"/>
+            <a:ext cx="5600000" cy="450000"/>
+          </a:xfrm>
+          <a:prstGeom prst="rect">
+            <a:avLst/>
+          </a:prstGeom>
+          <a:noFill/>
+        </p:spPr>
+        <p:txBody>
+          <a:bodyPr wrap="square" lIns="0" rIns="0" tIns="0" bIns="0" anchor="t">
+            <a:spAutoFit/>
+          </a:bodyPr>
+          <a:lstStyle/>
+          <a:p>
+            <a:pPr algn="l"/>
+            <a:r>
+              <a:rPr sz="1500" b="1" i="0">
+                <a:solidFill>
+                  <a:srgbClr val="1F1E1D"/>
+                </a:solidFill>
+                <a:latin typeface="Helvetica Neue"/>
+              </a:rPr>
+              <a:t>WITHOUT restoration (baseline):</a:t>
+            </a:r>
+          </a:p>
+        </p:txBody>
+      </p:sp>
+      <p:sp>
+        <p:nvSpPr>
+          <p:cNvPr id="6" name="TextBox 5"/>
+          <p:cNvSpPr txBox="1"/>
+          <p:nvPr/>
+        </p:nvSpPr>
+        <p:spPr>
+          <a:xfrm>
+            <a:off x="700000" y="2600000"/>
+            <a:ext cx="5600000" cy="1100000"/>
           </a:xfrm>
           <a:prstGeom prst="rect">
             <a:avLst/>
@@ -5780,11 +5921,11 @@
           <a:p>
             <a:pPr algn="l">
               <a:lnSpc>
-                <a:spcPct val="150000"/>
+                <a:spcPct val="140000"/>
               </a:lnSpc>
             </a:pPr>
             <a:r>
-              <a:rPr sz="1400" b="1">
+              <a:rPr sz="1300" b="1">
                 <a:solidFill>
                   <a:srgbClr val="7B2D26"/>
                 </a:solidFill>
@@ -5793,23 +5934,23 @@
               <a:t>·  </a:t>
             </a:r>
             <a:r>
-              <a:rPr sz="1400">
+              <a:rPr sz="1300">
                 <a:solidFill>
                   <a:srgbClr val="1F1E1D"/>
                 </a:solidFill>
                 <a:latin typeface="Helvetica Neue"/>
               </a:rPr>
-              <a:t>Self-reporting is insufficient. Basin-level visibility is essential.</a:t>
+              <a:t>Basin drains, collapses in ~6 years</a:t>
             </a:r>
           </a:p>
           <a:p>
             <a:pPr algn="l">
               <a:lnSpc>
-                <a:spcPct val="150000"/>
+                <a:spcPct val="140000"/>
               </a:lnSpc>
             </a:pPr>
             <a:r>
-              <a:rPr sz="1400" b="1">
+              <a:rPr sz="1300" b="1">
                 <a:solidFill>
                   <a:srgbClr val="7B2D26"/>
                 </a:solidFill>
@@ -5818,23 +5959,81 @@
               <a:t>·  </a:t>
             </a:r>
             <a:r>
-              <a:rPr sz="1400">
+              <a:rPr sz="1300">
                 <a:solidFill>
                   <a:srgbClr val="1F1E1D"/>
                 </a:solidFill>
                 <a:latin typeface="Helvetica Neue"/>
               </a:rPr>
-              <a:t>Reactive policy at conventional thresholds is structurally equivalent to no policy.</a:t>
-            </a:r>
-          </a:p>
+              <a:t>Every unregulated run fails (100%, n=50)</a:t>
+            </a:r>
+          </a:p>
+        </p:txBody>
+      </p:sp>
+      <p:sp>
+        <p:nvSpPr>
+          <p:cNvPr id="7" name="TextBox 6"/>
+          <p:cNvSpPr txBox="1"/>
+          <p:nvPr/>
+        </p:nvSpPr>
+        <p:spPr>
+          <a:xfrm>
+            <a:off x="700000" y="3900000"/>
+            <a:ext cx="5600000" cy="450000"/>
+          </a:xfrm>
+          <a:prstGeom prst="rect">
+            <a:avLst/>
+          </a:prstGeom>
+          <a:noFill/>
+        </p:spPr>
+        <p:txBody>
+          <a:bodyPr wrap="square" lIns="0" rIns="0" tIns="0" bIns="0" anchor="t">
+            <a:spAutoFit/>
+          </a:bodyPr>
+          <a:lstStyle/>
+          <a:p>
+            <a:pPr algn="l"/>
+            <a:r>
+              <a:rPr sz="1500" b="1" i="0">
+                <a:solidFill>
+                  <a:srgbClr val="7B2D26"/>
+                </a:solidFill>
+                <a:latin typeface="Helvetica Neue"/>
+              </a:rPr>
+              <a:t>WITH restoration (DC Restore % &gt;= 100%):</a:t>
+            </a:r>
+          </a:p>
+        </p:txBody>
+      </p:sp>
+      <p:sp>
+        <p:nvSpPr>
+          <p:cNvPr id="8" name="TextBox 7"/>
+          <p:cNvSpPr txBox="1"/>
+          <p:nvPr/>
+        </p:nvSpPr>
+        <p:spPr>
+          <a:xfrm>
+            <a:off x="700000" y="4350000"/>
+            <a:ext cx="5600000" cy="1800000"/>
+          </a:xfrm>
+          <a:prstGeom prst="rect">
+            <a:avLst/>
+          </a:prstGeom>
+          <a:noFill/>
+        </p:spPr>
+        <p:txBody>
+          <a:bodyPr wrap="square" lIns="0" rIns="0" tIns="0" bIns="0" anchor="t">
+            <a:spAutoFit/>
+          </a:bodyPr>
+          <a:lstStyle/>
           <a:p>
             <a:pPr algn="l">
               <a:lnSpc>
-                <a:spcPct val="150000"/>
+                <a:spcPct val="140000"/>
               </a:lnSpc>
             </a:pPr>
             <a:r>
-              <a:rPr sz="1400" b="1">
+              <a:rPr sz="1300" b="1">
                 <a:solidFill>
                   <a:srgbClr val="7B2D26"/>
                 </a:solidFill>
@@ -5843,23 +6042,23 @@
               <a:t>·  </a:t>
             </a:r>
             <a:r>
-              <a:rPr sz="1400">
+              <a:rPr sz="1300">
                 <a:solidFill>
                   <a:srgbClr val="1F1E1D"/>
                 </a:solidFill>
                 <a:latin typeface="Helvetica Neue"/>
               </a:rPr>
-              <a:t>Staggered entry buys time, not safety. Long-run equilibrium is unchanged.</a:t>
+              <a:t>Basin climbs to 100% and holds -- even in Unregulated</a:t>
             </a:r>
           </a:p>
           <a:p>
             <a:pPr algn="l">
               <a:lnSpc>
-                <a:spcPct val="150000"/>
+                <a:spcPct val="140000"/>
               </a:lnSpc>
             </a:pPr>
             <a:r>
-              <a:rPr sz="1400" b="1">
+              <a:rPr sz="1300" b="1">
                 <a:solidFill>
                   <a:srgbClr val="7B2D26"/>
                 </a:solidFill>
@@ -5868,79 +6067,320 @@
               <a:t>·  </a:t>
             </a:r>
             <a:r>
-              <a:rPr sz="1400">
+              <a:rPr sz="1300">
                 <a:solidFill>
                   <a:srgbClr val="1F1E1D"/>
                 </a:solidFill>
                 <a:latin typeface="Helvetica Neue"/>
               </a:rPr>
-              <a:t>A 9x acceleration means by the time politicians notice, it is already too late.</a:t>
-            </a:r>
-          </a:p>
-        </p:txBody>
-      </p:sp>
-      <p:pic>
-        <p:nvPicPr>
-          <p:cNvPr id="5" name="Picture 4" descr="fig_scenario_compare.png"/>
-          <p:cNvPicPr>
-            <a:picLocks noChangeAspect="1"/>
-          </p:cNvPicPr>
-          <p:nvPr/>
-        </p:nvPicPr>
-        <p:blipFill>
-          <a:blip r:embed="rId2"/>
-          <a:stretch>
-            <a:fillRect/>
-          </a:stretch>
-        </p:blipFill>
-        <p:spPr>
-          <a:xfrm>
-            <a:off x="7800000" y="2000000"/>
-            <a:ext cx="4833333" cy="3568991"/>
-          </a:xfrm>
-          <a:prstGeom prst="rect">
-            <a:avLst/>
-          </a:prstGeom>
-        </p:spPr>
-      </p:pic>
-      <p:sp>
-        <p:nvSpPr>
-          <p:cNvPr id="6" name="TextBox 5"/>
-          <p:cNvSpPr txBox="1"/>
-          <p:nvPr/>
-        </p:nvSpPr>
-        <p:spPr>
-          <a:xfrm>
-            <a:off x="7800000" y="5648991"/>
-            <a:ext cx="4833333" cy="400000"/>
-          </a:xfrm>
-          <a:prstGeom prst="rect">
-            <a:avLst/>
-          </a:prstGeom>
-          <a:noFill/>
-        </p:spPr>
-        <p:txBody>
-          <a:bodyPr wrap="square" lIns="0" rIns="0" tIns="0" bIns="0" anchor="t">
-            <a:spAutoFit/>
-          </a:bodyPr>
-          <a:lstStyle/>
-          <a:p>
-            <a:pPr algn="ctr"/>
-            <a:r>
-              <a:rPr sz="1000" b="0" i="0">
+              <a:t>Net aquifer gain: +36.8 ML/day at 150% restore</a:t>
+            </a:r>
+          </a:p>
+          <a:p>
+            <a:pPr algn="l">
+              <a:lnSpc>
+                <a:spcPct val="140000"/>
+              </a:lnSpc>
+            </a:pPr>
+            <a:r>
+              <a:rPr sz="1300" b="1">
+                <a:solidFill>
+                  <a:srgbClr val="7B2D26"/>
+                </a:solidFill>
+                <a:latin typeface="Helvetica Neue"/>
+              </a:rPr>
+              <a:t>·  </a:t>
+            </a:r>
+            <a:r>
+              <a:rPr sz="1300">
+                <a:solidFill>
+                  <a:srgbClr val="1F1E1D"/>
+                </a:solidFill>
+                <a:latin typeface="Helvetica Neue"/>
+              </a:rPr>
+              <a:t>4 DCs running full capacity (47.7 ML total), zero complaints</a:t>
+            </a:r>
+          </a:p>
+          <a:p>
+            <a:pPr algn="l">
+              <a:lnSpc>
+                <a:spcPct val="140000"/>
+              </a:lnSpc>
+            </a:pPr>
+            <a:r>
+              <a:rPr sz="1300" b="1">
+                <a:solidFill>
+                  <a:srgbClr val="7B2D26"/>
+                </a:solidFill>
+                <a:latin typeface="Helvetica Neue"/>
+              </a:rPr>
+              <a:t>·  </a:t>
+            </a:r>
+            <a:r>
+              <a:rPr sz="1300">
+                <a:solidFill>
+                  <a:srgbClr val="1F1E1D"/>
+                </a:solidFill>
+                <a:latin typeface="Helvetica Neue"/>
+              </a:rPr>
+              <a:t>Population grew to 135,000 -- still fully sustained</a:t>
+            </a:r>
+          </a:p>
+        </p:txBody>
+      </p:sp>
+      <p:sp>
+        <p:nvSpPr>
+          <p:cNvPr id="9" name="TextBox 8"/>
+          <p:cNvSpPr txBox="1"/>
+          <p:nvPr/>
+        </p:nvSpPr>
+        <p:spPr>
+          <a:xfrm>
+            <a:off x="6700000" y="1700000"/>
+            <a:ext cx="6000000" cy="400000"/>
+          </a:xfrm>
+          <a:prstGeom prst="rect">
+            <a:avLst/>
+          </a:prstGeom>
+          <a:noFill/>
+        </p:spPr>
+        <p:txBody>
+          <a:bodyPr wrap="square" lIns="0" rIns="0" tIns="0" bIns="0" anchor="t">
+            <a:spAutoFit/>
+          </a:bodyPr>
+          <a:lstStyle/>
+          <a:p>
+            <a:pPr algn="l"/>
+            <a:r>
+              <a:rPr sz="1100" b="1" i="0">
+                <a:solidFill>
+                  <a:srgbClr val="7B2D26"/>
+                </a:solidFill>
+                <a:latin typeface="Helvetica Neue"/>
+              </a:rPr>
+              <a:t>THE THRESHOLD</a:t>
+            </a:r>
+          </a:p>
+        </p:txBody>
+      </p:sp>
+      <p:sp>
+        <p:nvSpPr>
+          <p:cNvPr id="10" name="TextBox 9"/>
+          <p:cNvSpPr txBox="1"/>
+          <p:nvPr/>
+        </p:nvSpPr>
+        <p:spPr>
+          <a:xfrm>
+            <a:off x="6700000" y="2100000"/>
+            <a:ext cx="6000000" cy="1400000"/>
+          </a:xfrm>
+          <a:prstGeom prst="rect">
+            <a:avLst/>
+          </a:prstGeom>
+          <a:noFill/>
+        </p:spPr>
+        <p:txBody>
+          <a:bodyPr wrap="square" lIns="0" rIns="0" tIns="0" bIns="0" anchor="t">
+            <a:spAutoFit/>
+          </a:bodyPr>
+          <a:lstStyle/>
+          <a:p>
+            <a:pPr algn="l"/>
+            <a:r>
+              <a:rPr sz="8000" b="1" i="0">
+                <a:solidFill>
+                  <a:srgbClr val="7B2D26"/>
+                </a:solidFill>
+                <a:latin typeface="Georgia"/>
+              </a:rPr>
+              <a:t>~100%</a:t>
+            </a:r>
+          </a:p>
+        </p:txBody>
+      </p:sp>
+      <p:sp>
+        <p:nvSpPr>
+          <p:cNvPr id="11" name="TextBox 10"/>
+          <p:cNvSpPr txBox="1"/>
+          <p:nvPr/>
+        </p:nvSpPr>
+        <p:spPr>
+          <a:xfrm>
+            <a:off x="6700000" y="3500000"/>
+            <a:ext cx="6000000" cy="700000"/>
+          </a:xfrm>
+          <a:prstGeom prst="rect">
+            <a:avLst/>
+          </a:prstGeom>
+          <a:noFill/>
+        </p:spPr>
+        <p:txBody>
+          <a:bodyPr wrap="square" lIns="0" rIns="0" tIns="0" bIns="0" anchor="t">
+            <a:spAutoFit/>
+          </a:bodyPr>
+          <a:lstStyle/>
+          <a:p>
+            <a:pPr algn="l"/>
+            <a:r>
+              <a:rPr sz="1600" b="0" i="1">
+                <a:solidFill>
+                  <a:srgbClr val="1F1E1D"/>
+                </a:solidFill>
+                <a:latin typeface="Georgia"/>
+              </a:rPr>
+              <a:t>restoration rate flips DCs from</a:t>
+            </a:r>
+          </a:p>
+          <a:p>
+            <a:pPr algn="l"/>
+            <a:r>
+              <a:rPr sz="1600" b="0" i="1">
+                <a:solidFill>
+                  <a:srgbClr val="1F1E1D"/>
+                </a:solidFill>
+                <a:latin typeface="Georgia"/>
+              </a:rPr>
+              <a:t>aquifer drains to replenishers.</a:t>
+            </a:r>
+          </a:p>
+        </p:txBody>
+      </p:sp>
+      <p:sp>
+        <p:nvSpPr>
+          <p:cNvPr id="12" name="TextBox 11"/>
+          <p:cNvSpPr txBox="1"/>
+          <p:nvPr/>
+        </p:nvSpPr>
+        <p:spPr>
+          <a:xfrm>
+            <a:off x="6700000" y="4400000"/>
+            <a:ext cx="6000000" cy="400000"/>
+          </a:xfrm>
+          <a:prstGeom prst="rect">
+            <a:avLst/>
+          </a:prstGeom>
+          <a:noFill/>
+        </p:spPr>
+        <p:txBody>
+          <a:bodyPr wrap="square" lIns="0" rIns="0" tIns="0" bIns="0" anchor="t">
+            <a:spAutoFit/>
+          </a:bodyPr>
+          <a:lstStyle/>
+          <a:p>
+            <a:pPr algn="l"/>
+            <a:r>
+              <a:rPr sz="1100" b="1" i="0">
+                <a:solidFill>
+                  <a:srgbClr val="7B2D26"/>
+                </a:solidFill>
+                <a:latin typeface="Helvetica Neue"/>
+              </a:rPr>
+              <a:t>REAL-WORLD PARALLEL</a:t>
+            </a:r>
+          </a:p>
+        </p:txBody>
+      </p:sp>
+      <p:sp>
+        <p:nvSpPr>
+          <p:cNvPr id="13" name="TextBox 12"/>
+          <p:cNvSpPr txBox="1"/>
+          <p:nvPr/>
+        </p:nvSpPr>
+        <p:spPr>
+          <a:xfrm>
+            <a:off x="6700000" y="4850000"/>
+            <a:ext cx="6000000" cy="1600000"/>
+          </a:xfrm>
+          <a:prstGeom prst="rect">
+            <a:avLst/>
+          </a:prstGeom>
+          <a:noFill/>
+        </p:spPr>
+        <p:txBody>
+          <a:bodyPr wrap="square" lIns="0" rIns="0" tIns="0" bIns="0" anchor="t">
+            <a:spAutoFit/>
+          </a:bodyPr>
+          <a:lstStyle/>
+          <a:p>
+            <a:pPr algn="l">
+              <a:lnSpc>
+                <a:spcPct val="135000"/>
+              </a:lnSpc>
+            </a:pPr>
+            <a:r>
+              <a:rPr sz="1200" b="1">
+                <a:solidFill>
+                  <a:srgbClr val="7B2D26"/>
+                </a:solidFill>
+                <a:latin typeface="Helvetica Neue"/>
+              </a:rPr>
+              <a:t>·  </a:t>
+            </a:r>
+            <a:r>
+              <a:rPr sz="1200">
                 <a:solidFill>
                   <a:srgbClr val="605E5B"/>
                 </a:solidFill>
                 <a:latin typeface="Helvetica Neue"/>
               </a:rPr>
-              <a:t>Scenario comparison (A / B / C / D)</a:t>
-            </a:r>
-          </a:p>
-        </p:txBody>
-      </p:sp>
-      <p:sp>
-        <p:nvSpPr>
-          <p:cNvPr id="7" name="TextBox 6"/>
+              <a:t>Microsoft: water-positive pledge by 2030 (replenish &gt;100%)</a:t>
+            </a:r>
+          </a:p>
+          <a:p>
+            <a:pPr algn="l">
+              <a:lnSpc>
+                <a:spcPct val="135000"/>
+              </a:lnSpc>
+            </a:pPr>
+            <a:r>
+              <a:rPr sz="1200" b="1">
+                <a:solidFill>
+                  <a:srgbClr val="7B2D26"/>
+                </a:solidFill>
+                <a:latin typeface="Helvetica Neue"/>
+              </a:rPr>
+              <a:t>·  </a:t>
+            </a:r>
+            <a:r>
+              <a:rPr sz="1200">
+                <a:solidFill>
+                  <a:srgbClr val="605E5B"/>
+                </a:solidFill>
+                <a:latin typeface="Helvetica Neue"/>
+              </a:rPr>
+              <a:t>Google: replenish 120% of water consumed</a:t>
+            </a:r>
+          </a:p>
+          <a:p>
+            <a:pPr algn="l">
+              <a:lnSpc>
+                <a:spcPct val="135000"/>
+              </a:lnSpc>
+            </a:pPr>
+            <a:r>
+              <a:rPr sz="1200" b="1">
+                <a:solidFill>
+                  <a:srgbClr val="7B2D26"/>
+                </a:solidFill>
+                <a:latin typeface="Helvetica Neue"/>
+              </a:rPr>
+              <a:t>·  </a:t>
+            </a:r>
+            <a:r>
+              <a:rPr sz="1200">
+                <a:solidFill>
+                  <a:srgbClr val="605E5B"/>
+                </a:solidFill>
+                <a:latin typeface="Helvetica Neue"/>
+              </a:rPr>
+              <a:t>Our model quantifies the basin-level effect of that pledge</a:t>
+            </a:r>
+          </a:p>
+        </p:txBody>
+      </p:sp>
+      <p:sp>
+        <p:nvSpPr>
+          <p:cNvPr id="14" name="TextBox 13"/>
           <p:cNvSpPr txBox="1"/>
           <p:nvPr/>
         </p:nvSpPr>
@@ -5975,7 +6415,7 @@
       </p:sp>
       <p:sp>
         <p:nvSpPr>
-          <p:cNvPr id="8" name="TextBox 7"/>
+          <p:cNvPr id="15" name="TextBox 14"/>
           <p:cNvSpPr txBox="1"/>
           <p:nvPr/>
         </p:nvSpPr>
@@ -6003,7 +6443,7 @@
                 </a:solidFill>
                 <a:latin typeface="Helvetica Neue"/>
               </a:rPr>
-              <a:t>12 / 14</a:t>
+              <a:t>12 / 15</a:t>
             </a:r>
           </a:p>
         </p:txBody>
@@ -6107,7 +6547,7 @@
                 </a:solidFill>
                 <a:latin typeface="Georgia"/>
               </a:rPr>
-              <a:t>Limitations and Future Work</a:t>
+              <a:t>Discussion: What The Model Says</a:t>
             </a:r>
           </a:p>
         </p:txBody>
@@ -6120,43 +6560,8 @@
         </p:nvSpPr>
         <p:spPr>
           <a:xfrm>
-            <a:off x="700000" y="1800000"/>
-            <a:ext cx="5900000" cy="400000"/>
-          </a:xfrm>
-          <a:prstGeom prst="rect">
-            <a:avLst/>
-          </a:prstGeom>
-          <a:noFill/>
-        </p:spPr>
-        <p:txBody>
-          <a:bodyPr wrap="square" lIns="0" rIns="0" tIns="0" bIns="0" anchor="t">
-            <a:spAutoFit/>
-          </a:bodyPr>
-          <a:lstStyle/>
-          <a:p>
-            <a:pPr algn="l"/>
-            <a:r>
-              <a:rPr sz="1100" b="1" i="0">
-                <a:solidFill>
-                  <a:srgbClr val="7B2D26"/>
-                </a:solidFill>
-                <a:latin typeface="Helvetica Neue"/>
-              </a:rPr>
-              <a:t>LIMITATIONS</a:t>
-            </a:r>
-          </a:p>
-        </p:txBody>
-      </p:sp>
-      <p:sp>
-        <p:nvSpPr>
-          <p:cNvPr id="5" name="TextBox 4"/>
-          <p:cNvSpPr txBox="1"/>
-          <p:nvPr/>
-        </p:nvSpPr>
-        <p:spPr>
-          <a:xfrm>
-            <a:off x="700000" y="2250000"/>
-            <a:ext cx="5900000" cy="4500000"/>
+            <a:off x="700000" y="1900000"/>
+            <a:ext cx="6700000" cy="4800000"/>
           </a:xfrm>
           <a:prstGeom prst="rect">
             <a:avLst/>
@@ -6171,11 +6576,11 @@
           <a:p>
             <a:pPr algn="l">
               <a:lnSpc>
-                <a:spcPct val="140000"/>
+                <a:spcPct val="150000"/>
               </a:lnSpc>
             </a:pPr>
             <a:r>
-              <a:rPr sz="1300" b="1">
+              <a:rPr sz="1400" b="1">
                 <a:solidFill>
                   <a:srgbClr val="7B2D26"/>
                 </a:solidFill>
@@ -6184,23 +6589,23 @@
               <a:t>·  </a:t>
             </a:r>
             <a:r>
-              <a:rPr sz="1300">
+              <a:rPr sz="1400">
                 <a:solidFill>
                   <a:srgbClr val="1F1E1D"/>
                 </a:solidFill>
                 <a:latin typeface="Helvetica Neue"/>
               </a:rPr>
-              <a:t>Synthetic parameters (calibrated, not validated against a specific basin)</a:t>
+              <a:t>Self-reporting is insufficient. Basin-level visibility is essential.</a:t>
             </a:r>
           </a:p>
           <a:p>
             <a:pPr algn="l">
               <a:lnSpc>
-                <a:spcPct val="140000"/>
+                <a:spcPct val="150000"/>
               </a:lnSpc>
             </a:pPr>
             <a:r>
-              <a:rPr sz="1300" b="1">
+              <a:rPr sz="1400" b="1">
                 <a:solidFill>
                   <a:srgbClr val="7B2D26"/>
                 </a:solidFill>
@@ -6209,23 +6614,23 @@
               <a:t>·  </a:t>
             </a:r>
             <a:r>
-              <a:rPr sz="1300">
+              <a:rPr sz="1400">
                 <a:solidFill>
                   <a:srgbClr val="1F1E1D"/>
                 </a:solidFill>
                 <a:latin typeface="Helvetica Neue"/>
               </a:rPr>
-              <a:t>No climate-change drift in recharge mean</a:t>
+              <a:t>Reactive policy at conventional thresholds is structurally equivalent to no policy.</a:t>
             </a:r>
           </a:p>
           <a:p>
             <a:pPr algn="l">
               <a:lnSpc>
-                <a:spcPct val="140000"/>
+                <a:spcPct val="150000"/>
               </a:lnSpc>
             </a:pPr>
             <a:r>
-              <a:rPr sz="1300" b="1">
+              <a:rPr sz="1400" b="1">
                 <a:solidFill>
                   <a:srgbClr val="7B2D26"/>
                 </a:solidFill>
@@ -6234,23 +6639,23 @@
               <a:t>·  </a:t>
             </a:r>
             <a:r>
-              <a:rPr sz="1300">
+              <a:rPr sz="1400">
                 <a:solidFill>
                   <a:srgbClr val="1F1E1D"/>
                 </a:solidFill>
                 <a:latin typeface="Helvetica Neue"/>
               </a:rPr>
-              <a:t>Single basin, no inter-basin trade</a:t>
+              <a:t>Staggered entry buys time, not safety. Long-run equilibrium is unchanged.</a:t>
             </a:r>
           </a:p>
           <a:p>
             <a:pPr algn="l">
               <a:lnSpc>
-                <a:spcPct val="140000"/>
+                <a:spcPct val="150000"/>
               </a:lnSpc>
             </a:pPr>
             <a:r>
-              <a:rPr sz="1300" b="1">
+              <a:rPr sz="1400" b="1">
                 <a:solidFill>
                   <a:srgbClr val="7B2D26"/>
                 </a:solidFill>
@@ -6259,23 +6664,23 @@
               <a:t>·  </a:t>
             </a:r>
             <a:r>
-              <a:rPr sz="1300">
+              <a:rPr sz="1400">
                 <a:solidFill>
                   <a:srgbClr val="1F1E1D"/>
                 </a:solidFill>
                 <a:latin typeface="Helvetica Neue"/>
               </a:rPr>
-              <a:t>Regulator has perfect observability after delay</a:t>
+              <a:t>A 9x acceleration means by the time politicians notice, it is already too late.</a:t>
             </a:r>
           </a:p>
           <a:p>
             <a:pPr algn="l">
               <a:lnSpc>
-                <a:spcPct val="140000"/>
+                <a:spcPct val="150000"/>
               </a:lnSpc>
             </a:pPr>
             <a:r>
-              <a:rPr sz="1300" b="1">
+              <a:rPr sz="1400" b="1">
                 <a:solidFill>
                   <a:srgbClr val="7B2D26"/>
                 </a:solidFill>
@@ -6284,42 +6689,41 @@
               <a:t>·  </a:t>
             </a:r>
             <a:r>
-              <a:rPr sz="1300">
+              <a:rPr sz="1400">
                 <a:solidFill>
                   <a:srgbClr val="1F1E1D"/>
                 </a:solidFill>
                 <a:latin typeface="Helvetica Neue"/>
               </a:rPr>
-              <a:t>DC demand is exogenous (compute growth not price-responsive)</a:t>
-            </a:r>
-          </a:p>
-          <a:p>
-            <a:pPr algn="l">
-              <a:lnSpc>
-                <a:spcPct val="140000"/>
-              </a:lnSpc>
-            </a:pPr>
-            <a:r>
-              <a:rPr sz="1300" b="1">
-                <a:solidFill>
-                  <a:srgbClr val="7B2D26"/>
-                </a:solidFill>
-                <a:latin typeface="Helvetica Neue"/>
-              </a:rPr>
-              <a:t>·  </a:t>
-            </a:r>
-            <a:r>
-              <a:rPr sz="1300">
-                <a:solidFill>
-                  <a:srgbClr val="1F1E1D"/>
-                </a:solidFill>
-                <a:latin typeface="Helvetica Neue"/>
-              </a:rPr>
-              <a:t>Ag yield loss simplified: below threshold = dead</a:t>
-            </a:r>
-          </a:p>
-        </p:txBody>
-      </p:sp>
+              <a:t>Restoration obligations &gt;= 100% can flip a data center from threat to asset.</a:t>
+            </a:r>
+          </a:p>
+        </p:txBody>
+      </p:sp>
+      <p:pic>
+        <p:nvPicPr>
+          <p:cNvPr id="5" name="Picture 4" descr="fig_scenario_compare.png"/>
+          <p:cNvPicPr>
+            <a:picLocks noChangeAspect="1"/>
+          </p:cNvPicPr>
+          <p:nvPr/>
+        </p:nvPicPr>
+        <p:blipFill>
+          <a:blip r:embed="rId2"/>
+          <a:stretch>
+            <a:fillRect/>
+          </a:stretch>
+        </p:blipFill>
+        <p:spPr>
+          <a:xfrm>
+            <a:off x="7800000" y="2000000"/>
+            <a:ext cx="4833333" cy="3568991"/>
+          </a:xfrm>
+          <a:prstGeom prst="rect">
+            <a:avLst/>
+          </a:prstGeom>
+        </p:spPr>
+      </p:pic>
       <p:sp>
         <p:nvSpPr>
           <p:cNvPr id="6" name="TextBox 5"/>
@@ -6328,29 +6732,29 @@
         </p:nvSpPr>
         <p:spPr>
           <a:xfrm>
-            <a:off x="7100000" y="1800000"/>
-            <a:ext cx="5700000" cy="400000"/>
-          </a:xfrm>
-          <a:prstGeom prst="rect">
-            <a:avLst/>
-          </a:prstGeom>
-          <a:noFill/>
-        </p:spPr>
-        <p:txBody>
-          <a:bodyPr wrap="square" lIns="0" rIns="0" tIns="0" bIns="0" anchor="t">
-            <a:spAutoFit/>
-          </a:bodyPr>
-          <a:lstStyle/>
-          <a:p>
-            <a:pPr algn="l"/>
-            <a:r>
-              <a:rPr sz="1100" b="1" i="0">
-                <a:solidFill>
-                  <a:srgbClr val="7B2D26"/>
-                </a:solidFill>
-                <a:latin typeface="Helvetica Neue"/>
-              </a:rPr>
-              <a:t>FUTURE WORK</a:t>
+            <a:off x="7800000" y="5648991"/>
+            <a:ext cx="4833333" cy="400000"/>
+          </a:xfrm>
+          <a:prstGeom prst="rect">
+            <a:avLst/>
+          </a:prstGeom>
+          <a:noFill/>
+        </p:spPr>
+        <p:txBody>
+          <a:bodyPr wrap="square" lIns="0" rIns="0" tIns="0" bIns="0" anchor="t">
+            <a:spAutoFit/>
+          </a:bodyPr>
+          <a:lstStyle/>
+          <a:p>
+            <a:pPr algn="ctr"/>
+            <a:r>
+              <a:rPr sz="1000" b="0" i="0">
+                <a:solidFill>
+                  <a:srgbClr val="605E5B"/>
+                </a:solidFill>
+                <a:latin typeface="Helvetica Neue"/>
+              </a:rPr>
+              <a:t>Scenario comparison (A / B / C / D)</a:t>
             </a:r>
           </a:p>
         </p:txBody>
@@ -6358,179 +6762,6 @@
       <p:sp>
         <p:nvSpPr>
           <p:cNvPr id="7" name="TextBox 6"/>
-          <p:cNvSpPr txBox="1"/>
-          <p:nvPr/>
-        </p:nvSpPr>
-        <p:spPr>
-          <a:xfrm>
-            <a:off x="7100000" y="2250000"/>
-            <a:ext cx="5700000" cy="4500000"/>
-          </a:xfrm>
-          <a:prstGeom prst="rect">
-            <a:avLst/>
-          </a:prstGeom>
-          <a:noFill/>
-        </p:spPr>
-        <p:txBody>
-          <a:bodyPr wrap="square" lIns="0" rIns="0" tIns="0" bIns="0" anchor="t">
-            <a:spAutoFit/>
-          </a:bodyPr>
-          <a:lstStyle/>
-          <a:p>
-            <a:pPr algn="l">
-              <a:lnSpc>
-                <a:spcPct val="140000"/>
-              </a:lnSpc>
-            </a:pPr>
-            <a:r>
-              <a:rPr sz="1300" b="1">
-                <a:solidFill>
-                  <a:srgbClr val="7B2D26"/>
-                </a:solidFill>
-                <a:latin typeface="Helvetica Neue"/>
-              </a:rPr>
-              <a:t>·  </a:t>
-            </a:r>
-            <a:r>
-              <a:rPr sz="1300">
-                <a:solidFill>
-                  <a:srgbClr val="1F1E1D"/>
-                </a:solidFill>
-                <a:latin typeface="Helvetica Neue"/>
-              </a:rPr>
-              <a:t>Inter-basin water trade</a:t>
-            </a:r>
-          </a:p>
-          <a:p>
-            <a:pPr algn="l">
-              <a:lnSpc>
-                <a:spcPct val="140000"/>
-              </a:lnSpc>
-            </a:pPr>
-            <a:r>
-              <a:rPr sz="1300" b="1">
-                <a:solidFill>
-                  <a:srgbClr val="7B2D26"/>
-                </a:solidFill>
-                <a:latin typeface="Helvetica Neue"/>
-              </a:rPr>
-              <a:t>·  </a:t>
-            </a:r>
-            <a:r>
-              <a:rPr sz="1300">
-                <a:solidFill>
-                  <a:srgbClr val="1F1E1D"/>
-                </a:solidFill>
-                <a:latin typeface="Helvetica Neue"/>
-              </a:rPr>
-              <a:t>Climate-change scenarios (drift in recharge mean)</a:t>
-            </a:r>
-          </a:p>
-          <a:p>
-            <a:pPr algn="l">
-              <a:lnSpc>
-                <a:spcPct val="140000"/>
-              </a:lnSpc>
-            </a:pPr>
-            <a:r>
-              <a:rPr sz="1300" b="1">
-                <a:solidFill>
-                  <a:srgbClr val="7B2D26"/>
-                </a:solidFill>
-                <a:latin typeface="Helvetica Neue"/>
-              </a:rPr>
-              <a:t>·  </a:t>
-            </a:r>
-            <a:r>
-              <a:rPr sz="1300">
-                <a:solidFill>
-                  <a:srgbClr val="1F1E1D"/>
-                </a:solidFill>
-                <a:latin typeface="Helvetica Neue"/>
-              </a:rPr>
-              <a:t>Real permit-process modeling (political delay curves)</a:t>
-            </a:r>
-          </a:p>
-          <a:p>
-            <a:pPr algn="l">
-              <a:lnSpc>
-                <a:spcPct val="140000"/>
-              </a:lnSpc>
-            </a:pPr>
-            <a:r>
-              <a:rPr sz="1300" b="1">
-                <a:solidFill>
-                  <a:srgbClr val="7B2D26"/>
-                </a:solidFill>
-                <a:latin typeface="Helvetica Neue"/>
-              </a:rPr>
-              <a:t>·  </a:t>
-            </a:r>
-            <a:r>
-              <a:rPr sz="1300">
-                <a:solidFill>
-                  <a:srgbClr val="1F1E1D"/>
-                </a:solidFill>
-                <a:latin typeface="Helvetica Neue"/>
-              </a:rPr>
-              <a:t>Inter-operator contestation and bidding</a:t>
-            </a:r>
-          </a:p>
-          <a:p>
-            <a:pPr algn="l">
-              <a:lnSpc>
-                <a:spcPct val="140000"/>
-              </a:lnSpc>
-            </a:pPr>
-            <a:r>
-              <a:rPr sz="1300" b="1">
-                <a:solidFill>
-                  <a:srgbClr val="7B2D26"/>
-                </a:solidFill>
-                <a:latin typeface="Helvetica Neue"/>
-              </a:rPr>
-              <a:t>·  </a:t>
-            </a:r>
-            <a:r>
-              <a:rPr sz="1300">
-                <a:solidFill>
-                  <a:srgbClr val="1F1E1D"/>
-                </a:solidFill>
-                <a:latin typeface="Helvetica Neue"/>
-              </a:rPr>
-              <a:t>Endogenous DC demand response (price / water cost)</a:t>
-            </a:r>
-          </a:p>
-          <a:p>
-            <a:pPr algn="l">
-              <a:lnSpc>
-                <a:spcPct val="140000"/>
-              </a:lnSpc>
-            </a:pPr>
-            <a:r>
-              <a:rPr sz="1300" b="1">
-                <a:solidFill>
-                  <a:srgbClr val="7B2D26"/>
-                </a:solidFill>
-                <a:latin typeface="Helvetica Neue"/>
-              </a:rPr>
-              <a:t>·  </a:t>
-            </a:r>
-            <a:r>
-              <a:rPr sz="1300">
-                <a:solidFill>
-                  <a:srgbClr val="1F1E1D"/>
-                </a:solidFill>
-                <a:latin typeface="Helvetica Neue"/>
-              </a:rPr>
-              <a:t>Calibrate to a real candidate basin (Pacific NW, Chile)</a:t>
-            </a:r>
-          </a:p>
-        </p:txBody>
-      </p:sp>
-      <p:sp>
-        <p:nvSpPr>
-          <p:cNvPr id="8" name="TextBox 7"/>
           <p:cNvSpPr txBox="1"/>
           <p:nvPr/>
         </p:nvSpPr>
@@ -6565,7 +6796,7 @@
       </p:sp>
       <p:sp>
         <p:nvSpPr>
-          <p:cNvPr id="9" name="TextBox 8"/>
+          <p:cNvPr id="8" name="TextBox 7"/>
           <p:cNvSpPr txBox="1"/>
           <p:nvPr/>
         </p:nvSpPr>
@@ -6593,7 +6824,7 @@
                 </a:solidFill>
                 <a:latin typeface="Helvetica Neue"/>
               </a:rPr>
-              <a:t>13 / 14</a:t>
+              <a:t>13 / 15</a:t>
             </a:r>
           </a:p>
         </p:txBody>
@@ -6697,6 +6928,596 @@
                 </a:solidFill>
                 <a:latin typeface="Georgia"/>
               </a:rPr>
+              <a:t>Limitations and Future Work</a:t>
+            </a:r>
+          </a:p>
+        </p:txBody>
+      </p:sp>
+      <p:sp>
+        <p:nvSpPr>
+          <p:cNvPr id="4" name="TextBox 3"/>
+          <p:cNvSpPr txBox="1"/>
+          <p:nvPr/>
+        </p:nvSpPr>
+        <p:spPr>
+          <a:xfrm>
+            <a:off x="700000" y="1800000"/>
+            <a:ext cx="5900000" cy="400000"/>
+          </a:xfrm>
+          <a:prstGeom prst="rect">
+            <a:avLst/>
+          </a:prstGeom>
+          <a:noFill/>
+        </p:spPr>
+        <p:txBody>
+          <a:bodyPr wrap="square" lIns="0" rIns="0" tIns="0" bIns="0" anchor="t">
+            <a:spAutoFit/>
+          </a:bodyPr>
+          <a:lstStyle/>
+          <a:p>
+            <a:pPr algn="l"/>
+            <a:r>
+              <a:rPr sz="1100" b="1" i="0">
+                <a:solidFill>
+                  <a:srgbClr val="7B2D26"/>
+                </a:solidFill>
+                <a:latin typeface="Helvetica Neue"/>
+              </a:rPr>
+              <a:t>LIMITATIONS</a:t>
+            </a:r>
+          </a:p>
+        </p:txBody>
+      </p:sp>
+      <p:sp>
+        <p:nvSpPr>
+          <p:cNvPr id="5" name="TextBox 4"/>
+          <p:cNvSpPr txBox="1"/>
+          <p:nvPr/>
+        </p:nvSpPr>
+        <p:spPr>
+          <a:xfrm>
+            <a:off x="700000" y="2250000"/>
+            <a:ext cx="5900000" cy="4500000"/>
+          </a:xfrm>
+          <a:prstGeom prst="rect">
+            <a:avLst/>
+          </a:prstGeom>
+          <a:noFill/>
+        </p:spPr>
+        <p:txBody>
+          <a:bodyPr wrap="square" lIns="0" rIns="0" tIns="0" bIns="0" anchor="t">
+            <a:spAutoFit/>
+          </a:bodyPr>
+          <a:lstStyle/>
+          <a:p>
+            <a:pPr algn="l">
+              <a:lnSpc>
+                <a:spcPct val="140000"/>
+              </a:lnSpc>
+            </a:pPr>
+            <a:r>
+              <a:rPr sz="1300" b="1">
+                <a:solidFill>
+                  <a:srgbClr val="7B2D26"/>
+                </a:solidFill>
+                <a:latin typeface="Helvetica Neue"/>
+              </a:rPr>
+              <a:t>·  </a:t>
+            </a:r>
+            <a:r>
+              <a:rPr sz="1300">
+                <a:solidFill>
+                  <a:srgbClr val="1F1E1D"/>
+                </a:solidFill>
+                <a:latin typeface="Helvetica Neue"/>
+              </a:rPr>
+              <a:t>Synthetic parameters (calibrated, not validated against a specific basin)</a:t>
+            </a:r>
+          </a:p>
+          <a:p>
+            <a:pPr algn="l">
+              <a:lnSpc>
+                <a:spcPct val="140000"/>
+              </a:lnSpc>
+            </a:pPr>
+            <a:r>
+              <a:rPr sz="1300" b="1">
+                <a:solidFill>
+                  <a:srgbClr val="7B2D26"/>
+                </a:solidFill>
+                <a:latin typeface="Helvetica Neue"/>
+              </a:rPr>
+              <a:t>·  </a:t>
+            </a:r>
+            <a:r>
+              <a:rPr sz="1300">
+                <a:solidFill>
+                  <a:srgbClr val="1F1E1D"/>
+                </a:solidFill>
+                <a:latin typeface="Helvetica Neue"/>
+              </a:rPr>
+              <a:t>No climate-change drift in recharge mean</a:t>
+            </a:r>
+          </a:p>
+          <a:p>
+            <a:pPr algn="l">
+              <a:lnSpc>
+                <a:spcPct val="140000"/>
+              </a:lnSpc>
+            </a:pPr>
+            <a:r>
+              <a:rPr sz="1300" b="1">
+                <a:solidFill>
+                  <a:srgbClr val="7B2D26"/>
+                </a:solidFill>
+                <a:latin typeface="Helvetica Neue"/>
+              </a:rPr>
+              <a:t>·  </a:t>
+            </a:r>
+            <a:r>
+              <a:rPr sz="1300">
+                <a:solidFill>
+                  <a:srgbClr val="1F1E1D"/>
+                </a:solidFill>
+                <a:latin typeface="Helvetica Neue"/>
+              </a:rPr>
+              <a:t>Single basin, no inter-basin trade</a:t>
+            </a:r>
+          </a:p>
+          <a:p>
+            <a:pPr algn="l">
+              <a:lnSpc>
+                <a:spcPct val="140000"/>
+              </a:lnSpc>
+            </a:pPr>
+            <a:r>
+              <a:rPr sz="1300" b="1">
+                <a:solidFill>
+                  <a:srgbClr val="7B2D26"/>
+                </a:solidFill>
+                <a:latin typeface="Helvetica Neue"/>
+              </a:rPr>
+              <a:t>·  </a:t>
+            </a:r>
+            <a:r>
+              <a:rPr sz="1300">
+                <a:solidFill>
+                  <a:srgbClr val="1F1E1D"/>
+                </a:solidFill>
+                <a:latin typeface="Helvetica Neue"/>
+              </a:rPr>
+              <a:t>Regulator has perfect observability after delay</a:t>
+            </a:r>
+          </a:p>
+          <a:p>
+            <a:pPr algn="l">
+              <a:lnSpc>
+                <a:spcPct val="140000"/>
+              </a:lnSpc>
+            </a:pPr>
+            <a:r>
+              <a:rPr sz="1300" b="1">
+                <a:solidFill>
+                  <a:srgbClr val="7B2D26"/>
+                </a:solidFill>
+                <a:latin typeface="Helvetica Neue"/>
+              </a:rPr>
+              <a:t>·  </a:t>
+            </a:r>
+            <a:r>
+              <a:rPr sz="1300">
+                <a:solidFill>
+                  <a:srgbClr val="1F1E1D"/>
+                </a:solidFill>
+                <a:latin typeface="Helvetica Neue"/>
+              </a:rPr>
+              <a:t>DC demand is exogenous (compute growth not price-responsive)</a:t>
+            </a:r>
+          </a:p>
+          <a:p>
+            <a:pPr algn="l">
+              <a:lnSpc>
+                <a:spcPct val="140000"/>
+              </a:lnSpc>
+            </a:pPr>
+            <a:r>
+              <a:rPr sz="1300" b="1">
+                <a:solidFill>
+                  <a:srgbClr val="7B2D26"/>
+                </a:solidFill>
+                <a:latin typeface="Helvetica Neue"/>
+              </a:rPr>
+              <a:t>·  </a:t>
+            </a:r>
+            <a:r>
+              <a:rPr sz="1300">
+                <a:solidFill>
+                  <a:srgbClr val="1F1E1D"/>
+                </a:solidFill>
+                <a:latin typeface="Helvetica Neue"/>
+              </a:rPr>
+              <a:t>Ag yield loss simplified: below threshold = dead</a:t>
+            </a:r>
+          </a:p>
+        </p:txBody>
+      </p:sp>
+      <p:sp>
+        <p:nvSpPr>
+          <p:cNvPr id="6" name="TextBox 5"/>
+          <p:cNvSpPr txBox="1"/>
+          <p:nvPr/>
+        </p:nvSpPr>
+        <p:spPr>
+          <a:xfrm>
+            <a:off x="7100000" y="1800000"/>
+            <a:ext cx="5700000" cy="400000"/>
+          </a:xfrm>
+          <a:prstGeom prst="rect">
+            <a:avLst/>
+          </a:prstGeom>
+          <a:noFill/>
+        </p:spPr>
+        <p:txBody>
+          <a:bodyPr wrap="square" lIns="0" rIns="0" tIns="0" bIns="0" anchor="t">
+            <a:spAutoFit/>
+          </a:bodyPr>
+          <a:lstStyle/>
+          <a:p>
+            <a:pPr algn="l"/>
+            <a:r>
+              <a:rPr sz="1100" b="1" i="0">
+                <a:solidFill>
+                  <a:srgbClr val="7B2D26"/>
+                </a:solidFill>
+                <a:latin typeface="Helvetica Neue"/>
+              </a:rPr>
+              <a:t>FUTURE WORK</a:t>
+            </a:r>
+          </a:p>
+        </p:txBody>
+      </p:sp>
+      <p:sp>
+        <p:nvSpPr>
+          <p:cNvPr id="7" name="TextBox 6"/>
+          <p:cNvSpPr txBox="1"/>
+          <p:nvPr/>
+        </p:nvSpPr>
+        <p:spPr>
+          <a:xfrm>
+            <a:off x="7100000" y="2250000"/>
+            <a:ext cx="5700000" cy="4500000"/>
+          </a:xfrm>
+          <a:prstGeom prst="rect">
+            <a:avLst/>
+          </a:prstGeom>
+          <a:noFill/>
+        </p:spPr>
+        <p:txBody>
+          <a:bodyPr wrap="square" lIns="0" rIns="0" tIns="0" bIns="0" anchor="t">
+            <a:spAutoFit/>
+          </a:bodyPr>
+          <a:lstStyle/>
+          <a:p>
+            <a:pPr algn="l">
+              <a:lnSpc>
+                <a:spcPct val="140000"/>
+              </a:lnSpc>
+            </a:pPr>
+            <a:r>
+              <a:rPr sz="1300" b="1">
+                <a:solidFill>
+                  <a:srgbClr val="7B2D26"/>
+                </a:solidFill>
+                <a:latin typeface="Helvetica Neue"/>
+              </a:rPr>
+              <a:t>·  </a:t>
+            </a:r>
+            <a:r>
+              <a:rPr sz="1300">
+                <a:solidFill>
+                  <a:srgbClr val="1F1E1D"/>
+                </a:solidFill>
+                <a:latin typeface="Helvetica Neue"/>
+              </a:rPr>
+              <a:t>Inter-basin water trade</a:t>
+            </a:r>
+          </a:p>
+          <a:p>
+            <a:pPr algn="l">
+              <a:lnSpc>
+                <a:spcPct val="140000"/>
+              </a:lnSpc>
+            </a:pPr>
+            <a:r>
+              <a:rPr sz="1300" b="1">
+                <a:solidFill>
+                  <a:srgbClr val="7B2D26"/>
+                </a:solidFill>
+                <a:latin typeface="Helvetica Neue"/>
+              </a:rPr>
+              <a:t>·  </a:t>
+            </a:r>
+            <a:r>
+              <a:rPr sz="1300">
+                <a:solidFill>
+                  <a:srgbClr val="1F1E1D"/>
+                </a:solidFill>
+                <a:latin typeface="Helvetica Neue"/>
+              </a:rPr>
+              <a:t>Climate-change scenarios (drift in recharge mean)</a:t>
+            </a:r>
+          </a:p>
+          <a:p>
+            <a:pPr algn="l">
+              <a:lnSpc>
+                <a:spcPct val="140000"/>
+              </a:lnSpc>
+            </a:pPr>
+            <a:r>
+              <a:rPr sz="1300" b="1">
+                <a:solidFill>
+                  <a:srgbClr val="7B2D26"/>
+                </a:solidFill>
+                <a:latin typeface="Helvetica Neue"/>
+              </a:rPr>
+              <a:t>·  </a:t>
+            </a:r>
+            <a:r>
+              <a:rPr sz="1300">
+                <a:solidFill>
+                  <a:srgbClr val="1F1E1D"/>
+                </a:solidFill>
+                <a:latin typeface="Helvetica Neue"/>
+              </a:rPr>
+              <a:t>Real permit-process modeling (political delay curves)</a:t>
+            </a:r>
+          </a:p>
+          <a:p>
+            <a:pPr algn="l">
+              <a:lnSpc>
+                <a:spcPct val="140000"/>
+              </a:lnSpc>
+            </a:pPr>
+            <a:r>
+              <a:rPr sz="1300" b="1">
+                <a:solidFill>
+                  <a:srgbClr val="7B2D26"/>
+                </a:solidFill>
+                <a:latin typeface="Helvetica Neue"/>
+              </a:rPr>
+              <a:t>·  </a:t>
+            </a:r>
+            <a:r>
+              <a:rPr sz="1300">
+                <a:solidFill>
+                  <a:srgbClr val="1F1E1D"/>
+                </a:solidFill>
+                <a:latin typeface="Helvetica Neue"/>
+              </a:rPr>
+              <a:t>Inter-operator contestation and bidding</a:t>
+            </a:r>
+          </a:p>
+          <a:p>
+            <a:pPr algn="l">
+              <a:lnSpc>
+                <a:spcPct val="140000"/>
+              </a:lnSpc>
+            </a:pPr>
+            <a:r>
+              <a:rPr sz="1300" b="1">
+                <a:solidFill>
+                  <a:srgbClr val="7B2D26"/>
+                </a:solidFill>
+                <a:latin typeface="Helvetica Neue"/>
+              </a:rPr>
+              <a:t>·  </a:t>
+            </a:r>
+            <a:r>
+              <a:rPr sz="1300">
+                <a:solidFill>
+                  <a:srgbClr val="1F1E1D"/>
+                </a:solidFill>
+                <a:latin typeface="Helvetica Neue"/>
+              </a:rPr>
+              <a:t>Endogenous DC demand response (price / water cost)</a:t>
+            </a:r>
+          </a:p>
+          <a:p>
+            <a:pPr algn="l">
+              <a:lnSpc>
+                <a:spcPct val="140000"/>
+              </a:lnSpc>
+            </a:pPr>
+            <a:r>
+              <a:rPr sz="1300" b="1">
+                <a:solidFill>
+                  <a:srgbClr val="7B2D26"/>
+                </a:solidFill>
+                <a:latin typeface="Helvetica Neue"/>
+              </a:rPr>
+              <a:t>·  </a:t>
+            </a:r>
+            <a:r>
+              <a:rPr sz="1300">
+                <a:solidFill>
+                  <a:srgbClr val="1F1E1D"/>
+                </a:solidFill>
+                <a:latin typeface="Helvetica Neue"/>
+              </a:rPr>
+              <a:t>Calibrate to a real candidate basin (Pacific NW, Chile)</a:t>
+            </a:r>
+          </a:p>
+        </p:txBody>
+      </p:sp>
+      <p:sp>
+        <p:nvSpPr>
+          <p:cNvPr id="8" name="TextBox 7"/>
+          <p:cNvSpPr txBox="1"/>
+          <p:nvPr/>
+        </p:nvSpPr>
+        <p:spPr>
+          <a:xfrm>
+            <a:off x="700000" y="7120000"/>
+            <a:ext cx="2500000" cy="300000"/>
+          </a:xfrm>
+          <a:prstGeom prst="rect">
+            <a:avLst/>
+          </a:prstGeom>
+          <a:noFill/>
+        </p:spPr>
+        <p:txBody>
+          <a:bodyPr wrap="square" lIns="0" rIns="0" tIns="0" bIns="0" anchor="t">
+            <a:spAutoFit/>
+          </a:bodyPr>
+          <a:lstStyle/>
+          <a:p>
+            <a:pPr algn="l"/>
+            <a:r>
+              <a:rPr sz="900" b="0" i="0">
+                <a:solidFill>
+                  <a:srgbClr val="605E5B"/>
+                </a:solidFill>
+                <a:latin typeface="Helvetica Neue"/>
+              </a:rPr>
+              <a:t>PARCHED</a:t>
+            </a:r>
+          </a:p>
+        </p:txBody>
+      </p:sp>
+      <p:sp>
+        <p:nvSpPr>
+          <p:cNvPr id="9" name="TextBox 8"/>
+          <p:cNvSpPr txBox="1"/>
+          <p:nvPr/>
+        </p:nvSpPr>
+        <p:spPr>
+          <a:xfrm>
+            <a:off x="11133333" y="7120000"/>
+            <a:ext cx="1500000" cy="300000"/>
+          </a:xfrm>
+          <a:prstGeom prst="rect">
+            <a:avLst/>
+          </a:prstGeom>
+          <a:noFill/>
+        </p:spPr>
+        <p:txBody>
+          <a:bodyPr wrap="square" lIns="0" rIns="0" tIns="0" bIns="0" anchor="t">
+            <a:spAutoFit/>
+          </a:bodyPr>
+          <a:lstStyle/>
+          <a:p>
+            <a:pPr algn="r"/>
+            <a:r>
+              <a:rPr sz="900" b="0" i="0">
+                <a:solidFill>
+                  <a:srgbClr val="605E5B"/>
+                </a:solidFill>
+                <a:latin typeface="Helvetica Neue"/>
+              </a:rPr>
+              <a:t>14 / 15</a:t>
+            </a:r>
+          </a:p>
+        </p:txBody>
+      </p:sp>
+    </p:spTree>
+  </p:cSld>
+  <p:clrMapOvr>
+    <a:masterClrMapping/>
+  </p:clrMapOvr>
+</p:sld>
+</file>
+
+<file path=ppt/slides/slide15.xml><?xml version="1.0" encoding="utf-8"?>
+<p:sld xmlns:a="http://schemas.openxmlformats.org/drawingml/2006/main" xmlns:p="http://schemas.openxmlformats.org/presentationml/2006/main" xmlns:r="http://schemas.openxmlformats.org/officeDocument/2006/relationships">
+  <p:cSld>
+    <p:bg>
+      <p:bgPr>
+        <a:solidFill>
+          <a:srgbClr val="FAF9F5"/>
+        </a:solidFill>
+        <a:effectLst/>
+      </p:bgPr>
+    </p:bg>
+    <p:spTree>
+      <p:nvGrpSpPr>
+        <p:cNvPr id="1" name=""/>
+        <p:cNvGrpSpPr/>
+        <p:nvPr/>
+      </p:nvGrpSpPr>
+      <p:grpSpPr/>
+      <p:sp>
+        <p:nvSpPr>
+          <p:cNvPr id="2" name="Rectangle 1"/>
+          <p:cNvSpPr/>
+          <p:nvPr/>
+        </p:nvSpPr>
+        <p:spPr>
+          <a:xfrm>
+            <a:off x="700000" y="705740"/>
+            <a:ext cx="110000" cy="110000"/>
+          </a:xfrm>
+          <a:prstGeom prst="rect">
+            <a:avLst/>
+          </a:prstGeom>
+          <a:solidFill>
+            <a:srgbClr val="7B2D26"/>
+          </a:solidFill>
+          <a:ln>
+            <a:noFill/>
+          </a:ln>
+        </p:spPr>
+        <p:style>
+          <a:lnRef idx="1">
+            <a:schemeClr val="accent1"/>
+          </a:lnRef>
+          <a:fillRef idx="3">
+            <a:schemeClr val="accent1"/>
+          </a:fillRef>
+          <a:effectRef idx="2">
+            <a:schemeClr val="accent1"/>
+          </a:effectRef>
+          <a:fontRef idx="minor">
+            <a:schemeClr val="lt1"/>
+          </a:fontRef>
+        </p:style>
+        <p:txBody>
+          <a:bodyPr rtlCol="0" anchor="ctr"/>
+          <a:lstStyle/>
+          <a:p>
+            <a:pPr algn="ctr"/>
+          </a:p>
+        </p:txBody>
+      </p:sp>
+      <p:sp>
+        <p:nvSpPr>
+          <p:cNvPr id="3" name="TextBox 2"/>
+          <p:cNvSpPr txBox="1"/>
+          <p:nvPr/>
+        </p:nvSpPr>
+        <p:spPr>
+          <a:xfrm>
+            <a:off x="990000" y="500000"/>
+            <a:ext cx="11643333" cy="900000"/>
+          </a:xfrm>
+          <a:prstGeom prst="rect">
+            <a:avLst/>
+          </a:prstGeom>
+          <a:noFill/>
+        </p:spPr>
+        <p:txBody>
+          <a:bodyPr wrap="square" lIns="0" rIns="0" tIns="0" bIns="0" anchor="t">
+            <a:spAutoFit/>
+          </a:bodyPr>
+          <a:lstStyle/>
+          <a:p>
+            <a:pPr algn="l"/>
+            <a:r>
+              <a:rPr sz="3600" b="1" i="0">
+                <a:solidFill>
+                  <a:srgbClr val="1F1E1D"/>
+                </a:solidFill>
+                <a:latin typeface="Georgia"/>
+              </a:rPr>
               <a:t>Conclusion and Q&amp;A</a:t>
             </a:r>
           </a:p>
@@ -6745,7 +7566,7 @@
         </p:nvSpPr>
         <p:spPr>
           <a:xfrm>
-            <a:off x="700000" y="2300000"/>
+            <a:off x="700000" y="2100000"/>
             <a:ext cx="550000" cy="600000"/>
           </a:xfrm>
           <a:prstGeom prst="rect">
@@ -6780,7 +7601,7 @@
         </p:nvSpPr>
         <p:spPr>
           <a:xfrm>
-            <a:off x="1400000" y="2370000"/>
+            <a:off x="1400000" y="2170000"/>
             <a:ext cx="11133333" cy="600000"/>
           </a:xfrm>
           <a:prstGeom prst="rect">
@@ -6815,7 +7636,7 @@
         </p:nvSpPr>
         <p:spPr>
           <a:xfrm>
-            <a:off x="700000" y="3100000"/>
+            <a:off x="700000" y="2800000"/>
             <a:ext cx="550000" cy="600000"/>
           </a:xfrm>
           <a:prstGeom prst="rect">
@@ -6850,7 +7671,7 @@
         </p:nvSpPr>
         <p:spPr>
           <a:xfrm>
-            <a:off x="1400000" y="3170000"/>
+            <a:off x="1400000" y="2870000"/>
             <a:ext cx="11133333" cy="600000"/>
           </a:xfrm>
           <a:prstGeom prst="rect">
@@ -6885,7 +7706,7 @@
         </p:nvSpPr>
         <p:spPr>
           <a:xfrm>
-            <a:off x="700000" y="3900000"/>
+            <a:off x="700000" y="3500000"/>
             <a:ext cx="550000" cy="600000"/>
           </a:xfrm>
           <a:prstGeom prst="rect">
@@ -6920,7 +7741,7 @@
         </p:nvSpPr>
         <p:spPr>
           <a:xfrm>
-            <a:off x="1400000" y="3970000"/>
+            <a:off x="1400000" y="3570000"/>
             <a:ext cx="11133333" cy="600000"/>
           </a:xfrm>
           <a:prstGeom prst="rect">
@@ -6955,8 +7776,78 @@
         </p:nvSpPr>
         <p:spPr>
           <a:xfrm>
+            <a:off x="700000" y="4200000"/>
+            <a:ext cx="550000" cy="600000"/>
+          </a:xfrm>
+          <a:prstGeom prst="rect">
+            <a:avLst/>
+          </a:prstGeom>
+          <a:noFill/>
+        </p:spPr>
+        <p:txBody>
+          <a:bodyPr wrap="square" lIns="0" rIns="0" tIns="0" bIns="0" anchor="t">
+            <a:spAutoFit/>
+          </a:bodyPr>
+          <a:lstStyle/>
+          <a:p>
+            <a:pPr algn="l"/>
+            <a:r>
+              <a:rPr sz="3200" b="1" i="0">
+                <a:solidFill>
+                  <a:srgbClr val="7B2D26"/>
+                </a:solidFill>
+                <a:latin typeface="Georgia"/>
+              </a:rPr>
+              <a:t>4</a:t>
+            </a:r>
+          </a:p>
+        </p:txBody>
+      </p:sp>
+      <p:sp>
+        <p:nvSpPr>
+          <p:cNvPr id="12" name="TextBox 11"/>
+          <p:cNvSpPr txBox="1"/>
+          <p:nvPr/>
+        </p:nvSpPr>
+        <p:spPr>
+          <a:xfrm>
+            <a:off x="1400000" y="4270000"/>
+            <a:ext cx="11133333" cy="600000"/>
+          </a:xfrm>
+          <a:prstGeom prst="rect">
+            <a:avLst/>
+          </a:prstGeom>
+          <a:noFill/>
+        </p:spPr>
+        <p:txBody>
+          <a:bodyPr wrap="square" lIns="0" rIns="0" tIns="0" bIns="0" anchor="t">
+            <a:spAutoFit/>
+          </a:bodyPr>
+          <a:lstStyle/>
+          <a:p>
+            <a:pPr algn="l"/>
+            <a:r>
+              <a:rPr sz="2000" b="1" i="0">
+                <a:solidFill>
+                  <a:srgbClr val="1F1E1D"/>
+                </a:solidFill>
+                <a:latin typeface="Georgia"/>
+              </a:rPr>
+              <a:t>Restoration &gt;= 100% turns data centers into water assets, not liabilities.</a:t>
+            </a:r>
+          </a:p>
+        </p:txBody>
+      </p:sp>
+      <p:sp>
+        <p:nvSpPr>
+          <p:cNvPr id="13" name="TextBox 12"/>
+          <p:cNvSpPr txBox="1"/>
+          <p:nvPr/>
+        </p:nvSpPr>
+        <p:spPr>
+          <a:xfrm>
             <a:off x="700000" y="5050000"/>
-            <a:ext cx="11933333" cy="1000000"/>
+            <a:ext cx="11933333" cy="800000"/>
           </a:xfrm>
           <a:prstGeom prst="rect">
             <a:avLst/>
@@ -6971,26 +7862,26 @@
           <a:p>
             <a:pPr algn="l"/>
             <a:r>
-              <a:rPr sz="2000" b="0" i="1">
+              <a:rPr sz="1700" b="0" i="1">
                 <a:solidFill>
                   <a:srgbClr val="7B2D26"/>
                 </a:solidFill>
                 <a:latin typeface="Georgia"/>
               </a:rPr>
-              <a:t>"If you want to keep the water on, you have to cap the draw before anyone asks you to."</a:t>
-            </a:r>
-          </a:p>
-        </p:txBody>
-      </p:sp>
-      <p:sp>
-        <p:nvSpPr>
-          <p:cNvPr id="12" name="TextBox 11"/>
-          <p:cNvSpPr txBox="1"/>
-          <p:nvPr/>
-        </p:nvSpPr>
-        <p:spPr>
-          <a:xfrm>
-            <a:off x="700000" y="6200000"/>
+              <a:t>"If you want to keep the water on, cap the draw before anyone asks -- or make the data center pay it back."</a:t>
+            </a:r>
+          </a:p>
+        </p:txBody>
+      </p:sp>
+      <p:sp>
+        <p:nvSpPr>
+          <p:cNvPr id="14" name="TextBox 13"/>
+          <p:cNvSpPr txBox="1"/>
+          <p:nvPr/>
+        </p:nvSpPr>
+        <p:spPr>
+          <a:xfrm>
+            <a:off x="700000" y="6000000"/>
             <a:ext cx="11933333" cy="400000"/>
           </a:xfrm>
           <a:prstGeom prst="rect">
@@ -7019,13 +7910,13 @@
       </p:sp>
       <p:sp>
         <p:nvSpPr>
-          <p:cNvPr id="13" name="TextBox 12"/>
-          <p:cNvSpPr txBox="1"/>
-          <p:nvPr/>
-        </p:nvSpPr>
-        <p:spPr>
-          <a:xfrm>
-            <a:off x="700000" y="6600000"/>
+          <p:cNvPr id="15" name="TextBox 14"/>
+          <p:cNvSpPr txBox="1"/>
+          <p:nvPr/>
+        </p:nvSpPr>
+        <p:spPr>
+          <a:xfrm>
+            <a:off x="700000" y="6450000"/>
             <a:ext cx="11933333" cy="400000"/>
           </a:xfrm>
           <a:prstGeom prst="rect">
@@ -7054,7 +7945,7 @@
       </p:sp>
       <p:sp>
         <p:nvSpPr>
-          <p:cNvPr id="14" name="TextBox 13"/>
+          <p:cNvPr id="16" name="TextBox 15"/>
           <p:cNvSpPr txBox="1"/>
           <p:nvPr/>
         </p:nvSpPr>
@@ -7089,7 +7980,7 @@
       </p:sp>
       <p:sp>
         <p:nvSpPr>
-          <p:cNvPr id="15" name="TextBox 14"/>
+          <p:cNvPr id="17" name="TextBox 16"/>
           <p:cNvSpPr txBox="1"/>
           <p:nvPr/>
         </p:nvSpPr>
@@ -7117,7 +8008,7 @@
                 </a:solidFill>
                 <a:latin typeface="Helvetica Neue"/>
               </a:rPr>
-              <a:t>14 / 14</a:t>
+              <a:t>15 / 15</a:t>
             </a:r>
           </a:p>
         </p:txBody>
@@ -7431,7 +8322,7 @@
                 </a:solidFill>
                 <a:latin typeface="Helvetica Neue"/>
               </a:rPr>
-              <a:t>2 / 14</a:t>
+              <a:t>2 / 15</a:t>
             </a:r>
           </a:p>
         </p:txBody>
@@ -7893,7 +8784,7 @@
                 </a:solidFill>
                 <a:latin typeface="Helvetica Neue"/>
               </a:rPr>
-              <a:t>3 / 14</a:t>
+              <a:t>3 / 15</a:t>
             </a:r>
           </a:p>
         </p:txBody>
@@ -8200,7 +9091,7 @@
                 </a:solidFill>
                 <a:latin typeface="Helvetica Neue"/>
               </a:rPr>
-              <a:t>4 / 14</a:t>
+              <a:t>4 / 15</a:t>
             </a:r>
           </a:p>
         </p:txBody>
@@ -8689,7 +9580,7 @@
                 </a:solidFill>
                 <a:latin typeface="Helvetica Neue"/>
               </a:rPr>
-              <a:t>5 / 14</a:t>
+              <a:t>5 / 15</a:t>
             </a:r>
           </a:p>
         </p:txBody>
@@ -9095,7 +9986,7 @@
                 </a:solidFill>
                 <a:latin typeface="Helvetica Neue"/>
               </a:rPr>
-              <a:t>6 / 14</a:t>
+              <a:t>6 / 15</a:t>
             </a:r>
           </a:p>
         </p:txBody>
@@ -9724,7 +10615,7 @@
                 </a:solidFill>
                 <a:latin typeface="Helvetica Neue"/>
               </a:rPr>
-              <a:t>7 / 14</a:t>
+              <a:t>7 / 15</a:t>
             </a:r>
           </a:p>
         </p:txBody>
@@ -10167,7 +11058,7 @@
                 </a:solidFill>
                 <a:latin typeface="Helvetica Neue"/>
               </a:rPr>
-              <a:t>8 / 14</a:t>
+              <a:t>8 / 15</a:t>
             </a:r>
           </a:p>
         </p:txBody>
@@ -10575,7 +11466,7 @@
                 </a:solidFill>
                 <a:latin typeface="Helvetica Neue"/>
               </a:rPr>
-              <a:t>9 / 14</a:t>
+              <a:t>9 / 15</a:t>
             </a:r>
           </a:p>
         </p:txBody>

--- a/presentation/PARCHED_final.pptx
+++ b/presentation/PARCHED_final.pptx
@@ -1146,7 +1146,7 @@
           <a:lstStyle/>
           <a:p>
             <a:r>
-              <a:t>Three objectives, in order. First, we build the model itself. That means agents for the data centers, farms, residents, and a regulator, plus a basin module that does the bookkeeping on inflows, withdrawals, and stress. Second, we test three concrete hypotheses, which I will introduce on the next slide. Third, we run four policy scenarios, A through D, under matched stochastic conditions. Matched is the key word: every scenario sees the same fifty random seeds, the same weather realizations, the same demand shocks. That way, when scenario C outperforms scenario A, we know the difference is the policy rule and not stochastic luck. This is a small methodological choice but it is what gives the comparative results their teeth.</a:t>
+              <a:t>Three objectives, in order. First, we build the model itself: agents for data centers, farms, residents, and a regulator, plus a basin module that handles inflows, withdrawals, and stress. Second, we test four concrete hypotheses, which I will introduce on the next slide. The first three cover collapse timing, the tipping-point nonlinearity, and policy effectiveness. The fourth, which we added after observing an unexpected result in the model, asks whether data center water restoration can itself substitute for regulation. Third, we run four policy scenarios under matched stochastic conditions. Matched means every scenario sees the same fifty random seeds and the same weather realizations, so differences in outcomes are the policy rule, not stochastic luck.</a:t>
             </a:r>
           </a:p>
         </p:txBody>
@@ -1216,7 +1216,7 @@
           <a:lstStyle/>
           <a:p>
             <a:r>
-              <a:t>Three hypotheses. H1 says that under unregulated growth the basin collapses on a five to eight year timeline. That window is from the back-of-envelope balance between hyperscaler intake rates and basin recharge. H2 is the most interesting claim and the one where the ABM earns its keep: we expect a tipping point around forty percent storage, below which decline is no longer linear. That happens because cooling-tower efficiency depends on water availability, so stress feeds back into demand. A static water-balance equation cannot show you that. H3 says proactive caps, set from day one, will delay critical stress by at least forty percent compared to reactive caps or no policy at all. Each of these has a clean test, which is what comes next.</a:t>
+              <a:t>Four hypotheses. H1 says that under unregulated growth the basin collapses on a five to eight year timeline. That window comes from the back-of-envelope balance between hyperscaler intake rates and basin recharge. H2 is the tipping-point claim and the one where the ABM earns its keep: we expect a nonlinear acceleration around forty percent storage, because cooling-tower efficiency depends on water availability, creating a positive feedback loop that a static balance equation cannot capture. H3 says proactive caps delay critical stress by at least forty percent compared to reactive caps or no policy. H4 is the hypothesis we derived from running the model: if data centers are required or incentivized to return at least one hundred percent of their daily draw to the basin via funded recharge projects, the basin stabilizes or grows even under zero regulatory oversight. This maps directly onto real-world commitments by Microsoft, which has pledged to be water-positive by 2030, and Google, which targets replenishing one hundred and twenty percent of consumption. Our model lets us test whether those pledges, if met at the basin level, actually hold.</a:t>
             </a:r>
           </a:p>
         </p:txBody>
@@ -5822,7 +5822,7 @@
                 </a:solidFill>
                 <a:latin typeface="Georgia"/>
               </a:rPr>
-              <a:t>Bonus Finding: The Restoration Threshold</a:t>
+              <a:t>Result H4: The Restoration Threshold</a:t>
             </a:r>
           </a:p>
         </p:txBody>
@@ -6695,7 +6695,7 @@
                 </a:solidFill>
                 <a:latin typeface="Helvetica Neue"/>
               </a:rPr>
-              <a:t>Restoration obligations &gt;= 100% can flip a data center from threat to asset.</a:t>
+              <a:t>H4 confirmed: restoration &gt;= 100% turns data centers from threats into water assets.</a:t>
             </a:r>
           </a:p>
         </p:txBody>
@@ -8961,7 +8961,7 @@
                 </a:solidFill>
                 <a:latin typeface="Helvetica Neue"/>
               </a:rPr>
-              <a:t>Test three hypotheses about collapse timing, nonlinearity, and policy effect</a:t>
+              <a:t>Test four hypotheses: collapse timing, nonlinearity, policy effect, and restoration threshold</a:t>
             </a:r>
           </a:p>
           <a:p>
@@ -9208,8 +9208,8 @@
         </p:nvSpPr>
         <p:spPr>
           <a:xfrm>
-            <a:off x="700000" y="1900000"/>
-            <a:ext cx="3900000" cy="400000"/>
+            <a:off x="700000" y="1750000"/>
+            <a:ext cx="5900000" cy="350000"/>
           </a:xfrm>
           <a:prstGeom prst="rect">
             <a:avLst/>
@@ -9224,7 +9224,7 @@
           <a:p>
             <a:pPr algn="l"/>
             <a:r>
-              <a:rPr sz="1100" b="1" i="0">
+              <a:rPr sz="1000" b="1" i="0">
                 <a:solidFill>
                   <a:srgbClr val="7B2D26"/>
                 </a:solidFill>
@@ -9243,8 +9243,8 @@
         </p:nvSpPr>
         <p:spPr>
           <a:xfrm>
-            <a:off x="700000" y="2350000"/>
-            <a:ext cx="3900000" cy="2200000"/>
+            <a:off x="700000" y="2130000"/>
+            <a:ext cx="5900000" cy="1200000"/>
           </a:xfrm>
           <a:prstGeom prst="rect">
             <a:avLst/>
@@ -9259,7 +9259,7 @@
           <a:p>
             <a:pPr algn="l"/>
             <a:r>
-              <a:rPr sz="2000" b="1" i="0">
+              <a:rPr sz="1800" b="1" i="0">
                 <a:solidFill>
                   <a:srgbClr val="1F1E1D"/>
                 </a:solidFill>
@@ -9278,8 +9278,8 @@
         </p:nvSpPr>
         <p:spPr>
           <a:xfrm>
-            <a:off x="700000" y="4250000"/>
-            <a:ext cx="3900000" cy="1800000"/>
+            <a:off x="700000" y="3230000"/>
+            <a:ext cx="5900000" cy="900000"/>
           </a:xfrm>
           <a:prstGeom prst="rect">
             <a:avLst/>
@@ -9294,7 +9294,7 @@
           <a:p>
             <a:pPr algn="l"/>
             <a:r>
-              <a:rPr sz="1300" b="0" i="0">
+              <a:rPr sz="1200" b="0" i="0">
                 <a:solidFill>
                   <a:srgbClr val="605E5B"/>
                 </a:solidFill>
@@ -9313,8 +9313,8 @@
         </p:nvSpPr>
         <p:spPr>
           <a:xfrm>
-            <a:off x="4850000" y="1900000"/>
-            <a:ext cx="3900000" cy="400000"/>
+            <a:off x="6950000" y="1750000"/>
+            <a:ext cx="5900000" cy="350000"/>
           </a:xfrm>
           <a:prstGeom prst="rect">
             <a:avLst/>
@@ -9329,7 +9329,7 @@
           <a:p>
             <a:pPr algn="l"/>
             <a:r>
-              <a:rPr sz="1100" b="1" i="0">
+              <a:rPr sz="1000" b="1" i="0">
                 <a:solidFill>
                   <a:srgbClr val="7B2D26"/>
                 </a:solidFill>
@@ -9348,8 +9348,8 @@
         </p:nvSpPr>
         <p:spPr>
           <a:xfrm>
-            <a:off x="4850000" y="2350000"/>
-            <a:ext cx="3900000" cy="2200000"/>
+            <a:off x="6950000" y="2130000"/>
+            <a:ext cx="5900000" cy="1200000"/>
           </a:xfrm>
           <a:prstGeom prst="rect">
             <a:avLst/>
@@ -9364,7 +9364,7 @@
           <a:p>
             <a:pPr algn="l"/>
             <a:r>
-              <a:rPr sz="2000" b="1" i="0">
+              <a:rPr sz="1800" b="1" i="0">
                 <a:solidFill>
                   <a:srgbClr val="1F1E1D"/>
                 </a:solidFill>
@@ -9383,8 +9383,8 @@
         </p:nvSpPr>
         <p:spPr>
           <a:xfrm>
-            <a:off x="4850000" y="4250000"/>
-            <a:ext cx="3900000" cy="1800000"/>
+            <a:off x="6950000" y="3230000"/>
+            <a:ext cx="5900000" cy="900000"/>
           </a:xfrm>
           <a:prstGeom prst="rect">
             <a:avLst/>
@@ -9399,7 +9399,7 @@
           <a:p>
             <a:pPr algn="l"/>
             <a:r>
-              <a:rPr sz="1300" b="0" i="0">
+              <a:rPr sz="1200" b="0" i="0">
                 <a:solidFill>
                   <a:srgbClr val="605E5B"/>
                 </a:solidFill>
@@ -9418,8 +9418,8 @@
         </p:nvSpPr>
         <p:spPr>
           <a:xfrm>
-            <a:off x="9000000" y="1900000"/>
-            <a:ext cx="3900000" cy="400000"/>
+            <a:off x="700000" y="4500000"/>
+            <a:ext cx="5900000" cy="350000"/>
           </a:xfrm>
           <a:prstGeom prst="rect">
             <a:avLst/>
@@ -9434,7 +9434,7 @@
           <a:p>
             <a:pPr algn="l"/>
             <a:r>
-              <a:rPr sz="1100" b="1" i="0">
+              <a:rPr sz="1000" b="1" i="0">
                 <a:solidFill>
                   <a:srgbClr val="7B2D26"/>
                 </a:solidFill>
@@ -9453,8 +9453,8 @@
         </p:nvSpPr>
         <p:spPr>
           <a:xfrm>
-            <a:off x="9000000" y="2350000"/>
-            <a:ext cx="3900000" cy="2200000"/>
+            <a:off x="700000" y="4880000"/>
+            <a:ext cx="5900000" cy="1200000"/>
           </a:xfrm>
           <a:prstGeom prst="rect">
             <a:avLst/>
@@ -9469,7 +9469,7 @@
           <a:p>
             <a:pPr algn="l"/>
             <a:r>
-              <a:rPr sz="2000" b="1" i="0">
+              <a:rPr sz="1800" b="1" i="0">
                 <a:solidFill>
                   <a:srgbClr val="1F1E1D"/>
                 </a:solidFill>
@@ -9488,8 +9488,8 @@
         </p:nvSpPr>
         <p:spPr>
           <a:xfrm>
-            <a:off x="9000000" y="4250000"/>
-            <a:ext cx="3900000" cy="1800000"/>
+            <a:off x="700000" y="5980000"/>
+            <a:ext cx="5900000" cy="900000"/>
           </a:xfrm>
           <a:prstGeom prst="rect">
             <a:avLst/>
@@ -9504,7 +9504,7 @@
           <a:p>
             <a:pPr algn="l"/>
             <a:r>
-              <a:rPr sz="1300" b="0" i="0">
+              <a:rPr sz="1200" b="0" i="0">
                 <a:solidFill>
                   <a:srgbClr val="605E5B"/>
                 </a:solidFill>
@@ -9518,6 +9518,111 @@
       <p:sp>
         <p:nvSpPr>
           <p:cNvPr id="13" name="TextBox 12"/>
+          <p:cNvSpPr txBox="1"/>
+          <p:nvPr/>
+        </p:nvSpPr>
+        <p:spPr>
+          <a:xfrm>
+            <a:off x="6950000" y="4500000"/>
+            <a:ext cx="5900000" cy="350000"/>
+          </a:xfrm>
+          <a:prstGeom prst="rect">
+            <a:avLst/>
+          </a:prstGeom>
+          <a:noFill/>
+        </p:spPr>
+        <p:txBody>
+          <a:bodyPr wrap="square" lIns="0" rIns="0" tIns="0" bIns="0" anchor="t">
+            <a:spAutoFit/>
+          </a:bodyPr>
+          <a:lstStyle/>
+          <a:p>
+            <a:pPr algn="l"/>
+            <a:r>
+              <a:rPr sz="1000" b="1" i="0">
+                <a:solidFill>
+                  <a:srgbClr val="7B2D26"/>
+                </a:solidFill>
+                <a:latin typeface="Helvetica Neue"/>
+              </a:rPr>
+              <a:t>H4   RESTORATION THRESHOLD</a:t>
+            </a:r>
+          </a:p>
+        </p:txBody>
+      </p:sp>
+      <p:sp>
+        <p:nvSpPr>
+          <p:cNvPr id="14" name="TextBox 13"/>
+          <p:cNvSpPr txBox="1"/>
+          <p:nvPr/>
+        </p:nvSpPr>
+        <p:spPr>
+          <a:xfrm>
+            <a:off x="6950000" y="4880000"/>
+            <a:ext cx="5900000" cy="1200000"/>
+          </a:xfrm>
+          <a:prstGeom prst="rect">
+            <a:avLst/>
+          </a:prstGeom>
+          <a:noFill/>
+        </p:spPr>
+        <p:txBody>
+          <a:bodyPr wrap="square" lIns="0" rIns="0" tIns="0" bIns="0" anchor="t">
+            <a:spAutoFit/>
+          </a:bodyPr>
+          <a:lstStyle/>
+          <a:p>
+            <a:pPr algn="l"/>
+            <a:r>
+              <a:rPr sz="1800" b="1" i="0">
+                <a:solidFill>
+                  <a:srgbClr val="1F1E1D"/>
+                </a:solidFill>
+                <a:latin typeface="Georgia"/>
+              </a:rPr>
+              <a:t>Above ~100% restoration, data centers sustain the basin even without regulation.</a:t>
+            </a:r>
+          </a:p>
+        </p:txBody>
+      </p:sp>
+      <p:sp>
+        <p:nvSpPr>
+          <p:cNvPr id="15" name="TextBox 14"/>
+          <p:cNvSpPr txBox="1"/>
+          <p:nvPr/>
+        </p:nvSpPr>
+        <p:spPr>
+          <a:xfrm>
+            <a:off x="6950000" y="5980000"/>
+            <a:ext cx="5900000" cy="900000"/>
+          </a:xfrm>
+          <a:prstGeom prst="rect">
+            <a:avLst/>
+          </a:prstGeom>
+          <a:noFill/>
+        </p:spPr>
+        <p:txBody>
+          <a:bodyPr wrap="square" lIns="0" rIns="0" tIns="0" bIns="0" anchor="t">
+            <a:spAutoFit/>
+          </a:bodyPr>
+          <a:lstStyle/>
+          <a:p>
+            <a:pPr algn="l"/>
+            <a:r>
+              <a:rPr sz="1200" b="0" i="0">
+                <a:solidFill>
+                  <a:srgbClr val="605E5B"/>
+                </a:solidFill>
+                <a:latin typeface="Helvetica Neue"/>
+              </a:rPr>
+              <a:t>Modeled after water-positive pledges by Microsoft and Google: replenish more than consumed.</a:t>
+            </a:r>
+          </a:p>
+        </p:txBody>
+      </p:sp>
+      <p:sp>
+        <p:nvSpPr>
+          <p:cNvPr id="16" name="TextBox 15"/>
           <p:cNvSpPr txBox="1"/>
           <p:nvPr/>
         </p:nvSpPr>
@@ -9552,7 +9657,7 @@
       </p:sp>
       <p:sp>
         <p:nvSpPr>
-          <p:cNvPr id="14" name="TextBox 13"/>
+          <p:cNvPr id="17" name="TextBox 16"/>
           <p:cNvSpPr txBox="1"/>
           <p:nvPr/>
         </p:nvSpPr>
